--- a/chapter_05/figures/contingency_table_prob_fc.pptx
+++ b/chapter_05/figures/contingency_table_prob_fc.pptx
@@ -2,12 +2,12 @@
 <file path=ppt/presentation.xml><?xml version="1.0" encoding="utf-8"?>
 <p:presentation xmlns:a="http://schemas.openxmlformats.org/drawingml/2006/main" xmlns:r="http://schemas.openxmlformats.org/officeDocument/2006/relationships" xmlns:p="http://schemas.openxmlformats.org/presentationml/2006/main" saveSubsetFonts="1">
   <p:sldMasterIdLst>
-    <p:sldMasterId id="2147483744" r:id="rId1"/>
+    <p:sldMasterId id="2147483756" r:id="rId1"/>
   </p:sldMasterIdLst>
   <p:sldIdLst>
     <p:sldId id="256" r:id="rId2"/>
   </p:sldIdLst>
-  <p:sldSz cx="4140200" cy="4032250"/>
+  <p:sldSz cx="4140200" cy="4500563"/>
   <p:notesSz cx="6858000" cy="9144000"/>
   <p:defaultTextStyle>
     <a:defPPr>
@@ -115,7 +115,7 @@
 <file path=ppt/revisionInfo.xml><?xml version="1.0" encoding="utf-8"?>
 <p1510:revInfo xmlns:a="http://schemas.openxmlformats.org/drawingml/2006/main" xmlns:r="http://schemas.openxmlformats.org/officeDocument/2006/relationships" xmlns:p1510="http://schemas.microsoft.com/office/powerpoint/2015/10/main">
   <p1510:revLst>
-    <p1510:client id="{8AA7C05A-A40B-47BE-AD88-53F73456539F}" v="2" dt="2026-01-19T23:29:43.500"/>
+    <p1510:client id="{8AA7C05A-A40B-47BE-AD88-53F73456539F}" v="11" dt="2026-01-22T23:12:29.835"/>
   </p1510:revLst>
 </p1510:revInfo>
 </file>
@@ -124,43 +124,35 @@
 <pc:chgInfo xmlns:a="http://schemas.openxmlformats.org/drawingml/2006/main" xmlns:r="http://schemas.openxmlformats.org/officeDocument/2006/relationships" xmlns:ac="http://schemas.microsoft.com/office/drawing/2013/main/command" xmlns:pc="http://schemas.microsoft.com/office/powerpoint/2013/main/command">
   <pc:docChgLst>
     <pc:chgData name="Fatima Pillosu" userId="a6295d4dc9e22643" providerId="LiveId" clId="{87453732-75AC-4426-B5D3-B7C69C2D4F54}"/>
-    <pc:docChg chg="custSel modSld">
-      <pc:chgData name="Fatima Pillosu" userId="a6295d4dc9e22643" providerId="LiveId" clId="{87453732-75AC-4426-B5D3-B7C69C2D4F54}" dt="2026-01-19T23:29:43.500" v="205"/>
+    <pc:docChg chg="undo custSel modSld">
+      <pc:chgData name="Fatima Pillosu" userId="a6295d4dc9e22643" providerId="LiveId" clId="{87453732-75AC-4426-B5D3-B7C69C2D4F54}" dt="2026-01-22T23:15:43.100" v="1066" actId="1036"/>
       <pc:docMkLst>
         <pc:docMk/>
       </pc:docMkLst>
       <pc:sldChg chg="addSp delSp modSp mod">
-        <pc:chgData name="Fatima Pillosu" userId="a6295d4dc9e22643" providerId="LiveId" clId="{87453732-75AC-4426-B5D3-B7C69C2D4F54}" dt="2026-01-19T23:29:43.500" v="205"/>
+        <pc:chgData name="Fatima Pillosu" userId="a6295d4dc9e22643" providerId="LiveId" clId="{87453732-75AC-4426-B5D3-B7C69C2D4F54}" dt="2026-01-22T23:15:43.100" v="1066" actId="1036"/>
         <pc:sldMkLst>
           <pc:docMk/>
           <pc:sldMk cId="1573992039" sldId="256"/>
         </pc:sldMkLst>
-        <pc:spChg chg="add del">
-          <ac:chgData name="Fatima Pillosu" userId="a6295d4dc9e22643" providerId="LiveId" clId="{87453732-75AC-4426-B5D3-B7C69C2D4F54}" dt="2026-01-19T23:29:27.087" v="203" actId="478"/>
+        <pc:spChg chg="del">
+          <ac:chgData name="Fatima Pillosu" userId="a6295d4dc9e22643" providerId="LiveId" clId="{87453732-75AC-4426-B5D3-B7C69C2D4F54}" dt="2026-01-22T22:57:57.325" v="214" actId="21"/>
           <ac:spMkLst>
             <pc:docMk/>
             <pc:sldMk cId="1573992039" sldId="256"/>
-            <ac:spMk id="2" creationId="{0672BF64-D960-F2B9-6121-AA52E9E9BBDC}"/>
+            <ac:spMk id="4" creationId="{863D7830-3EC5-1488-4779-4B842624939D}"/>
           </ac:spMkLst>
         </pc:spChg>
         <pc:spChg chg="add mod">
-          <ac:chgData name="Fatima Pillosu" userId="a6295d4dc9e22643" providerId="LiveId" clId="{87453732-75AC-4426-B5D3-B7C69C2D4F54}" dt="2026-01-19T23:29:43.500" v="205"/>
+          <ac:chgData name="Fatima Pillosu" userId="a6295d4dc9e22643" providerId="LiveId" clId="{87453732-75AC-4426-B5D3-B7C69C2D4F54}" dt="2026-01-22T22:56:44.430" v="208" actId="164"/>
           <ac:spMkLst>
             <pc:docMk/>
             <pc:sldMk cId="1573992039" sldId="256"/>
             <ac:spMk id="10" creationId="{88FD4609-03C7-48B1-EA84-375FFFEDBE06}"/>
           </ac:spMkLst>
         </pc:spChg>
-        <pc:spChg chg="add mod">
-          <ac:chgData name="Fatima Pillosu" userId="a6295d4dc9e22643" providerId="LiveId" clId="{87453732-75AC-4426-B5D3-B7C69C2D4F54}" dt="2026-01-19T23:29:43.500" v="205"/>
-          <ac:spMkLst>
-            <pc:docMk/>
-            <pc:sldMk cId="1573992039" sldId="256"/>
-            <ac:spMk id="11" creationId="{4C39D33D-2B26-F2D6-F8F4-09E6518093E9}"/>
-          </ac:spMkLst>
-        </pc:spChg>
-        <pc:spChg chg="add mod">
-          <ac:chgData name="Fatima Pillosu" userId="a6295d4dc9e22643" providerId="LiveId" clId="{87453732-75AC-4426-B5D3-B7C69C2D4F54}" dt="2026-01-19T23:29:43.500" v="205"/>
+        <pc:spChg chg="add del mod">
+          <ac:chgData name="Fatima Pillosu" userId="a6295d4dc9e22643" providerId="LiveId" clId="{87453732-75AC-4426-B5D3-B7C69C2D4F54}" dt="2026-01-22T22:57:57.325" v="214" actId="21"/>
           <ac:spMkLst>
             <pc:docMk/>
             <pc:sldMk cId="1573992039" sldId="256"/>
@@ -168,341 +160,373 @@
           </ac:spMkLst>
         </pc:spChg>
         <pc:spChg chg="add mod">
-          <ac:chgData name="Fatima Pillosu" userId="a6295d4dc9e22643" providerId="LiveId" clId="{87453732-75AC-4426-B5D3-B7C69C2D4F54}" dt="2026-01-19T23:29:43.500" v="205"/>
+          <ac:chgData name="Fatima Pillosu" userId="a6295d4dc9e22643" providerId="LiveId" clId="{87453732-75AC-4426-B5D3-B7C69C2D4F54}" dt="2026-01-22T22:56:44.430" v="208" actId="164"/>
           <ac:spMkLst>
             <pc:docMk/>
             <pc:sldMk cId="1573992039" sldId="256"/>
             <ac:spMk id="14" creationId="{886A253C-800A-4473-19A4-5EC96B3D6DA8}"/>
           </ac:spMkLst>
         </pc:spChg>
-        <pc:spChg chg="add mod">
-          <ac:chgData name="Fatima Pillosu" userId="a6295d4dc9e22643" providerId="LiveId" clId="{87453732-75AC-4426-B5D3-B7C69C2D4F54}" dt="2026-01-19T23:29:43.500" v="205"/>
+        <pc:spChg chg="mod">
+          <ac:chgData name="Fatima Pillosu" userId="a6295d4dc9e22643" providerId="LiveId" clId="{87453732-75AC-4426-B5D3-B7C69C2D4F54}" dt="2026-01-22T22:56:44.430" v="208" actId="164"/>
+          <ac:spMkLst>
+            <pc:docMk/>
+            <pc:sldMk cId="1573992039" sldId="256"/>
+            <ac:spMk id="15" creationId="{31526C8F-65EA-4AE2-A6F7-E27D64A802EA}"/>
+          </ac:spMkLst>
+        </pc:spChg>
+        <pc:spChg chg="add del mod">
+          <ac:chgData name="Fatima Pillosu" userId="a6295d4dc9e22643" providerId="LiveId" clId="{87453732-75AC-4426-B5D3-B7C69C2D4F54}" dt="2026-01-22T22:57:57.325" v="214" actId="21"/>
           <ac:spMkLst>
             <pc:docMk/>
             <pc:sldMk cId="1573992039" sldId="256"/>
             <ac:spMk id="16" creationId="{ADEEF2B1-EBC8-9F1F-6B1F-DD1E6A4ADDB0}"/>
           </ac:spMkLst>
         </pc:spChg>
-        <pc:spChg chg="add mod">
-          <ac:chgData name="Fatima Pillosu" userId="a6295d4dc9e22643" providerId="LiveId" clId="{87453732-75AC-4426-B5D3-B7C69C2D4F54}" dt="2026-01-19T23:29:43.500" v="205"/>
+        <pc:spChg chg="del">
+          <ac:chgData name="Fatima Pillosu" userId="a6295d4dc9e22643" providerId="LiveId" clId="{87453732-75AC-4426-B5D3-B7C69C2D4F54}" dt="2026-01-22T22:57:57.325" v="214" actId="21"/>
+          <ac:spMkLst>
+            <pc:docMk/>
+            <pc:sldMk cId="1573992039" sldId="256"/>
+            <ac:spMk id="17" creationId="{CDB02FB9-7686-55B5-2237-CE34FE7138F4}"/>
+          </ac:spMkLst>
+        </pc:spChg>
+        <pc:spChg chg="add del mod">
+          <ac:chgData name="Fatima Pillosu" userId="a6295d4dc9e22643" providerId="LiveId" clId="{87453732-75AC-4426-B5D3-B7C69C2D4F54}" dt="2026-01-22T22:57:57.325" v="214" actId="21"/>
           <ac:spMkLst>
             <pc:docMk/>
             <pc:sldMk cId="1573992039" sldId="256"/>
             <ac:spMk id="19" creationId="{F1CE41FF-7B22-BB87-5437-9C5A6D9C40EA}"/>
           </ac:spMkLst>
         </pc:spChg>
-        <pc:spChg chg="add mod">
-          <ac:chgData name="Fatima Pillosu" userId="a6295d4dc9e22643" providerId="LiveId" clId="{87453732-75AC-4426-B5D3-B7C69C2D4F54}" dt="2026-01-19T23:29:43.500" v="205"/>
+        <pc:spChg chg="add del mod">
+          <ac:chgData name="Fatima Pillosu" userId="a6295d4dc9e22643" providerId="LiveId" clId="{87453732-75AC-4426-B5D3-B7C69C2D4F54}" dt="2026-01-22T22:57:57.325" v="214" actId="21"/>
           <ac:spMkLst>
             <pc:docMk/>
             <pc:sldMk cId="1573992039" sldId="256"/>
             <ac:spMk id="20" creationId="{3CDA144B-1F01-F0CC-A493-5631BE7BE96B}"/>
           </ac:spMkLst>
         </pc:spChg>
+        <pc:spChg chg="del">
+          <ac:chgData name="Fatima Pillosu" userId="a6295d4dc9e22643" providerId="LiveId" clId="{87453732-75AC-4426-B5D3-B7C69C2D4F54}" dt="2026-01-22T22:57:57.325" v="214" actId="21"/>
+          <ac:spMkLst>
+            <pc:docMk/>
+            <pc:sldMk cId="1573992039" sldId="256"/>
+            <ac:spMk id="21" creationId="{9D4C28E0-97DE-3DC8-9344-F610BE62157D}"/>
+          </ac:spMkLst>
+        </pc:spChg>
+        <pc:spChg chg="mod">
+          <ac:chgData name="Fatima Pillosu" userId="a6295d4dc9e22643" providerId="LiveId" clId="{87453732-75AC-4426-B5D3-B7C69C2D4F54}" dt="2026-01-22T22:56:44.430" v="208" actId="164"/>
+          <ac:spMkLst>
+            <pc:docMk/>
+            <pc:sldMk cId="1573992039" sldId="256"/>
+            <ac:spMk id="23" creationId="{2806A400-C100-A7CD-C682-9F752EF41C58}"/>
+          </ac:spMkLst>
+        </pc:spChg>
+        <pc:spChg chg="mod">
+          <ac:chgData name="Fatima Pillosu" userId="a6295d4dc9e22643" providerId="LiveId" clId="{87453732-75AC-4426-B5D3-B7C69C2D4F54}" dt="2026-01-22T22:56:44.430" v="208" actId="164"/>
+          <ac:spMkLst>
+            <pc:docMk/>
+            <pc:sldMk cId="1573992039" sldId="256"/>
+            <ac:spMk id="26" creationId="{E1F6673A-1B0C-E424-8F99-86B139BD4918}"/>
+          </ac:spMkLst>
+        </pc:spChg>
+        <pc:spChg chg="mod">
+          <ac:chgData name="Fatima Pillosu" userId="a6295d4dc9e22643" providerId="LiveId" clId="{87453732-75AC-4426-B5D3-B7C69C2D4F54}" dt="2026-01-22T22:56:44.430" v="208" actId="164"/>
+          <ac:spMkLst>
+            <pc:docMk/>
+            <pc:sldMk cId="1573992039" sldId="256"/>
+            <ac:spMk id="27" creationId="{7160EB10-8701-2F92-B2E3-BD9975B33EAB}"/>
+          </ac:spMkLst>
+        </pc:spChg>
+        <pc:spChg chg="mod">
+          <ac:chgData name="Fatima Pillosu" userId="a6295d4dc9e22643" providerId="LiveId" clId="{87453732-75AC-4426-B5D3-B7C69C2D4F54}" dt="2026-01-22T22:57:26.135" v="211" actId="164"/>
+          <ac:spMkLst>
+            <pc:docMk/>
+            <pc:sldMk cId="1573992039" sldId="256"/>
+            <ac:spMk id="29" creationId="{843DCFB4-D832-CE14-33FD-22FE10682A05}"/>
+          </ac:spMkLst>
+        </pc:spChg>
+        <pc:spChg chg="mod">
+          <ac:chgData name="Fatima Pillosu" userId="a6295d4dc9e22643" providerId="LiveId" clId="{87453732-75AC-4426-B5D3-B7C69C2D4F54}" dt="2026-01-22T22:57:26.135" v="211" actId="164"/>
+          <ac:spMkLst>
+            <pc:docMk/>
+            <pc:sldMk cId="1573992039" sldId="256"/>
+            <ac:spMk id="31" creationId="{5CCEEB50-0EB3-291D-2911-B86403C69D4E}"/>
+          </ac:spMkLst>
+        </pc:spChg>
+        <pc:spChg chg="mod">
+          <ac:chgData name="Fatima Pillosu" userId="a6295d4dc9e22643" providerId="LiveId" clId="{87453732-75AC-4426-B5D3-B7C69C2D4F54}" dt="2026-01-22T22:57:26.135" v="211" actId="164"/>
+          <ac:spMkLst>
+            <pc:docMk/>
+            <pc:sldMk cId="1573992039" sldId="256"/>
+            <ac:spMk id="34" creationId="{DD906E7D-FF64-09FE-65EF-837BDD47046A}"/>
+          </ac:spMkLst>
+        </pc:spChg>
+        <pc:spChg chg="mod">
+          <ac:chgData name="Fatima Pillosu" userId="a6295d4dc9e22643" providerId="LiveId" clId="{87453732-75AC-4426-B5D3-B7C69C2D4F54}" dt="2026-01-22T22:57:26.135" v="211" actId="164"/>
+          <ac:spMkLst>
+            <pc:docMk/>
+            <pc:sldMk cId="1573992039" sldId="256"/>
+            <ac:spMk id="35" creationId="{CDF5D99F-239B-7286-E705-43476984C1FD}"/>
+          </ac:spMkLst>
+        </pc:spChg>
+        <pc:spChg chg="mod">
+          <ac:chgData name="Fatima Pillosu" userId="a6295d4dc9e22643" providerId="LiveId" clId="{87453732-75AC-4426-B5D3-B7C69C2D4F54}" dt="2026-01-22T22:57:26.135" v="211" actId="164"/>
+          <ac:spMkLst>
+            <pc:docMk/>
+            <pc:sldMk cId="1573992039" sldId="256"/>
+            <ac:spMk id="36" creationId="{A09387BF-360E-1373-B4E2-484CDF5B6943}"/>
+          </ac:spMkLst>
+        </pc:spChg>
+        <pc:spChg chg="mod">
+          <ac:chgData name="Fatima Pillosu" userId="a6295d4dc9e22643" providerId="LiveId" clId="{87453732-75AC-4426-B5D3-B7C69C2D4F54}" dt="2026-01-22T22:57:26.135" v="211" actId="164"/>
+          <ac:spMkLst>
+            <pc:docMk/>
+            <pc:sldMk cId="1573992039" sldId="256"/>
+            <ac:spMk id="38" creationId="{F3106249-1C45-1C12-2453-07133FF1CD86}"/>
+          </ac:spMkLst>
+        </pc:spChg>
+        <pc:spChg chg="mod">
+          <ac:chgData name="Fatima Pillosu" userId="a6295d4dc9e22643" providerId="LiveId" clId="{87453732-75AC-4426-B5D3-B7C69C2D4F54}" dt="2026-01-22T22:57:26.135" v="211" actId="164"/>
+          <ac:spMkLst>
+            <pc:docMk/>
+            <pc:sldMk cId="1573992039" sldId="256"/>
+            <ac:spMk id="39" creationId="{E3F5F678-30B9-E5A6-EDA8-349820A25D9E}"/>
+          </ac:spMkLst>
+        </pc:spChg>
         <pc:spChg chg="add mod">
-          <ac:chgData name="Fatima Pillosu" userId="a6295d4dc9e22643" providerId="LiveId" clId="{87453732-75AC-4426-B5D3-B7C69C2D4F54}" dt="2026-01-19T23:29:43.500" v="205"/>
+          <ac:chgData name="Fatima Pillosu" userId="a6295d4dc9e22643" providerId="LiveId" clId="{87453732-75AC-4426-B5D3-B7C69C2D4F54}" dt="2026-01-22T22:57:26.135" v="211" actId="164"/>
           <ac:spMkLst>
             <pc:docMk/>
             <pc:sldMk cId="1573992039" sldId="256"/>
             <ac:spMk id="40" creationId="{7ED78E03-DDB8-9C4E-DC18-F07659A40AE4}"/>
           </ac:spMkLst>
         </pc:spChg>
-        <pc:spChg chg="add mod">
-          <ac:chgData name="Fatima Pillosu" userId="a6295d4dc9e22643" providerId="LiveId" clId="{87453732-75AC-4426-B5D3-B7C69C2D4F54}" dt="2026-01-19T23:29:43.500" v="205"/>
+        <pc:spChg chg="del">
+          <ac:chgData name="Fatima Pillosu" userId="a6295d4dc9e22643" providerId="LiveId" clId="{87453732-75AC-4426-B5D3-B7C69C2D4F54}" dt="2026-01-22T22:56:30.386" v="206" actId="478"/>
           <ac:spMkLst>
             <pc:docMk/>
             <pc:sldMk cId="1573992039" sldId="256"/>
-            <ac:spMk id="46" creationId="{4ABA71F5-F7CE-E653-5451-1F27E1EA51A4}"/>
+            <ac:spMk id="42" creationId="{9B7BC31B-AF25-6343-17FE-7E9A8F8B73EB}"/>
+          </ac:spMkLst>
+        </pc:spChg>
+        <pc:spChg chg="mod">
+          <ac:chgData name="Fatima Pillosu" userId="a6295d4dc9e22643" providerId="LiveId" clId="{87453732-75AC-4426-B5D3-B7C69C2D4F54}" dt="2026-01-22T22:57:26.135" v="211" actId="164"/>
+          <ac:spMkLst>
+            <pc:docMk/>
+            <pc:sldMk cId="1573992039" sldId="256"/>
+            <ac:spMk id="44" creationId="{65533EAA-5F83-EA70-6747-5F625123CB00}"/>
+          </ac:spMkLst>
+        </pc:spChg>
+        <pc:spChg chg="mod">
+          <ac:chgData name="Fatima Pillosu" userId="a6295d4dc9e22643" providerId="LiveId" clId="{87453732-75AC-4426-B5D3-B7C69C2D4F54}" dt="2026-01-22T22:57:26.135" v="211" actId="164"/>
+          <ac:spMkLst>
+            <pc:docMk/>
+            <pc:sldMk cId="1573992039" sldId="256"/>
+            <ac:spMk id="45" creationId="{545E5C43-F926-13EA-70BE-CA710E33D019}"/>
+          </ac:spMkLst>
+        </pc:spChg>
+        <pc:spChg chg="mod">
+          <ac:chgData name="Fatima Pillosu" userId="a6295d4dc9e22643" providerId="LiveId" clId="{87453732-75AC-4426-B5D3-B7C69C2D4F54}" dt="2026-01-22T22:56:44.430" v="208" actId="164"/>
+          <ac:spMkLst>
+            <pc:docMk/>
+            <pc:sldMk cId="1573992039" sldId="256"/>
+            <ac:spMk id="47" creationId="{C700B7F9-A72E-559F-D17A-BFCCF191350D}"/>
+          </ac:spMkLst>
+        </pc:spChg>
+        <pc:spChg chg="mod">
+          <ac:chgData name="Fatima Pillosu" userId="a6295d4dc9e22643" providerId="LiveId" clId="{87453732-75AC-4426-B5D3-B7C69C2D4F54}" dt="2026-01-22T22:56:44.430" v="208" actId="164"/>
+          <ac:spMkLst>
+            <pc:docMk/>
+            <pc:sldMk cId="1573992039" sldId="256"/>
+            <ac:spMk id="48" creationId="{BA6B5728-94FF-1C7C-CD97-4D776F6436FF}"/>
+          </ac:spMkLst>
+        </pc:spChg>
+        <pc:spChg chg="mod">
+          <ac:chgData name="Fatima Pillosu" userId="a6295d4dc9e22643" providerId="LiveId" clId="{87453732-75AC-4426-B5D3-B7C69C2D4F54}" dt="2026-01-22T22:56:44.430" v="208" actId="164"/>
+          <ac:spMkLst>
+            <pc:docMk/>
+            <pc:sldMk cId="1573992039" sldId="256"/>
+            <ac:spMk id="49" creationId="{BE8CA2C2-9A67-A315-55CF-D3B76C5B4ABF}"/>
           </ac:spMkLst>
         </pc:spChg>
         <pc:spChg chg="add mod">
-          <ac:chgData name="Fatima Pillosu" userId="a6295d4dc9e22643" providerId="LiveId" clId="{87453732-75AC-4426-B5D3-B7C69C2D4F54}" dt="2026-01-19T23:29:43.500" v="205"/>
+          <ac:chgData name="Fatima Pillosu" userId="a6295d4dc9e22643" providerId="LiveId" clId="{87453732-75AC-4426-B5D3-B7C69C2D4F54}" dt="2026-01-22T22:56:44.430" v="208" actId="164"/>
           <ac:spMkLst>
             <pc:docMk/>
             <pc:sldMk cId="1573992039" sldId="256"/>
             <ac:spMk id="50" creationId="{16D7E8D5-094D-0801-2477-66BD27467E33}"/>
           </ac:spMkLst>
         </pc:spChg>
-        <pc:spChg chg="mod">
-          <ac:chgData name="Fatima Pillosu" userId="a6295d4dc9e22643" providerId="LiveId" clId="{87453732-75AC-4426-B5D3-B7C69C2D4F54}" dt="2026-01-19T23:29:14.153" v="201" actId="1036"/>
+        <pc:spChg chg="add mod">
+          <ac:chgData name="Fatima Pillosu" userId="a6295d4dc9e22643" providerId="LiveId" clId="{87453732-75AC-4426-B5D3-B7C69C2D4F54}" dt="2026-01-22T22:58:11.774" v="215"/>
           <ac:spMkLst>
             <pc:docMk/>
             <pc:sldMk cId="1573992039" sldId="256"/>
-            <ac:spMk id="860" creationId="{88FD4609-03C7-48B1-EA84-375FFFEDBE06}"/>
+            <ac:spMk id="64" creationId="{F1CE41FF-7B22-BB87-5437-9C5A6D9C40EA}"/>
           </ac:spMkLst>
         </pc:spChg>
         <pc:spChg chg="mod">
-          <ac:chgData name="Fatima Pillosu" userId="a6295d4dc9e22643" providerId="LiveId" clId="{87453732-75AC-4426-B5D3-B7C69C2D4F54}" dt="2026-01-19T23:28:57.406" v="192" actId="1036"/>
+          <ac:chgData name="Fatima Pillosu" userId="a6295d4dc9e22643" providerId="LiveId" clId="{87453732-75AC-4426-B5D3-B7C69C2D4F54}" dt="2026-01-22T22:58:11.774" v="215"/>
           <ac:spMkLst>
             <pc:docMk/>
             <pc:sldMk cId="1573992039" sldId="256"/>
-            <ac:spMk id="861" creationId="{4C39D33D-2B26-F2D6-F8F4-09E6518093E9}"/>
+            <ac:spMk id="71" creationId="{1ACBC9A4-96CE-2145-4C13-43843EED1EEE}"/>
           </ac:spMkLst>
         </pc:spChg>
         <pc:spChg chg="mod">
-          <ac:chgData name="Fatima Pillosu" userId="a6295d4dc9e22643" providerId="LiveId" clId="{87453732-75AC-4426-B5D3-B7C69C2D4F54}" dt="2026-01-19T23:29:06.340" v="194" actId="1036"/>
+          <ac:chgData name="Fatima Pillosu" userId="a6295d4dc9e22643" providerId="LiveId" clId="{87453732-75AC-4426-B5D3-B7C69C2D4F54}" dt="2026-01-22T22:58:11.774" v="215"/>
           <ac:spMkLst>
             <pc:docMk/>
             <pc:sldMk cId="1573992039" sldId="256"/>
-            <ac:spMk id="862" creationId="{F4E1EB47-FB49-B221-8F40-6FAAC8188E34}"/>
+            <ac:spMk id="75" creationId="{DD906E7D-FF64-09FE-65EF-837BDD47046A}"/>
           </ac:spMkLst>
         </pc:spChg>
-        <pc:spChg chg="del">
-          <ac:chgData name="Fatima Pillosu" userId="a6295d4dc9e22643" providerId="LiveId" clId="{87453732-75AC-4426-B5D3-B7C69C2D4F54}" dt="2026-01-19T23:28:30.120" v="166" actId="478"/>
+        <pc:spChg chg="mod">
+          <ac:chgData name="Fatima Pillosu" userId="a6295d4dc9e22643" providerId="LiveId" clId="{87453732-75AC-4426-B5D3-B7C69C2D4F54}" dt="2026-01-22T22:58:11.774" v="215"/>
           <ac:spMkLst>
             <pc:docMk/>
             <pc:sldMk cId="1573992039" sldId="256"/>
-            <ac:spMk id="863" creationId="{1BD78840-0564-22E5-B26D-C7ADAF54B12C}"/>
+            <ac:spMk id="76" creationId="{CDF5D99F-239B-7286-E705-43476984C1FD}"/>
           </ac:spMkLst>
         </pc:spChg>
-        <pc:spChg chg="del mod">
-          <ac:chgData name="Fatima Pillosu" userId="a6295d4dc9e22643" providerId="LiveId" clId="{87453732-75AC-4426-B5D3-B7C69C2D4F54}" dt="2026-01-19T23:29:29.948" v="204" actId="21"/>
+        <pc:spChg chg="mod">
+          <ac:chgData name="Fatima Pillosu" userId="a6295d4dc9e22643" providerId="LiveId" clId="{87453732-75AC-4426-B5D3-B7C69C2D4F54}" dt="2026-01-22T23:02:40.072" v="278" actId="20577"/>
           <ac:spMkLst>
             <pc:docMk/>
             <pc:sldMk cId="1573992039" sldId="256"/>
-            <ac:spMk id="864" creationId="{D4A499F2-3420-098E-60B9-2B0BAC6336D7}"/>
+            <ac:spMk id="81" creationId="{7ED78E03-DDB8-9C4E-DC18-F07659A40AE4}"/>
           </ac:spMkLst>
         </pc:spChg>
         <pc:spChg chg="mod">
-          <ac:chgData name="Fatima Pillosu" userId="a6295d4dc9e22643" providerId="LiveId" clId="{87453732-75AC-4426-B5D3-B7C69C2D4F54}" dt="2026-01-19T23:28:57.406" v="192" actId="1036"/>
+          <ac:chgData name="Fatima Pillosu" userId="a6295d4dc9e22643" providerId="LiveId" clId="{87453732-75AC-4426-B5D3-B7C69C2D4F54}" dt="2026-01-22T22:58:11.774" v="215"/>
           <ac:spMkLst>
             <pc:docMk/>
             <pc:sldMk cId="1573992039" sldId="256"/>
-            <ac:spMk id="865" creationId="{886A253C-800A-4473-19A4-5EC96B3D6DA8}"/>
+            <ac:spMk id="85" creationId="{545E5C43-F926-13EA-70BE-CA710E33D019}"/>
           </ac:spMkLst>
         </pc:spChg>
-        <pc:spChg chg="del mod">
-          <ac:chgData name="Fatima Pillosu" userId="a6295d4dc9e22643" providerId="LiveId" clId="{87453732-75AC-4426-B5D3-B7C69C2D4F54}" dt="2026-01-19T23:29:29.948" v="204" actId="21"/>
+        <pc:spChg chg="mod">
+          <ac:chgData name="Fatima Pillosu" userId="a6295d4dc9e22643" providerId="LiveId" clId="{87453732-75AC-4426-B5D3-B7C69C2D4F54}" dt="2026-01-22T22:58:11.774" v="215"/>
           <ac:spMkLst>
             <pc:docMk/>
             <pc:sldMk cId="1573992039" sldId="256"/>
-            <ac:spMk id="866" creationId="{31526C8F-65EA-4AE2-A6F7-E27D64A802EA}"/>
+            <ac:spMk id="86" creationId="{4ABA71F5-F7CE-E653-5451-1F27E1EA51A4}"/>
           </ac:spMkLst>
         </pc:spChg>
-        <pc:spChg chg="del">
-          <ac:chgData name="Fatima Pillosu" userId="a6295d4dc9e22643" providerId="LiveId" clId="{87453732-75AC-4426-B5D3-B7C69C2D4F54}" dt="2026-01-19T23:29:29.948" v="204" actId="21"/>
+        <pc:spChg chg="mod">
+          <ac:chgData name="Fatima Pillosu" userId="a6295d4dc9e22643" providerId="LiveId" clId="{87453732-75AC-4426-B5D3-B7C69C2D4F54}" dt="2026-01-22T23:15:29.344" v="1059" actId="14100"/>
           <ac:spMkLst>
             <pc:docMk/>
             <pc:sldMk cId="1573992039" sldId="256"/>
-            <ac:spMk id="874" creationId="{2806A400-C100-A7CD-C682-9F752EF41C58}"/>
+            <ac:spMk id="90" creationId="{88FD4609-03C7-48B1-EA84-375FFFEDBE06}"/>
           </ac:spMkLst>
         </pc:spChg>
         <pc:spChg chg="mod">
-          <ac:chgData name="Fatima Pillosu" userId="a6295d4dc9e22643" providerId="LiveId" clId="{87453732-75AC-4426-B5D3-B7C69C2D4F54}" dt="2026-01-19T23:28:57.406" v="192" actId="1036"/>
+          <ac:chgData name="Fatima Pillosu" userId="a6295d4dc9e22643" providerId="LiveId" clId="{87453732-75AC-4426-B5D3-B7C69C2D4F54}" dt="2026-01-22T22:58:11.774" v="215"/>
           <ac:spMkLst>
             <pc:docMk/>
             <pc:sldMk cId="1573992039" sldId="256"/>
-            <ac:spMk id="877" creationId="{E1F6673A-1B0C-E424-8F99-86B139BD4918}"/>
+            <ac:spMk id="92" creationId="{D4A499F2-3420-098E-60B9-2B0BAC6336D7}"/>
           </ac:spMkLst>
         </pc:spChg>
-        <pc:spChg chg="del">
-          <ac:chgData name="Fatima Pillosu" userId="a6295d4dc9e22643" providerId="LiveId" clId="{87453732-75AC-4426-B5D3-B7C69C2D4F54}" dt="2026-01-19T23:29:29.948" v="204" actId="21"/>
+        <pc:spChg chg="mod">
+          <ac:chgData name="Fatima Pillosu" userId="a6295d4dc9e22643" providerId="LiveId" clId="{87453732-75AC-4426-B5D3-B7C69C2D4F54}" dt="2026-01-22T22:58:11.774" v="215"/>
           <ac:spMkLst>
             <pc:docMk/>
             <pc:sldMk cId="1573992039" sldId="256"/>
-            <ac:spMk id="878" creationId="{7160EB10-8701-2F92-B2E3-BD9975B33EAB}"/>
+            <ac:spMk id="94" creationId="{31526C8F-65EA-4AE2-A6F7-E27D64A802EA}"/>
           </ac:spMkLst>
         </pc:spChg>
-        <pc:spChg chg="del mod">
-          <ac:chgData name="Fatima Pillosu" userId="a6295d4dc9e22643" providerId="LiveId" clId="{87453732-75AC-4426-B5D3-B7C69C2D4F54}" dt="2026-01-19T23:29:29.948" v="204" actId="21"/>
+        <pc:spChg chg="mod">
+          <ac:chgData name="Fatima Pillosu" userId="a6295d4dc9e22643" providerId="LiveId" clId="{87453732-75AC-4426-B5D3-B7C69C2D4F54}" dt="2026-01-22T22:58:11.774" v="215"/>
           <ac:spMkLst>
             <pc:docMk/>
             <pc:sldMk cId="1573992039" sldId="256"/>
-            <ac:spMk id="879" creationId="{871F6875-B35B-38C5-3426-33D516CADAB5}"/>
+            <ac:spMk id="95" creationId="{2806A400-C100-A7CD-C682-9F752EF41C58}"/>
           </ac:spMkLst>
         </pc:spChg>
         <pc:spChg chg="mod">
-          <ac:chgData name="Fatima Pillosu" userId="a6295d4dc9e22643" providerId="LiveId" clId="{87453732-75AC-4426-B5D3-B7C69C2D4F54}" dt="2026-01-19T23:29:14.153" v="201" actId="1036"/>
+          <ac:chgData name="Fatima Pillosu" userId="a6295d4dc9e22643" providerId="LiveId" clId="{87453732-75AC-4426-B5D3-B7C69C2D4F54}" dt="2026-01-22T23:14:40.498" v="1030" actId="1036"/>
           <ac:spMkLst>
             <pc:docMk/>
             <pc:sldMk cId="1573992039" sldId="256"/>
-            <ac:spMk id="880" creationId="{843DCFB4-D832-CE14-33FD-22FE10682A05}"/>
+            <ac:spMk id="104" creationId="{5E7D516C-6098-CA78-A68A-A60E91A03B8B}"/>
           </ac:spMkLst>
         </pc:spChg>
-        <pc:spChg chg="mod">
-          <ac:chgData name="Fatima Pillosu" userId="a6295d4dc9e22643" providerId="LiveId" clId="{87453732-75AC-4426-B5D3-B7C69C2D4F54}" dt="2026-01-19T23:29:14.153" v="201" actId="1036"/>
+        <pc:spChg chg="add mod">
+          <ac:chgData name="Fatima Pillosu" userId="a6295d4dc9e22643" providerId="LiveId" clId="{87453732-75AC-4426-B5D3-B7C69C2D4F54}" dt="2026-01-22T23:14:06.291" v="1008" actId="1038"/>
           <ac:spMkLst>
             <pc:docMk/>
             <pc:sldMk cId="1573992039" sldId="256"/>
-            <ac:spMk id="881" creationId="{1ACBC9A4-96CE-2145-4C13-43843EED1EEE}"/>
+            <ac:spMk id="107" creationId="{8C2CF4A1-967C-6891-8D3E-E404ED5D4E82}"/>
           </ac:spMkLst>
         </pc:spChg>
-        <pc:spChg chg="del">
-          <ac:chgData name="Fatima Pillosu" userId="a6295d4dc9e22643" providerId="LiveId" clId="{87453732-75AC-4426-B5D3-B7C69C2D4F54}" dt="2026-01-19T23:29:29.948" v="204" actId="21"/>
+        <pc:spChg chg="add mod">
+          <ac:chgData name="Fatima Pillosu" userId="a6295d4dc9e22643" providerId="LiveId" clId="{87453732-75AC-4426-B5D3-B7C69C2D4F54}" dt="2026-01-22T23:14:06.291" v="1008" actId="1038"/>
           <ac:spMkLst>
             <pc:docMk/>
             <pc:sldMk cId="1573992039" sldId="256"/>
-            <ac:spMk id="882" creationId="{5CCEEB50-0EB3-291D-2911-B86403C69D4E}"/>
+            <ac:spMk id="108" creationId="{748BB081-753E-2804-7F05-2F111730D61F}"/>
           </ac:spMkLst>
         </pc:spChg>
-        <pc:spChg chg="mod">
-          <ac:chgData name="Fatima Pillosu" userId="a6295d4dc9e22643" providerId="LiveId" clId="{87453732-75AC-4426-B5D3-B7C69C2D4F54}" dt="2026-01-19T23:29:14.153" v="201" actId="1036"/>
+        <pc:spChg chg="add mod">
+          <ac:chgData name="Fatima Pillosu" userId="a6295d4dc9e22643" providerId="LiveId" clId="{87453732-75AC-4426-B5D3-B7C69C2D4F54}" dt="2026-01-22T23:15:43.100" v="1066" actId="1036"/>
           <ac:spMkLst>
             <pc:docMk/>
             <pc:sldMk cId="1573992039" sldId="256"/>
-            <ac:spMk id="886" creationId="{CDF5D99F-239B-7286-E705-43476984C1FD}"/>
+            <ac:spMk id="109" creationId="{0A54A4DA-82CE-F662-6560-4E4EB66C1AE8}"/>
           </ac:spMkLst>
         </pc:spChg>
-        <pc:spChg chg="del mod">
-          <ac:chgData name="Fatima Pillosu" userId="a6295d4dc9e22643" providerId="LiveId" clId="{87453732-75AC-4426-B5D3-B7C69C2D4F54}" dt="2026-01-19T23:29:29.948" v="204" actId="21"/>
+        <pc:spChg chg="add del mod">
+          <ac:chgData name="Fatima Pillosu" userId="a6295d4dc9e22643" providerId="LiveId" clId="{87453732-75AC-4426-B5D3-B7C69C2D4F54}" dt="2026-01-22T23:12:51.476" v="940" actId="478"/>
           <ac:spMkLst>
             <pc:docMk/>
             <pc:sldMk cId="1573992039" sldId="256"/>
-            <ac:spMk id="887" creationId="{A09387BF-360E-1373-B4E2-484CDF5B6943}"/>
+            <ac:spMk id="110" creationId="{A65EA570-4E91-1F02-2093-70F878ABB862}"/>
           </ac:spMkLst>
         </pc:spChg>
-        <pc:spChg chg="mod">
-          <ac:chgData name="Fatima Pillosu" userId="a6295d4dc9e22643" providerId="LiveId" clId="{87453732-75AC-4426-B5D3-B7C69C2D4F54}" dt="2026-01-19T23:29:14.153" v="201" actId="1036"/>
-          <ac:spMkLst>
+        <pc:grpChg chg="del mod">
+          <ac:chgData name="Fatima Pillosu" userId="a6295d4dc9e22643" providerId="LiveId" clId="{87453732-75AC-4426-B5D3-B7C69C2D4F54}" dt="2026-01-22T22:57:57.325" v="214" actId="21"/>
+          <ac:grpSpMkLst>
             <pc:docMk/>
             <pc:sldMk cId="1573992039" sldId="256"/>
-            <ac:spMk id="892" creationId="{307BB4E1-82F3-30C4-2FB1-591A624180EF}"/>
-          </ac:spMkLst>
-        </pc:spChg>
-        <pc:spChg chg="del mod">
-          <ac:chgData name="Fatima Pillosu" userId="a6295d4dc9e22643" providerId="LiveId" clId="{87453732-75AC-4426-B5D3-B7C69C2D4F54}" dt="2026-01-19T23:29:29.948" v="204" actId="21"/>
-          <ac:spMkLst>
+            <ac:grpSpMk id="2" creationId="{CACA255C-6D4D-4370-696B-5DEA6A8AC9A4}"/>
+          </ac:grpSpMkLst>
+        </pc:grpChg>
+        <pc:grpChg chg="del mod">
+          <ac:chgData name="Fatima Pillosu" userId="a6295d4dc9e22643" providerId="LiveId" clId="{87453732-75AC-4426-B5D3-B7C69C2D4F54}" dt="2026-01-22T22:57:57.325" v="214" actId="21"/>
+          <ac:grpSpMkLst>
             <pc:docMk/>
             <pc:sldMk cId="1573992039" sldId="256"/>
-            <ac:spMk id="893" creationId="{9B7BC31B-AF25-6343-17FE-7E9A8F8B73EB}"/>
-          </ac:spMkLst>
-        </pc:spChg>
-        <pc:spChg chg="del">
-          <ac:chgData name="Fatima Pillosu" userId="a6295d4dc9e22643" providerId="LiveId" clId="{87453732-75AC-4426-B5D3-B7C69C2D4F54}" dt="2026-01-19T23:29:29.948" v="204" actId="21"/>
-          <ac:spMkLst>
+            <ac:grpSpMk id="54" creationId="{43A56C84-4F0C-4006-0C8C-7604A213D08E}"/>
+          </ac:grpSpMkLst>
+        </pc:grpChg>
+        <pc:grpChg chg="mod">
+          <ac:chgData name="Fatima Pillosu" userId="a6295d4dc9e22643" providerId="LiveId" clId="{87453732-75AC-4426-B5D3-B7C69C2D4F54}" dt="2026-01-22T23:01:33.921" v="261" actId="1076"/>
+          <ac:grpSpMkLst>
             <pc:docMk/>
             <pc:sldMk cId="1573992039" sldId="256"/>
-            <ac:spMk id="895" creationId="{65533EAA-5F83-EA70-6747-5F625123CB00}"/>
-          </ac:spMkLst>
-        </pc:spChg>
-        <pc:spChg chg="del mod">
-          <ac:chgData name="Fatima Pillosu" userId="a6295d4dc9e22643" providerId="LiveId" clId="{87453732-75AC-4426-B5D3-B7C69C2D4F54}" dt="2026-01-19T23:29:29.948" v="204" actId="21"/>
-          <ac:spMkLst>
+            <ac:grpSpMk id="68" creationId="{43A56C84-4F0C-4006-0C8C-7604A213D08E}"/>
+          </ac:grpSpMkLst>
+        </pc:grpChg>
+        <pc:grpChg chg="mod">
+          <ac:chgData name="Fatima Pillosu" userId="a6295d4dc9e22643" providerId="LiveId" clId="{87453732-75AC-4426-B5D3-B7C69C2D4F54}" dt="2026-01-22T23:14:14.649" v="1022" actId="1035"/>
+          <ac:grpSpMkLst>
             <pc:docMk/>
             <pc:sldMk cId="1573992039" sldId="256"/>
-            <ac:spMk id="899" creationId="{BA6B5728-94FF-1C7C-CD97-4D776F6436FF}"/>
-          </ac:spMkLst>
-        </pc:spChg>
-        <pc:spChg chg="mod">
-          <ac:chgData name="Fatima Pillosu" userId="a6295d4dc9e22643" providerId="LiveId" clId="{87453732-75AC-4426-B5D3-B7C69C2D4F54}" dt="2026-01-19T23:28:57.406" v="192" actId="1036"/>
-          <ac:spMkLst>
+            <ac:grpSpMk id="87" creationId="{CACA255C-6D4D-4370-696B-5DEA6A8AC9A4}"/>
+          </ac:grpSpMkLst>
+        </pc:grpChg>
+        <pc:cxnChg chg="del">
+          <ac:chgData name="Fatima Pillosu" userId="a6295d4dc9e22643" providerId="LiveId" clId="{87453732-75AC-4426-B5D3-B7C69C2D4F54}" dt="2026-01-22T22:57:57.325" v="214" actId="21"/>
+          <ac:cxnSpMkLst>
             <pc:docMk/>
             <pc:sldMk cId="1573992039" sldId="256"/>
-            <ac:spMk id="900" creationId="{BE8CA2C2-9A67-A315-55CF-D3B76C5B4ABF}"/>
-          </ac:spMkLst>
-        </pc:spChg>
-        <pc:spChg chg="mod">
-          <ac:chgData name="Fatima Pillosu" userId="a6295d4dc9e22643" providerId="LiveId" clId="{87453732-75AC-4426-B5D3-B7C69C2D4F54}" dt="2026-01-19T23:29:14.153" v="201" actId="1036"/>
-          <ac:spMkLst>
-            <pc:docMk/>
-            <pc:sldMk cId="1573992039" sldId="256"/>
-            <ac:spMk id="901" creationId="{16D7E8D5-094D-0801-2477-66BD27467E33}"/>
-          </ac:spMkLst>
-        </pc:spChg>
-        <pc:spChg chg="mod">
-          <ac:chgData name="Fatima Pillosu" userId="a6295d4dc9e22643" providerId="LiveId" clId="{87453732-75AC-4426-B5D3-B7C69C2D4F54}" dt="2026-01-19T23:28:57.406" v="192" actId="1036"/>
-          <ac:spMkLst>
-            <pc:docMk/>
-            <pc:sldMk cId="1573992039" sldId="256"/>
-            <ac:spMk id="902" creationId="{5E7D516C-6098-CA78-A68A-A60E91A03B8B}"/>
-          </ac:spMkLst>
-        </pc:spChg>
-        <pc:spChg chg="del">
-          <ac:chgData name="Fatima Pillosu" userId="a6295d4dc9e22643" providerId="LiveId" clId="{87453732-75AC-4426-B5D3-B7C69C2D4F54}" dt="2026-01-19T23:27:27.647" v="0" actId="478"/>
-          <ac:spMkLst>
-            <pc:docMk/>
-            <pc:sldMk cId="1573992039" sldId="256"/>
-            <ac:spMk id="920" creationId="{609B895C-8C96-00FC-B186-7A3C7A3E9132}"/>
-          </ac:spMkLst>
-        </pc:spChg>
-        <pc:spChg chg="del">
-          <ac:chgData name="Fatima Pillosu" userId="a6295d4dc9e22643" providerId="LiveId" clId="{87453732-75AC-4426-B5D3-B7C69C2D4F54}" dt="2026-01-19T23:27:27.647" v="0" actId="478"/>
-          <ac:spMkLst>
-            <pc:docMk/>
-            <pc:sldMk cId="1573992039" sldId="256"/>
-            <ac:spMk id="922" creationId="{3BD7B3DC-F3A9-B413-076C-142F462DB31E}"/>
-          </ac:spMkLst>
-        </pc:spChg>
-        <pc:spChg chg="del">
-          <ac:chgData name="Fatima Pillosu" userId="a6295d4dc9e22643" providerId="LiveId" clId="{87453732-75AC-4426-B5D3-B7C69C2D4F54}" dt="2026-01-19T23:27:27.647" v="0" actId="478"/>
-          <ac:spMkLst>
-            <pc:docMk/>
-            <pc:sldMk cId="1573992039" sldId="256"/>
-            <ac:spMk id="935" creationId="{E318B0CD-B389-D58D-3EAB-C464FDE2BBDF}"/>
-          </ac:spMkLst>
-        </pc:spChg>
-        <pc:spChg chg="del">
-          <ac:chgData name="Fatima Pillosu" userId="a6295d4dc9e22643" providerId="LiveId" clId="{87453732-75AC-4426-B5D3-B7C69C2D4F54}" dt="2026-01-19T23:27:29.178" v="1" actId="478"/>
-          <ac:spMkLst>
-            <pc:docMk/>
-            <pc:sldMk cId="1573992039" sldId="256"/>
-            <ac:spMk id="948" creationId="{C8C3D13A-BFDD-54C1-8A04-DD3BB24773C4}"/>
-          </ac:spMkLst>
-        </pc:spChg>
-        <pc:spChg chg="del">
-          <ac:chgData name="Fatima Pillosu" userId="a6295d4dc9e22643" providerId="LiveId" clId="{87453732-75AC-4426-B5D3-B7C69C2D4F54}" dt="2026-01-19T23:27:27.647" v="0" actId="478"/>
-          <ac:spMkLst>
-            <pc:docMk/>
-            <pc:sldMk cId="1573992039" sldId="256"/>
-            <ac:spMk id="963" creationId="{B2A59DDD-285A-7034-B1F5-70C3236EEB8E}"/>
-          </ac:spMkLst>
-        </pc:spChg>
-        <pc:spChg chg="del">
-          <ac:chgData name="Fatima Pillosu" userId="a6295d4dc9e22643" providerId="LiveId" clId="{87453732-75AC-4426-B5D3-B7C69C2D4F54}" dt="2026-01-19T23:27:27.647" v="0" actId="478"/>
-          <ac:spMkLst>
-            <pc:docMk/>
-            <pc:sldMk cId="1573992039" sldId="256"/>
-            <ac:spMk id="971" creationId="{00472CBD-CB17-A7EF-5FDC-A2F6815385EA}"/>
-          </ac:spMkLst>
-        </pc:spChg>
-        <pc:spChg chg="del">
-          <ac:chgData name="Fatima Pillosu" userId="a6295d4dc9e22643" providerId="LiveId" clId="{87453732-75AC-4426-B5D3-B7C69C2D4F54}" dt="2026-01-19T23:27:27.647" v="0" actId="478"/>
-          <ac:spMkLst>
-            <pc:docMk/>
-            <pc:sldMk cId="1573992039" sldId="256"/>
-            <ac:spMk id="974" creationId="{6D8A9C3F-217E-9DEA-31D3-F668D73532C6}"/>
-          </ac:spMkLst>
-        </pc:spChg>
-        <pc:spChg chg="del">
-          <ac:chgData name="Fatima Pillosu" userId="a6295d4dc9e22643" providerId="LiveId" clId="{87453732-75AC-4426-B5D3-B7C69C2D4F54}" dt="2026-01-19T23:27:27.647" v="0" actId="478"/>
-          <ac:spMkLst>
-            <pc:docMk/>
-            <pc:sldMk cId="1573992039" sldId="256"/>
-            <ac:spMk id="976" creationId="{0CF803A3-4BEB-9400-7B38-57E687183C6D}"/>
-          </ac:spMkLst>
-        </pc:spChg>
-        <pc:spChg chg="del">
-          <ac:chgData name="Fatima Pillosu" userId="a6295d4dc9e22643" providerId="LiveId" clId="{87453732-75AC-4426-B5D3-B7C69C2D4F54}" dt="2026-01-19T23:27:27.647" v="0" actId="478"/>
-          <ac:spMkLst>
-            <pc:docMk/>
-            <pc:sldMk cId="1573992039" sldId="256"/>
-            <ac:spMk id="980" creationId="{AEF79955-9585-5CF1-C444-DDF210469501}"/>
-          </ac:spMkLst>
-        </pc:spChg>
-        <pc:spChg chg="del">
-          <ac:chgData name="Fatima Pillosu" userId="a6295d4dc9e22643" providerId="LiveId" clId="{87453732-75AC-4426-B5D3-B7C69C2D4F54}" dt="2026-01-19T23:27:27.647" v="0" actId="478"/>
-          <ac:spMkLst>
-            <pc:docMk/>
-            <pc:sldMk cId="1573992039" sldId="256"/>
-            <ac:spMk id="986" creationId="{0F9E7280-5D40-9558-A401-287F029CE5A4}"/>
-          </ac:spMkLst>
-        </pc:spChg>
-        <pc:spChg chg="del">
-          <ac:chgData name="Fatima Pillosu" userId="a6295d4dc9e22643" providerId="LiveId" clId="{87453732-75AC-4426-B5D3-B7C69C2D4F54}" dt="2026-01-19T23:27:27.647" v="0" actId="478"/>
-          <ac:spMkLst>
-            <pc:docMk/>
-            <pc:sldMk cId="1573992039" sldId="256"/>
-            <ac:spMk id="988" creationId="{B2394BC8-687D-D688-2D19-7127147A70A1}"/>
-          </ac:spMkLst>
-        </pc:spChg>
-        <pc:spChg chg="mod">
-          <ac:chgData name="Fatima Pillosu" userId="a6295d4dc9e22643" providerId="LiveId" clId="{87453732-75AC-4426-B5D3-B7C69C2D4F54}" dt="2026-01-19T23:28:57.406" v="192" actId="1036"/>
-          <ac:spMkLst>
-            <pc:docMk/>
-            <pc:sldMk cId="1573992039" sldId="256"/>
-            <ac:spMk id="1030" creationId="{19C06D92-10F2-6629-738B-329DDCC22607}"/>
-          </ac:spMkLst>
-        </pc:spChg>
+            <ac:cxnSpMk id="22" creationId="{E3E411FB-33CC-5F34-656E-94560D185092}"/>
+          </ac:cxnSpMkLst>
+        </pc:cxnChg>
       </pc:sldChg>
     </pc:docChg>
   </pc:docChgLst>
@@ -538,8 +562,8 @@
         </p:nvSpPr>
         <p:spPr>
           <a:xfrm>
-            <a:off x="310515" y="659908"/>
-            <a:ext cx="3519170" cy="1403820"/>
+            <a:off x="310515" y="736551"/>
+            <a:ext cx="3519170" cy="1566863"/>
           </a:xfrm>
         </p:spPr>
         <p:txBody>
@@ -570,8 +594,8 @@
         </p:nvSpPr>
         <p:spPr>
           <a:xfrm>
-            <a:off x="517525" y="2117865"/>
-            <a:ext cx="3105150" cy="973527"/>
+            <a:off x="517525" y="2363838"/>
+            <a:ext cx="3105150" cy="1086594"/>
           </a:xfrm>
         </p:spPr>
         <p:txBody>
@@ -640,7 +664,7 @@
           <a:p>
             <a:fld id="{1B0A7230-9229-4B4E-8CC9-329D15B7627B}" type="datetimeFigureOut">
               <a:rPr lang="en-GB" smtClean="0"/>
-              <a:t>19/01/2026</a:t>
+              <a:t>22/01/2026</a:t>
             </a:fld>
             <a:endParaRPr lang="en-GB"/>
           </a:p>
@@ -691,7 +715,7 @@
     </p:spTree>
     <p:extLst>
       <p:ext uri="{BB962C8B-B14F-4D97-AF65-F5344CB8AC3E}">
-        <p14:creationId xmlns:p14="http://schemas.microsoft.com/office/powerpoint/2010/main" val="2917547464"/>
+        <p14:creationId xmlns:p14="http://schemas.microsoft.com/office/powerpoint/2010/main" val="4215184418"/>
       </p:ext>
     </p:extLst>
   </p:cSld>
@@ -810,7 +834,7 @@
           <a:p>
             <a:fld id="{1B0A7230-9229-4B4E-8CC9-329D15B7627B}" type="datetimeFigureOut">
               <a:rPr lang="en-GB" smtClean="0"/>
-              <a:t>19/01/2026</a:t>
+              <a:t>22/01/2026</a:t>
             </a:fld>
             <a:endParaRPr lang="en-GB"/>
           </a:p>
@@ -861,7 +885,7 @@
     </p:spTree>
     <p:extLst>
       <p:ext uri="{BB962C8B-B14F-4D97-AF65-F5344CB8AC3E}">
-        <p14:creationId xmlns:p14="http://schemas.microsoft.com/office/powerpoint/2010/main" val="1650999170"/>
+        <p14:creationId xmlns:p14="http://schemas.microsoft.com/office/powerpoint/2010/main" val="3240061376"/>
       </p:ext>
     </p:extLst>
   </p:cSld>
@@ -900,8 +924,8 @@
         </p:nvSpPr>
         <p:spPr>
           <a:xfrm>
-            <a:off x="2962831" y="214680"/>
-            <a:ext cx="892731" cy="3417145"/>
+            <a:off x="2962831" y="239613"/>
+            <a:ext cx="892731" cy="3814019"/>
           </a:xfrm>
         </p:spPr>
         <p:txBody>
@@ -928,8 +952,8 @@
         </p:nvSpPr>
         <p:spPr>
           <a:xfrm>
-            <a:off x="284639" y="214680"/>
-            <a:ext cx="2626439" cy="3417145"/>
+            <a:off x="284639" y="239613"/>
+            <a:ext cx="2626439" cy="3814019"/>
           </a:xfrm>
         </p:spPr>
         <p:txBody>
@@ -990,7 +1014,7 @@
           <a:p>
             <a:fld id="{1B0A7230-9229-4B4E-8CC9-329D15B7627B}" type="datetimeFigureOut">
               <a:rPr lang="en-GB" smtClean="0"/>
-              <a:t>19/01/2026</a:t>
+              <a:t>22/01/2026</a:t>
             </a:fld>
             <a:endParaRPr lang="en-GB"/>
           </a:p>
@@ -1041,7 +1065,7 @@
     </p:spTree>
     <p:extLst>
       <p:ext uri="{BB962C8B-B14F-4D97-AF65-F5344CB8AC3E}">
-        <p14:creationId xmlns:p14="http://schemas.microsoft.com/office/powerpoint/2010/main" val="1546281471"/>
+        <p14:creationId xmlns:p14="http://schemas.microsoft.com/office/powerpoint/2010/main" val="3290670060"/>
       </p:ext>
     </p:extLst>
   </p:cSld>
@@ -1160,7 +1184,7 @@
           <a:p>
             <a:fld id="{1B0A7230-9229-4B4E-8CC9-329D15B7627B}" type="datetimeFigureOut">
               <a:rPr lang="en-GB" smtClean="0"/>
-              <a:t>19/01/2026</a:t>
+              <a:t>22/01/2026</a:t>
             </a:fld>
             <a:endParaRPr lang="en-GB"/>
           </a:p>
@@ -1211,7 +1235,7 @@
     </p:spTree>
     <p:extLst>
       <p:ext uri="{BB962C8B-B14F-4D97-AF65-F5344CB8AC3E}">
-        <p14:creationId xmlns:p14="http://schemas.microsoft.com/office/powerpoint/2010/main" val="2912521932"/>
+        <p14:creationId xmlns:p14="http://schemas.microsoft.com/office/powerpoint/2010/main" val="2570768429"/>
       </p:ext>
     </p:extLst>
   </p:cSld>
@@ -1250,8 +1274,8 @@
         </p:nvSpPr>
         <p:spPr>
           <a:xfrm>
-            <a:off x="282482" y="1005263"/>
-            <a:ext cx="3570923" cy="1677304"/>
+            <a:off x="282482" y="1122017"/>
+            <a:ext cx="3570923" cy="1872109"/>
           </a:xfrm>
         </p:spPr>
         <p:txBody>
@@ -1282,8 +1306,8 @@
         </p:nvSpPr>
         <p:spPr>
           <a:xfrm>
-            <a:off x="282482" y="2698435"/>
-            <a:ext cx="3570923" cy="882054"/>
+            <a:off x="282482" y="3011836"/>
+            <a:ext cx="3570923" cy="984498"/>
           </a:xfrm>
         </p:spPr>
         <p:txBody>
@@ -1406,7 +1430,7 @@
           <a:p>
             <a:fld id="{1B0A7230-9229-4B4E-8CC9-329D15B7627B}" type="datetimeFigureOut">
               <a:rPr lang="en-GB" smtClean="0"/>
-              <a:t>19/01/2026</a:t>
+              <a:t>22/01/2026</a:t>
             </a:fld>
             <a:endParaRPr lang="en-GB"/>
           </a:p>
@@ -1457,7 +1481,7 @@
     </p:spTree>
     <p:extLst>
       <p:ext uri="{BB962C8B-B14F-4D97-AF65-F5344CB8AC3E}">
-        <p14:creationId xmlns:p14="http://schemas.microsoft.com/office/powerpoint/2010/main" val="2571398315"/>
+        <p14:creationId xmlns:p14="http://schemas.microsoft.com/office/powerpoint/2010/main" val="1086882721"/>
       </p:ext>
     </p:extLst>
   </p:cSld>
@@ -1519,8 +1543,8 @@
         </p:nvSpPr>
         <p:spPr>
           <a:xfrm>
-            <a:off x="284639" y="1073400"/>
-            <a:ext cx="1759585" cy="2558426"/>
+            <a:off x="284639" y="1198066"/>
+            <a:ext cx="1759585" cy="2855566"/>
           </a:xfrm>
         </p:spPr>
         <p:txBody>
@@ -1576,8 +1600,8 @@
         </p:nvSpPr>
         <p:spPr>
           <a:xfrm>
-            <a:off x="2095976" y="1073400"/>
-            <a:ext cx="1759585" cy="2558426"/>
+            <a:off x="2095976" y="1198066"/>
+            <a:ext cx="1759585" cy="2855566"/>
           </a:xfrm>
         </p:spPr>
         <p:txBody>
@@ -1638,7 +1662,7 @@
           <a:p>
             <a:fld id="{1B0A7230-9229-4B4E-8CC9-329D15B7627B}" type="datetimeFigureOut">
               <a:rPr lang="en-GB" smtClean="0"/>
-              <a:t>19/01/2026</a:t>
+              <a:t>22/01/2026</a:t>
             </a:fld>
             <a:endParaRPr lang="en-GB"/>
           </a:p>
@@ -1689,7 +1713,7 @@
     </p:spTree>
     <p:extLst>
       <p:ext uri="{BB962C8B-B14F-4D97-AF65-F5344CB8AC3E}">
-        <p14:creationId xmlns:p14="http://schemas.microsoft.com/office/powerpoint/2010/main" val="2021555215"/>
+        <p14:creationId xmlns:p14="http://schemas.microsoft.com/office/powerpoint/2010/main" val="2485809336"/>
       </p:ext>
     </p:extLst>
   </p:cSld>
@@ -1728,8 +1752,8 @@
         </p:nvSpPr>
         <p:spPr>
           <a:xfrm>
-            <a:off x="285178" y="214681"/>
-            <a:ext cx="3570923" cy="779382"/>
+            <a:off x="285178" y="239614"/>
+            <a:ext cx="3570923" cy="869901"/>
           </a:xfrm>
         </p:spPr>
         <p:txBody>
@@ -1756,8 +1780,8 @@
         </p:nvSpPr>
         <p:spPr>
           <a:xfrm>
-            <a:off x="285179" y="988461"/>
-            <a:ext cx="1751498" cy="484430"/>
+            <a:off x="285179" y="1103263"/>
+            <a:ext cx="1751498" cy="540692"/>
           </a:xfrm>
         </p:spPr>
         <p:txBody>
@@ -1821,8 +1845,8 @@
         </p:nvSpPr>
         <p:spPr>
           <a:xfrm>
-            <a:off x="285179" y="1472891"/>
-            <a:ext cx="1751498" cy="2166401"/>
+            <a:off x="285179" y="1643956"/>
+            <a:ext cx="1751498" cy="2418011"/>
           </a:xfrm>
         </p:spPr>
         <p:txBody>
@@ -1878,8 +1902,8 @@
         </p:nvSpPr>
         <p:spPr>
           <a:xfrm>
-            <a:off x="2095977" y="988461"/>
-            <a:ext cx="1760124" cy="484430"/>
+            <a:off x="2095977" y="1103263"/>
+            <a:ext cx="1760124" cy="540692"/>
           </a:xfrm>
         </p:spPr>
         <p:txBody>
@@ -1943,8 +1967,8 @@
         </p:nvSpPr>
         <p:spPr>
           <a:xfrm>
-            <a:off x="2095977" y="1472891"/>
-            <a:ext cx="1760124" cy="2166401"/>
+            <a:off x="2095977" y="1643956"/>
+            <a:ext cx="1760124" cy="2418011"/>
           </a:xfrm>
         </p:spPr>
         <p:txBody>
@@ -2005,7 +2029,7 @@
           <a:p>
             <a:fld id="{1B0A7230-9229-4B4E-8CC9-329D15B7627B}" type="datetimeFigureOut">
               <a:rPr lang="en-GB" smtClean="0"/>
-              <a:t>19/01/2026</a:t>
+              <a:t>22/01/2026</a:t>
             </a:fld>
             <a:endParaRPr lang="en-GB"/>
           </a:p>
@@ -2056,7 +2080,7 @@
     </p:spTree>
     <p:extLst>
       <p:ext uri="{BB962C8B-B14F-4D97-AF65-F5344CB8AC3E}">
-        <p14:creationId xmlns:p14="http://schemas.microsoft.com/office/powerpoint/2010/main" val="2020913522"/>
+        <p14:creationId xmlns:p14="http://schemas.microsoft.com/office/powerpoint/2010/main" val="3425147199"/>
       </p:ext>
     </p:extLst>
   </p:cSld>
@@ -2123,7 +2147,7 @@
           <a:p>
             <a:fld id="{1B0A7230-9229-4B4E-8CC9-329D15B7627B}" type="datetimeFigureOut">
               <a:rPr lang="en-GB" smtClean="0"/>
-              <a:t>19/01/2026</a:t>
+              <a:t>22/01/2026</a:t>
             </a:fld>
             <a:endParaRPr lang="en-GB"/>
           </a:p>
@@ -2174,7 +2198,7 @@
     </p:spTree>
     <p:extLst>
       <p:ext uri="{BB962C8B-B14F-4D97-AF65-F5344CB8AC3E}">
-        <p14:creationId xmlns:p14="http://schemas.microsoft.com/office/powerpoint/2010/main" val="4135025699"/>
+        <p14:creationId xmlns:p14="http://schemas.microsoft.com/office/powerpoint/2010/main" val="4166872336"/>
       </p:ext>
     </p:extLst>
   </p:cSld>
@@ -2218,7 +2242,7 @@
           <a:p>
             <a:fld id="{1B0A7230-9229-4B4E-8CC9-329D15B7627B}" type="datetimeFigureOut">
               <a:rPr lang="en-GB" smtClean="0"/>
-              <a:t>19/01/2026</a:t>
+              <a:t>22/01/2026</a:t>
             </a:fld>
             <a:endParaRPr lang="en-GB"/>
           </a:p>
@@ -2269,7 +2293,7 @@
     </p:spTree>
     <p:extLst>
       <p:ext uri="{BB962C8B-B14F-4D97-AF65-F5344CB8AC3E}">
-        <p14:creationId xmlns:p14="http://schemas.microsoft.com/office/powerpoint/2010/main" val="2271424269"/>
+        <p14:creationId xmlns:p14="http://schemas.microsoft.com/office/powerpoint/2010/main" val="2230682355"/>
       </p:ext>
     </p:extLst>
   </p:cSld>
@@ -2308,8 +2332,8 @@
         </p:nvSpPr>
         <p:spPr>
           <a:xfrm>
-            <a:off x="285178" y="268817"/>
-            <a:ext cx="1335322" cy="940858"/>
+            <a:off x="285178" y="300038"/>
+            <a:ext cx="1335322" cy="1050131"/>
           </a:xfrm>
         </p:spPr>
         <p:txBody>
@@ -2340,8 +2364,8 @@
         </p:nvSpPr>
         <p:spPr>
           <a:xfrm>
-            <a:off x="1760124" y="580570"/>
-            <a:ext cx="2095976" cy="2865511"/>
+            <a:off x="1760124" y="647999"/>
+            <a:ext cx="2095976" cy="3198317"/>
           </a:xfrm>
         </p:spPr>
         <p:txBody>
@@ -2425,8 +2449,8 @@
         </p:nvSpPr>
         <p:spPr>
           <a:xfrm>
-            <a:off x="285178" y="1209675"/>
-            <a:ext cx="1335322" cy="2241073"/>
+            <a:off x="285178" y="1350169"/>
+            <a:ext cx="1335322" cy="2501355"/>
           </a:xfrm>
         </p:spPr>
         <p:txBody>
@@ -2495,7 +2519,7 @@
           <a:p>
             <a:fld id="{1B0A7230-9229-4B4E-8CC9-329D15B7627B}" type="datetimeFigureOut">
               <a:rPr lang="en-GB" smtClean="0"/>
-              <a:t>19/01/2026</a:t>
+              <a:t>22/01/2026</a:t>
             </a:fld>
             <a:endParaRPr lang="en-GB"/>
           </a:p>
@@ -2546,7 +2570,7 @@
     </p:spTree>
     <p:extLst>
       <p:ext uri="{BB962C8B-B14F-4D97-AF65-F5344CB8AC3E}">
-        <p14:creationId xmlns:p14="http://schemas.microsoft.com/office/powerpoint/2010/main" val="3221524731"/>
+        <p14:creationId xmlns:p14="http://schemas.microsoft.com/office/powerpoint/2010/main" val="1129559582"/>
       </p:ext>
     </p:extLst>
   </p:cSld>
@@ -2585,8 +2609,8 @@
         </p:nvSpPr>
         <p:spPr>
           <a:xfrm>
-            <a:off x="285178" y="268817"/>
-            <a:ext cx="1335322" cy="940858"/>
+            <a:off x="285178" y="300038"/>
+            <a:ext cx="1335322" cy="1050131"/>
           </a:xfrm>
         </p:spPr>
         <p:txBody>
@@ -2617,8 +2641,8 @@
         </p:nvSpPr>
         <p:spPr>
           <a:xfrm>
-            <a:off x="1760124" y="580570"/>
-            <a:ext cx="2095976" cy="2865511"/>
+            <a:off x="1760124" y="647999"/>
+            <a:ext cx="2095976" cy="3198317"/>
           </a:xfrm>
         </p:spPr>
         <p:txBody>
@@ -2682,8 +2706,8 @@
         </p:nvSpPr>
         <p:spPr>
           <a:xfrm>
-            <a:off x="285178" y="1209675"/>
-            <a:ext cx="1335322" cy="2241073"/>
+            <a:off x="285178" y="1350169"/>
+            <a:ext cx="1335322" cy="2501355"/>
           </a:xfrm>
         </p:spPr>
         <p:txBody>
@@ -2752,7 +2776,7 @@
           <a:p>
             <a:fld id="{1B0A7230-9229-4B4E-8CC9-329D15B7627B}" type="datetimeFigureOut">
               <a:rPr lang="en-GB" smtClean="0"/>
-              <a:t>19/01/2026</a:t>
+              <a:t>22/01/2026</a:t>
             </a:fld>
             <a:endParaRPr lang="en-GB"/>
           </a:p>
@@ -2803,7 +2827,7 @@
     </p:spTree>
     <p:extLst>
       <p:ext uri="{BB962C8B-B14F-4D97-AF65-F5344CB8AC3E}">
-        <p14:creationId xmlns:p14="http://schemas.microsoft.com/office/powerpoint/2010/main" val="3436199340"/>
+        <p14:creationId xmlns:p14="http://schemas.microsoft.com/office/powerpoint/2010/main" val="1295419014"/>
       </p:ext>
     </p:extLst>
   </p:cSld>
@@ -2847,8 +2871,8 @@
         </p:nvSpPr>
         <p:spPr>
           <a:xfrm>
-            <a:off x="284639" y="214681"/>
-            <a:ext cx="3570923" cy="779382"/>
+            <a:off x="284639" y="239614"/>
+            <a:ext cx="3570923" cy="869901"/>
           </a:xfrm>
           <a:prstGeom prst="rect">
             <a:avLst/>
@@ -2880,8 +2904,8 @@
         </p:nvSpPr>
         <p:spPr>
           <a:xfrm>
-            <a:off x="284639" y="1073400"/>
-            <a:ext cx="3570923" cy="2558426"/>
+            <a:off x="284639" y="1198066"/>
+            <a:ext cx="3570923" cy="2855566"/>
           </a:xfrm>
           <a:prstGeom prst="rect">
             <a:avLst/>
@@ -2942,8 +2966,8 @@
         </p:nvSpPr>
         <p:spPr>
           <a:xfrm>
-            <a:off x="284639" y="3737299"/>
-            <a:ext cx="931545" cy="214680"/>
+            <a:off x="284639" y="4171356"/>
+            <a:ext cx="931545" cy="239613"/>
           </a:xfrm>
           <a:prstGeom prst="rect">
             <a:avLst/>
@@ -2965,7 +2989,7 @@
           <a:p>
             <a:fld id="{1B0A7230-9229-4B4E-8CC9-329D15B7627B}" type="datetimeFigureOut">
               <a:rPr lang="en-GB" smtClean="0"/>
-              <a:t>19/01/2026</a:t>
+              <a:t>22/01/2026</a:t>
             </a:fld>
             <a:endParaRPr lang="en-GB"/>
           </a:p>
@@ -2983,8 +3007,8 @@
         </p:nvSpPr>
         <p:spPr>
           <a:xfrm>
-            <a:off x="1371441" y="3737299"/>
-            <a:ext cx="1397318" cy="214680"/>
+            <a:off x="1371441" y="4171356"/>
+            <a:ext cx="1397318" cy="239613"/>
           </a:xfrm>
           <a:prstGeom prst="rect">
             <a:avLst/>
@@ -3020,8 +3044,8 @@
         </p:nvSpPr>
         <p:spPr>
           <a:xfrm>
-            <a:off x="2924016" y="3737299"/>
-            <a:ext cx="931545" cy="214680"/>
+            <a:off x="2924016" y="4171356"/>
+            <a:ext cx="931545" cy="239613"/>
           </a:xfrm>
           <a:prstGeom prst="rect">
             <a:avLst/>
@@ -3052,23 +3076,23 @@
     </p:spTree>
     <p:extLst>
       <p:ext uri="{BB962C8B-B14F-4D97-AF65-F5344CB8AC3E}">
-        <p14:creationId xmlns:p14="http://schemas.microsoft.com/office/powerpoint/2010/main" val="4050850815"/>
+        <p14:creationId xmlns:p14="http://schemas.microsoft.com/office/powerpoint/2010/main" val="3423585590"/>
       </p:ext>
     </p:extLst>
   </p:cSld>
   <p:clrMap bg1="lt1" tx1="dk1" bg2="lt2" tx2="dk2" accent1="accent1" accent2="accent2" accent3="accent3" accent4="accent4" accent5="accent5" accent6="accent6" hlink="hlink" folHlink="folHlink"/>
   <p:sldLayoutIdLst>
-    <p:sldLayoutId id="2147483745" r:id="rId1"/>
-    <p:sldLayoutId id="2147483746" r:id="rId2"/>
-    <p:sldLayoutId id="2147483747" r:id="rId3"/>
-    <p:sldLayoutId id="2147483748" r:id="rId4"/>
-    <p:sldLayoutId id="2147483749" r:id="rId5"/>
-    <p:sldLayoutId id="2147483750" r:id="rId6"/>
-    <p:sldLayoutId id="2147483751" r:id="rId7"/>
-    <p:sldLayoutId id="2147483752" r:id="rId8"/>
-    <p:sldLayoutId id="2147483753" r:id="rId9"/>
-    <p:sldLayoutId id="2147483754" r:id="rId10"/>
-    <p:sldLayoutId id="2147483755" r:id="rId11"/>
+    <p:sldLayoutId id="2147483757" r:id="rId1"/>
+    <p:sldLayoutId id="2147483758" r:id="rId2"/>
+    <p:sldLayoutId id="2147483759" r:id="rId3"/>
+    <p:sldLayoutId id="2147483760" r:id="rId4"/>
+    <p:sldLayoutId id="2147483761" r:id="rId5"/>
+    <p:sldLayoutId id="2147483762" r:id="rId6"/>
+    <p:sldLayoutId id="2147483763" r:id="rId7"/>
+    <p:sldLayoutId id="2147483764" r:id="rId8"/>
+    <p:sldLayoutId id="2147483765" r:id="rId9"/>
+    <p:sldLayoutId id="2147483766" r:id="rId10"/>
+    <p:sldLayoutId id="2147483767" r:id="rId11"/>
   </p:sldLayoutIdLst>
   <p:txStyles>
     <p:titleStyle>
@@ -3370,39 +3394,9 @@
           <a:chExt cx="0" cy="0"/>
         </a:xfrm>
       </p:grpSpPr>
-      <p:pic>
-        <p:nvPicPr>
-          <p:cNvPr id="3" name="Picture 2">
-            <a:extLst>
-              <a:ext uri="{FF2B5EF4-FFF2-40B4-BE49-F238E27FC236}">
-                <a16:creationId xmlns:a16="http://schemas.microsoft.com/office/drawing/2014/main" id="{B4B20B6B-3DAA-796C-8EA6-D7D94A189AD2}"/>
-              </a:ext>
-            </a:extLst>
-          </p:cNvPr>
-          <p:cNvPicPr>
-            <a:picLocks noChangeAspect="1"/>
-          </p:cNvPicPr>
-          <p:nvPr/>
-        </p:nvPicPr>
-        <p:blipFill>
-          <a:blip r:embed="rId2"/>
-          <a:stretch>
-            <a:fillRect/>
-          </a:stretch>
-        </p:blipFill>
-        <p:spPr>
-          <a:xfrm>
-            <a:off x="1983672" y="2707728"/>
-            <a:ext cx="1987063" cy="1079696"/>
-          </a:xfrm>
-          <a:prstGeom prst="rect">
-            <a:avLst/>
-          </a:prstGeom>
-        </p:spPr>
-      </p:pic>
       <p:sp>
         <p:nvSpPr>
-          <p:cNvPr id="4" name="Freeform: Shape 3">
+          <p:cNvPr id="55" name="Freeform: Shape 54">
             <a:extLst>
               <a:ext uri="{FF2B5EF4-FFF2-40B4-BE49-F238E27FC236}">
                 <a16:creationId xmlns:a16="http://schemas.microsoft.com/office/drawing/2014/main" id="{863D7830-3EC5-1488-4779-4B842624939D}"/>
@@ -4795,7 +4789,7 @@
       </p:sp>
       <p:cxnSp>
         <p:nvCxnSpPr>
-          <p:cNvPr id="5" name="Straight Connector 4">
+          <p:cNvPr id="56" name="Straight Connector 55">
             <a:extLst>
               <a:ext uri="{FF2B5EF4-FFF2-40B4-BE49-F238E27FC236}">
                 <a16:creationId xmlns:a16="http://schemas.microsoft.com/office/drawing/2014/main" id="{A9EAFB7D-EF2C-3FE3-1553-F2A5789D0B03}"/>
@@ -4842,7 +4836,7 @@
       </p:cxnSp>
       <p:cxnSp>
         <p:nvCxnSpPr>
-          <p:cNvPr id="6" name="Straight Connector 5">
+          <p:cNvPr id="57" name="Straight Connector 56">
             <a:extLst>
               <a:ext uri="{FF2B5EF4-FFF2-40B4-BE49-F238E27FC236}">
                 <a16:creationId xmlns:a16="http://schemas.microsoft.com/office/drawing/2014/main" id="{E285F2A1-75BD-C1B8-AE9A-EABFD7341599}"/>
@@ -4889,7 +4883,7 @@
       </p:cxnSp>
       <p:cxnSp>
         <p:nvCxnSpPr>
-          <p:cNvPr id="7" name="Straight Arrow Connector 6">
+          <p:cNvPr id="58" name="Straight Arrow Connector 57">
             <a:extLst>
               <a:ext uri="{FF2B5EF4-FFF2-40B4-BE49-F238E27FC236}">
                 <a16:creationId xmlns:a16="http://schemas.microsoft.com/office/drawing/2014/main" id="{5DDB82E1-2293-6864-7C4C-860BB6D52449}"/>
@@ -4934,54 +4928,9 @@
           </a:fontRef>
         </p:style>
       </p:cxnSp>
-      <p:sp>
-        <p:nvSpPr>
-          <p:cNvPr id="8" name="TextBox 7">
-            <a:extLst>
-              <a:ext uri="{FF2B5EF4-FFF2-40B4-BE49-F238E27FC236}">
-                <a16:creationId xmlns:a16="http://schemas.microsoft.com/office/drawing/2014/main" id="{D0B60395-29A9-5583-BABB-33B236329A61}"/>
-              </a:ext>
-            </a:extLst>
-          </p:cNvPr>
-          <p:cNvSpPr txBox="1"/>
-          <p:nvPr/>
-        </p:nvSpPr>
-        <p:spPr>
-          <a:xfrm>
-            <a:off x="2094320" y="2858109"/>
-            <a:ext cx="340242" cy="222175"/>
-          </a:xfrm>
-          <a:prstGeom prst="rect">
-            <a:avLst/>
-          </a:prstGeom>
-          <a:noFill/>
-        </p:spPr>
-        <p:txBody>
-          <a:bodyPr wrap="square" rtlCol="0">
-            <a:spAutoFit/>
-          </a:bodyPr>
-          <a:lstStyle/>
-          <a:p>
-            <a:pPr algn="ctr"/>
-            <a:r>
-              <a:rPr lang="en-US" sz="800" b="1" dirty="0">
-                <a:solidFill>
-                  <a:schemeClr val="tx1">
-                    <a:lumMod val="95000"/>
-                    <a:lumOff val="5000"/>
-                  </a:schemeClr>
-                </a:solidFill>
-                <a:latin typeface="Calibri Light" panose="020F0302020204030204" pitchFamily="34" charset="0"/>
-                <a:cs typeface="Calibri Light" panose="020F0302020204030204" pitchFamily="34" charset="0"/>
-              </a:rPr>
-              <a:t>CN</a:t>
-            </a:r>
-          </a:p>
-        </p:txBody>
-      </p:sp>
       <p:cxnSp>
         <p:nvCxnSpPr>
-          <p:cNvPr id="9" name="Straight Arrow Connector 8">
+          <p:cNvPr id="59" name="Straight Arrow Connector 58">
             <a:extLst>
               <a:ext uri="{FF2B5EF4-FFF2-40B4-BE49-F238E27FC236}">
                 <a16:creationId xmlns:a16="http://schemas.microsoft.com/office/drawing/2014/main" id="{9C8F36A9-FFBF-D2AF-D86B-DB32A664D134}"/>
@@ -5028,132 +4977,7 @@
       </p:cxnSp>
       <p:sp>
         <p:nvSpPr>
-          <p:cNvPr id="10" name="TextBox 9">
-            <a:extLst>
-              <a:ext uri="{FF2B5EF4-FFF2-40B4-BE49-F238E27FC236}">
-                <a16:creationId xmlns:a16="http://schemas.microsoft.com/office/drawing/2014/main" id="{88FD4609-03C7-48B1-EA84-375FFFEDBE06}"/>
-              </a:ext>
-            </a:extLst>
-          </p:cNvPr>
-          <p:cNvSpPr txBox="1"/>
-          <p:nvPr/>
-        </p:nvSpPr>
-        <p:spPr>
-          <a:xfrm>
-            <a:off x="2655424" y="2773742"/>
-            <a:ext cx="1646865" cy="215444"/>
-          </a:xfrm>
-          <a:prstGeom prst="rect">
-            <a:avLst/>
-          </a:prstGeom>
-          <a:noFill/>
-        </p:spPr>
-        <p:txBody>
-          <a:bodyPr wrap="square" rtlCol="0">
-            <a:spAutoFit/>
-          </a:bodyPr>
-          <a:lstStyle/>
-          <a:p>
-            <a:pPr algn="ctr"/>
-            <a:r>
-              <a:rPr lang="en-US" sz="800" b="1" dirty="0">
-                <a:solidFill>
-                  <a:schemeClr val="tx1">
-                    <a:lumMod val="95000"/>
-                    <a:lumOff val="5000"/>
-                  </a:schemeClr>
-                </a:solidFill>
-                <a:latin typeface="Calibri" panose="020F0502020204030204" pitchFamily="34" charset="0"/>
-                <a:cs typeface="Calibri" panose="020F0502020204030204" pitchFamily="34" charset="0"/>
-              </a:rPr>
-              <a:t>Probability threshold</a:t>
-            </a:r>
-          </a:p>
-        </p:txBody>
-      </p:sp>
-      <p:sp>
-        <p:nvSpPr>
-          <p:cNvPr id="11" name="TextBox 10">
-            <a:extLst>
-              <a:ext uri="{FF2B5EF4-FFF2-40B4-BE49-F238E27FC236}">
-                <a16:creationId xmlns:a16="http://schemas.microsoft.com/office/drawing/2014/main" id="{4C39D33D-2B26-F2D6-F8F4-09E6518093E9}"/>
-              </a:ext>
-            </a:extLst>
-          </p:cNvPr>
-          <p:cNvSpPr txBox="1"/>
-          <p:nvPr/>
-        </p:nvSpPr>
-        <p:spPr>
-          <a:xfrm>
-            <a:off x="1391203" y="2998584"/>
-            <a:ext cx="722453" cy="461665"/>
-          </a:xfrm>
-          <a:prstGeom prst="rect">
-            <a:avLst/>
-          </a:prstGeom>
-          <a:noFill/>
-        </p:spPr>
-        <p:txBody>
-          <a:bodyPr wrap="square" rtlCol="0">
-            <a:spAutoFit/>
-          </a:bodyPr>
-          <a:lstStyle/>
-          <a:p>
-            <a:r>
-              <a:rPr lang="en-US" sz="800" dirty="0">
-                <a:solidFill>
-                  <a:schemeClr val="tx1">
-                    <a:lumMod val="95000"/>
-                    <a:lumOff val="5000"/>
-                  </a:schemeClr>
-                </a:solidFill>
-                <a:latin typeface="Calibri Light" panose="020F0302020204030204" pitchFamily="34" charset="0"/>
-                <a:cs typeface="Calibri Light" panose="020F0302020204030204" pitchFamily="34" charset="0"/>
-              </a:rPr>
-              <a:t>Distribution of </a:t>
-            </a:r>
-            <a:r>
-              <a:rPr lang="en-US" sz="800" b="1" dirty="0">
-                <a:solidFill>
-                  <a:schemeClr val="tx1">
-                    <a:lumMod val="95000"/>
-                    <a:lumOff val="5000"/>
-                  </a:schemeClr>
-                </a:solidFill>
-                <a:latin typeface="Calibri" panose="020F0502020204030204" pitchFamily="34" charset="0"/>
-                <a:cs typeface="Calibri" panose="020F0502020204030204" pitchFamily="34" charset="0"/>
-              </a:rPr>
-              <a:t>observed</a:t>
-            </a:r>
-            <a:r>
-              <a:rPr lang="en-US" sz="800" dirty="0">
-                <a:solidFill>
-                  <a:schemeClr val="tx1">
-                    <a:lumMod val="95000"/>
-                    <a:lumOff val="5000"/>
-                  </a:schemeClr>
-                </a:solidFill>
-                <a:latin typeface="Calibri Light" panose="020F0302020204030204" pitchFamily="34" charset="0"/>
-                <a:cs typeface="Calibri Light" panose="020F0302020204030204" pitchFamily="34" charset="0"/>
-              </a:rPr>
-              <a:t> </a:t>
-            </a:r>
-            <a:r>
-              <a:rPr lang="en-US" sz="800" dirty="0">
-                <a:solidFill>
-                  <a:srgbClr val="FF0066"/>
-                </a:solidFill>
-                <a:latin typeface="Calibri Light" panose="020F0302020204030204" pitchFamily="34" charset="0"/>
-                <a:cs typeface="Calibri Light" panose="020F0302020204030204" pitchFamily="34" charset="0"/>
-              </a:rPr>
-              <a:t>non-events</a:t>
-            </a:r>
-          </a:p>
-        </p:txBody>
-      </p:sp>
-      <p:sp>
-        <p:nvSpPr>
-          <p:cNvPr id="12" name="TextBox 11">
+          <p:cNvPr id="60" name="TextBox 59">
             <a:extLst>
               <a:ext uri="{FF2B5EF4-FFF2-40B4-BE49-F238E27FC236}">
                 <a16:creationId xmlns:a16="http://schemas.microsoft.com/office/drawing/2014/main" id="{F4E1EB47-FB49-B221-8F40-6FAAC8188E34}"/>
@@ -5212,142 +5036,7 @@
       </p:sp>
       <p:sp>
         <p:nvSpPr>
-          <p:cNvPr id="13" name="TextBox 12">
-            <a:extLst>
-              <a:ext uri="{FF2B5EF4-FFF2-40B4-BE49-F238E27FC236}">
-                <a16:creationId xmlns:a16="http://schemas.microsoft.com/office/drawing/2014/main" id="{D4A499F2-3420-098E-60B9-2B0BAC6336D7}"/>
-              </a:ext>
-            </a:extLst>
-          </p:cNvPr>
-          <p:cNvSpPr txBox="1"/>
-          <p:nvPr/>
-        </p:nvSpPr>
-        <p:spPr>
-          <a:xfrm>
-            <a:off x="1546228" y="2649223"/>
-            <a:ext cx="546256" cy="215444"/>
-          </a:xfrm>
-          <a:prstGeom prst="rect">
-            <a:avLst/>
-          </a:prstGeom>
-          <a:noFill/>
-        </p:spPr>
-        <p:txBody>
-          <a:bodyPr wrap="square" rtlCol="0">
-            <a:spAutoFit/>
-          </a:bodyPr>
-          <a:lstStyle/>
-          <a:p>
-            <a:pPr algn="ctr"/>
-            <a:r>
-              <a:rPr lang="en-US" sz="800" dirty="0">
-                <a:solidFill>
-                  <a:schemeClr val="tx1">
-                    <a:lumMod val="95000"/>
-                    <a:lumOff val="5000"/>
-                  </a:schemeClr>
-                </a:solidFill>
-                <a:latin typeface="Calibri Light" panose="020F0302020204030204" pitchFamily="34" charset="0"/>
-                <a:cs typeface="Calibri Light" panose="020F0302020204030204" pitchFamily="34" charset="0"/>
-              </a:rPr>
-              <a:t>Density</a:t>
-            </a:r>
-          </a:p>
-        </p:txBody>
-      </p:sp>
-      <p:sp>
-        <p:nvSpPr>
-          <p:cNvPr id="14" name="TextBox 13">
-            <a:extLst>
-              <a:ext uri="{FF2B5EF4-FFF2-40B4-BE49-F238E27FC236}">
-                <a16:creationId xmlns:a16="http://schemas.microsoft.com/office/drawing/2014/main" id="{886A253C-800A-4473-19A4-5EC96B3D6DA8}"/>
-              </a:ext>
-            </a:extLst>
-          </p:cNvPr>
-          <p:cNvSpPr txBox="1"/>
-          <p:nvPr/>
-        </p:nvSpPr>
-        <p:spPr>
-          <a:xfrm>
-            <a:off x="1853925" y="3594738"/>
-            <a:ext cx="340242" cy="222175"/>
-          </a:xfrm>
-          <a:prstGeom prst="rect">
-            <a:avLst/>
-          </a:prstGeom>
-          <a:noFill/>
-        </p:spPr>
-        <p:txBody>
-          <a:bodyPr wrap="square" rtlCol="0">
-            <a:spAutoFit/>
-          </a:bodyPr>
-          <a:lstStyle/>
-          <a:p>
-            <a:pPr algn="ctr"/>
-            <a:r>
-              <a:rPr lang="en-US" sz="800" dirty="0">
-                <a:solidFill>
-                  <a:schemeClr val="tx1">
-                    <a:lumMod val="95000"/>
-                    <a:lumOff val="5000"/>
-                  </a:schemeClr>
-                </a:solidFill>
-                <a:latin typeface="Calibri Light" panose="020F0302020204030204" pitchFamily="34" charset="0"/>
-                <a:cs typeface="Calibri Light" panose="020F0302020204030204" pitchFamily="34" charset="0"/>
-              </a:rPr>
-              <a:t>0</a:t>
-            </a:r>
-          </a:p>
-        </p:txBody>
-      </p:sp>
-      <p:sp>
-        <p:nvSpPr>
-          <p:cNvPr id="15" name="TextBox 14">
-            <a:extLst>
-              <a:ext uri="{FF2B5EF4-FFF2-40B4-BE49-F238E27FC236}">
-                <a16:creationId xmlns:a16="http://schemas.microsoft.com/office/drawing/2014/main" id="{31526C8F-65EA-4AE2-A6F7-E27D64A802EA}"/>
-              </a:ext>
-            </a:extLst>
-          </p:cNvPr>
-          <p:cNvSpPr txBox="1"/>
-          <p:nvPr/>
-        </p:nvSpPr>
-        <p:spPr>
-          <a:xfrm>
-            <a:off x="2731585" y="3594738"/>
-            <a:ext cx="410966" cy="215444"/>
-          </a:xfrm>
-          <a:prstGeom prst="rect">
-            <a:avLst/>
-          </a:prstGeom>
-          <a:noFill/>
-        </p:spPr>
-        <p:txBody>
-          <a:bodyPr wrap="square" rtlCol="0">
-            <a:spAutoFit/>
-          </a:bodyPr>
-          <a:lstStyle/>
-          <a:p>
-            <a:pPr algn="ctr"/>
-            <a:r>
-              <a:rPr lang="en-US" sz="800" dirty="0">
-                <a:solidFill>
-                  <a:schemeClr val="tx1">
-                    <a:lumMod val="95000"/>
-                    <a:lumOff val="5000"/>
-                  </a:schemeClr>
-                </a:solidFill>
-                <a:latin typeface="Calibri Light" panose="020F0302020204030204" pitchFamily="34" charset="0"/>
-                <a:cs typeface="Calibri Light" panose="020F0302020204030204" pitchFamily="34" charset="0"/>
-              </a:rPr>
-              <a:t>50</a:t>
-            </a:r>
-          </a:p>
-        </p:txBody>
-      </p:sp>
-      <p:sp>
-        <p:nvSpPr>
-          <p:cNvPr id="16" name="Freeform: Shape 15">
+          <p:cNvPr id="61" name="Freeform: Shape 60">
             <a:extLst>
               <a:ext uri="{FF2B5EF4-FFF2-40B4-BE49-F238E27FC236}">
                 <a16:creationId xmlns:a16="http://schemas.microsoft.com/office/drawing/2014/main" id="{ADEEF2B1-EBC8-9F1F-6B1F-DD1E6A4ADDB0}"/>
@@ -8038,7 +7727,7 @@
       </p:sp>
       <p:sp>
         <p:nvSpPr>
-          <p:cNvPr id="17" name="Freeform: Shape 16">
+          <p:cNvPr id="62" name="Freeform: Shape 61">
             <a:extLst>
               <a:ext uri="{FF2B5EF4-FFF2-40B4-BE49-F238E27FC236}">
                 <a16:creationId xmlns:a16="http://schemas.microsoft.com/office/drawing/2014/main" id="{CDB02FB9-7686-55B5-2237-CE34FE7138F4}"/>
@@ -8474,7 +8163,7 @@
       </p:sp>
       <p:cxnSp>
         <p:nvCxnSpPr>
-          <p:cNvPr id="18" name="Straight Arrow Connector 17">
+          <p:cNvPr id="63" name="Straight Arrow Connector 62">
             <a:extLst>
               <a:ext uri="{FF2B5EF4-FFF2-40B4-BE49-F238E27FC236}">
                 <a16:creationId xmlns:a16="http://schemas.microsoft.com/office/drawing/2014/main" id="{98EEF7E7-0C5F-BA49-C209-AFA93EACC957}"/>
@@ -8521,7 +8210,7 @@
       </p:cxnSp>
       <p:sp>
         <p:nvSpPr>
-          <p:cNvPr id="19" name="Freeform: Shape 18">
+          <p:cNvPr id="64" name="Freeform: Shape 63">
             <a:extLst>
               <a:ext uri="{FF2B5EF4-FFF2-40B4-BE49-F238E27FC236}">
                 <a16:creationId xmlns:a16="http://schemas.microsoft.com/office/drawing/2014/main" id="{F1CE41FF-7B22-BB87-5437-9C5A6D9C40EA}"/>
@@ -9621,7 +9310,7 @@
       </p:sp>
       <p:sp>
         <p:nvSpPr>
-          <p:cNvPr id="20" name="Freeform: Shape 19">
+          <p:cNvPr id="65" name="Freeform: Shape 64">
             <a:extLst>
               <a:ext uri="{FF2B5EF4-FFF2-40B4-BE49-F238E27FC236}">
                 <a16:creationId xmlns:a16="http://schemas.microsoft.com/office/drawing/2014/main" id="{3CDA144B-1F01-F0CC-A493-5631BE7BE96B}"/>
@@ -11452,7 +11141,7 @@
       </p:sp>
       <p:sp>
         <p:nvSpPr>
-          <p:cNvPr id="21" name="Freeform: Shape 20">
+          <p:cNvPr id="66" name="Freeform: Shape 65">
             <a:extLst>
               <a:ext uri="{FF2B5EF4-FFF2-40B4-BE49-F238E27FC236}">
                 <a16:creationId xmlns:a16="http://schemas.microsoft.com/office/drawing/2014/main" id="{9D4C28E0-97DE-3DC8-9344-F610BE62157D}"/>
@@ -13923,7 +13612,7 @@
       </p:sp>
       <p:cxnSp>
         <p:nvCxnSpPr>
-          <p:cNvPr id="22" name="Straight Arrow Connector 21">
+          <p:cNvPr id="67" name="Straight Arrow Connector 66">
             <a:extLst>
               <a:ext uri="{FF2B5EF4-FFF2-40B4-BE49-F238E27FC236}">
                 <a16:creationId xmlns:a16="http://schemas.microsoft.com/office/drawing/2014/main" id="{E3E411FB-33CC-5F34-656E-94560D185092}"/>
@@ -13968,12 +13657,1976 @@
           </a:fontRef>
         </p:style>
       </p:cxnSp>
+      <p:grpSp>
+        <p:nvGrpSpPr>
+          <p:cNvPr id="68" name="Group 67">
+            <a:extLst>
+              <a:ext uri="{FF2B5EF4-FFF2-40B4-BE49-F238E27FC236}">
+                <a16:creationId xmlns:a16="http://schemas.microsoft.com/office/drawing/2014/main" id="{43A56C84-4F0C-4006-0C8C-7604A213D08E}"/>
+              </a:ext>
+            </a:extLst>
+          </p:cNvPr>
+          <p:cNvGrpSpPr/>
+          <p:nvPr/>
+        </p:nvGrpSpPr>
+        <p:grpSpPr>
+          <a:xfrm>
+            <a:off x="-78034" y="2602592"/>
+            <a:ext cx="4203348" cy="1897971"/>
+            <a:chOff x="-78034" y="403094"/>
+            <a:chExt cx="4203348" cy="1897971"/>
+          </a:xfrm>
+        </p:grpSpPr>
+        <p:sp>
+          <p:nvSpPr>
+            <p:cNvPr id="69" name="TextBox 68">
+              <a:extLst>
+                <a:ext uri="{FF2B5EF4-FFF2-40B4-BE49-F238E27FC236}">
+                  <a16:creationId xmlns:a16="http://schemas.microsoft.com/office/drawing/2014/main" id="{871F6875-B35B-38C5-3426-33D516CADAB5}"/>
+                </a:ext>
+              </a:extLst>
+            </p:cNvPr>
+            <p:cNvSpPr txBox="1"/>
+            <p:nvPr/>
+          </p:nvSpPr>
+          <p:spPr>
+            <a:xfrm>
+              <a:off x="256030" y="759281"/>
+              <a:ext cx="1080000" cy="720000"/>
+            </a:xfrm>
+            <a:prstGeom prst="rect">
+              <a:avLst/>
+            </a:prstGeom>
+            <a:noFill/>
+          </p:spPr>
+          <p:txBody>
+            <a:bodyPr wrap="square" rtlCol="0">
+              <a:spAutoFit/>
+            </a:bodyPr>
+            <a:lstStyle/>
+            <a:p>
+              <a:pPr algn="ctr"/>
+              <a:r>
+                <a:rPr lang="en-US" sz="800" b="1" dirty="0">
+                  <a:latin typeface="Calibri" panose="020F0502020204030204" pitchFamily="34" charset="0"/>
+                  <a:cs typeface="Calibri" panose="020F0502020204030204" pitchFamily="34" charset="0"/>
+                </a:rPr>
+                <a:t>HITS (H)</a:t>
+              </a:r>
+            </a:p>
+            <a:p>
+              <a:pPr algn="ctr"/>
+              <a:r>
+                <a:rPr lang="en-GB" sz="800" dirty="0">
+                  <a:latin typeface="Calibri Light" panose="020F0302020204030204" pitchFamily="34" charset="0"/>
+                  <a:cs typeface="Calibri Light" panose="020F0302020204030204" pitchFamily="34" charset="0"/>
+                </a:rPr>
+                <a:t>The event was predicted and it was observed</a:t>
+              </a:r>
+            </a:p>
+          </p:txBody>
+        </p:sp>
+        <p:sp>
+          <p:nvSpPr>
+            <p:cNvPr id="70" name="TextBox 69">
+              <a:extLst>
+                <a:ext uri="{FF2B5EF4-FFF2-40B4-BE49-F238E27FC236}">
+                  <a16:creationId xmlns:a16="http://schemas.microsoft.com/office/drawing/2014/main" id="{843DCFB4-D832-CE14-33FD-22FE10682A05}"/>
+                </a:ext>
+              </a:extLst>
+            </p:cNvPr>
+            <p:cNvSpPr txBox="1"/>
+            <p:nvPr/>
+          </p:nvSpPr>
+          <p:spPr>
+            <a:xfrm>
+              <a:off x="1449831" y="759281"/>
+              <a:ext cx="1080000" cy="720000"/>
+            </a:xfrm>
+            <a:prstGeom prst="rect">
+              <a:avLst/>
+            </a:prstGeom>
+            <a:noFill/>
+          </p:spPr>
+          <p:txBody>
+            <a:bodyPr wrap="square" rtlCol="0">
+              <a:spAutoFit/>
+            </a:bodyPr>
+            <a:lstStyle/>
+            <a:p>
+              <a:pPr algn="ctr"/>
+              <a:r>
+                <a:rPr lang="en-US" sz="800" b="1" dirty="0">
+                  <a:latin typeface="Calibri" panose="020F0502020204030204" pitchFamily="34" charset="0"/>
+                  <a:cs typeface="Calibri" panose="020F0502020204030204" pitchFamily="34" charset="0"/>
+                </a:rPr>
+                <a:t>MISSES (M)</a:t>
+              </a:r>
+            </a:p>
+            <a:p>
+              <a:pPr algn="ctr"/>
+              <a:r>
+                <a:rPr lang="en-GB" sz="800" dirty="0">
+                  <a:latin typeface="Calibri Light" panose="020F0302020204030204" pitchFamily="34" charset="0"/>
+                  <a:cs typeface="Calibri Light" panose="020F0302020204030204" pitchFamily="34" charset="0"/>
+                </a:rPr>
+                <a:t>The event was not predicted but it was observed</a:t>
+              </a:r>
+            </a:p>
+          </p:txBody>
+        </p:sp>
+        <p:sp>
+          <p:nvSpPr>
+            <p:cNvPr id="71" name="TextBox 70">
+              <a:extLst>
+                <a:ext uri="{FF2B5EF4-FFF2-40B4-BE49-F238E27FC236}">
+                  <a16:creationId xmlns:a16="http://schemas.microsoft.com/office/drawing/2014/main" id="{1ACBC9A4-96CE-2145-4C13-43843EED1EEE}"/>
+                </a:ext>
+              </a:extLst>
+            </p:cNvPr>
+            <p:cNvSpPr txBox="1"/>
+            <p:nvPr/>
+          </p:nvSpPr>
+          <p:spPr>
+            <a:xfrm>
+              <a:off x="256030" y="1578875"/>
+              <a:ext cx="1080000" cy="720000"/>
+            </a:xfrm>
+            <a:prstGeom prst="rect">
+              <a:avLst/>
+            </a:prstGeom>
+            <a:noFill/>
+          </p:spPr>
+          <p:txBody>
+            <a:bodyPr wrap="square" rtlCol="0">
+              <a:spAutoFit/>
+            </a:bodyPr>
+            <a:lstStyle/>
+            <a:p>
+              <a:pPr algn="ctr"/>
+              <a:r>
+                <a:rPr lang="en-US" sz="800" b="1" dirty="0">
+                  <a:latin typeface="Calibri" panose="020F0502020204030204" pitchFamily="34" charset="0"/>
+                  <a:cs typeface="Calibri" panose="020F0502020204030204" pitchFamily="34" charset="0"/>
+                </a:rPr>
+                <a:t>FALSE ALARMS (FA)</a:t>
+              </a:r>
+            </a:p>
+            <a:p>
+              <a:pPr algn="ctr"/>
+              <a:r>
+                <a:rPr lang="en-GB" sz="800" dirty="0">
+                  <a:latin typeface="Calibri Light" panose="020F0302020204030204" pitchFamily="34" charset="0"/>
+                  <a:cs typeface="Calibri Light" panose="020F0302020204030204" pitchFamily="34" charset="0"/>
+                </a:rPr>
+                <a:t>The event was predicted but it was not observed</a:t>
+              </a:r>
+            </a:p>
+          </p:txBody>
+        </p:sp>
+        <p:sp>
+          <p:nvSpPr>
+            <p:cNvPr id="72" name="TextBox 71">
+              <a:extLst>
+                <a:ext uri="{FF2B5EF4-FFF2-40B4-BE49-F238E27FC236}">
+                  <a16:creationId xmlns:a16="http://schemas.microsoft.com/office/drawing/2014/main" id="{5CCEEB50-0EB3-291D-2911-B86403C69D4E}"/>
+                </a:ext>
+              </a:extLst>
+            </p:cNvPr>
+            <p:cNvSpPr txBox="1"/>
+            <p:nvPr/>
+          </p:nvSpPr>
+          <p:spPr>
+            <a:xfrm>
+              <a:off x="1362574" y="1578875"/>
+              <a:ext cx="1254515" cy="584775"/>
+            </a:xfrm>
+            <a:prstGeom prst="rect">
+              <a:avLst/>
+            </a:prstGeom>
+            <a:noFill/>
+          </p:spPr>
+          <p:txBody>
+            <a:bodyPr wrap="square" rtlCol="0">
+              <a:spAutoFit/>
+            </a:bodyPr>
+            <a:lstStyle/>
+            <a:p>
+              <a:pPr algn="ctr"/>
+              <a:r>
+                <a:rPr lang="en-US" sz="800" b="1" dirty="0">
+                  <a:latin typeface="Calibri" panose="020F0502020204030204" pitchFamily="34" charset="0"/>
+                  <a:cs typeface="Calibri" panose="020F0502020204030204" pitchFamily="34" charset="0"/>
+                </a:rPr>
+                <a:t>CORRECT NEGATIVE (CN)</a:t>
+              </a:r>
+            </a:p>
+            <a:p>
+              <a:pPr algn="ctr"/>
+              <a:r>
+                <a:rPr lang="en-GB" sz="800" dirty="0">
+                  <a:latin typeface="Calibri Light" panose="020F0302020204030204" pitchFamily="34" charset="0"/>
+                  <a:cs typeface="Calibri Light" panose="020F0302020204030204" pitchFamily="34" charset="0"/>
+                </a:rPr>
+                <a:t>The event was not predicted and it was not observed</a:t>
+              </a:r>
+            </a:p>
+          </p:txBody>
+        </p:sp>
+        <p:cxnSp>
+          <p:nvCxnSpPr>
+            <p:cNvPr id="73" name="Straight Connector 72">
+              <a:extLst>
+                <a:ext uri="{FF2B5EF4-FFF2-40B4-BE49-F238E27FC236}">
+                  <a16:creationId xmlns:a16="http://schemas.microsoft.com/office/drawing/2014/main" id="{A0143ED4-4C89-1348-C278-56520894994E}"/>
+                </a:ext>
+              </a:extLst>
+            </p:cNvPr>
+            <p:cNvCxnSpPr>
+              <a:cxnSpLocks/>
+            </p:cNvCxnSpPr>
+            <p:nvPr/>
+          </p:nvCxnSpPr>
+          <p:spPr>
+            <a:xfrm>
+              <a:off x="1357050" y="626888"/>
+              <a:ext cx="0" cy="1639317"/>
+            </a:xfrm>
+            <a:prstGeom prst="line">
+              <a:avLst/>
+            </a:prstGeom>
+            <a:ln w="3175">
+              <a:solidFill>
+                <a:schemeClr val="tx1">
+                  <a:lumMod val="75000"/>
+                  <a:lumOff val="25000"/>
+                </a:schemeClr>
+              </a:solidFill>
+            </a:ln>
+          </p:spPr>
+          <p:style>
+            <a:lnRef idx="2">
+              <a:schemeClr val="accent1"/>
+            </a:lnRef>
+            <a:fillRef idx="0">
+              <a:schemeClr val="accent1"/>
+            </a:fillRef>
+            <a:effectRef idx="1">
+              <a:schemeClr val="accent1"/>
+            </a:effectRef>
+            <a:fontRef idx="minor">
+              <a:schemeClr val="tx1"/>
+            </a:fontRef>
+          </p:style>
+        </p:cxnSp>
+        <p:cxnSp>
+          <p:nvCxnSpPr>
+            <p:cNvPr id="74" name="Straight Connector 73">
+              <a:extLst>
+                <a:ext uri="{FF2B5EF4-FFF2-40B4-BE49-F238E27FC236}">
+                  <a16:creationId xmlns:a16="http://schemas.microsoft.com/office/drawing/2014/main" id="{F722787C-8461-E4FE-8414-D479477597C4}"/>
+                </a:ext>
+              </a:extLst>
+            </p:cNvPr>
+            <p:cNvCxnSpPr>
+              <a:cxnSpLocks/>
+            </p:cNvCxnSpPr>
+            <p:nvPr/>
+          </p:nvCxnSpPr>
+          <p:spPr>
+            <a:xfrm flipH="1">
+              <a:off x="216892" y="1525908"/>
+              <a:ext cx="2397547" cy="0"/>
+            </a:xfrm>
+            <a:prstGeom prst="line">
+              <a:avLst/>
+            </a:prstGeom>
+            <a:ln w="3175">
+              <a:solidFill>
+                <a:schemeClr val="tx1">
+                  <a:lumMod val="75000"/>
+                  <a:lumOff val="25000"/>
+                </a:schemeClr>
+              </a:solidFill>
+            </a:ln>
+          </p:spPr>
+          <p:style>
+            <a:lnRef idx="2">
+              <a:schemeClr val="accent1"/>
+            </a:lnRef>
+            <a:fillRef idx="0">
+              <a:schemeClr val="accent1"/>
+            </a:fillRef>
+            <a:effectRef idx="1">
+              <a:schemeClr val="accent1"/>
+            </a:effectRef>
+            <a:fontRef idx="minor">
+              <a:schemeClr val="tx1"/>
+            </a:fontRef>
+          </p:style>
+        </p:cxnSp>
+        <p:sp>
+          <p:nvSpPr>
+            <p:cNvPr id="75" name="TextBox 74">
+              <a:extLst>
+                <a:ext uri="{FF2B5EF4-FFF2-40B4-BE49-F238E27FC236}">
+                  <a16:creationId xmlns:a16="http://schemas.microsoft.com/office/drawing/2014/main" id="{DD906E7D-FF64-09FE-65EF-837BDD47046A}"/>
+                </a:ext>
+              </a:extLst>
+            </p:cNvPr>
+            <p:cNvSpPr txBox="1"/>
+            <p:nvPr/>
+          </p:nvSpPr>
+          <p:spPr>
+            <a:xfrm>
+              <a:off x="-78034" y="887761"/>
+              <a:ext cx="307777" cy="1275889"/>
+            </a:xfrm>
+            <a:prstGeom prst="rect">
+              <a:avLst/>
+            </a:prstGeom>
+            <a:noFill/>
+          </p:spPr>
+          <p:txBody>
+            <a:bodyPr vert="vert270" wrap="square" rtlCol="0">
+              <a:spAutoFit/>
+            </a:bodyPr>
+            <a:lstStyle/>
+            <a:p>
+              <a:pPr algn="ctr"/>
+              <a:r>
+                <a:rPr lang="en-US" sz="800" b="1" dirty="0">
+                  <a:solidFill>
+                    <a:schemeClr val="tx1">
+                      <a:lumMod val="95000"/>
+                      <a:lumOff val="5000"/>
+                    </a:schemeClr>
+                  </a:solidFill>
+                  <a:latin typeface="Calibri" panose="020F0502020204030204" pitchFamily="34" charset="0"/>
+                  <a:cs typeface="Calibri" panose="020F0502020204030204" pitchFamily="34" charset="0"/>
+                </a:rPr>
+                <a:t>Observed</a:t>
+              </a:r>
+              <a:endParaRPr lang="en-US" sz="800" dirty="0">
+                <a:solidFill>
+                  <a:srgbClr val="0000FF"/>
+                </a:solidFill>
+                <a:latin typeface="Calibri Light" panose="020F0302020204030204" pitchFamily="34" charset="0"/>
+                <a:cs typeface="Calibri Light" panose="020F0302020204030204" pitchFamily="34" charset="0"/>
+              </a:endParaRPr>
+            </a:p>
+          </p:txBody>
+        </p:sp>
+        <p:sp>
+          <p:nvSpPr>
+            <p:cNvPr id="76" name="TextBox 75">
+              <a:extLst>
+                <a:ext uri="{FF2B5EF4-FFF2-40B4-BE49-F238E27FC236}">
+                  <a16:creationId xmlns:a16="http://schemas.microsoft.com/office/drawing/2014/main" id="{CDF5D99F-239B-7286-E705-43476984C1FD}"/>
+                </a:ext>
+              </a:extLst>
+            </p:cNvPr>
+            <p:cNvSpPr txBox="1"/>
+            <p:nvPr/>
+          </p:nvSpPr>
+          <p:spPr>
+            <a:xfrm>
+              <a:off x="98296" y="760014"/>
+              <a:ext cx="307777" cy="736524"/>
+            </a:xfrm>
+            <a:prstGeom prst="rect">
+              <a:avLst/>
+            </a:prstGeom>
+            <a:noFill/>
+          </p:spPr>
+          <p:txBody>
+            <a:bodyPr vert="vert270" wrap="square" rtlCol="0">
+              <a:spAutoFit/>
+            </a:bodyPr>
+            <a:lstStyle/>
+            <a:p>
+              <a:pPr algn="ctr"/>
+              <a:r>
+                <a:rPr lang="en-US" sz="800" dirty="0">
+                  <a:solidFill>
+                    <a:srgbClr val="0000FF"/>
+                  </a:solidFill>
+                  <a:latin typeface="Calibri Light" panose="020F0302020204030204" pitchFamily="34" charset="0"/>
+                  <a:cs typeface="Calibri Light" panose="020F0302020204030204" pitchFamily="34" charset="0"/>
+                </a:rPr>
+                <a:t>yes-events</a:t>
+              </a:r>
+            </a:p>
+          </p:txBody>
+        </p:sp>
+        <p:sp>
+          <p:nvSpPr>
+            <p:cNvPr id="77" name="TextBox 76">
+              <a:extLst>
+                <a:ext uri="{FF2B5EF4-FFF2-40B4-BE49-F238E27FC236}">
+                  <a16:creationId xmlns:a16="http://schemas.microsoft.com/office/drawing/2014/main" id="{A09387BF-360E-1373-B4E2-484CDF5B6943}"/>
+                </a:ext>
+              </a:extLst>
+            </p:cNvPr>
+            <p:cNvSpPr txBox="1"/>
+            <p:nvPr/>
+          </p:nvSpPr>
+          <p:spPr>
+            <a:xfrm>
+              <a:off x="928929" y="403094"/>
+              <a:ext cx="863944" cy="215444"/>
+            </a:xfrm>
+            <a:prstGeom prst="rect">
+              <a:avLst/>
+            </a:prstGeom>
+            <a:noFill/>
+          </p:spPr>
+          <p:txBody>
+            <a:bodyPr wrap="square" rtlCol="0">
+              <a:spAutoFit/>
+            </a:bodyPr>
+            <a:lstStyle/>
+            <a:p>
+              <a:pPr algn="ctr"/>
+              <a:r>
+                <a:rPr lang="en-US" sz="800" b="1" dirty="0">
+                  <a:solidFill>
+                    <a:schemeClr val="tx1">
+                      <a:lumMod val="95000"/>
+                      <a:lumOff val="5000"/>
+                    </a:schemeClr>
+                  </a:solidFill>
+                  <a:latin typeface="Calibri" panose="020F0502020204030204" pitchFamily="34" charset="0"/>
+                  <a:cs typeface="Calibri" panose="020F0502020204030204" pitchFamily="34" charset="0"/>
+                </a:rPr>
+                <a:t>Predicted</a:t>
+              </a:r>
+              <a:endParaRPr lang="en-US" sz="800" dirty="0">
+                <a:solidFill>
+                  <a:srgbClr val="D6A300"/>
+                </a:solidFill>
+                <a:latin typeface="Calibri Light" panose="020F0302020204030204" pitchFamily="34" charset="0"/>
+                <a:cs typeface="Calibri Light" panose="020F0302020204030204" pitchFamily="34" charset="0"/>
+              </a:endParaRPr>
+            </a:p>
+          </p:txBody>
+        </p:sp>
+        <p:sp>
+          <p:nvSpPr>
+            <p:cNvPr id="78" name="TextBox 77">
+              <a:extLst>
+                <a:ext uri="{FF2B5EF4-FFF2-40B4-BE49-F238E27FC236}">
+                  <a16:creationId xmlns:a16="http://schemas.microsoft.com/office/drawing/2014/main" id="{FEE84F7D-562E-3E17-3F19-517232627412}"/>
+                </a:ext>
+              </a:extLst>
+            </p:cNvPr>
+            <p:cNvSpPr txBox="1"/>
+            <p:nvPr/>
+          </p:nvSpPr>
+          <p:spPr>
+            <a:xfrm>
+              <a:off x="1557859" y="563513"/>
+              <a:ext cx="863944" cy="215444"/>
+            </a:xfrm>
+            <a:prstGeom prst="rect">
+              <a:avLst/>
+            </a:prstGeom>
+            <a:noFill/>
+          </p:spPr>
+          <p:txBody>
+            <a:bodyPr wrap="square" rtlCol="0">
+              <a:spAutoFit/>
+            </a:bodyPr>
+            <a:lstStyle/>
+            <a:p>
+              <a:pPr algn="ctr"/>
+              <a:r>
+                <a:rPr lang="en-US" sz="800" dirty="0">
+                  <a:solidFill>
+                    <a:srgbClr val="D6A300"/>
+                  </a:solidFill>
+                  <a:latin typeface="Calibri Light" panose="020F0302020204030204" pitchFamily="34" charset="0"/>
+                  <a:cs typeface="Calibri Light" panose="020F0302020204030204" pitchFamily="34" charset="0"/>
+                </a:rPr>
+                <a:t>non-events</a:t>
+              </a:r>
+            </a:p>
+          </p:txBody>
+        </p:sp>
+        <p:sp>
+          <p:nvSpPr>
+            <p:cNvPr id="79" name="TextBox 78">
+              <a:extLst>
+                <a:ext uri="{FF2B5EF4-FFF2-40B4-BE49-F238E27FC236}">
+                  <a16:creationId xmlns:a16="http://schemas.microsoft.com/office/drawing/2014/main" id="{F3106249-1C45-1C12-2453-07133FF1CD86}"/>
+                </a:ext>
+              </a:extLst>
+            </p:cNvPr>
+            <p:cNvSpPr txBox="1"/>
+            <p:nvPr/>
+          </p:nvSpPr>
+          <p:spPr>
+            <a:xfrm>
+              <a:off x="364058" y="567326"/>
+              <a:ext cx="863944" cy="215444"/>
+            </a:xfrm>
+            <a:prstGeom prst="rect">
+              <a:avLst/>
+            </a:prstGeom>
+            <a:noFill/>
+          </p:spPr>
+          <p:txBody>
+            <a:bodyPr wrap="square" rtlCol="0">
+              <a:spAutoFit/>
+            </a:bodyPr>
+            <a:lstStyle/>
+            <a:p>
+              <a:pPr algn="ctr"/>
+              <a:r>
+                <a:rPr lang="en-US" sz="800" dirty="0">
+                  <a:solidFill>
+                    <a:srgbClr val="33CC33"/>
+                  </a:solidFill>
+                  <a:latin typeface="Calibri Light" panose="020F0302020204030204" pitchFamily="34" charset="0"/>
+                  <a:cs typeface="Calibri Light" panose="020F0302020204030204" pitchFamily="34" charset="0"/>
+                </a:rPr>
+                <a:t>yes-events</a:t>
+              </a:r>
+            </a:p>
+          </p:txBody>
+        </p:sp>
+        <p:sp>
+          <p:nvSpPr>
+            <p:cNvPr id="80" name="TextBox 79">
+              <a:extLst>
+                <a:ext uri="{FF2B5EF4-FFF2-40B4-BE49-F238E27FC236}">
+                  <a16:creationId xmlns:a16="http://schemas.microsoft.com/office/drawing/2014/main" id="{E3F5F678-30B9-E5A6-EDA8-349820A25D9E}"/>
+                </a:ext>
+              </a:extLst>
+            </p:cNvPr>
+            <p:cNvSpPr txBox="1"/>
+            <p:nvPr/>
+          </p:nvSpPr>
+          <p:spPr>
+            <a:xfrm>
+              <a:off x="99447" y="1564541"/>
+              <a:ext cx="307777" cy="736524"/>
+            </a:xfrm>
+            <a:prstGeom prst="rect">
+              <a:avLst/>
+            </a:prstGeom>
+            <a:noFill/>
+          </p:spPr>
+          <p:txBody>
+            <a:bodyPr vert="vert270" wrap="square" rtlCol="0">
+              <a:spAutoFit/>
+            </a:bodyPr>
+            <a:lstStyle/>
+            <a:p>
+              <a:pPr algn="ctr"/>
+              <a:r>
+                <a:rPr lang="en-US" sz="800" dirty="0">
+                  <a:solidFill>
+                    <a:srgbClr val="FF0066"/>
+                  </a:solidFill>
+                  <a:latin typeface="Calibri Light" panose="020F0302020204030204" pitchFamily="34" charset="0"/>
+                  <a:cs typeface="Calibri Light" panose="020F0302020204030204" pitchFamily="34" charset="0"/>
+                </a:rPr>
+                <a:t>non-events</a:t>
+              </a:r>
+            </a:p>
+          </p:txBody>
+        </p:sp>
+        <p:sp>
+          <p:nvSpPr>
+            <p:cNvPr id="81" name="TextBox 80">
+              <a:extLst>
+                <a:ext uri="{FF2B5EF4-FFF2-40B4-BE49-F238E27FC236}">
+                  <a16:creationId xmlns:a16="http://schemas.microsoft.com/office/drawing/2014/main" id="{7ED78E03-DDB8-9C4E-DC18-F07659A40AE4}"/>
+                </a:ext>
+              </a:extLst>
+            </p:cNvPr>
+            <p:cNvSpPr txBox="1"/>
+            <p:nvPr/>
+          </p:nvSpPr>
+          <p:spPr>
+            <a:xfrm>
+              <a:off x="2757314" y="759281"/>
+              <a:ext cx="1368000" cy="707886"/>
+            </a:xfrm>
+            <a:prstGeom prst="rect">
+              <a:avLst/>
+            </a:prstGeom>
+            <a:noFill/>
+            <a:ln w="3175">
+              <a:solidFill>
+                <a:schemeClr val="tx1">
+                  <a:lumMod val="75000"/>
+                  <a:lumOff val="25000"/>
+                </a:schemeClr>
+              </a:solidFill>
+            </a:ln>
+          </p:spPr>
+          <p:txBody>
+            <a:bodyPr wrap="square" rtlCol="0">
+              <a:spAutoFit/>
+            </a:bodyPr>
+            <a:lstStyle/>
+            <a:p>
+              <a:pPr algn="ctr"/>
+              <a:r>
+                <a:rPr lang="en-US" sz="800" b="1" i="1" dirty="0">
+                  <a:latin typeface="Calibri" panose="020F0502020204030204" pitchFamily="34" charset="0"/>
+                  <a:cs typeface="Calibri" panose="020F0502020204030204" pitchFamily="34" charset="0"/>
+                </a:rPr>
+                <a:t>HIT RATE</a:t>
+              </a:r>
+            </a:p>
+            <a:p>
+              <a:pPr algn="ctr"/>
+              <a:r>
+                <a:rPr lang="en-GB" sz="800" i="1" dirty="0">
+                  <a:latin typeface="Calibri Light" panose="020F0302020204030204" pitchFamily="34" charset="0"/>
+                  <a:cs typeface="Calibri Light" panose="020F0302020204030204" pitchFamily="34" charset="0"/>
+                </a:rPr>
+                <a:t>Proportion of observed yes-events that were correctly predicted</a:t>
+              </a:r>
+            </a:p>
+            <a:p>
+              <a:pPr algn="ctr"/>
+              <a:r>
+                <a:rPr lang="en-GB" sz="800" i="1" dirty="0">
+                  <a:latin typeface="Calibri Light" panose="020F0302020204030204" pitchFamily="34" charset="0"/>
+                  <a:cs typeface="Calibri Light" panose="020F0302020204030204" pitchFamily="34" charset="0"/>
+                </a:rPr>
+                <a:t>HR = H / (H + M)</a:t>
+              </a:r>
+            </a:p>
+          </p:txBody>
+        </p:sp>
+        <p:sp>
+          <p:nvSpPr>
+            <p:cNvPr id="82" name="TextBox 81">
+              <a:extLst>
+                <a:ext uri="{FF2B5EF4-FFF2-40B4-BE49-F238E27FC236}">
+                  <a16:creationId xmlns:a16="http://schemas.microsoft.com/office/drawing/2014/main" id="{307BB4E1-82F3-30C4-2FB1-591A624180EF}"/>
+                </a:ext>
+              </a:extLst>
+            </p:cNvPr>
+            <p:cNvSpPr txBox="1"/>
+            <p:nvPr/>
+          </p:nvSpPr>
+          <p:spPr>
+            <a:xfrm>
+              <a:off x="2757314" y="1578875"/>
+              <a:ext cx="1368000" cy="720000"/>
+            </a:xfrm>
+            <a:prstGeom prst="rect">
+              <a:avLst/>
+            </a:prstGeom>
+            <a:noFill/>
+            <a:ln w="3175">
+              <a:solidFill>
+                <a:schemeClr val="tx1">
+                  <a:lumMod val="75000"/>
+                  <a:lumOff val="25000"/>
+                </a:schemeClr>
+              </a:solidFill>
+            </a:ln>
+          </p:spPr>
+          <p:txBody>
+            <a:bodyPr wrap="square" rtlCol="0">
+              <a:spAutoFit/>
+            </a:bodyPr>
+            <a:lstStyle/>
+            <a:p>
+              <a:pPr algn="ctr"/>
+              <a:r>
+                <a:rPr lang="en-US" sz="800" b="1" i="1" dirty="0">
+                  <a:latin typeface="Calibri" panose="020F0502020204030204" pitchFamily="34" charset="0"/>
+                  <a:cs typeface="Calibri" panose="020F0502020204030204" pitchFamily="34" charset="0"/>
+                </a:rPr>
+                <a:t>FALSE ALARM RATE [-]</a:t>
+              </a:r>
+            </a:p>
+            <a:p>
+              <a:pPr algn="ctr"/>
+              <a:r>
+                <a:rPr lang="en-GB" sz="800" i="1" dirty="0">
+                  <a:latin typeface="Calibri Light" panose="020F0302020204030204" pitchFamily="34" charset="0"/>
+                  <a:cs typeface="Calibri Light" panose="020F0302020204030204" pitchFamily="34" charset="0"/>
+                </a:rPr>
+                <a:t>Proportion of observed non-events that were incorrectly predicted as yes-events</a:t>
+              </a:r>
+            </a:p>
+            <a:p>
+              <a:pPr algn="ctr"/>
+              <a:r>
+                <a:rPr lang="en-GB" sz="800" i="1" dirty="0">
+                  <a:latin typeface="Calibri Light" panose="020F0302020204030204" pitchFamily="34" charset="0"/>
+                  <a:cs typeface="Calibri Light" panose="020F0302020204030204" pitchFamily="34" charset="0"/>
+                </a:rPr>
+                <a:t>FAR = FA / (FA + CN)</a:t>
+              </a:r>
+            </a:p>
+          </p:txBody>
+        </p:sp>
+        <p:sp>
+          <p:nvSpPr>
+            <p:cNvPr id="83" name="Rectangle 82">
+              <a:extLst>
+                <a:ext uri="{FF2B5EF4-FFF2-40B4-BE49-F238E27FC236}">
+                  <a16:creationId xmlns:a16="http://schemas.microsoft.com/office/drawing/2014/main" id="{2D87FE8A-4BD4-D2C0-4981-4C00E52C4C21}"/>
+                </a:ext>
+              </a:extLst>
+            </p:cNvPr>
+            <p:cNvSpPr/>
+            <p:nvPr/>
+          </p:nvSpPr>
+          <p:spPr>
+            <a:xfrm>
+              <a:off x="1809831" y="2138288"/>
+              <a:ext cx="360000" cy="90000"/>
+            </a:xfrm>
+            <a:prstGeom prst="rect">
+              <a:avLst/>
+            </a:prstGeom>
+            <a:pattFill prst="dkHorz">
+              <a:fgClr>
+                <a:srgbClr val="E07A1A"/>
+              </a:fgClr>
+              <a:bgClr>
+                <a:schemeClr val="bg1"/>
+              </a:bgClr>
+            </a:pattFill>
+            <a:ln w="1270">
+              <a:solidFill>
+                <a:schemeClr val="bg1">
+                  <a:lumMod val="50000"/>
+                </a:schemeClr>
+              </a:solidFill>
+            </a:ln>
+          </p:spPr>
+          <p:style>
+            <a:lnRef idx="2">
+              <a:schemeClr val="accent1">
+                <a:shade val="15000"/>
+              </a:schemeClr>
+            </a:lnRef>
+            <a:fillRef idx="1">
+              <a:schemeClr val="accent1"/>
+            </a:fillRef>
+            <a:effectRef idx="0">
+              <a:schemeClr val="accent1"/>
+            </a:effectRef>
+            <a:fontRef idx="minor">
+              <a:schemeClr val="lt1"/>
+            </a:fontRef>
+          </p:style>
+          <p:txBody>
+            <a:bodyPr rtlCol="0" anchor="ctr"/>
+            <a:lstStyle/>
+            <a:p>
+              <a:pPr algn="ctr"/>
+              <a:endParaRPr lang="en-GB">
+                <a:latin typeface="Calibri" panose="020F0502020204030204" pitchFamily="34" charset="0"/>
+                <a:cs typeface="Calibri" panose="020F0502020204030204" pitchFamily="34" charset="0"/>
+              </a:endParaRPr>
+            </a:p>
+          </p:txBody>
+        </p:sp>
+        <p:sp>
+          <p:nvSpPr>
+            <p:cNvPr id="84" name="Rectangle 83">
+              <a:extLst>
+                <a:ext uri="{FF2B5EF4-FFF2-40B4-BE49-F238E27FC236}">
+                  <a16:creationId xmlns:a16="http://schemas.microsoft.com/office/drawing/2014/main" id="{65533EAA-5F83-EA70-6747-5F625123CB00}"/>
+                </a:ext>
+              </a:extLst>
+            </p:cNvPr>
+            <p:cNvSpPr/>
+            <p:nvPr/>
+          </p:nvSpPr>
+          <p:spPr>
+            <a:xfrm>
+              <a:off x="616030" y="2138288"/>
+              <a:ext cx="360000" cy="90000"/>
+            </a:xfrm>
+            <a:prstGeom prst="rect">
+              <a:avLst/>
+            </a:prstGeom>
+            <a:solidFill>
+              <a:srgbClr val="AD5252">
+                <a:alpha val="49804"/>
+              </a:srgbClr>
+            </a:solidFill>
+            <a:ln w="3175">
+              <a:solidFill>
+                <a:schemeClr val="bg1">
+                  <a:lumMod val="50000"/>
+                </a:schemeClr>
+              </a:solidFill>
+            </a:ln>
+          </p:spPr>
+          <p:style>
+            <a:lnRef idx="2">
+              <a:schemeClr val="accent1">
+                <a:shade val="15000"/>
+              </a:schemeClr>
+            </a:lnRef>
+            <a:fillRef idx="1">
+              <a:schemeClr val="accent1"/>
+            </a:fillRef>
+            <a:effectRef idx="0">
+              <a:schemeClr val="accent1"/>
+            </a:effectRef>
+            <a:fontRef idx="minor">
+              <a:schemeClr val="lt1"/>
+            </a:fontRef>
+          </p:style>
+          <p:txBody>
+            <a:bodyPr rtlCol="0" anchor="ctr"/>
+            <a:lstStyle/>
+            <a:p>
+              <a:pPr algn="ctr"/>
+              <a:endParaRPr lang="en-GB">
+                <a:latin typeface="Calibri" panose="020F0502020204030204" pitchFamily="34" charset="0"/>
+                <a:cs typeface="Calibri" panose="020F0502020204030204" pitchFamily="34" charset="0"/>
+              </a:endParaRPr>
+            </a:p>
+          </p:txBody>
+        </p:sp>
+        <p:sp>
+          <p:nvSpPr>
+            <p:cNvPr id="85" name="Rectangle 84">
+              <a:extLst>
+                <a:ext uri="{FF2B5EF4-FFF2-40B4-BE49-F238E27FC236}">
+                  <a16:creationId xmlns:a16="http://schemas.microsoft.com/office/drawing/2014/main" id="{545E5C43-F926-13EA-70BE-CA710E33D019}"/>
+                </a:ext>
+              </a:extLst>
+            </p:cNvPr>
+            <p:cNvSpPr/>
+            <p:nvPr/>
+          </p:nvSpPr>
+          <p:spPr>
+            <a:xfrm>
+              <a:off x="1809831" y="1332433"/>
+              <a:ext cx="360000" cy="90000"/>
+            </a:xfrm>
+            <a:prstGeom prst="rect">
+              <a:avLst/>
+            </a:prstGeom>
+            <a:solidFill>
+              <a:srgbClr val="96724C">
+                <a:alpha val="49804"/>
+              </a:srgbClr>
+            </a:solidFill>
+            <a:ln w="3175">
+              <a:solidFill>
+                <a:schemeClr val="bg1">
+                  <a:lumMod val="50000"/>
+                </a:schemeClr>
+              </a:solidFill>
+            </a:ln>
+          </p:spPr>
+          <p:style>
+            <a:lnRef idx="2">
+              <a:schemeClr val="accent1">
+                <a:shade val="15000"/>
+              </a:schemeClr>
+            </a:lnRef>
+            <a:fillRef idx="1">
+              <a:schemeClr val="accent1"/>
+            </a:fillRef>
+            <a:effectRef idx="0">
+              <a:schemeClr val="accent1"/>
+            </a:effectRef>
+            <a:fontRef idx="minor">
+              <a:schemeClr val="lt1"/>
+            </a:fontRef>
+          </p:style>
+          <p:txBody>
+            <a:bodyPr rtlCol="0" anchor="ctr"/>
+            <a:lstStyle/>
+            <a:p>
+              <a:pPr algn="ctr"/>
+              <a:endParaRPr lang="en-GB" dirty="0">
+                <a:latin typeface="Calibri" panose="020F0502020204030204" pitchFamily="34" charset="0"/>
+                <a:cs typeface="Calibri" panose="020F0502020204030204" pitchFamily="34" charset="0"/>
+              </a:endParaRPr>
+            </a:p>
+          </p:txBody>
+        </p:sp>
+        <p:sp>
+          <p:nvSpPr>
+            <p:cNvPr id="86" name="Rectangle 85">
+              <a:extLst>
+                <a:ext uri="{FF2B5EF4-FFF2-40B4-BE49-F238E27FC236}">
+                  <a16:creationId xmlns:a16="http://schemas.microsoft.com/office/drawing/2014/main" id="{4ABA71F5-F7CE-E653-5451-1F27E1EA51A4}"/>
+                </a:ext>
+              </a:extLst>
+            </p:cNvPr>
+            <p:cNvSpPr/>
+            <p:nvPr/>
+          </p:nvSpPr>
+          <p:spPr>
+            <a:xfrm>
+              <a:off x="616030" y="1334883"/>
+              <a:ext cx="360000" cy="90000"/>
+            </a:xfrm>
+            <a:prstGeom prst="rect">
+              <a:avLst/>
+            </a:prstGeom>
+            <a:pattFill prst="wdDnDiag">
+              <a:fgClr>
+                <a:srgbClr val="21857A"/>
+              </a:fgClr>
+              <a:bgClr>
+                <a:schemeClr val="bg1"/>
+              </a:bgClr>
+            </a:pattFill>
+            <a:ln w="3175">
+              <a:solidFill>
+                <a:schemeClr val="bg1">
+                  <a:lumMod val="50000"/>
+                </a:schemeClr>
+              </a:solidFill>
+            </a:ln>
+          </p:spPr>
+          <p:style>
+            <a:lnRef idx="2">
+              <a:schemeClr val="accent1">
+                <a:shade val="15000"/>
+              </a:schemeClr>
+            </a:lnRef>
+            <a:fillRef idx="1">
+              <a:schemeClr val="accent1"/>
+            </a:fillRef>
+            <a:effectRef idx="0">
+              <a:schemeClr val="accent1"/>
+            </a:effectRef>
+            <a:fontRef idx="minor">
+              <a:schemeClr val="lt1"/>
+            </a:fontRef>
+          </p:style>
+          <p:txBody>
+            <a:bodyPr rtlCol="0" anchor="ctr"/>
+            <a:lstStyle/>
+            <a:p>
+              <a:pPr algn="ctr"/>
+              <a:endParaRPr lang="en-GB" dirty="0">
+                <a:latin typeface="Calibri" panose="020F0502020204030204" pitchFamily="34" charset="0"/>
+                <a:cs typeface="Calibri" panose="020F0502020204030204" pitchFamily="34" charset="0"/>
+              </a:endParaRPr>
+            </a:p>
+          </p:txBody>
+        </p:sp>
+      </p:grpSp>
+      <p:grpSp>
+        <p:nvGrpSpPr>
+          <p:cNvPr id="87" name="Group 86">
+            <a:extLst>
+              <a:ext uri="{FF2B5EF4-FFF2-40B4-BE49-F238E27FC236}">
+                <a16:creationId xmlns:a16="http://schemas.microsoft.com/office/drawing/2014/main" id="{CACA255C-6D4D-4370-696B-5DEA6A8AC9A4}"/>
+              </a:ext>
+            </a:extLst>
+          </p:cNvPr>
+          <p:cNvGrpSpPr/>
+          <p:nvPr/>
+        </p:nvGrpSpPr>
+        <p:grpSpPr>
+          <a:xfrm>
+            <a:off x="796030" y="583049"/>
+            <a:ext cx="3065926" cy="1827868"/>
+            <a:chOff x="1385728" y="2365126"/>
+            <a:chExt cx="3065926" cy="1827868"/>
+          </a:xfrm>
+        </p:grpSpPr>
+        <p:pic>
+          <p:nvPicPr>
+            <p:cNvPr id="88" name="Picture 87">
+              <a:extLst>
+                <a:ext uri="{FF2B5EF4-FFF2-40B4-BE49-F238E27FC236}">
+                  <a16:creationId xmlns:a16="http://schemas.microsoft.com/office/drawing/2014/main" id="{B4B20B6B-3DAA-796C-8EA6-D7D94A189AD2}"/>
+                </a:ext>
+              </a:extLst>
+            </p:cNvPr>
+            <p:cNvPicPr>
+              <a:picLocks noChangeAspect="1"/>
+            </p:cNvPicPr>
+            <p:nvPr/>
+          </p:nvPicPr>
+          <p:blipFill>
+            <a:blip r:embed="rId2"/>
+            <a:stretch>
+              <a:fillRect/>
+            </a:stretch>
+          </p:blipFill>
+          <p:spPr>
+            <a:xfrm>
+              <a:off x="1978197" y="2707728"/>
+              <a:ext cx="1987063" cy="1079696"/>
+            </a:xfrm>
+            <a:prstGeom prst="rect">
+              <a:avLst/>
+            </a:prstGeom>
+          </p:spPr>
+        </p:pic>
+        <p:sp>
+          <p:nvSpPr>
+            <p:cNvPr id="89" name="TextBox 88">
+              <a:extLst>
+                <a:ext uri="{FF2B5EF4-FFF2-40B4-BE49-F238E27FC236}">
+                  <a16:creationId xmlns:a16="http://schemas.microsoft.com/office/drawing/2014/main" id="{D0B60395-29A9-5583-BABB-33B236329A61}"/>
+                </a:ext>
+              </a:extLst>
+            </p:cNvPr>
+            <p:cNvSpPr txBox="1"/>
+            <p:nvPr/>
+          </p:nvSpPr>
+          <p:spPr>
+            <a:xfrm>
+              <a:off x="2088845" y="2858109"/>
+              <a:ext cx="340242" cy="222175"/>
+            </a:xfrm>
+            <a:prstGeom prst="rect">
+              <a:avLst/>
+            </a:prstGeom>
+            <a:noFill/>
+          </p:spPr>
+          <p:txBody>
+            <a:bodyPr wrap="square" rtlCol="0">
+              <a:spAutoFit/>
+            </a:bodyPr>
+            <a:lstStyle/>
+            <a:p>
+              <a:pPr algn="ctr"/>
+              <a:r>
+                <a:rPr lang="en-US" sz="800" b="1" dirty="0">
+                  <a:solidFill>
+                    <a:schemeClr val="tx1">
+                      <a:lumMod val="95000"/>
+                      <a:lumOff val="5000"/>
+                    </a:schemeClr>
+                  </a:solidFill>
+                  <a:latin typeface="Calibri Light" panose="020F0302020204030204" pitchFamily="34" charset="0"/>
+                  <a:cs typeface="Calibri Light" panose="020F0302020204030204" pitchFamily="34" charset="0"/>
+                </a:rPr>
+                <a:t>CN</a:t>
+              </a:r>
+            </a:p>
+          </p:txBody>
+        </p:sp>
+        <p:sp>
+          <p:nvSpPr>
+            <p:cNvPr id="90" name="TextBox 89">
+              <a:extLst>
+                <a:ext uri="{FF2B5EF4-FFF2-40B4-BE49-F238E27FC236}">
+                  <a16:creationId xmlns:a16="http://schemas.microsoft.com/office/drawing/2014/main" id="{88FD4609-03C7-48B1-EA84-375FFFEDBE06}"/>
+                </a:ext>
+              </a:extLst>
+            </p:cNvPr>
+            <p:cNvSpPr txBox="1"/>
+            <p:nvPr/>
+          </p:nvSpPr>
+          <p:spPr>
+            <a:xfrm>
+              <a:off x="2935592" y="2767766"/>
+              <a:ext cx="1516062" cy="215444"/>
+            </a:xfrm>
+            <a:prstGeom prst="rect">
+              <a:avLst/>
+            </a:prstGeom>
+            <a:noFill/>
+          </p:spPr>
+          <p:txBody>
+            <a:bodyPr wrap="square" rtlCol="0">
+              <a:spAutoFit/>
+            </a:bodyPr>
+            <a:lstStyle/>
+            <a:p>
+              <a:r>
+                <a:rPr lang="en-US" sz="800" b="1" dirty="0">
+                  <a:solidFill>
+                    <a:schemeClr val="tx1">
+                      <a:lumMod val="95000"/>
+                      <a:lumOff val="5000"/>
+                    </a:schemeClr>
+                  </a:solidFill>
+                  <a:latin typeface="Calibri" panose="020F0502020204030204" pitchFamily="34" charset="0"/>
+                  <a:cs typeface="Calibri" panose="020F0502020204030204" pitchFamily="34" charset="0"/>
+                </a:rPr>
+                <a:t>(Moving) probability threshold</a:t>
+              </a:r>
+            </a:p>
+          </p:txBody>
+        </p:sp>
+        <p:sp>
+          <p:nvSpPr>
+            <p:cNvPr id="91" name="TextBox 90">
+              <a:extLst>
+                <a:ext uri="{FF2B5EF4-FFF2-40B4-BE49-F238E27FC236}">
+                  <a16:creationId xmlns:a16="http://schemas.microsoft.com/office/drawing/2014/main" id="{4C39D33D-2B26-F2D6-F8F4-09E6518093E9}"/>
+                </a:ext>
+              </a:extLst>
+            </p:cNvPr>
+            <p:cNvSpPr txBox="1"/>
+            <p:nvPr/>
+          </p:nvSpPr>
+          <p:spPr>
+            <a:xfrm>
+              <a:off x="1385728" y="2998584"/>
+              <a:ext cx="722453" cy="461665"/>
+            </a:xfrm>
+            <a:prstGeom prst="rect">
+              <a:avLst/>
+            </a:prstGeom>
+            <a:noFill/>
+          </p:spPr>
+          <p:txBody>
+            <a:bodyPr wrap="square" rtlCol="0">
+              <a:spAutoFit/>
+            </a:bodyPr>
+            <a:lstStyle/>
+            <a:p>
+              <a:r>
+                <a:rPr lang="en-US" sz="800" dirty="0">
+                  <a:solidFill>
+                    <a:schemeClr val="tx1">
+                      <a:lumMod val="95000"/>
+                      <a:lumOff val="5000"/>
+                    </a:schemeClr>
+                  </a:solidFill>
+                  <a:latin typeface="Calibri Light" panose="020F0302020204030204" pitchFamily="34" charset="0"/>
+                  <a:cs typeface="Calibri Light" panose="020F0302020204030204" pitchFamily="34" charset="0"/>
+                </a:rPr>
+                <a:t>Distribution of </a:t>
+              </a:r>
+              <a:r>
+                <a:rPr lang="en-US" sz="800" b="1" dirty="0">
+                  <a:solidFill>
+                    <a:schemeClr val="tx1">
+                      <a:lumMod val="95000"/>
+                      <a:lumOff val="5000"/>
+                    </a:schemeClr>
+                  </a:solidFill>
+                  <a:latin typeface="Calibri" panose="020F0502020204030204" pitchFamily="34" charset="0"/>
+                  <a:cs typeface="Calibri" panose="020F0502020204030204" pitchFamily="34" charset="0"/>
+                </a:rPr>
+                <a:t>observed</a:t>
+              </a:r>
+              <a:r>
+                <a:rPr lang="en-US" sz="800" dirty="0">
+                  <a:solidFill>
+                    <a:schemeClr val="tx1">
+                      <a:lumMod val="95000"/>
+                      <a:lumOff val="5000"/>
+                    </a:schemeClr>
+                  </a:solidFill>
+                  <a:latin typeface="Calibri Light" panose="020F0302020204030204" pitchFamily="34" charset="0"/>
+                  <a:cs typeface="Calibri Light" panose="020F0302020204030204" pitchFamily="34" charset="0"/>
+                </a:rPr>
+                <a:t> </a:t>
+              </a:r>
+              <a:r>
+                <a:rPr lang="en-US" sz="800" dirty="0">
+                  <a:solidFill>
+                    <a:srgbClr val="FF0066"/>
+                  </a:solidFill>
+                  <a:latin typeface="Calibri Light" panose="020F0302020204030204" pitchFamily="34" charset="0"/>
+                  <a:cs typeface="Calibri Light" panose="020F0302020204030204" pitchFamily="34" charset="0"/>
+                </a:rPr>
+                <a:t>non-events</a:t>
+              </a:r>
+            </a:p>
+          </p:txBody>
+        </p:sp>
+        <p:sp>
+          <p:nvSpPr>
+            <p:cNvPr id="92" name="TextBox 91">
+              <a:extLst>
+                <a:ext uri="{FF2B5EF4-FFF2-40B4-BE49-F238E27FC236}">
+                  <a16:creationId xmlns:a16="http://schemas.microsoft.com/office/drawing/2014/main" id="{D4A499F2-3420-098E-60B9-2B0BAC6336D7}"/>
+                </a:ext>
+              </a:extLst>
+            </p:cNvPr>
+            <p:cNvSpPr txBox="1"/>
+            <p:nvPr/>
+          </p:nvSpPr>
+          <p:spPr>
+            <a:xfrm>
+              <a:off x="1540753" y="2649223"/>
+              <a:ext cx="546256" cy="215444"/>
+            </a:xfrm>
+            <a:prstGeom prst="rect">
+              <a:avLst/>
+            </a:prstGeom>
+            <a:noFill/>
+          </p:spPr>
+          <p:txBody>
+            <a:bodyPr wrap="square" rtlCol="0">
+              <a:spAutoFit/>
+            </a:bodyPr>
+            <a:lstStyle/>
+            <a:p>
+              <a:pPr algn="ctr"/>
+              <a:r>
+                <a:rPr lang="en-US" sz="800" dirty="0">
+                  <a:solidFill>
+                    <a:schemeClr val="tx1">
+                      <a:lumMod val="95000"/>
+                      <a:lumOff val="5000"/>
+                    </a:schemeClr>
+                  </a:solidFill>
+                  <a:latin typeface="Calibri Light" panose="020F0302020204030204" pitchFamily="34" charset="0"/>
+                  <a:cs typeface="Calibri Light" panose="020F0302020204030204" pitchFamily="34" charset="0"/>
+                </a:rPr>
+                <a:t>Density</a:t>
+              </a:r>
+            </a:p>
+          </p:txBody>
+        </p:sp>
+        <p:sp>
+          <p:nvSpPr>
+            <p:cNvPr id="93" name="TextBox 92">
+              <a:extLst>
+                <a:ext uri="{FF2B5EF4-FFF2-40B4-BE49-F238E27FC236}">
+                  <a16:creationId xmlns:a16="http://schemas.microsoft.com/office/drawing/2014/main" id="{886A253C-800A-4473-19A4-5EC96B3D6DA8}"/>
+                </a:ext>
+              </a:extLst>
+            </p:cNvPr>
+            <p:cNvSpPr txBox="1"/>
+            <p:nvPr/>
+          </p:nvSpPr>
+          <p:spPr>
+            <a:xfrm>
+              <a:off x="1848450" y="3594738"/>
+              <a:ext cx="340242" cy="222175"/>
+            </a:xfrm>
+            <a:prstGeom prst="rect">
+              <a:avLst/>
+            </a:prstGeom>
+            <a:noFill/>
+          </p:spPr>
+          <p:txBody>
+            <a:bodyPr wrap="square" rtlCol="0">
+              <a:spAutoFit/>
+            </a:bodyPr>
+            <a:lstStyle/>
+            <a:p>
+              <a:pPr algn="ctr"/>
+              <a:r>
+                <a:rPr lang="en-US" sz="800" dirty="0">
+                  <a:solidFill>
+                    <a:schemeClr val="tx1">
+                      <a:lumMod val="95000"/>
+                      <a:lumOff val="5000"/>
+                    </a:schemeClr>
+                  </a:solidFill>
+                  <a:latin typeface="Calibri Light" panose="020F0302020204030204" pitchFamily="34" charset="0"/>
+                  <a:cs typeface="Calibri Light" panose="020F0302020204030204" pitchFamily="34" charset="0"/>
+                </a:rPr>
+                <a:t>0</a:t>
+              </a:r>
+            </a:p>
+          </p:txBody>
+        </p:sp>
+        <p:sp>
+          <p:nvSpPr>
+            <p:cNvPr id="94" name="TextBox 93">
+              <a:extLst>
+                <a:ext uri="{FF2B5EF4-FFF2-40B4-BE49-F238E27FC236}">
+                  <a16:creationId xmlns:a16="http://schemas.microsoft.com/office/drawing/2014/main" id="{31526C8F-65EA-4AE2-A6F7-E27D64A802EA}"/>
+                </a:ext>
+              </a:extLst>
+            </p:cNvPr>
+            <p:cNvSpPr txBox="1"/>
+            <p:nvPr/>
+          </p:nvSpPr>
+          <p:spPr>
+            <a:xfrm>
+              <a:off x="2726110" y="3594738"/>
+              <a:ext cx="410966" cy="215444"/>
+            </a:xfrm>
+            <a:prstGeom prst="rect">
+              <a:avLst/>
+            </a:prstGeom>
+            <a:noFill/>
+          </p:spPr>
+          <p:txBody>
+            <a:bodyPr wrap="square" rtlCol="0">
+              <a:spAutoFit/>
+            </a:bodyPr>
+            <a:lstStyle/>
+            <a:p>
+              <a:pPr algn="ctr"/>
+              <a:r>
+                <a:rPr lang="en-US" sz="800" dirty="0">
+                  <a:solidFill>
+                    <a:schemeClr val="tx1">
+                      <a:lumMod val="95000"/>
+                      <a:lumOff val="5000"/>
+                    </a:schemeClr>
+                  </a:solidFill>
+                  <a:latin typeface="Calibri Light" panose="020F0302020204030204" pitchFamily="34" charset="0"/>
+                  <a:cs typeface="Calibri Light" panose="020F0302020204030204" pitchFamily="34" charset="0"/>
+                </a:rPr>
+                <a:t>50</a:t>
+              </a:r>
+            </a:p>
+          </p:txBody>
+        </p:sp>
+        <p:sp>
+          <p:nvSpPr>
+            <p:cNvPr id="95" name="TextBox 94">
+              <a:extLst>
+                <a:ext uri="{FF2B5EF4-FFF2-40B4-BE49-F238E27FC236}">
+                  <a16:creationId xmlns:a16="http://schemas.microsoft.com/office/drawing/2014/main" id="{2806A400-C100-A7CD-C682-9F752EF41C58}"/>
+                </a:ext>
+              </a:extLst>
+            </p:cNvPr>
+            <p:cNvSpPr txBox="1"/>
+            <p:nvPr/>
+          </p:nvSpPr>
+          <p:spPr>
+            <a:xfrm>
+              <a:off x="2541044" y="3147230"/>
+              <a:ext cx="340242" cy="222175"/>
+            </a:xfrm>
+            <a:prstGeom prst="rect">
+              <a:avLst/>
+            </a:prstGeom>
+            <a:noFill/>
+          </p:spPr>
+          <p:txBody>
+            <a:bodyPr wrap="square" rtlCol="0">
+              <a:spAutoFit/>
+            </a:bodyPr>
+            <a:lstStyle/>
+            <a:p>
+              <a:pPr algn="ctr"/>
+              <a:r>
+                <a:rPr lang="en-US" sz="800" b="1" dirty="0">
+                  <a:solidFill>
+                    <a:schemeClr val="tx1">
+                      <a:lumMod val="95000"/>
+                      <a:lumOff val="5000"/>
+                    </a:schemeClr>
+                  </a:solidFill>
+                  <a:latin typeface="Calibri Light" panose="020F0302020204030204" pitchFamily="34" charset="0"/>
+                  <a:cs typeface="Calibri Light" panose="020F0302020204030204" pitchFamily="34" charset="0"/>
+                </a:rPr>
+                <a:t>H</a:t>
+              </a:r>
+            </a:p>
+          </p:txBody>
+        </p:sp>
+        <p:cxnSp>
+          <p:nvCxnSpPr>
+            <p:cNvPr id="96" name="Straight Connector 95">
+              <a:extLst>
+                <a:ext uri="{FF2B5EF4-FFF2-40B4-BE49-F238E27FC236}">
+                  <a16:creationId xmlns:a16="http://schemas.microsoft.com/office/drawing/2014/main" id="{3E482B56-9FB4-F1B3-4505-6BC8857291E6}"/>
+                </a:ext>
+              </a:extLst>
+            </p:cNvPr>
+            <p:cNvCxnSpPr>
+              <a:cxnSpLocks/>
+            </p:cNvCxnSpPr>
+            <p:nvPr/>
+          </p:nvCxnSpPr>
+          <p:spPr>
+            <a:xfrm>
+              <a:off x="2383371" y="2425953"/>
+              <a:ext cx="0" cy="1193088"/>
+            </a:xfrm>
+            <a:prstGeom prst="line">
+              <a:avLst/>
+            </a:prstGeom>
+            <a:ln w="12700">
+              <a:solidFill>
+                <a:schemeClr val="tx1"/>
+              </a:solidFill>
+              <a:prstDash val="lgDashDot"/>
+            </a:ln>
+          </p:spPr>
+          <p:style>
+            <a:lnRef idx="2">
+              <a:schemeClr val="accent1"/>
+            </a:lnRef>
+            <a:fillRef idx="0">
+              <a:schemeClr val="accent1"/>
+            </a:fillRef>
+            <a:effectRef idx="1">
+              <a:schemeClr val="accent1"/>
+            </a:effectRef>
+            <a:fontRef idx="minor">
+              <a:schemeClr val="tx1"/>
+            </a:fontRef>
+          </p:style>
+        </p:cxnSp>
+        <p:sp>
+          <p:nvSpPr>
+            <p:cNvPr id="97" name="TextBox 96">
+              <a:extLst>
+                <a:ext uri="{FF2B5EF4-FFF2-40B4-BE49-F238E27FC236}">
+                  <a16:creationId xmlns:a16="http://schemas.microsoft.com/office/drawing/2014/main" id="{1B78CC36-883D-5957-AD5C-423198EA1845}"/>
+                </a:ext>
+              </a:extLst>
+            </p:cNvPr>
+            <p:cNvSpPr txBox="1"/>
+            <p:nvPr/>
+          </p:nvSpPr>
+          <p:spPr>
+            <a:xfrm>
+              <a:off x="2379518" y="2365126"/>
+              <a:ext cx="863944" cy="338554"/>
+            </a:xfrm>
+            <a:prstGeom prst="rect">
+              <a:avLst/>
+            </a:prstGeom>
+            <a:noFill/>
+          </p:spPr>
+          <p:txBody>
+            <a:bodyPr wrap="square" rtlCol="0">
+              <a:spAutoFit/>
+            </a:bodyPr>
+            <a:lstStyle/>
+            <a:p>
+              <a:r>
+                <a:rPr lang="en-US" sz="800" b="1" dirty="0">
+                  <a:solidFill>
+                    <a:schemeClr val="tx1">
+                      <a:lumMod val="95000"/>
+                      <a:lumOff val="5000"/>
+                    </a:schemeClr>
+                  </a:solidFill>
+                  <a:latin typeface="Calibri" panose="020F0502020204030204" pitchFamily="34" charset="0"/>
+                  <a:cs typeface="Calibri" panose="020F0502020204030204" pitchFamily="34" charset="0"/>
+                </a:rPr>
+                <a:t>Predicted</a:t>
+              </a:r>
+              <a:r>
+                <a:rPr lang="en-US" sz="800" dirty="0">
+                  <a:solidFill>
+                    <a:schemeClr val="tx1">
+                      <a:lumMod val="95000"/>
+                      <a:lumOff val="5000"/>
+                    </a:schemeClr>
+                  </a:solidFill>
+                  <a:latin typeface="Calibri Light" panose="020F0302020204030204" pitchFamily="34" charset="0"/>
+                  <a:cs typeface="Calibri Light" panose="020F0302020204030204" pitchFamily="34" charset="0"/>
+                </a:rPr>
+                <a:t> </a:t>
+              </a:r>
+            </a:p>
+            <a:p>
+              <a:r>
+                <a:rPr lang="en-US" sz="800" dirty="0">
+                  <a:solidFill>
+                    <a:srgbClr val="33CC33"/>
+                  </a:solidFill>
+                  <a:latin typeface="Calibri Light" panose="020F0302020204030204" pitchFamily="34" charset="0"/>
+                  <a:cs typeface="Calibri Light" panose="020F0302020204030204" pitchFamily="34" charset="0"/>
+                </a:rPr>
+                <a:t>yes-events</a:t>
+              </a:r>
+            </a:p>
+          </p:txBody>
+        </p:sp>
+        <p:sp>
+          <p:nvSpPr>
+            <p:cNvPr id="98" name="TextBox 97">
+              <a:extLst>
+                <a:ext uri="{FF2B5EF4-FFF2-40B4-BE49-F238E27FC236}">
+                  <a16:creationId xmlns:a16="http://schemas.microsoft.com/office/drawing/2014/main" id="{E1F6673A-1B0C-E424-8F99-86B139BD4918}"/>
+                </a:ext>
+              </a:extLst>
+            </p:cNvPr>
+            <p:cNvSpPr txBox="1"/>
+            <p:nvPr/>
+          </p:nvSpPr>
+          <p:spPr>
+            <a:xfrm>
+              <a:off x="1540888" y="2365126"/>
+              <a:ext cx="863944" cy="338554"/>
+            </a:xfrm>
+            <a:prstGeom prst="rect">
+              <a:avLst/>
+            </a:prstGeom>
+            <a:noFill/>
+          </p:spPr>
+          <p:txBody>
+            <a:bodyPr wrap="square" rtlCol="0">
+              <a:spAutoFit/>
+            </a:bodyPr>
+            <a:lstStyle/>
+            <a:p>
+              <a:pPr algn="r"/>
+              <a:r>
+                <a:rPr lang="en-US" sz="800" b="1" dirty="0">
+                  <a:solidFill>
+                    <a:schemeClr val="tx1">
+                      <a:lumMod val="95000"/>
+                      <a:lumOff val="5000"/>
+                    </a:schemeClr>
+                  </a:solidFill>
+                  <a:latin typeface="Calibri" panose="020F0502020204030204" pitchFamily="34" charset="0"/>
+                  <a:cs typeface="Calibri" panose="020F0502020204030204" pitchFamily="34" charset="0"/>
+                </a:rPr>
+                <a:t>Predicted</a:t>
+              </a:r>
+              <a:r>
+                <a:rPr lang="en-US" sz="800" dirty="0">
+                  <a:solidFill>
+                    <a:schemeClr val="tx1">
+                      <a:lumMod val="95000"/>
+                      <a:lumOff val="5000"/>
+                    </a:schemeClr>
+                  </a:solidFill>
+                  <a:latin typeface="Calibri Light" panose="020F0302020204030204" pitchFamily="34" charset="0"/>
+                  <a:cs typeface="Calibri Light" panose="020F0302020204030204" pitchFamily="34" charset="0"/>
+                </a:rPr>
+                <a:t> </a:t>
+              </a:r>
+            </a:p>
+            <a:p>
+              <a:pPr algn="r"/>
+              <a:r>
+                <a:rPr lang="en-US" sz="800" dirty="0">
+                  <a:solidFill>
+                    <a:srgbClr val="D6A300"/>
+                  </a:solidFill>
+                  <a:latin typeface="Calibri Light" panose="020F0302020204030204" pitchFamily="34" charset="0"/>
+                  <a:cs typeface="Calibri Light" panose="020F0302020204030204" pitchFamily="34" charset="0"/>
+                </a:rPr>
+                <a:t>non-events</a:t>
+              </a:r>
+            </a:p>
+          </p:txBody>
+        </p:sp>
+        <p:sp>
+          <p:nvSpPr>
+            <p:cNvPr id="99" name="TextBox 98">
+              <a:extLst>
+                <a:ext uri="{FF2B5EF4-FFF2-40B4-BE49-F238E27FC236}">
+                  <a16:creationId xmlns:a16="http://schemas.microsoft.com/office/drawing/2014/main" id="{7160EB10-8701-2F92-B2E3-BD9975B33EAB}"/>
+                </a:ext>
+              </a:extLst>
+            </p:cNvPr>
+            <p:cNvSpPr txBox="1"/>
+            <p:nvPr/>
+          </p:nvSpPr>
+          <p:spPr>
+            <a:xfrm>
+              <a:off x="3219895" y="3160833"/>
+              <a:ext cx="713654" cy="461665"/>
+            </a:xfrm>
+            <a:prstGeom prst="rect">
+              <a:avLst/>
+            </a:prstGeom>
+            <a:noFill/>
+          </p:spPr>
+          <p:txBody>
+            <a:bodyPr wrap="square" rtlCol="0">
+              <a:spAutoFit/>
+            </a:bodyPr>
+            <a:lstStyle/>
+            <a:p>
+              <a:r>
+                <a:rPr lang="en-US" sz="800" dirty="0">
+                  <a:solidFill>
+                    <a:schemeClr val="tx1">
+                      <a:lumMod val="95000"/>
+                      <a:lumOff val="5000"/>
+                    </a:schemeClr>
+                  </a:solidFill>
+                  <a:latin typeface="Calibri Light" panose="020F0302020204030204" pitchFamily="34" charset="0"/>
+                  <a:cs typeface="Calibri Light" panose="020F0302020204030204" pitchFamily="34" charset="0"/>
+                </a:rPr>
+                <a:t>Distribution of </a:t>
+              </a:r>
+              <a:r>
+                <a:rPr lang="en-US" sz="800" b="1" dirty="0">
+                  <a:solidFill>
+                    <a:schemeClr val="tx1">
+                      <a:lumMod val="95000"/>
+                      <a:lumOff val="5000"/>
+                    </a:schemeClr>
+                  </a:solidFill>
+                  <a:latin typeface="Calibri" panose="020F0502020204030204" pitchFamily="34" charset="0"/>
+                  <a:cs typeface="Calibri" panose="020F0502020204030204" pitchFamily="34" charset="0"/>
+                </a:rPr>
+                <a:t>observed</a:t>
+              </a:r>
+              <a:r>
+                <a:rPr lang="en-US" sz="800" dirty="0">
+                  <a:solidFill>
+                    <a:schemeClr val="tx1">
+                      <a:lumMod val="95000"/>
+                      <a:lumOff val="5000"/>
+                    </a:schemeClr>
+                  </a:solidFill>
+                  <a:latin typeface="Calibri" panose="020F0502020204030204" pitchFamily="34" charset="0"/>
+                  <a:cs typeface="Calibri" panose="020F0502020204030204" pitchFamily="34" charset="0"/>
+                </a:rPr>
+                <a:t> </a:t>
+              </a:r>
+              <a:r>
+                <a:rPr lang="en-US" sz="800" dirty="0">
+                  <a:solidFill>
+                    <a:srgbClr val="0000FF"/>
+                  </a:solidFill>
+                  <a:latin typeface="Calibri Light" panose="020F0302020204030204" pitchFamily="34" charset="0"/>
+                  <a:cs typeface="Calibri Light" panose="020F0302020204030204" pitchFamily="34" charset="0"/>
+                </a:rPr>
+                <a:t>yes-events</a:t>
+              </a:r>
+            </a:p>
+          </p:txBody>
+        </p:sp>
+        <p:sp>
+          <p:nvSpPr>
+            <p:cNvPr id="100" name="TextBox 99">
+              <a:extLst>
+                <a:ext uri="{FF2B5EF4-FFF2-40B4-BE49-F238E27FC236}">
+                  <a16:creationId xmlns:a16="http://schemas.microsoft.com/office/drawing/2014/main" id="{C700B7F9-A72E-559F-D17A-BFCCF191350D}"/>
+                </a:ext>
+              </a:extLst>
+            </p:cNvPr>
+            <p:cNvSpPr txBox="1"/>
+            <p:nvPr/>
+          </p:nvSpPr>
+          <p:spPr>
+            <a:xfrm>
+              <a:off x="3674495" y="3594738"/>
+              <a:ext cx="527261" cy="215444"/>
+            </a:xfrm>
+            <a:prstGeom prst="rect">
+              <a:avLst/>
+            </a:prstGeom>
+            <a:noFill/>
+          </p:spPr>
+          <p:txBody>
+            <a:bodyPr wrap="square" rtlCol="0">
+              <a:spAutoFit/>
+            </a:bodyPr>
+            <a:lstStyle/>
+            <a:p>
+              <a:pPr algn="ctr"/>
+              <a:r>
+                <a:rPr lang="en-US" sz="800" dirty="0">
+                  <a:solidFill>
+                    <a:schemeClr val="tx1">
+                      <a:lumMod val="95000"/>
+                      <a:lumOff val="5000"/>
+                    </a:schemeClr>
+                  </a:solidFill>
+                  <a:latin typeface="Calibri Light" panose="020F0302020204030204" pitchFamily="34" charset="0"/>
+                  <a:cs typeface="Calibri Light" panose="020F0302020204030204" pitchFamily="34" charset="0"/>
+                </a:rPr>
+                <a:t>100 %</a:t>
+              </a:r>
+            </a:p>
+          </p:txBody>
+        </p:sp>
+        <p:sp>
+          <p:nvSpPr>
+            <p:cNvPr id="101" name="Rectangle 100">
+              <a:extLst>
+                <a:ext uri="{FF2B5EF4-FFF2-40B4-BE49-F238E27FC236}">
+                  <a16:creationId xmlns:a16="http://schemas.microsoft.com/office/drawing/2014/main" id="{BA6B5728-94FF-1C7C-CD97-4D776F6436FF}"/>
+                </a:ext>
+              </a:extLst>
+            </p:cNvPr>
+            <p:cNvSpPr/>
+            <p:nvPr/>
+          </p:nvSpPr>
+          <p:spPr>
+            <a:xfrm>
+              <a:off x="2164356" y="3701449"/>
+              <a:ext cx="539909" cy="130163"/>
+            </a:xfrm>
+            <a:prstGeom prst="rect">
+              <a:avLst/>
+            </a:prstGeom>
+            <a:solidFill>
+              <a:schemeClr val="bg1"/>
+            </a:solidFill>
+            <a:ln>
+              <a:noFill/>
+            </a:ln>
+            <a:effectLst/>
+          </p:spPr>
+          <p:style>
+            <a:lnRef idx="2">
+              <a:schemeClr val="accent1">
+                <a:shade val="15000"/>
+              </a:schemeClr>
+            </a:lnRef>
+            <a:fillRef idx="1">
+              <a:schemeClr val="accent1"/>
+            </a:fillRef>
+            <a:effectRef idx="0">
+              <a:schemeClr val="accent1"/>
+            </a:effectRef>
+            <a:fontRef idx="minor">
+              <a:schemeClr val="lt1"/>
+            </a:fontRef>
+          </p:style>
+          <p:txBody>
+            <a:bodyPr rtlCol="0" anchor="ctr"/>
+            <a:lstStyle/>
+            <a:p>
+              <a:pPr algn="ctr"/>
+              <a:endParaRPr lang="en-GB"/>
+            </a:p>
+          </p:txBody>
+        </p:sp>
+        <p:sp>
+          <p:nvSpPr>
+            <p:cNvPr id="102" name="TextBox 101">
+              <a:extLst>
+                <a:ext uri="{FF2B5EF4-FFF2-40B4-BE49-F238E27FC236}">
+                  <a16:creationId xmlns:a16="http://schemas.microsoft.com/office/drawing/2014/main" id="{BE8CA2C2-9A67-A315-55CF-D3B76C5B4ABF}"/>
+                </a:ext>
+              </a:extLst>
+            </p:cNvPr>
+            <p:cNvSpPr txBox="1"/>
+            <p:nvPr/>
+          </p:nvSpPr>
+          <p:spPr>
+            <a:xfrm>
+              <a:off x="2063032" y="3668843"/>
+              <a:ext cx="340242" cy="222175"/>
+            </a:xfrm>
+            <a:prstGeom prst="rect">
+              <a:avLst/>
+            </a:prstGeom>
+            <a:noFill/>
+          </p:spPr>
+          <p:txBody>
+            <a:bodyPr wrap="square" rtlCol="0">
+              <a:spAutoFit/>
+            </a:bodyPr>
+            <a:lstStyle/>
+            <a:p>
+              <a:pPr algn="ctr"/>
+              <a:r>
+                <a:rPr lang="en-US" sz="800" b="1" dirty="0">
+                  <a:solidFill>
+                    <a:schemeClr val="tx1">
+                      <a:lumMod val="95000"/>
+                      <a:lumOff val="5000"/>
+                    </a:schemeClr>
+                  </a:solidFill>
+                  <a:latin typeface="Calibri Light" panose="020F0302020204030204" pitchFamily="34" charset="0"/>
+                  <a:cs typeface="Calibri Light" panose="020F0302020204030204" pitchFamily="34" charset="0"/>
+                </a:rPr>
+                <a:t>M</a:t>
+              </a:r>
+            </a:p>
+          </p:txBody>
+        </p:sp>
+        <p:sp>
+          <p:nvSpPr>
+            <p:cNvPr id="103" name="TextBox 102">
+              <a:extLst>
+                <a:ext uri="{FF2B5EF4-FFF2-40B4-BE49-F238E27FC236}">
+                  <a16:creationId xmlns:a16="http://schemas.microsoft.com/office/drawing/2014/main" id="{16D7E8D5-094D-0801-2477-66BD27467E33}"/>
+                </a:ext>
+              </a:extLst>
+            </p:cNvPr>
+            <p:cNvSpPr txBox="1"/>
+            <p:nvPr/>
+          </p:nvSpPr>
+          <p:spPr>
+            <a:xfrm>
+              <a:off x="2370923" y="3664967"/>
+              <a:ext cx="340242" cy="222175"/>
+            </a:xfrm>
+            <a:prstGeom prst="rect">
+              <a:avLst/>
+            </a:prstGeom>
+            <a:noFill/>
+          </p:spPr>
+          <p:txBody>
+            <a:bodyPr wrap="square" rtlCol="0">
+              <a:spAutoFit/>
+            </a:bodyPr>
+            <a:lstStyle/>
+            <a:p>
+              <a:pPr algn="ctr"/>
+              <a:r>
+                <a:rPr lang="en-US" sz="800" b="1" dirty="0">
+                  <a:solidFill>
+                    <a:schemeClr val="tx1">
+                      <a:lumMod val="95000"/>
+                      <a:lumOff val="5000"/>
+                    </a:schemeClr>
+                  </a:solidFill>
+                  <a:latin typeface="Calibri Light" panose="020F0302020204030204" pitchFamily="34" charset="0"/>
+                  <a:cs typeface="Calibri Light" panose="020F0302020204030204" pitchFamily="34" charset="0"/>
+                </a:rPr>
+                <a:t>FA</a:t>
+              </a:r>
+            </a:p>
+          </p:txBody>
+        </p:sp>
+        <p:sp>
+          <p:nvSpPr>
+            <p:cNvPr id="104" name="TextBox 103">
+              <a:extLst>
+                <a:ext uri="{FF2B5EF4-FFF2-40B4-BE49-F238E27FC236}">
+                  <a16:creationId xmlns:a16="http://schemas.microsoft.com/office/drawing/2014/main" id="{5E7D516C-6098-CA78-A68A-A60E91A03B8B}"/>
+                </a:ext>
+              </a:extLst>
+            </p:cNvPr>
+            <p:cNvSpPr txBox="1"/>
+            <p:nvPr/>
+          </p:nvSpPr>
+          <p:spPr>
+            <a:xfrm>
+              <a:off x="2548095" y="3731329"/>
+              <a:ext cx="1650154" cy="461665"/>
+            </a:xfrm>
+            <a:prstGeom prst="rect">
+              <a:avLst/>
+            </a:prstGeom>
+            <a:noFill/>
+          </p:spPr>
+          <p:txBody>
+            <a:bodyPr wrap="square" rtlCol="0">
+              <a:spAutoFit/>
+            </a:bodyPr>
+            <a:lstStyle/>
+            <a:p>
+              <a:pPr algn="r"/>
+              <a:r>
+                <a:rPr lang="en-US" sz="800" dirty="0">
+                  <a:solidFill>
+                    <a:schemeClr val="tx1">
+                      <a:lumMod val="95000"/>
+                      <a:lumOff val="5000"/>
+                    </a:schemeClr>
+                  </a:solidFill>
+                  <a:latin typeface="Calibri Light" panose="020F0302020204030204" pitchFamily="34" charset="0"/>
+                  <a:cs typeface="Calibri Light" panose="020F0302020204030204" pitchFamily="34" charset="0"/>
+                </a:rPr>
+                <a:t>Probabilities of exceeding the verifying rainfall threshold (defined as a percentile or return period)</a:t>
+              </a:r>
+            </a:p>
+          </p:txBody>
+        </p:sp>
+        <p:cxnSp>
+          <p:nvCxnSpPr>
+            <p:cNvPr id="105" name="Straight Arrow Connector 104">
+              <a:extLst>
+                <a:ext uri="{FF2B5EF4-FFF2-40B4-BE49-F238E27FC236}">
+                  <a16:creationId xmlns:a16="http://schemas.microsoft.com/office/drawing/2014/main" id="{9F83BDF9-60EC-1D45-016B-A09DF554F68E}"/>
+                </a:ext>
+              </a:extLst>
+            </p:cNvPr>
+            <p:cNvCxnSpPr>
+              <a:cxnSpLocks/>
+            </p:cNvCxnSpPr>
+            <p:nvPr/>
+          </p:nvCxnSpPr>
+          <p:spPr>
+            <a:xfrm flipV="1">
+              <a:off x="2381535" y="2870752"/>
+              <a:ext cx="601864" cy="0"/>
+            </a:xfrm>
+            <a:prstGeom prst="straightConnector1">
+              <a:avLst/>
+            </a:prstGeom>
+            <a:ln w="3175">
+              <a:solidFill>
+                <a:schemeClr val="tx1">
+                  <a:lumMod val="95000"/>
+                  <a:lumOff val="5000"/>
+                </a:schemeClr>
+              </a:solidFill>
+              <a:tailEnd type="triangle"/>
+            </a:ln>
+          </p:spPr>
+          <p:style>
+            <a:lnRef idx="2">
+              <a:schemeClr val="accent1"/>
+            </a:lnRef>
+            <a:fillRef idx="0">
+              <a:schemeClr val="accent1"/>
+            </a:fillRef>
+            <a:effectRef idx="1">
+              <a:schemeClr val="accent1"/>
+            </a:effectRef>
+            <a:fontRef idx="minor">
+              <a:schemeClr val="tx1"/>
+            </a:fontRef>
+          </p:style>
+        </p:cxnSp>
+        <p:sp>
+          <p:nvSpPr>
+            <p:cNvPr id="106" name="Oval 105">
+              <a:extLst>
+                <a:ext uri="{FF2B5EF4-FFF2-40B4-BE49-F238E27FC236}">
+                  <a16:creationId xmlns:a16="http://schemas.microsoft.com/office/drawing/2014/main" id="{19C06D92-10F2-6629-738B-329DDCC22607}"/>
+                </a:ext>
+              </a:extLst>
+            </p:cNvPr>
+            <p:cNvSpPr/>
+            <p:nvPr/>
+          </p:nvSpPr>
+          <p:spPr>
+            <a:xfrm>
+              <a:off x="2347112" y="3592356"/>
+              <a:ext cx="72000" cy="72000"/>
+            </a:xfrm>
+            <a:prstGeom prst="ellipse">
+              <a:avLst/>
+            </a:prstGeom>
+            <a:solidFill>
+              <a:schemeClr val="accent5">
+                <a:lumMod val="60000"/>
+                <a:lumOff val="40000"/>
+              </a:schemeClr>
+            </a:solidFill>
+            <a:ln>
+              <a:noFill/>
+            </a:ln>
+          </p:spPr>
+          <p:style>
+            <a:lnRef idx="2">
+              <a:schemeClr val="accent1">
+                <a:shade val="15000"/>
+              </a:schemeClr>
+            </a:lnRef>
+            <a:fillRef idx="1">
+              <a:schemeClr val="accent1"/>
+            </a:fillRef>
+            <a:effectRef idx="0">
+              <a:schemeClr val="accent1"/>
+            </a:effectRef>
+            <a:fontRef idx="minor">
+              <a:schemeClr val="lt1"/>
+            </a:fontRef>
+          </p:style>
+          <p:txBody>
+            <a:bodyPr rtlCol="0" anchor="ctr"/>
+            <a:lstStyle/>
+            <a:p>
+              <a:pPr algn="ctr"/>
+              <a:endParaRPr lang="en-GB"/>
+            </a:p>
+          </p:txBody>
+        </p:sp>
+      </p:grpSp>
       <p:sp>
         <p:nvSpPr>
-          <p:cNvPr id="23" name="TextBox 22">
+          <p:cNvPr id="107" name="TextBox 106">
             <a:extLst>
               <a:ext uri="{FF2B5EF4-FFF2-40B4-BE49-F238E27FC236}">
-                <a16:creationId xmlns:a16="http://schemas.microsoft.com/office/drawing/2014/main" id="{2806A400-C100-A7CD-C682-9F752EF41C58}"/>
+                <a16:creationId xmlns:a16="http://schemas.microsoft.com/office/drawing/2014/main" id="{8C2CF4A1-967C-6891-8D3E-E404ED5D4E82}"/>
               </a:ext>
             </a:extLst>
           </p:cNvPr>
@@ -13982,237 +15635,8 @@
         </p:nvSpPr>
         <p:spPr>
           <a:xfrm>
-            <a:off x="2546519" y="3147230"/>
-            <a:ext cx="340242" cy="222175"/>
-          </a:xfrm>
-          <a:prstGeom prst="rect">
-            <a:avLst/>
-          </a:prstGeom>
-          <a:noFill/>
-        </p:spPr>
-        <p:txBody>
-          <a:bodyPr wrap="square" rtlCol="0">
-            <a:spAutoFit/>
-          </a:bodyPr>
-          <a:lstStyle/>
-          <a:p>
-            <a:pPr algn="ctr"/>
-            <a:r>
-              <a:rPr lang="en-US" sz="800" b="1" dirty="0">
-                <a:solidFill>
-                  <a:schemeClr val="tx1">
-                    <a:lumMod val="95000"/>
-                    <a:lumOff val="5000"/>
-                  </a:schemeClr>
-                </a:solidFill>
-                <a:latin typeface="Calibri Light" panose="020F0302020204030204" pitchFamily="34" charset="0"/>
-                <a:cs typeface="Calibri Light" panose="020F0302020204030204" pitchFamily="34" charset="0"/>
-              </a:rPr>
-              <a:t>H</a:t>
-            </a:r>
-          </a:p>
-        </p:txBody>
-      </p:sp>
-      <p:cxnSp>
-        <p:nvCxnSpPr>
-          <p:cNvPr id="24" name="Straight Connector 23">
-            <a:extLst>
-              <a:ext uri="{FF2B5EF4-FFF2-40B4-BE49-F238E27FC236}">
-                <a16:creationId xmlns:a16="http://schemas.microsoft.com/office/drawing/2014/main" id="{3E482B56-9FB4-F1B3-4505-6BC8857291E6}"/>
-              </a:ext>
-            </a:extLst>
-          </p:cNvPr>
-          <p:cNvCxnSpPr>
-            <a:cxnSpLocks/>
-          </p:cNvCxnSpPr>
-          <p:nvPr/>
-        </p:nvCxnSpPr>
-        <p:spPr>
-          <a:xfrm>
-            <a:off x="2388846" y="2425953"/>
-            <a:ext cx="0" cy="1193088"/>
-          </a:xfrm>
-          <a:prstGeom prst="line">
-            <a:avLst/>
-          </a:prstGeom>
-          <a:ln w="12700">
-            <a:solidFill>
-              <a:schemeClr val="tx1"/>
-            </a:solidFill>
-            <a:prstDash val="lgDashDot"/>
-          </a:ln>
-        </p:spPr>
-        <p:style>
-          <a:lnRef idx="2">
-            <a:schemeClr val="accent1"/>
-          </a:lnRef>
-          <a:fillRef idx="0">
-            <a:schemeClr val="accent1"/>
-          </a:fillRef>
-          <a:effectRef idx="1">
-            <a:schemeClr val="accent1"/>
-          </a:effectRef>
-          <a:fontRef idx="minor">
-            <a:schemeClr val="tx1"/>
-          </a:fontRef>
-        </p:style>
-      </p:cxnSp>
-      <p:sp>
-        <p:nvSpPr>
-          <p:cNvPr id="25" name="TextBox 24">
-            <a:extLst>
-              <a:ext uri="{FF2B5EF4-FFF2-40B4-BE49-F238E27FC236}">
-                <a16:creationId xmlns:a16="http://schemas.microsoft.com/office/drawing/2014/main" id="{1B78CC36-883D-5957-AD5C-423198EA1845}"/>
-              </a:ext>
-            </a:extLst>
-          </p:cNvPr>
-          <p:cNvSpPr txBox="1"/>
-          <p:nvPr/>
-        </p:nvSpPr>
-        <p:spPr>
-          <a:xfrm>
-            <a:off x="2384993" y="2365126"/>
-            <a:ext cx="863944" cy="338554"/>
-          </a:xfrm>
-          <a:prstGeom prst="rect">
-            <a:avLst/>
-          </a:prstGeom>
-          <a:noFill/>
-        </p:spPr>
-        <p:txBody>
-          <a:bodyPr wrap="square" rtlCol="0">
-            <a:spAutoFit/>
-          </a:bodyPr>
-          <a:lstStyle/>
-          <a:p>
-            <a:r>
-              <a:rPr lang="en-US" sz="800" b="1" dirty="0">
-                <a:solidFill>
-                  <a:schemeClr val="tx1">
-                    <a:lumMod val="95000"/>
-                    <a:lumOff val="5000"/>
-                  </a:schemeClr>
-                </a:solidFill>
-                <a:latin typeface="Calibri" panose="020F0502020204030204" pitchFamily="34" charset="0"/>
-                <a:cs typeface="Calibri" panose="020F0502020204030204" pitchFamily="34" charset="0"/>
-              </a:rPr>
-              <a:t>Predicted</a:t>
-            </a:r>
-            <a:r>
-              <a:rPr lang="en-US" sz="800" dirty="0">
-                <a:solidFill>
-                  <a:schemeClr val="tx1">
-                    <a:lumMod val="95000"/>
-                    <a:lumOff val="5000"/>
-                  </a:schemeClr>
-                </a:solidFill>
-                <a:latin typeface="Calibri Light" panose="020F0302020204030204" pitchFamily="34" charset="0"/>
-                <a:cs typeface="Calibri Light" panose="020F0302020204030204" pitchFamily="34" charset="0"/>
-              </a:rPr>
-              <a:t> </a:t>
-            </a:r>
-          </a:p>
-          <a:p>
-            <a:r>
-              <a:rPr lang="en-US" sz="800" dirty="0">
-                <a:solidFill>
-                  <a:srgbClr val="33CC33"/>
-                </a:solidFill>
-                <a:latin typeface="Calibri Light" panose="020F0302020204030204" pitchFamily="34" charset="0"/>
-                <a:cs typeface="Calibri Light" panose="020F0302020204030204" pitchFamily="34" charset="0"/>
-              </a:rPr>
-              <a:t>yes-events</a:t>
-            </a:r>
-          </a:p>
-        </p:txBody>
-      </p:sp>
-      <p:sp>
-        <p:nvSpPr>
-          <p:cNvPr id="26" name="TextBox 25">
-            <a:extLst>
-              <a:ext uri="{FF2B5EF4-FFF2-40B4-BE49-F238E27FC236}">
-                <a16:creationId xmlns:a16="http://schemas.microsoft.com/office/drawing/2014/main" id="{E1F6673A-1B0C-E424-8F99-86B139BD4918}"/>
-              </a:ext>
-            </a:extLst>
-          </p:cNvPr>
-          <p:cNvSpPr txBox="1"/>
-          <p:nvPr/>
-        </p:nvSpPr>
-        <p:spPr>
-          <a:xfrm>
-            <a:off x="1546363" y="2365126"/>
-            <a:ext cx="863944" cy="338554"/>
-          </a:xfrm>
-          <a:prstGeom prst="rect">
-            <a:avLst/>
-          </a:prstGeom>
-          <a:noFill/>
-        </p:spPr>
-        <p:txBody>
-          <a:bodyPr wrap="square" rtlCol="0">
-            <a:spAutoFit/>
-          </a:bodyPr>
-          <a:lstStyle/>
-          <a:p>
-            <a:pPr algn="r"/>
-            <a:r>
-              <a:rPr lang="en-US" sz="800" b="1" dirty="0">
-                <a:solidFill>
-                  <a:schemeClr val="tx1">
-                    <a:lumMod val="95000"/>
-                    <a:lumOff val="5000"/>
-                  </a:schemeClr>
-                </a:solidFill>
-                <a:latin typeface="Calibri" panose="020F0502020204030204" pitchFamily="34" charset="0"/>
-                <a:cs typeface="Calibri" panose="020F0502020204030204" pitchFamily="34" charset="0"/>
-              </a:rPr>
-              <a:t>Predicted</a:t>
-            </a:r>
-            <a:r>
-              <a:rPr lang="en-US" sz="800" dirty="0">
-                <a:solidFill>
-                  <a:schemeClr val="tx1">
-                    <a:lumMod val="95000"/>
-                    <a:lumOff val="5000"/>
-                  </a:schemeClr>
-                </a:solidFill>
-                <a:latin typeface="Calibri Light" panose="020F0302020204030204" pitchFamily="34" charset="0"/>
-                <a:cs typeface="Calibri Light" panose="020F0302020204030204" pitchFamily="34" charset="0"/>
-              </a:rPr>
-              <a:t> </a:t>
-            </a:r>
-          </a:p>
-          <a:p>
-            <a:pPr algn="r"/>
-            <a:r>
-              <a:rPr lang="en-US" sz="800" dirty="0">
-                <a:solidFill>
-                  <a:srgbClr val="D6A300"/>
-                </a:solidFill>
-                <a:latin typeface="Calibri Light" panose="020F0302020204030204" pitchFamily="34" charset="0"/>
-                <a:cs typeface="Calibri Light" panose="020F0302020204030204" pitchFamily="34" charset="0"/>
-              </a:rPr>
-              <a:t>non-events</a:t>
-            </a:r>
-          </a:p>
-        </p:txBody>
-      </p:sp>
-      <p:sp>
-        <p:nvSpPr>
-          <p:cNvPr id="27" name="TextBox 26">
-            <a:extLst>
-              <a:ext uri="{FF2B5EF4-FFF2-40B4-BE49-F238E27FC236}">
-                <a16:creationId xmlns:a16="http://schemas.microsoft.com/office/drawing/2014/main" id="{7160EB10-8701-2F92-B2E3-BD9975B33EAB}"/>
-              </a:ext>
-            </a:extLst>
-          </p:cNvPr>
-          <p:cNvSpPr txBox="1"/>
-          <p:nvPr/>
-        </p:nvSpPr>
-        <p:spPr>
-          <a:xfrm>
-            <a:off x="3225370" y="3160833"/>
-            <a:ext cx="713654" cy="461665"/>
+            <a:off x="-74557" y="408529"/>
+            <a:ext cx="4181942" cy="215444"/>
           </a:xfrm>
           <a:prstGeom prst="rect">
             <a:avLst/>
@@ -14236,53 +15660,17 @@
                 <a:latin typeface="Calibri Light" panose="020F0302020204030204" pitchFamily="34" charset="0"/>
                 <a:cs typeface="Calibri Light" panose="020F0302020204030204" pitchFamily="34" charset="0"/>
               </a:rPr>
-              <a:t>Distribution of </a:t>
-            </a:r>
-            <a:r>
-              <a:rPr lang="en-US" sz="800" b="1" dirty="0">
-                <a:solidFill>
-                  <a:schemeClr val="tx1">
-                    <a:lumMod val="95000"/>
-                    <a:lumOff val="5000"/>
-                  </a:schemeClr>
-                </a:solidFill>
-                <a:latin typeface="Calibri" panose="020F0502020204030204" pitchFamily="34" charset="0"/>
-                <a:cs typeface="Calibri" panose="020F0502020204030204" pitchFamily="34" charset="0"/>
-              </a:rPr>
-              <a:t>observed</a:t>
-            </a:r>
-            <a:r>
-              <a:rPr lang="en-US" sz="800" dirty="0">
-                <a:solidFill>
-                  <a:schemeClr val="tx1">
-                    <a:lumMod val="95000"/>
-                    <a:lumOff val="5000"/>
-                  </a:schemeClr>
-                </a:solidFill>
-                <a:latin typeface="Calibri" panose="020F0502020204030204" pitchFamily="34" charset="0"/>
-                <a:cs typeface="Calibri" panose="020F0502020204030204" pitchFamily="34" charset="0"/>
-              </a:rPr>
-              <a:t> </a:t>
-            </a:r>
-            <a:r>
-              <a:rPr lang="en-US" sz="800" dirty="0">
-                <a:solidFill>
-                  <a:srgbClr val="0000FF"/>
-                </a:solidFill>
-                <a:latin typeface="Calibri Light" panose="020F0302020204030204" pitchFamily="34" charset="0"/>
-                <a:cs typeface="Calibri Light" panose="020F0302020204030204" pitchFamily="34" charset="0"/>
-              </a:rPr>
-              <a:t>yes-events</a:t>
+              <a:t>(a) Conceptual schematic for the contingency table definition for probabilistic forecasts</a:t>
             </a:r>
           </a:p>
         </p:txBody>
       </p:sp>
       <p:sp>
         <p:nvSpPr>
-          <p:cNvPr id="28" name="TextBox 27">
+          <p:cNvPr id="108" name="TextBox 107">
             <a:extLst>
               <a:ext uri="{FF2B5EF4-FFF2-40B4-BE49-F238E27FC236}">
-                <a16:creationId xmlns:a16="http://schemas.microsoft.com/office/drawing/2014/main" id="{871F6875-B35B-38C5-3426-33D516CADAB5}"/>
+                <a16:creationId xmlns:a16="http://schemas.microsoft.com/office/drawing/2014/main" id="{748BB081-753E-2804-7F05-2F111730D61F}"/>
               </a:ext>
             </a:extLst>
           </p:cNvPr>
@@ -14291,8 +15679,8 @@
         </p:nvSpPr>
         <p:spPr>
           <a:xfrm>
-            <a:off x="256030" y="759281"/>
-            <a:ext cx="1080000" cy="720000"/>
+            <a:off x="-74557" y="2432378"/>
+            <a:ext cx="2940174" cy="215444"/>
           </a:xfrm>
           <a:prstGeom prst="rect">
             <a:avLst/>
@@ -14305,33 +15693,28 @@
           </a:bodyPr>
           <a:lstStyle/>
           <a:p>
-            <a:pPr algn="ctr"/>
             <a:r>
-              <a:rPr lang="en-US" sz="800" b="1" dirty="0">
-                <a:latin typeface="Calibri" panose="020F0502020204030204" pitchFamily="34" charset="0"/>
-                <a:cs typeface="Calibri" panose="020F0502020204030204" pitchFamily="34" charset="0"/>
-              </a:rPr>
-              <a:t>HITS (H)</a:t>
-            </a:r>
-          </a:p>
-          <a:p>
-            <a:pPr algn="ctr"/>
-            <a:r>
-              <a:rPr lang="en-GB" sz="800" dirty="0">
+              <a:rPr lang="en-US" sz="800" dirty="0">
+                <a:solidFill>
+                  <a:schemeClr val="tx1">
+                    <a:lumMod val="95000"/>
+                    <a:lumOff val="5000"/>
+                  </a:schemeClr>
+                </a:solidFill>
                 <a:latin typeface="Calibri Light" panose="020F0302020204030204" pitchFamily="34" charset="0"/>
                 <a:cs typeface="Calibri Light" panose="020F0302020204030204" pitchFamily="34" charset="0"/>
               </a:rPr>
-              <a:t>The event was predicted and it was observed</a:t>
+              <a:t>(b) Contingency table for a given probability threshold</a:t>
             </a:r>
           </a:p>
         </p:txBody>
       </p:sp>
       <p:sp>
         <p:nvSpPr>
-          <p:cNvPr id="29" name="TextBox 28">
+          <p:cNvPr id="109" name="TextBox 108">
             <a:extLst>
               <a:ext uri="{FF2B5EF4-FFF2-40B4-BE49-F238E27FC236}">
-                <a16:creationId xmlns:a16="http://schemas.microsoft.com/office/drawing/2014/main" id="{843DCFB4-D832-CE14-33FD-22FE10682A05}"/>
+                <a16:creationId xmlns:a16="http://schemas.microsoft.com/office/drawing/2014/main" id="{0A54A4DA-82CE-F662-6560-4E4EB66C1AE8}"/>
               </a:ext>
             </a:extLst>
           </p:cNvPr>
@@ -14340,8 +15723,8 @@
         </p:nvSpPr>
         <p:spPr>
           <a:xfrm>
-            <a:off x="1449831" y="759281"/>
-            <a:ext cx="1080000" cy="720000"/>
+            <a:off x="2647521" y="2715105"/>
+            <a:ext cx="1492679" cy="215444"/>
           </a:xfrm>
           <a:prstGeom prst="rect">
             <a:avLst/>
@@ -14354,969 +15737,6 @@
           </a:bodyPr>
           <a:lstStyle/>
           <a:p>
-            <a:pPr algn="ctr"/>
-            <a:r>
-              <a:rPr lang="en-US" sz="800" b="1" dirty="0">
-                <a:latin typeface="Calibri" panose="020F0502020204030204" pitchFamily="34" charset="0"/>
-                <a:cs typeface="Calibri" panose="020F0502020204030204" pitchFamily="34" charset="0"/>
-              </a:rPr>
-              <a:t>MISSES (M)</a:t>
-            </a:r>
-          </a:p>
-          <a:p>
-            <a:pPr algn="ctr"/>
-            <a:r>
-              <a:rPr lang="en-GB" sz="800" dirty="0">
-                <a:latin typeface="Calibri Light" panose="020F0302020204030204" pitchFamily="34" charset="0"/>
-                <a:cs typeface="Calibri Light" panose="020F0302020204030204" pitchFamily="34" charset="0"/>
-              </a:rPr>
-              <a:t>The event was not predicted but it was observed</a:t>
-            </a:r>
-          </a:p>
-        </p:txBody>
-      </p:sp>
-      <p:sp>
-        <p:nvSpPr>
-          <p:cNvPr id="30" name="TextBox 29">
-            <a:extLst>
-              <a:ext uri="{FF2B5EF4-FFF2-40B4-BE49-F238E27FC236}">
-                <a16:creationId xmlns:a16="http://schemas.microsoft.com/office/drawing/2014/main" id="{1ACBC9A4-96CE-2145-4C13-43843EED1EEE}"/>
-              </a:ext>
-            </a:extLst>
-          </p:cNvPr>
-          <p:cNvSpPr txBox="1"/>
-          <p:nvPr/>
-        </p:nvSpPr>
-        <p:spPr>
-          <a:xfrm>
-            <a:off x="256030" y="1578875"/>
-            <a:ext cx="1080000" cy="720000"/>
-          </a:xfrm>
-          <a:prstGeom prst="rect">
-            <a:avLst/>
-          </a:prstGeom>
-          <a:noFill/>
-        </p:spPr>
-        <p:txBody>
-          <a:bodyPr wrap="square" rtlCol="0">
-            <a:spAutoFit/>
-          </a:bodyPr>
-          <a:lstStyle/>
-          <a:p>
-            <a:pPr algn="ctr"/>
-            <a:r>
-              <a:rPr lang="en-US" sz="800" b="1" dirty="0">
-                <a:latin typeface="Calibri" panose="020F0502020204030204" pitchFamily="34" charset="0"/>
-                <a:cs typeface="Calibri" panose="020F0502020204030204" pitchFamily="34" charset="0"/>
-              </a:rPr>
-              <a:t>FALSE ALARMS (FA)</a:t>
-            </a:r>
-          </a:p>
-          <a:p>
-            <a:pPr algn="ctr"/>
-            <a:r>
-              <a:rPr lang="en-GB" sz="800" dirty="0">
-                <a:latin typeface="Calibri Light" panose="020F0302020204030204" pitchFamily="34" charset="0"/>
-                <a:cs typeface="Calibri Light" panose="020F0302020204030204" pitchFamily="34" charset="0"/>
-              </a:rPr>
-              <a:t>The event was predicted but it was not observed</a:t>
-            </a:r>
-          </a:p>
-        </p:txBody>
-      </p:sp>
-      <p:sp>
-        <p:nvSpPr>
-          <p:cNvPr id="31" name="TextBox 30">
-            <a:extLst>
-              <a:ext uri="{FF2B5EF4-FFF2-40B4-BE49-F238E27FC236}">
-                <a16:creationId xmlns:a16="http://schemas.microsoft.com/office/drawing/2014/main" id="{5CCEEB50-0EB3-291D-2911-B86403C69D4E}"/>
-              </a:ext>
-            </a:extLst>
-          </p:cNvPr>
-          <p:cNvSpPr txBox="1"/>
-          <p:nvPr/>
-        </p:nvSpPr>
-        <p:spPr>
-          <a:xfrm>
-            <a:off x="1362574" y="1578875"/>
-            <a:ext cx="1254515" cy="584775"/>
-          </a:xfrm>
-          <a:prstGeom prst="rect">
-            <a:avLst/>
-          </a:prstGeom>
-          <a:noFill/>
-        </p:spPr>
-        <p:txBody>
-          <a:bodyPr wrap="square" rtlCol="0">
-            <a:spAutoFit/>
-          </a:bodyPr>
-          <a:lstStyle/>
-          <a:p>
-            <a:pPr algn="ctr"/>
-            <a:r>
-              <a:rPr lang="en-US" sz="800" b="1" dirty="0">
-                <a:latin typeface="Calibri" panose="020F0502020204030204" pitchFamily="34" charset="0"/>
-                <a:cs typeface="Calibri" panose="020F0502020204030204" pitchFamily="34" charset="0"/>
-              </a:rPr>
-              <a:t>CORRECT NEGATIVE (CN)</a:t>
-            </a:r>
-          </a:p>
-          <a:p>
-            <a:pPr algn="ctr"/>
-            <a:r>
-              <a:rPr lang="en-GB" sz="800" dirty="0">
-                <a:latin typeface="Calibri Light" panose="020F0302020204030204" pitchFamily="34" charset="0"/>
-                <a:cs typeface="Calibri Light" panose="020F0302020204030204" pitchFamily="34" charset="0"/>
-              </a:rPr>
-              <a:t>The event was not predicted and it was not observed</a:t>
-            </a:r>
-          </a:p>
-        </p:txBody>
-      </p:sp>
-      <p:cxnSp>
-        <p:nvCxnSpPr>
-          <p:cNvPr id="32" name="Straight Connector 31">
-            <a:extLst>
-              <a:ext uri="{FF2B5EF4-FFF2-40B4-BE49-F238E27FC236}">
-                <a16:creationId xmlns:a16="http://schemas.microsoft.com/office/drawing/2014/main" id="{A0143ED4-4C89-1348-C278-56520894994E}"/>
-              </a:ext>
-            </a:extLst>
-          </p:cNvPr>
-          <p:cNvCxnSpPr>
-            <a:cxnSpLocks/>
-          </p:cNvCxnSpPr>
-          <p:nvPr/>
-        </p:nvCxnSpPr>
-        <p:spPr>
-          <a:xfrm>
-            <a:off x="1357050" y="626888"/>
-            <a:ext cx="0" cy="1639317"/>
-          </a:xfrm>
-          <a:prstGeom prst="line">
-            <a:avLst/>
-          </a:prstGeom>
-          <a:ln w="3175">
-            <a:solidFill>
-              <a:schemeClr val="tx1">
-                <a:lumMod val="75000"/>
-                <a:lumOff val="25000"/>
-              </a:schemeClr>
-            </a:solidFill>
-          </a:ln>
-        </p:spPr>
-        <p:style>
-          <a:lnRef idx="2">
-            <a:schemeClr val="accent1"/>
-          </a:lnRef>
-          <a:fillRef idx="0">
-            <a:schemeClr val="accent1"/>
-          </a:fillRef>
-          <a:effectRef idx="1">
-            <a:schemeClr val="accent1"/>
-          </a:effectRef>
-          <a:fontRef idx="minor">
-            <a:schemeClr val="tx1"/>
-          </a:fontRef>
-        </p:style>
-      </p:cxnSp>
-      <p:cxnSp>
-        <p:nvCxnSpPr>
-          <p:cNvPr id="33" name="Straight Connector 32">
-            <a:extLst>
-              <a:ext uri="{FF2B5EF4-FFF2-40B4-BE49-F238E27FC236}">
-                <a16:creationId xmlns:a16="http://schemas.microsoft.com/office/drawing/2014/main" id="{F722787C-8461-E4FE-8414-D479477597C4}"/>
-              </a:ext>
-            </a:extLst>
-          </p:cNvPr>
-          <p:cNvCxnSpPr>
-            <a:cxnSpLocks/>
-          </p:cNvCxnSpPr>
-          <p:nvPr/>
-        </p:nvCxnSpPr>
-        <p:spPr>
-          <a:xfrm flipH="1">
-            <a:off x="216892" y="1525908"/>
-            <a:ext cx="2397547" cy="0"/>
-          </a:xfrm>
-          <a:prstGeom prst="line">
-            <a:avLst/>
-          </a:prstGeom>
-          <a:ln w="3175">
-            <a:solidFill>
-              <a:schemeClr val="tx1">
-                <a:lumMod val="75000"/>
-                <a:lumOff val="25000"/>
-              </a:schemeClr>
-            </a:solidFill>
-          </a:ln>
-        </p:spPr>
-        <p:style>
-          <a:lnRef idx="2">
-            <a:schemeClr val="accent1"/>
-          </a:lnRef>
-          <a:fillRef idx="0">
-            <a:schemeClr val="accent1"/>
-          </a:fillRef>
-          <a:effectRef idx="1">
-            <a:schemeClr val="accent1"/>
-          </a:effectRef>
-          <a:fontRef idx="minor">
-            <a:schemeClr val="tx1"/>
-          </a:fontRef>
-        </p:style>
-      </p:cxnSp>
-      <p:sp>
-        <p:nvSpPr>
-          <p:cNvPr id="34" name="TextBox 33">
-            <a:extLst>
-              <a:ext uri="{FF2B5EF4-FFF2-40B4-BE49-F238E27FC236}">
-                <a16:creationId xmlns:a16="http://schemas.microsoft.com/office/drawing/2014/main" id="{DD906E7D-FF64-09FE-65EF-837BDD47046A}"/>
-              </a:ext>
-            </a:extLst>
-          </p:cNvPr>
-          <p:cNvSpPr txBox="1"/>
-          <p:nvPr/>
-        </p:nvSpPr>
-        <p:spPr>
-          <a:xfrm>
-            <a:off x="-78034" y="887761"/>
-            <a:ext cx="307777" cy="1275889"/>
-          </a:xfrm>
-          <a:prstGeom prst="rect">
-            <a:avLst/>
-          </a:prstGeom>
-          <a:noFill/>
-        </p:spPr>
-        <p:txBody>
-          <a:bodyPr vert="vert270" wrap="square" rtlCol="0">
-            <a:spAutoFit/>
-          </a:bodyPr>
-          <a:lstStyle/>
-          <a:p>
-            <a:pPr algn="ctr"/>
-            <a:r>
-              <a:rPr lang="en-US" sz="800" b="1" dirty="0">
-                <a:solidFill>
-                  <a:schemeClr val="tx1">
-                    <a:lumMod val="95000"/>
-                    <a:lumOff val="5000"/>
-                  </a:schemeClr>
-                </a:solidFill>
-                <a:latin typeface="Calibri" panose="020F0502020204030204" pitchFamily="34" charset="0"/>
-                <a:cs typeface="Calibri" panose="020F0502020204030204" pitchFamily="34" charset="0"/>
-              </a:rPr>
-              <a:t>Observed</a:t>
-            </a:r>
-            <a:endParaRPr lang="en-US" sz="800" dirty="0">
-              <a:solidFill>
-                <a:srgbClr val="0000FF"/>
-              </a:solidFill>
-              <a:latin typeface="Calibri Light" panose="020F0302020204030204" pitchFamily="34" charset="0"/>
-              <a:cs typeface="Calibri Light" panose="020F0302020204030204" pitchFamily="34" charset="0"/>
-            </a:endParaRPr>
-          </a:p>
-        </p:txBody>
-      </p:sp>
-      <p:sp>
-        <p:nvSpPr>
-          <p:cNvPr id="35" name="TextBox 34">
-            <a:extLst>
-              <a:ext uri="{FF2B5EF4-FFF2-40B4-BE49-F238E27FC236}">
-                <a16:creationId xmlns:a16="http://schemas.microsoft.com/office/drawing/2014/main" id="{CDF5D99F-239B-7286-E705-43476984C1FD}"/>
-              </a:ext>
-            </a:extLst>
-          </p:cNvPr>
-          <p:cNvSpPr txBox="1"/>
-          <p:nvPr/>
-        </p:nvSpPr>
-        <p:spPr>
-          <a:xfrm>
-            <a:off x="98296" y="760014"/>
-            <a:ext cx="307777" cy="736524"/>
-          </a:xfrm>
-          <a:prstGeom prst="rect">
-            <a:avLst/>
-          </a:prstGeom>
-          <a:noFill/>
-        </p:spPr>
-        <p:txBody>
-          <a:bodyPr vert="vert270" wrap="square" rtlCol="0">
-            <a:spAutoFit/>
-          </a:bodyPr>
-          <a:lstStyle/>
-          <a:p>
-            <a:pPr algn="ctr"/>
-            <a:r>
-              <a:rPr lang="en-US" sz="800" dirty="0">
-                <a:solidFill>
-                  <a:srgbClr val="0000FF"/>
-                </a:solidFill>
-                <a:latin typeface="Calibri Light" panose="020F0302020204030204" pitchFamily="34" charset="0"/>
-                <a:cs typeface="Calibri Light" panose="020F0302020204030204" pitchFamily="34" charset="0"/>
-              </a:rPr>
-              <a:t>yes-events</a:t>
-            </a:r>
-          </a:p>
-        </p:txBody>
-      </p:sp>
-      <p:sp>
-        <p:nvSpPr>
-          <p:cNvPr id="36" name="TextBox 35">
-            <a:extLst>
-              <a:ext uri="{FF2B5EF4-FFF2-40B4-BE49-F238E27FC236}">
-                <a16:creationId xmlns:a16="http://schemas.microsoft.com/office/drawing/2014/main" id="{A09387BF-360E-1373-B4E2-484CDF5B6943}"/>
-              </a:ext>
-            </a:extLst>
-          </p:cNvPr>
-          <p:cNvSpPr txBox="1"/>
-          <p:nvPr/>
-        </p:nvSpPr>
-        <p:spPr>
-          <a:xfrm>
-            <a:off x="928929" y="403094"/>
-            <a:ext cx="863944" cy="215444"/>
-          </a:xfrm>
-          <a:prstGeom prst="rect">
-            <a:avLst/>
-          </a:prstGeom>
-          <a:noFill/>
-        </p:spPr>
-        <p:txBody>
-          <a:bodyPr wrap="square" rtlCol="0">
-            <a:spAutoFit/>
-          </a:bodyPr>
-          <a:lstStyle/>
-          <a:p>
-            <a:pPr algn="ctr"/>
-            <a:r>
-              <a:rPr lang="en-US" sz="800" b="1" dirty="0">
-                <a:solidFill>
-                  <a:schemeClr val="tx1">
-                    <a:lumMod val="95000"/>
-                    <a:lumOff val="5000"/>
-                  </a:schemeClr>
-                </a:solidFill>
-                <a:latin typeface="Calibri" panose="020F0502020204030204" pitchFamily="34" charset="0"/>
-                <a:cs typeface="Calibri" panose="020F0502020204030204" pitchFamily="34" charset="0"/>
-              </a:rPr>
-              <a:t>Predicted</a:t>
-            </a:r>
-            <a:endParaRPr lang="en-US" sz="800" dirty="0">
-              <a:solidFill>
-                <a:srgbClr val="D6A300"/>
-              </a:solidFill>
-              <a:latin typeface="Calibri Light" panose="020F0302020204030204" pitchFamily="34" charset="0"/>
-              <a:cs typeface="Calibri Light" panose="020F0302020204030204" pitchFamily="34" charset="0"/>
-            </a:endParaRPr>
-          </a:p>
-        </p:txBody>
-      </p:sp>
-      <p:sp>
-        <p:nvSpPr>
-          <p:cNvPr id="37" name="TextBox 36">
-            <a:extLst>
-              <a:ext uri="{FF2B5EF4-FFF2-40B4-BE49-F238E27FC236}">
-                <a16:creationId xmlns:a16="http://schemas.microsoft.com/office/drawing/2014/main" id="{FEE84F7D-562E-3E17-3F19-517232627412}"/>
-              </a:ext>
-            </a:extLst>
-          </p:cNvPr>
-          <p:cNvSpPr txBox="1"/>
-          <p:nvPr/>
-        </p:nvSpPr>
-        <p:spPr>
-          <a:xfrm>
-            <a:off x="1557859" y="563513"/>
-            <a:ext cx="863944" cy="215444"/>
-          </a:xfrm>
-          <a:prstGeom prst="rect">
-            <a:avLst/>
-          </a:prstGeom>
-          <a:noFill/>
-        </p:spPr>
-        <p:txBody>
-          <a:bodyPr wrap="square" rtlCol="0">
-            <a:spAutoFit/>
-          </a:bodyPr>
-          <a:lstStyle/>
-          <a:p>
-            <a:pPr algn="ctr"/>
-            <a:r>
-              <a:rPr lang="en-US" sz="800" dirty="0">
-                <a:solidFill>
-                  <a:srgbClr val="D6A300"/>
-                </a:solidFill>
-                <a:latin typeface="Calibri Light" panose="020F0302020204030204" pitchFamily="34" charset="0"/>
-                <a:cs typeface="Calibri Light" panose="020F0302020204030204" pitchFamily="34" charset="0"/>
-              </a:rPr>
-              <a:t>non-events</a:t>
-            </a:r>
-          </a:p>
-        </p:txBody>
-      </p:sp>
-      <p:sp>
-        <p:nvSpPr>
-          <p:cNvPr id="38" name="TextBox 37">
-            <a:extLst>
-              <a:ext uri="{FF2B5EF4-FFF2-40B4-BE49-F238E27FC236}">
-                <a16:creationId xmlns:a16="http://schemas.microsoft.com/office/drawing/2014/main" id="{F3106249-1C45-1C12-2453-07133FF1CD86}"/>
-              </a:ext>
-            </a:extLst>
-          </p:cNvPr>
-          <p:cNvSpPr txBox="1"/>
-          <p:nvPr/>
-        </p:nvSpPr>
-        <p:spPr>
-          <a:xfrm>
-            <a:off x="364058" y="567326"/>
-            <a:ext cx="863944" cy="215444"/>
-          </a:xfrm>
-          <a:prstGeom prst="rect">
-            <a:avLst/>
-          </a:prstGeom>
-          <a:noFill/>
-        </p:spPr>
-        <p:txBody>
-          <a:bodyPr wrap="square" rtlCol="0">
-            <a:spAutoFit/>
-          </a:bodyPr>
-          <a:lstStyle/>
-          <a:p>
-            <a:pPr algn="ctr"/>
-            <a:r>
-              <a:rPr lang="en-US" sz="800" dirty="0">
-                <a:solidFill>
-                  <a:srgbClr val="33CC33"/>
-                </a:solidFill>
-                <a:latin typeface="Calibri Light" panose="020F0302020204030204" pitchFamily="34" charset="0"/>
-                <a:cs typeface="Calibri Light" panose="020F0302020204030204" pitchFamily="34" charset="0"/>
-              </a:rPr>
-              <a:t>yes-events</a:t>
-            </a:r>
-          </a:p>
-        </p:txBody>
-      </p:sp>
-      <p:sp>
-        <p:nvSpPr>
-          <p:cNvPr id="39" name="TextBox 38">
-            <a:extLst>
-              <a:ext uri="{FF2B5EF4-FFF2-40B4-BE49-F238E27FC236}">
-                <a16:creationId xmlns:a16="http://schemas.microsoft.com/office/drawing/2014/main" id="{E3F5F678-30B9-E5A6-EDA8-349820A25D9E}"/>
-              </a:ext>
-            </a:extLst>
-          </p:cNvPr>
-          <p:cNvSpPr txBox="1"/>
-          <p:nvPr/>
-        </p:nvSpPr>
-        <p:spPr>
-          <a:xfrm>
-            <a:off x="99447" y="1564541"/>
-            <a:ext cx="307777" cy="736524"/>
-          </a:xfrm>
-          <a:prstGeom prst="rect">
-            <a:avLst/>
-          </a:prstGeom>
-          <a:noFill/>
-        </p:spPr>
-        <p:txBody>
-          <a:bodyPr vert="vert270" wrap="square" rtlCol="0">
-            <a:spAutoFit/>
-          </a:bodyPr>
-          <a:lstStyle/>
-          <a:p>
-            <a:pPr algn="ctr"/>
-            <a:r>
-              <a:rPr lang="en-US" sz="800" dirty="0">
-                <a:solidFill>
-                  <a:srgbClr val="FF0066"/>
-                </a:solidFill>
-                <a:latin typeface="Calibri Light" panose="020F0302020204030204" pitchFamily="34" charset="0"/>
-                <a:cs typeface="Calibri Light" panose="020F0302020204030204" pitchFamily="34" charset="0"/>
-              </a:rPr>
-              <a:t>non-events</a:t>
-            </a:r>
-          </a:p>
-        </p:txBody>
-      </p:sp>
-      <p:sp>
-        <p:nvSpPr>
-          <p:cNvPr id="40" name="TextBox 39">
-            <a:extLst>
-              <a:ext uri="{FF2B5EF4-FFF2-40B4-BE49-F238E27FC236}">
-                <a16:creationId xmlns:a16="http://schemas.microsoft.com/office/drawing/2014/main" id="{7ED78E03-DDB8-9C4E-DC18-F07659A40AE4}"/>
-              </a:ext>
-            </a:extLst>
-          </p:cNvPr>
-          <p:cNvSpPr txBox="1"/>
-          <p:nvPr/>
-        </p:nvSpPr>
-        <p:spPr>
-          <a:xfrm>
-            <a:off x="2757314" y="759281"/>
-            <a:ext cx="1368000" cy="707886"/>
-          </a:xfrm>
-          <a:prstGeom prst="rect">
-            <a:avLst/>
-          </a:prstGeom>
-          <a:noFill/>
-          <a:ln w="3175">
-            <a:solidFill>
-              <a:schemeClr val="tx1">
-                <a:lumMod val="75000"/>
-                <a:lumOff val="25000"/>
-              </a:schemeClr>
-            </a:solidFill>
-          </a:ln>
-        </p:spPr>
-        <p:txBody>
-          <a:bodyPr wrap="square" rtlCol="0">
-            <a:spAutoFit/>
-          </a:bodyPr>
-          <a:lstStyle/>
-          <a:p>
-            <a:pPr algn="ctr"/>
-            <a:r>
-              <a:rPr lang="en-US" sz="800" b="1" i="1" dirty="0">
-                <a:latin typeface="Calibri" panose="020F0502020204030204" pitchFamily="34" charset="0"/>
-                <a:cs typeface="Calibri" panose="020F0502020204030204" pitchFamily="34" charset="0"/>
-              </a:rPr>
-              <a:t>HIT RATE or RECALL [-]</a:t>
-            </a:r>
-          </a:p>
-          <a:p>
-            <a:pPr algn="ctr"/>
-            <a:r>
-              <a:rPr lang="en-GB" sz="800" i="1" dirty="0">
-                <a:latin typeface="Calibri Light" panose="020F0302020204030204" pitchFamily="34" charset="0"/>
-                <a:cs typeface="Calibri Light" panose="020F0302020204030204" pitchFamily="34" charset="0"/>
-              </a:rPr>
-              <a:t>Proportion of observed yes-events that were correctly predicted</a:t>
-            </a:r>
-          </a:p>
-          <a:p>
-            <a:pPr algn="ctr"/>
-            <a:r>
-              <a:rPr lang="en-GB" sz="800" i="1" dirty="0">
-                <a:latin typeface="Calibri Light" panose="020F0302020204030204" pitchFamily="34" charset="0"/>
-                <a:cs typeface="Calibri Light" panose="020F0302020204030204" pitchFamily="34" charset="0"/>
-              </a:rPr>
-              <a:t>HR = H / (H + M)</a:t>
-            </a:r>
-          </a:p>
-        </p:txBody>
-      </p:sp>
-      <p:sp>
-        <p:nvSpPr>
-          <p:cNvPr id="41" name="TextBox 40">
-            <a:extLst>
-              <a:ext uri="{FF2B5EF4-FFF2-40B4-BE49-F238E27FC236}">
-                <a16:creationId xmlns:a16="http://schemas.microsoft.com/office/drawing/2014/main" id="{307BB4E1-82F3-30C4-2FB1-591A624180EF}"/>
-              </a:ext>
-            </a:extLst>
-          </p:cNvPr>
-          <p:cNvSpPr txBox="1"/>
-          <p:nvPr/>
-        </p:nvSpPr>
-        <p:spPr>
-          <a:xfrm>
-            <a:off x="2757314" y="1578875"/>
-            <a:ext cx="1368000" cy="720000"/>
-          </a:xfrm>
-          <a:prstGeom prst="rect">
-            <a:avLst/>
-          </a:prstGeom>
-          <a:noFill/>
-          <a:ln w="3175">
-            <a:solidFill>
-              <a:schemeClr val="tx1">
-                <a:lumMod val="75000"/>
-                <a:lumOff val="25000"/>
-              </a:schemeClr>
-            </a:solidFill>
-          </a:ln>
-        </p:spPr>
-        <p:txBody>
-          <a:bodyPr wrap="square" rtlCol="0">
-            <a:spAutoFit/>
-          </a:bodyPr>
-          <a:lstStyle/>
-          <a:p>
-            <a:pPr algn="ctr"/>
-            <a:r>
-              <a:rPr lang="en-US" sz="800" b="1" i="1" dirty="0">
-                <a:latin typeface="Calibri" panose="020F0502020204030204" pitchFamily="34" charset="0"/>
-                <a:cs typeface="Calibri" panose="020F0502020204030204" pitchFamily="34" charset="0"/>
-              </a:rPr>
-              <a:t>FALSE ALARM RATE [-]</a:t>
-            </a:r>
-          </a:p>
-          <a:p>
-            <a:pPr algn="ctr"/>
-            <a:r>
-              <a:rPr lang="en-GB" sz="800" i="1" dirty="0">
-                <a:latin typeface="Calibri Light" panose="020F0302020204030204" pitchFamily="34" charset="0"/>
-                <a:cs typeface="Calibri Light" panose="020F0302020204030204" pitchFamily="34" charset="0"/>
-              </a:rPr>
-              <a:t>Proportion of observed non-events that were incorrectly predicted as yes-events</a:t>
-            </a:r>
-          </a:p>
-          <a:p>
-            <a:pPr algn="ctr"/>
-            <a:r>
-              <a:rPr lang="en-GB" sz="800" i="1" dirty="0">
-                <a:latin typeface="Calibri Light" panose="020F0302020204030204" pitchFamily="34" charset="0"/>
-                <a:cs typeface="Calibri Light" panose="020F0302020204030204" pitchFamily="34" charset="0"/>
-              </a:rPr>
-              <a:t>FAR = FA / (FA + CN)</a:t>
-            </a:r>
-          </a:p>
-        </p:txBody>
-      </p:sp>
-      <p:sp>
-        <p:nvSpPr>
-          <p:cNvPr id="42" name="TextBox 41">
-            <a:extLst>
-              <a:ext uri="{FF2B5EF4-FFF2-40B4-BE49-F238E27FC236}">
-                <a16:creationId xmlns:a16="http://schemas.microsoft.com/office/drawing/2014/main" id="{9B7BC31B-AF25-6343-17FE-7E9A8F8B73EB}"/>
-              </a:ext>
-            </a:extLst>
-          </p:cNvPr>
-          <p:cNvSpPr txBox="1"/>
-          <p:nvPr/>
-        </p:nvSpPr>
-        <p:spPr>
-          <a:xfrm>
-            <a:off x="258000" y="2414302"/>
-            <a:ext cx="1080000" cy="707886"/>
-          </a:xfrm>
-          <a:prstGeom prst="rect">
-            <a:avLst/>
-          </a:prstGeom>
-          <a:noFill/>
-          <a:ln w="3175">
-            <a:solidFill>
-              <a:schemeClr val="tx1">
-                <a:lumMod val="75000"/>
-                <a:lumOff val="25000"/>
-              </a:schemeClr>
-            </a:solidFill>
-          </a:ln>
-        </p:spPr>
-        <p:txBody>
-          <a:bodyPr wrap="square" rtlCol="0">
-            <a:spAutoFit/>
-          </a:bodyPr>
-          <a:lstStyle/>
-          <a:p>
-            <a:pPr algn="ctr"/>
-            <a:r>
-              <a:rPr lang="en-US" sz="800" b="1" i="1" dirty="0">
-                <a:latin typeface="Calibri" panose="020F0502020204030204" pitchFamily="34" charset="0"/>
-                <a:cs typeface="Calibri" panose="020F0502020204030204" pitchFamily="34" charset="0"/>
-              </a:rPr>
-              <a:t>PRECISION [-]</a:t>
-            </a:r>
-          </a:p>
-          <a:p>
-            <a:pPr algn="ctr"/>
-            <a:r>
-              <a:rPr lang="en-GB" sz="800" i="1" dirty="0">
-                <a:latin typeface="Calibri Light" panose="020F0302020204030204" pitchFamily="34" charset="0"/>
-                <a:cs typeface="Calibri Light" panose="020F0302020204030204" pitchFamily="34" charset="0"/>
-              </a:rPr>
-              <a:t>Proportion of predicted yes-events that were observed</a:t>
-            </a:r>
-          </a:p>
-          <a:p>
-            <a:pPr algn="ctr"/>
-            <a:r>
-              <a:rPr lang="en-GB" sz="800" i="1" dirty="0">
-                <a:latin typeface="Calibri Light" panose="020F0302020204030204" pitchFamily="34" charset="0"/>
-                <a:cs typeface="Calibri Light" panose="020F0302020204030204" pitchFamily="34" charset="0"/>
-              </a:rPr>
-              <a:t>P = H / (H + FA)</a:t>
-            </a:r>
-          </a:p>
-        </p:txBody>
-      </p:sp>
-      <p:sp>
-        <p:nvSpPr>
-          <p:cNvPr id="43" name="Rectangle 42">
-            <a:extLst>
-              <a:ext uri="{FF2B5EF4-FFF2-40B4-BE49-F238E27FC236}">
-                <a16:creationId xmlns:a16="http://schemas.microsoft.com/office/drawing/2014/main" id="{2D87FE8A-4BD4-D2C0-4981-4C00E52C4C21}"/>
-              </a:ext>
-            </a:extLst>
-          </p:cNvPr>
-          <p:cNvSpPr/>
-          <p:nvPr/>
-        </p:nvSpPr>
-        <p:spPr>
-          <a:xfrm>
-            <a:off x="1809831" y="2138288"/>
-            <a:ext cx="360000" cy="90000"/>
-          </a:xfrm>
-          <a:prstGeom prst="rect">
-            <a:avLst/>
-          </a:prstGeom>
-          <a:pattFill prst="dkHorz">
-            <a:fgClr>
-              <a:srgbClr val="E07A1A"/>
-            </a:fgClr>
-            <a:bgClr>
-              <a:schemeClr val="bg1"/>
-            </a:bgClr>
-          </a:pattFill>
-          <a:ln w="1270">
-            <a:solidFill>
-              <a:schemeClr val="bg1">
-                <a:lumMod val="50000"/>
-              </a:schemeClr>
-            </a:solidFill>
-          </a:ln>
-        </p:spPr>
-        <p:style>
-          <a:lnRef idx="2">
-            <a:schemeClr val="accent1">
-              <a:shade val="15000"/>
-            </a:schemeClr>
-          </a:lnRef>
-          <a:fillRef idx="1">
-            <a:schemeClr val="accent1"/>
-          </a:fillRef>
-          <a:effectRef idx="0">
-            <a:schemeClr val="accent1"/>
-          </a:effectRef>
-          <a:fontRef idx="minor">
-            <a:schemeClr val="lt1"/>
-          </a:fontRef>
-        </p:style>
-        <p:txBody>
-          <a:bodyPr rtlCol="0" anchor="ctr"/>
-          <a:lstStyle/>
-          <a:p>
-            <a:pPr algn="ctr"/>
-            <a:endParaRPr lang="en-GB">
-              <a:latin typeface="Calibri" panose="020F0502020204030204" pitchFamily="34" charset="0"/>
-              <a:cs typeface="Calibri" panose="020F0502020204030204" pitchFamily="34" charset="0"/>
-            </a:endParaRPr>
-          </a:p>
-        </p:txBody>
-      </p:sp>
-      <p:sp>
-        <p:nvSpPr>
-          <p:cNvPr id="44" name="Rectangle 43">
-            <a:extLst>
-              <a:ext uri="{FF2B5EF4-FFF2-40B4-BE49-F238E27FC236}">
-                <a16:creationId xmlns:a16="http://schemas.microsoft.com/office/drawing/2014/main" id="{65533EAA-5F83-EA70-6747-5F625123CB00}"/>
-              </a:ext>
-            </a:extLst>
-          </p:cNvPr>
-          <p:cNvSpPr/>
-          <p:nvPr/>
-        </p:nvSpPr>
-        <p:spPr>
-          <a:xfrm>
-            <a:off x="616030" y="2138288"/>
-            <a:ext cx="360000" cy="90000"/>
-          </a:xfrm>
-          <a:prstGeom prst="rect">
-            <a:avLst/>
-          </a:prstGeom>
-          <a:solidFill>
-            <a:srgbClr val="AD5252">
-              <a:alpha val="49804"/>
-            </a:srgbClr>
-          </a:solidFill>
-          <a:ln w="3175">
-            <a:solidFill>
-              <a:schemeClr val="bg1">
-                <a:lumMod val="50000"/>
-              </a:schemeClr>
-            </a:solidFill>
-          </a:ln>
-        </p:spPr>
-        <p:style>
-          <a:lnRef idx="2">
-            <a:schemeClr val="accent1">
-              <a:shade val="15000"/>
-            </a:schemeClr>
-          </a:lnRef>
-          <a:fillRef idx="1">
-            <a:schemeClr val="accent1"/>
-          </a:fillRef>
-          <a:effectRef idx="0">
-            <a:schemeClr val="accent1"/>
-          </a:effectRef>
-          <a:fontRef idx="minor">
-            <a:schemeClr val="lt1"/>
-          </a:fontRef>
-        </p:style>
-        <p:txBody>
-          <a:bodyPr rtlCol="0" anchor="ctr"/>
-          <a:lstStyle/>
-          <a:p>
-            <a:pPr algn="ctr"/>
-            <a:endParaRPr lang="en-GB">
-              <a:latin typeface="Calibri" panose="020F0502020204030204" pitchFamily="34" charset="0"/>
-              <a:cs typeface="Calibri" panose="020F0502020204030204" pitchFamily="34" charset="0"/>
-            </a:endParaRPr>
-          </a:p>
-        </p:txBody>
-      </p:sp>
-      <p:sp>
-        <p:nvSpPr>
-          <p:cNvPr id="45" name="Rectangle 44">
-            <a:extLst>
-              <a:ext uri="{FF2B5EF4-FFF2-40B4-BE49-F238E27FC236}">
-                <a16:creationId xmlns:a16="http://schemas.microsoft.com/office/drawing/2014/main" id="{545E5C43-F926-13EA-70BE-CA710E33D019}"/>
-              </a:ext>
-            </a:extLst>
-          </p:cNvPr>
-          <p:cNvSpPr/>
-          <p:nvPr/>
-        </p:nvSpPr>
-        <p:spPr>
-          <a:xfrm>
-            <a:off x="1809831" y="1332433"/>
-            <a:ext cx="360000" cy="90000"/>
-          </a:xfrm>
-          <a:prstGeom prst="rect">
-            <a:avLst/>
-          </a:prstGeom>
-          <a:solidFill>
-            <a:srgbClr val="96724C">
-              <a:alpha val="49804"/>
-            </a:srgbClr>
-          </a:solidFill>
-          <a:ln w="3175">
-            <a:solidFill>
-              <a:schemeClr val="bg1">
-                <a:lumMod val="50000"/>
-              </a:schemeClr>
-            </a:solidFill>
-          </a:ln>
-        </p:spPr>
-        <p:style>
-          <a:lnRef idx="2">
-            <a:schemeClr val="accent1">
-              <a:shade val="15000"/>
-            </a:schemeClr>
-          </a:lnRef>
-          <a:fillRef idx="1">
-            <a:schemeClr val="accent1"/>
-          </a:fillRef>
-          <a:effectRef idx="0">
-            <a:schemeClr val="accent1"/>
-          </a:effectRef>
-          <a:fontRef idx="minor">
-            <a:schemeClr val="lt1"/>
-          </a:fontRef>
-        </p:style>
-        <p:txBody>
-          <a:bodyPr rtlCol="0" anchor="ctr"/>
-          <a:lstStyle/>
-          <a:p>
-            <a:pPr algn="ctr"/>
-            <a:endParaRPr lang="en-GB" dirty="0">
-              <a:latin typeface="Calibri" panose="020F0502020204030204" pitchFamily="34" charset="0"/>
-              <a:cs typeface="Calibri" panose="020F0502020204030204" pitchFamily="34" charset="0"/>
-            </a:endParaRPr>
-          </a:p>
-        </p:txBody>
-      </p:sp>
-      <p:sp>
-        <p:nvSpPr>
-          <p:cNvPr id="46" name="Rectangle 45">
-            <a:extLst>
-              <a:ext uri="{FF2B5EF4-FFF2-40B4-BE49-F238E27FC236}">
-                <a16:creationId xmlns:a16="http://schemas.microsoft.com/office/drawing/2014/main" id="{4ABA71F5-F7CE-E653-5451-1F27E1EA51A4}"/>
-              </a:ext>
-            </a:extLst>
-          </p:cNvPr>
-          <p:cNvSpPr/>
-          <p:nvPr/>
-        </p:nvSpPr>
-        <p:spPr>
-          <a:xfrm>
-            <a:off x="616030" y="1334883"/>
-            <a:ext cx="360000" cy="90000"/>
-          </a:xfrm>
-          <a:prstGeom prst="rect">
-            <a:avLst/>
-          </a:prstGeom>
-          <a:pattFill prst="wdDnDiag">
-            <a:fgClr>
-              <a:srgbClr val="21857A"/>
-            </a:fgClr>
-            <a:bgClr>
-              <a:schemeClr val="bg1"/>
-            </a:bgClr>
-          </a:pattFill>
-          <a:ln w="3175">
-            <a:solidFill>
-              <a:schemeClr val="bg1">
-                <a:lumMod val="50000"/>
-              </a:schemeClr>
-            </a:solidFill>
-          </a:ln>
-        </p:spPr>
-        <p:style>
-          <a:lnRef idx="2">
-            <a:schemeClr val="accent1">
-              <a:shade val="15000"/>
-            </a:schemeClr>
-          </a:lnRef>
-          <a:fillRef idx="1">
-            <a:schemeClr val="accent1"/>
-          </a:fillRef>
-          <a:effectRef idx="0">
-            <a:schemeClr val="accent1"/>
-          </a:effectRef>
-          <a:fontRef idx="minor">
-            <a:schemeClr val="lt1"/>
-          </a:fontRef>
-        </p:style>
-        <p:txBody>
-          <a:bodyPr rtlCol="0" anchor="ctr"/>
-          <a:lstStyle/>
-          <a:p>
-            <a:pPr algn="ctr"/>
-            <a:endParaRPr lang="en-GB" dirty="0">
-              <a:latin typeface="Calibri" panose="020F0502020204030204" pitchFamily="34" charset="0"/>
-              <a:cs typeface="Calibri" panose="020F0502020204030204" pitchFamily="34" charset="0"/>
-            </a:endParaRPr>
-          </a:p>
-        </p:txBody>
-      </p:sp>
-      <p:sp>
-        <p:nvSpPr>
-          <p:cNvPr id="47" name="TextBox 46">
-            <a:extLst>
-              <a:ext uri="{FF2B5EF4-FFF2-40B4-BE49-F238E27FC236}">
-                <a16:creationId xmlns:a16="http://schemas.microsoft.com/office/drawing/2014/main" id="{C700B7F9-A72E-559F-D17A-BFCCF191350D}"/>
-              </a:ext>
-            </a:extLst>
-          </p:cNvPr>
-          <p:cNvSpPr txBox="1"/>
-          <p:nvPr/>
-        </p:nvSpPr>
-        <p:spPr>
-          <a:xfrm>
-            <a:off x="3679970" y="3594738"/>
-            <a:ext cx="527261" cy="215444"/>
-          </a:xfrm>
-          <a:prstGeom prst="rect">
-            <a:avLst/>
-          </a:prstGeom>
-          <a:noFill/>
-        </p:spPr>
-        <p:txBody>
-          <a:bodyPr wrap="square" rtlCol="0">
-            <a:spAutoFit/>
-          </a:bodyPr>
-          <a:lstStyle/>
-          <a:p>
-            <a:pPr algn="ctr"/>
             <a:r>
               <a:rPr lang="en-US" sz="800" dirty="0">
                 <a:solidFill>
@@ -15328,298 +15748,8 @@
                 <a:latin typeface="Calibri Light" panose="020F0302020204030204" pitchFamily="34" charset="0"/>
                 <a:cs typeface="Calibri Light" panose="020F0302020204030204" pitchFamily="34" charset="0"/>
               </a:rPr>
-              <a:t>100 %</a:t>
+              <a:t>(c) Derived verification metrics</a:t>
             </a:r>
-          </a:p>
-        </p:txBody>
-      </p:sp>
-      <p:sp>
-        <p:nvSpPr>
-          <p:cNvPr id="48" name="Rectangle 47">
-            <a:extLst>
-              <a:ext uri="{FF2B5EF4-FFF2-40B4-BE49-F238E27FC236}">
-                <a16:creationId xmlns:a16="http://schemas.microsoft.com/office/drawing/2014/main" id="{BA6B5728-94FF-1C7C-CD97-4D776F6436FF}"/>
-              </a:ext>
-            </a:extLst>
-          </p:cNvPr>
-          <p:cNvSpPr/>
-          <p:nvPr/>
-        </p:nvSpPr>
-        <p:spPr>
-          <a:xfrm>
-            <a:off x="2169831" y="3701449"/>
-            <a:ext cx="539909" cy="130163"/>
-          </a:xfrm>
-          <a:prstGeom prst="rect">
-            <a:avLst/>
-          </a:prstGeom>
-          <a:solidFill>
-            <a:schemeClr val="bg1"/>
-          </a:solidFill>
-          <a:ln>
-            <a:noFill/>
-          </a:ln>
-          <a:effectLst/>
-        </p:spPr>
-        <p:style>
-          <a:lnRef idx="2">
-            <a:schemeClr val="accent1">
-              <a:shade val="15000"/>
-            </a:schemeClr>
-          </a:lnRef>
-          <a:fillRef idx="1">
-            <a:schemeClr val="accent1"/>
-          </a:fillRef>
-          <a:effectRef idx="0">
-            <a:schemeClr val="accent1"/>
-          </a:effectRef>
-          <a:fontRef idx="minor">
-            <a:schemeClr val="lt1"/>
-          </a:fontRef>
-        </p:style>
-        <p:txBody>
-          <a:bodyPr rtlCol="0" anchor="ctr"/>
-          <a:lstStyle/>
-          <a:p>
-            <a:pPr algn="ctr"/>
-            <a:endParaRPr lang="en-GB"/>
-          </a:p>
-        </p:txBody>
-      </p:sp>
-      <p:sp>
-        <p:nvSpPr>
-          <p:cNvPr id="49" name="TextBox 48">
-            <a:extLst>
-              <a:ext uri="{FF2B5EF4-FFF2-40B4-BE49-F238E27FC236}">
-                <a16:creationId xmlns:a16="http://schemas.microsoft.com/office/drawing/2014/main" id="{BE8CA2C2-9A67-A315-55CF-D3B76C5B4ABF}"/>
-              </a:ext>
-            </a:extLst>
-          </p:cNvPr>
-          <p:cNvSpPr txBox="1"/>
-          <p:nvPr/>
-        </p:nvSpPr>
-        <p:spPr>
-          <a:xfrm>
-            <a:off x="2068507" y="3668843"/>
-            <a:ext cx="340242" cy="222175"/>
-          </a:xfrm>
-          <a:prstGeom prst="rect">
-            <a:avLst/>
-          </a:prstGeom>
-          <a:noFill/>
-        </p:spPr>
-        <p:txBody>
-          <a:bodyPr wrap="square" rtlCol="0">
-            <a:spAutoFit/>
-          </a:bodyPr>
-          <a:lstStyle/>
-          <a:p>
-            <a:pPr algn="ctr"/>
-            <a:r>
-              <a:rPr lang="en-US" sz="800" b="1" dirty="0">
-                <a:solidFill>
-                  <a:schemeClr val="tx1">
-                    <a:lumMod val="95000"/>
-                    <a:lumOff val="5000"/>
-                  </a:schemeClr>
-                </a:solidFill>
-                <a:latin typeface="Calibri Light" panose="020F0302020204030204" pitchFamily="34" charset="0"/>
-                <a:cs typeface="Calibri Light" panose="020F0302020204030204" pitchFamily="34" charset="0"/>
-              </a:rPr>
-              <a:t>M</a:t>
-            </a:r>
-          </a:p>
-        </p:txBody>
-      </p:sp>
-      <p:sp>
-        <p:nvSpPr>
-          <p:cNvPr id="50" name="TextBox 49">
-            <a:extLst>
-              <a:ext uri="{FF2B5EF4-FFF2-40B4-BE49-F238E27FC236}">
-                <a16:creationId xmlns:a16="http://schemas.microsoft.com/office/drawing/2014/main" id="{16D7E8D5-094D-0801-2477-66BD27467E33}"/>
-              </a:ext>
-            </a:extLst>
-          </p:cNvPr>
-          <p:cNvSpPr txBox="1"/>
-          <p:nvPr/>
-        </p:nvSpPr>
-        <p:spPr>
-          <a:xfrm>
-            <a:off x="2376398" y="3664967"/>
-            <a:ext cx="340242" cy="222175"/>
-          </a:xfrm>
-          <a:prstGeom prst="rect">
-            <a:avLst/>
-          </a:prstGeom>
-          <a:noFill/>
-        </p:spPr>
-        <p:txBody>
-          <a:bodyPr wrap="square" rtlCol="0">
-            <a:spAutoFit/>
-          </a:bodyPr>
-          <a:lstStyle/>
-          <a:p>
-            <a:pPr algn="ctr"/>
-            <a:r>
-              <a:rPr lang="en-US" sz="800" b="1" dirty="0">
-                <a:solidFill>
-                  <a:schemeClr val="tx1">
-                    <a:lumMod val="95000"/>
-                    <a:lumOff val="5000"/>
-                  </a:schemeClr>
-                </a:solidFill>
-                <a:latin typeface="Calibri Light" panose="020F0302020204030204" pitchFamily="34" charset="0"/>
-                <a:cs typeface="Calibri Light" panose="020F0302020204030204" pitchFamily="34" charset="0"/>
-              </a:rPr>
-              <a:t>FA</a:t>
-            </a:r>
-          </a:p>
-        </p:txBody>
-      </p:sp>
-      <p:sp>
-        <p:nvSpPr>
-          <p:cNvPr id="51" name="TextBox 50">
-            <a:extLst>
-              <a:ext uri="{FF2B5EF4-FFF2-40B4-BE49-F238E27FC236}">
-                <a16:creationId xmlns:a16="http://schemas.microsoft.com/office/drawing/2014/main" id="{5E7D516C-6098-CA78-A68A-A60E91A03B8B}"/>
-              </a:ext>
-            </a:extLst>
-          </p:cNvPr>
-          <p:cNvSpPr txBox="1"/>
-          <p:nvPr/>
-        </p:nvSpPr>
-        <p:spPr>
-          <a:xfrm>
-            <a:off x="2839839" y="3701449"/>
-            <a:ext cx="1363884" cy="338554"/>
-          </a:xfrm>
-          <a:prstGeom prst="rect">
-            <a:avLst/>
-          </a:prstGeom>
-          <a:noFill/>
-        </p:spPr>
-        <p:txBody>
-          <a:bodyPr wrap="square" rtlCol="0">
-            <a:spAutoFit/>
-          </a:bodyPr>
-          <a:lstStyle/>
-          <a:p>
-            <a:pPr algn="r"/>
-            <a:r>
-              <a:rPr lang="en-US" sz="800" dirty="0">
-                <a:solidFill>
-                  <a:schemeClr val="tx1">
-                    <a:lumMod val="95000"/>
-                    <a:lumOff val="5000"/>
-                  </a:schemeClr>
-                </a:solidFill>
-                <a:latin typeface="Calibri Light" panose="020F0302020204030204" pitchFamily="34" charset="0"/>
-                <a:cs typeface="Calibri Light" panose="020F0302020204030204" pitchFamily="34" charset="0"/>
-              </a:rPr>
-              <a:t>Probabilities of exceeding the verifying threshold event</a:t>
-            </a:r>
-          </a:p>
-        </p:txBody>
-      </p:sp>
-      <p:cxnSp>
-        <p:nvCxnSpPr>
-          <p:cNvPr id="52" name="Straight Arrow Connector 51">
-            <a:extLst>
-              <a:ext uri="{FF2B5EF4-FFF2-40B4-BE49-F238E27FC236}">
-                <a16:creationId xmlns:a16="http://schemas.microsoft.com/office/drawing/2014/main" id="{9F83BDF9-60EC-1D45-016B-A09DF554F68E}"/>
-              </a:ext>
-            </a:extLst>
-          </p:cNvPr>
-          <p:cNvCxnSpPr>
-            <a:cxnSpLocks/>
-          </p:cNvCxnSpPr>
-          <p:nvPr/>
-        </p:nvCxnSpPr>
-        <p:spPr>
-          <a:xfrm flipV="1">
-            <a:off x="2387010" y="2870752"/>
-            <a:ext cx="601864" cy="0"/>
-          </a:xfrm>
-          <a:prstGeom prst="straightConnector1">
-            <a:avLst/>
-          </a:prstGeom>
-          <a:ln w="3175">
-            <a:solidFill>
-              <a:schemeClr val="tx1">
-                <a:lumMod val="95000"/>
-                <a:lumOff val="5000"/>
-              </a:schemeClr>
-            </a:solidFill>
-            <a:tailEnd type="triangle"/>
-          </a:ln>
-        </p:spPr>
-        <p:style>
-          <a:lnRef idx="2">
-            <a:schemeClr val="accent1"/>
-          </a:lnRef>
-          <a:fillRef idx="0">
-            <a:schemeClr val="accent1"/>
-          </a:fillRef>
-          <a:effectRef idx="1">
-            <a:schemeClr val="accent1"/>
-          </a:effectRef>
-          <a:fontRef idx="minor">
-            <a:schemeClr val="tx1"/>
-          </a:fontRef>
-        </p:style>
-      </p:cxnSp>
-      <p:sp>
-        <p:nvSpPr>
-          <p:cNvPr id="53" name="Oval 52">
-            <a:extLst>
-              <a:ext uri="{FF2B5EF4-FFF2-40B4-BE49-F238E27FC236}">
-                <a16:creationId xmlns:a16="http://schemas.microsoft.com/office/drawing/2014/main" id="{19C06D92-10F2-6629-738B-329DDCC22607}"/>
-              </a:ext>
-            </a:extLst>
-          </p:cNvPr>
-          <p:cNvSpPr/>
-          <p:nvPr/>
-        </p:nvSpPr>
-        <p:spPr>
-          <a:xfrm>
-            <a:off x="2352587" y="3592356"/>
-            <a:ext cx="72000" cy="72000"/>
-          </a:xfrm>
-          <a:prstGeom prst="ellipse">
-            <a:avLst/>
-          </a:prstGeom>
-          <a:solidFill>
-            <a:schemeClr val="accent5">
-              <a:lumMod val="60000"/>
-              <a:lumOff val="40000"/>
-            </a:schemeClr>
-          </a:solidFill>
-          <a:ln>
-            <a:noFill/>
-          </a:ln>
-        </p:spPr>
-        <p:style>
-          <a:lnRef idx="2">
-            <a:schemeClr val="accent1">
-              <a:shade val="15000"/>
-            </a:schemeClr>
-          </a:lnRef>
-          <a:fillRef idx="1">
-            <a:schemeClr val="accent1"/>
-          </a:fillRef>
-          <a:effectRef idx="0">
-            <a:schemeClr val="accent1"/>
-          </a:effectRef>
-          <a:fontRef idx="minor">
-            <a:schemeClr val="lt1"/>
-          </a:fontRef>
-        </p:style>
-        <p:txBody>
-          <a:bodyPr rtlCol="0" anchor="ctr"/>
-          <a:lstStyle/>
-          <a:p>
-            <a:pPr algn="ctr"/>
-            <a:endParaRPr lang="en-GB"/>
           </a:p>
         </p:txBody>
       </p:sp>

--- a/chapter_05/figures/contingency_table_prob_fc.pptx
+++ b/chapter_05/figures/contingency_table_prob_fc.pptx
@@ -2,12 +2,12 @@
 <file path=ppt/presentation.xml><?xml version="1.0" encoding="utf-8"?>
 <p:presentation xmlns:a="http://schemas.openxmlformats.org/drawingml/2006/main" xmlns:r="http://schemas.openxmlformats.org/officeDocument/2006/relationships" xmlns:p="http://schemas.openxmlformats.org/presentationml/2006/main" saveSubsetFonts="1">
   <p:sldMasterIdLst>
-    <p:sldMasterId id="2147483756" r:id="rId1"/>
+    <p:sldMasterId id="2147483780" r:id="rId1"/>
   </p:sldMasterIdLst>
   <p:sldIdLst>
     <p:sldId id="256" r:id="rId2"/>
   </p:sldIdLst>
-  <p:sldSz cx="4140200" cy="4500563"/>
+  <p:sldSz cx="5759450" cy="2519363"/>
   <p:notesSz cx="6858000" cy="9144000"/>
   <p:defaultTextStyle>
     <a:defPPr>
@@ -115,7 +115,7 @@
 <file path=ppt/revisionInfo.xml><?xml version="1.0" encoding="utf-8"?>
 <p1510:revInfo xmlns:a="http://schemas.openxmlformats.org/drawingml/2006/main" xmlns:r="http://schemas.openxmlformats.org/officeDocument/2006/relationships" xmlns:p1510="http://schemas.microsoft.com/office/powerpoint/2015/10/main">
   <p1510:revLst>
-    <p1510:client id="{8AA7C05A-A40B-47BE-AD88-53F73456539F}" v="11" dt="2026-01-22T23:12:29.835"/>
+    <p1510:client id="{8AA7C05A-A40B-47BE-AD88-53F73456539F}" v="16" dt="2026-01-22T23:34:23.477"/>
   </p1510:revLst>
 </p1510:revInfo>
 </file>
@@ -125,22 +125,46 @@
   <pc:docChgLst>
     <pc:chgData name="Fatima Pillosu" userId="a6295d4dc9e22643" providerId="LiveId" clId="{87453732-75AC-4426-B5D3-B7C69C2D4F54}"/>
     <pc:docChg chg="undo custSel modSld">
-      <pc:chgData name="Fatima Pillosu" userId="a6295d4dc9e22643" providerId="LiveId" clId="{87453732-75AC-4426-B5D3-B7C69C2D4F54}" dt="2026-01-22T23:15:43.100" v="1066" actId="1036"/>
+      <pc:chgData name="Fatima Pillosu" userId="a6295d4dc9e22643" providerId="LiveId" clId="{87453732-75AC-4426-B5D3-B7C69C2D4F54}" dt="2026-01-22T23:34:52.514" v="1178" actId="1036"/>
       <pc:docMkLst>
         <pc:docMk/>
       </pc:docMkLst>
       <pc:sldChg chg="addSp delSp modSp mod">
-        <pc:chgData name="Fatima Pillosu" userId="a6295d4dc9e22643" providerId="LiveId" clId="{87453732-75AC-4426-B5D3-B7C69C2D4F54}" dt="2026-01-22T23:15:43.100" v="1066" actId="1036"/>
+        <pc:chgData name="Fatima Pillosu" userId="a6295d4dc9e22643" providerId="LiveId" clId="{87453732-75AC-4426-B5D3-B7C69C2D4F54}" dt="2026-01-22T23:34:52.514" v="1178" actId="1036"/>
         <pc:sldMkLst>
           <pc:docMk/>
           <pc:sldMk cId="1573992039" sldId="256"/>
         </pc:sldMkLst>
+        <pc:spChg chg="add del">
+          <ac:chgData name="Fatima Pillosu" userId="a6295d4dc9e22643" providerId="LiveId" clId="{87453732-75AC-4426-B5D3-B7C69C2D4F54}" dt="2026-01-22T23:30:40.473" v="1074" actId="478"/>
+          <ac:spMkLst>
+            <pc:docMk/>
+            <pc:sldMk cId="1573992039" sldId="256"/>
+            <ac:spMk id="2" creationId="{34FB978C-5A46-EB58-15FD-D1D6FE42766B}"/>
+          </ac:spMkLst>
+        </pc:spChg>
+        <pc:spChg chg="add del mod">
+          <ac:chgData name="Fatima Pillosu" userId="a6295d4dc9e22643" providerId="LiveId" clId="{87453732-75AC-4426-B5D3-B7C69C2D4F54}" dt="2026-01-22T23:34:11.915" v="1169" actId="21"/>
+          <ac:spMkLst>
+            <pc:docMk/>
+            <pc:sldMk cId="1573992039" sldId="256"/>
+            <ac:spMk id="3" creationId="{863D7830-3EC5-1488-4779-4B842624939D}"/>
+          </ac:spMkLst>
+        </pc:spChg>
         <pc:spChg chg="del">
           <ac:chgData name="Fatima Pillosu" userId="a6295d4dc9e22643" providerId="LiveId" clId="{87453732-75AC-4426-B5D3-B7C69C2D4F54}" dt="2026-01-22T22:57:57.325" v="214" actId="21"/>
           <ac:spMkLst>
             <pc:docMk/>
             <pc:sldMk cId="1573992039" sldId="256"/>
             <ac:spMk id="4" creationId="{863D7830-3EC5-1488-4779-4B842624939D}"/>
+          </ac:spMkLst>
+        </pc:spChg>
+        <pc:spChg chg="add del mod">
+          <ac:chgData name="Fatima Pillosu" userId="a6295d4dc9e22643" providerId="LiveId" clId="{87453732-75AC-4426-B5D3-B7C69C2D4F54}" dt="2026-01-22T23:34:11.915" v="1169" actId="21"/>
+          <ac:spMkLst>
+            <pc:docMk/>
+            <pc:sldMk cId="1573992039" sldId="256"/>
+            <ac:spMk id="9" creationId="{ADEEF2B1-EBC8-9F1F-6B1F-DD1E6A4ADDB0}"/>
           </ac:spMkLst>
         </pc:spChg>
         <pc:spChg chg="add mod">
@@ -191,6 +215,14 @@
             <ac:spMk id="17" creationId="{CDB02FB9-7686-55B5-2237-CE34FE7138F4}"/>
           </ac:spMkLst>
         </pc:spChg>
+        <pc:spChg chg="mod topLvl">
+          <ac:chgData name="Fatima Pillosu" userId="a6295d4dc9e22643" providerId="LiveId" clId="{87453732-75AC-4426-B5D3-B7C69C2D4F54}" dt="2026-01-22T23:33:12.635" v="1145" actId="165"/>
+          <ac:spMkLst>
+            <pc:docMk/>
+            <pc:sldMk cId="1573992039" sldId="256"/>
+            <ac:spMk id="18" creationId="{843DCFB4-D832-CE14-33FD-22FE10682A05}"/>
+          </ac:spMkLst>
+        </pc:spChg>
         <pc:spChg chg="add del mod">
           <ac:chgData name="Fatima Pillosu" userId="a6295d4dc9e22643" providerId="LiveId" clId="{87453732-75AC-4426-B5D3-B7C69C2D4F54}" dt="2026-01-22T22:57:57.325" v="214" actId="21"/>
           <ac:spMkLst>
@@ -223,6 +255,22 @@
             <ac:spMk id="23" creationId="{2806A400-C100-A7CD-C682-9F752EF41C58}"/>
           </ac:spMkLst>
         </pc:spChg>
+        <pc:spChg chg="del mod">
+          <ac:chgData name="Fatima Pillosu" userId="a6295d4dc9e22643" providerId="LiveId" clId="{87453732-75AC-4426-B5D3-B7C69C2D4F54}" dt="2026-01-22T23:34:11.915" v="1169" actId="21"/>
+          <ac:spMkLst>
+            <pc:docMk/>
+            <pc:sldMk cId="1573992039" sldId="256"/>
+            <ac:spMk id="24" creationId="{CDF5D99F-239B-7286-E705-43476984C1FD}"/>
+          </ac:spMkLst>
+        </pc:spChg>
+        <pc:spChg chg="mod">
+          <ac:chgData name="Fatima Pillosu" userId="a6295d4dc9e22643" providerId="LiveId" clId="{87453732-75AC-4426-B5D3-B7C69C2D4F54}" dt="2026-01-22T23:33:19.644" v="1146" actId="554"/>
+          <ac:spMkLst>
+            <pc:docMk/>
+            <pc:sldMk cId="1573992039" sldId="256"/>
+            <ac:spMk id="25" creationId="{A09387BF-360E-1373-B4E2-484CDF5B6943}"/>
+          </ac:spMkLst>
+        </pc:spChg>
         <pc:spChg chg="mod">
           <ac:chgData name="Fatima Pillosu" userId="a6295d4dc9e22643" providerId="LiveId" clId="{87453732-75AC-4426-B5D3-B7C69C2D4F54}" dt="2026-01-22T22:56:44.430" v="208" actId="164"/>
           <ac:spMkLst>
@@ -237,6 +285,22 @@
             <pc:docMk/>
             <pc:sldMk cId="1573992039" sldId="256"/>
             <ac:spMk id="27" creationId="{7160EB10-8701-2F92-B2E3-BD9975B33EAB}"/>
+          </ac:spMkLst>
+        </pc:spChg>
+        <pc:spChg chg="del mod">
+          <ac:chgData name="Fatima Pillosu" userId="a6295d4dc9e22643" providerId="LiveId" clId="{87453732-75AC-4426-B5D3-B7C69C2D4F54}" dt="2026-01-22T23:34:11.915" v="1169" actId="21"/>
+          <ac:spMkLst>
+            <pc:docMk/>
+            <pc:sldMk cId="1573992039" sldId="256"/>
+            <ac:spMk id="27" creationId="{F3106249-1C45-1C12-2453-07133FF1CD86}"/>
+          </ac:spMkLst>
+        </pc:spChg>
+        <pc:spChg chg="mod topLvl">
+          <ac:chgData name="Fatima Pillosu" userId="a6295d4dc9e22643" providerId="LiveId" clId="{87453732-75AC-4426-B5D3-B7C69C2D4F54}" dt="2026-01-22T23:33:12.635" v="1145" actId="165"/>
+          <ac:spMkLst>
+            <pc:docMk/>
+            <pc:sldMk cId="1573992039" sldId="256"/>
+            <ac:spMk id="28" creationId="{E3F5F678-30B9-E5A6-EDA8-349820A25D9E}"/>
           </ac:spMkLst>
         </pc:spChg>
         <pc:spChg chg="mod">
@@ -272,11 +336,35 @@
           </ac:spMkLst>
         </pc:spChg>
         <pc:spChg chg="mod">
+          <ac:chgData name="Fatima Pillosu" userId="a6295d4dc9e22643" providerId="LiveId" clId="{87453732-75AC-4426-B5D3-B7C69C2D4F54}" dt="2026-01-22T23:31:23.656" v="1096" actId="1076"/>
+          <ac:spMkLst>
+            <pc:docMk/>
+            <pc:sldMk cId="1573992039" sldId="256"/>
+            <ac:spMk id="36" creationId="{88FD4609-03C7-48B1-EA84-375FFFEDBE06}"/>
+          </ac:spMkLst>
+        </pc:spChg>
+        <pc:spChg chg="mod">
           <ac:chgData name="Fatima Pillosu" userId="a6295d4dc9e22643" providerId="LiveId" clId="{87453732-75AC-4426-B5D3-B7C69C2D4F54}" dt="2026-01-22T22:57:26.135" v="211" actId="164"/>
           <ac:spMkLst>
             <pc:docMk/>
             <pc:sldMk cId="1573992039" sldId="256"/>
             <ac:spMk id="36" creationId="{A09387BF-360E-1373-B4E2-484CDF5B6943}"/>
+          </ac:spMkLst>
+        </pc:spChg>
+        <pc:spChg chg="del mod topLvl">
+          <ac:chgData name="Fatima Pillosu" userId="a6295d4dc9e22643" providerId="LiveId" clId="{87453732-75AC-4426-B5D3-B7C69C2D4F54}" dt="2026-01-22T23:34:11.915" v="1169" actId="21"/>
+          <ac:spMkLst>
+            <pc:docMk/>
+            <pc:sldMk cId="1573992039" sldId="256"/>
+            <ac:spMk id="37" creationId="{4C39D33D-2B26-F2D6-F8F4-09E6518093E9}"/>
+          </ac:spMkLst>
+        </pc:spChg>
+        <pc:spChg chg="del mod topLvl">
+          <ac:chgData name="Fatima Pillosu" userId="a6295d4dc9e22643" providerId="LiveId" clId="{87453732-75AC-4426-B5D3-B7C69C2D4F54}" dt="2026-01-22T23:34:11.915" v="1169" actId="21"/>
+          <ac:spMkLst>
+            <pc:docMk/>
+            <pc:sldMk cId="1573992039" sldId="256"/>
+            <ac:spMk id="38" creationId="{D4A499F2-3420-098E-60B9-2B0BAC6336D7}"/>
           </ac:spMkLst>
         </pc:spChg>
         <pc:spChg chg="mod">
@@ -287,6 +375,14 @@
             <ac:spMk id="38" creationId="{F3106249-1C45-1C12-2453-07133FF1CD86}"/>
           </ac:spMkLst>
         </pc:spChg>
+        <pc:spChg chg="mod topLvl">
+          <ac:chgData name="Fatima Pillosu" userId="a6295d4dc9e22643" providerId="LiveId" clId="{87453732-75AC-4426-B5D3-B7C69C2D4F54}" dt="2026-01-22T23:33:12.635" v="1145" actId="165"/>
+          <ac:spMkLst>
+            <pc:docMk/>
+            <pc:sldMk cId="1573992039" sldId="256"/>
+            <ac:spMk id="39" creationId="{886A253C-800A-4473-19A4-5EC96B3D6DA8}"/>
+          </ac:spMkLst>
+        </pc:spChg>
         <pc:spChg chg="mod">
           <ac:chgData name="Fatima Pillosu" userId="a6295d4dc9e22643" providerId="LiveId" clId="{87453732-75AC-4426-B5D3-B7C69C2D4F54}" dt="2026-01-22T22:57:26.135" v="211" actId="164"/>
           <ac:spMkLst>
@@ -295,12 +391,28 @@
             <ac:spMk id="39" creationId="{E3F5F678-30B9-E5A6-EDA8-349820A25D9E}"/>
           </ac:spMkLst>
         </pc:spChg>
+        <pc:spChg chg="mod topLvl">
+          <ac:chgData name="Fatima Pillosu" userId="a6295d4dc9e22643" providerId="LiveId" clId="{87453732-75AC-4426-B5D3-B7C69C2D4F54}" dt="2026-01-22T23:33:12.635" v="1145" actId="165"/>
+          <ac:spMkLst>
+            <pc:docMk/>
+            <pc:sldMk cId="1573992039" sldId="256"/>
+            <ac:spMk id="40" creationId="{31526C8F-65EA-4AE2-A6F7-E27D64A802EA}"/>
+          </ac:spMkLst>
+        </pc:spChg>
         <pc:spChg chg="add mod">
           <ac:chgData name="Fatima Pillosu" userId="a6295d4dc9e22643" providerId="LiveId" clId="{87453732-75AC-4426-B5D3-B7C69C2D4F54}" dt="2026-01-22T22:57:26.135" v="211" actId="164"/>
           <ac:spMkLst>
             <pc:docMk/>
             <pc:sldMk cId="1573992039" sldId="256"/>
             <ac:spMk id="40" creationId="{7ED78E03-DDB8-9C4E-DC18-F07659A40AE4}"/>
+          </ac:spMkLst>
+        </pc:spChg>
+        <pc:spChg chg="mod topLvl">
+          <ac:chgData name="Fatima Pillosu" userId="a6295d4dc9e22643" providerId="LiveId" clId="{87453732-75AC-4426-B5D3-B7C69C2D4F54}" dt="2026-01-22T23:33:12.635" v="1145" actId="165"/>
+          <ac:spMkLst>
+            <pc:docMk/>
+            <pc:sldMk cId="1573992039" sldId="256"/>
+            <ac:spMk id="41" creationId="{2806A400-C100-A7CD-C682-9F752EF41C58}"/>
           </ac:spMkLst>
         </pc:spChg>
         <pc:spChg chg="del">
@@ -312,11 +424,27 @@
           </ac:spMkLst>
         </pc:spChg>
         <pc:spChg chg="mod">
+          <ac:chgData name="Fatima Pillosu" userId="a6295d4dc9e22643" providerId="LiveId" clId="{87453732-75AC-4426-B5D3-B7C69C2D4F54}" dt="2026-01-22T23:33:19.644" v="1146" actId="554"/>
+          <ac:spMkLst>
+            <pc:docMk/>
+            <pc:sldMk cId="1573992039" sldId="256"/>
+            <ac:spMk id="43" creationId="{1B78CC36-883D-5957-AD5C-423198EA1845}"/>
+          </ac:spMkLst>
+        </pc:spChg>
+        <pc:spChg chg="mod">
           <ac:chgData name="Fatima Pillosu" userId="a6295d4dc9e22643" providerId="LiveId" clId="{87453732-75AC-4426-B5D3-B7C69C2D4F54}" dt="2026-01-22T22:57:26.135" v="211" actId="164"/>
           <ac:spMkLst>
             <pc:docMk/>
             <pc:sldMk cId="1573992039" sldId="256"/>
             <ac:spMk id="44" creationId="{65533EAA-5F83-EA70-6747-5F625123CB00}"/>
+          </ac:spMkLst>
+        </pc:spChg>
+        <pc:spChg chg="del mod">
+          <ac:chgData name="Fatima Pillosu" userId="a6295d4dc9e22643" providerId="LiveId" clId="{87453732-75AC-4426-B5D3-B7C69C2D4F54}" dt="2026-01-22T23:34:11.915" v="1169" actId="21"/>
+          <ac:spMkLst>
+            <pc:docMk/>
+            <pc:sldMk cId="1573992039" sldId="256"/>
+            <ac:spMk id="44" creationId="{E1F6673A-1B0C-E424-8F99-86B139BD4918}"/>
           </ac:spMkLst>
         </pc:spChg>
         <pc:spChg chg="mod">
@@ -325,6 +453,30 @@
             <pc:docMk/>
             <pc:sldMk cId="1573992039" sldId="256"/>
             <ac:spMk id="45" creationId="{545E5C43-F926-13EA-70BE-CA710E33D019}"/>
+          </ac:spMkLst>
+        </pc:spChg>
+        <pc:spChg chg="del mod topLvl">
+          <ac:chgData name="Fatima Pillosu" userId="a6295d4dc9e22643" providerId="LiveId" clId="{87453732-75AC-4426-B5D3-B7C69C2D4F54}" dt="2026-01-22T23:34:11.915" v="1169" actId="21"/>
+          <ac:spMkLst>
+            <pc:docMk/>
+            <pc:sldMk cId="1573992039" sldId="256"/>
+            <ac:spMk id="45" creationId="{7160EB10-8701-2F92-B2E3-BD9975B33EAB}"/>
+          </ac:spMkLst>
+        </pc:spChg>
+        <pc:spChg chg="mod topLvl">
+          <ac:chgData name="Fatima Pillosu" userId="a6295d4dc9e22643" providerId="LiveId" clId="{87453732-75AC-4426-B5D3-B7C69C2D4F54}" dt="2026-01-22T23:33:12.635" v="1145" actId="165"/>
+          <ac:spMkLst>
+            <pc:docMk/>
+            <pc:sldMk cId="1573992039" sldId="256"/>
+            <ac:spMk id="46" creationId="{C700B7F9-A72E-559F-D17A-BFCCF191350D}"/>
+          </ac:spMkLst>
+        </pc:spChg>
+        <pc:spChg chg="del mod">
+          <ac:chgData name="Fatima Pillosu" userId="a6295d4dc9e22643" providerId="LiveId" clId="{87453732-75AC-4426-B5D3-B7C69C2D4F54}" dt="2026-01-22T23:34:11.915" v="1169" actId="21"/>
+          <ac:spMkLst>
+            <pc:docMk/>
+            <pc:sldMk cId="1573992039" sldId="256"/>
+            <ac:spMk id="47" creationId="{BA6B5728-94FF-1C7C-CD97-4D776F6436FF}"/>
           </ac:spMkLst>
         </pc:spChg>
         <pc:spChg chg="mod">
@@ -343,6 +495,14 @@
             <ac:spMk id="48" creationId="{BA6B5728-94FF-1C7C-CD97-4D776F6436FF}"/>
           </ac:spMkLst>
         </pc:spChg>
+        <pc:spChg chg="del mod topLvl">
+          <ac:chgData name="Fatima Pillosu" userId="a6295d4dc9e22643" providerId="LiveId" clId="{87453732-75AC-4426-B5D3-B7C69C2D4F54}" dt="2026-01-22T23:34:11.915" v="1169" actId="21"/>
+          <ac:spMkLst>
+            <pc:docMk/>
+            <pc:sldMk cId="1573992039" sldId="256"/>
+            <ac:spMk id="48" creationId="{BE8CA2C2-9A67-A315-55CF-D3B76C5B4ABF}"/>
+          </ac:spMkLst>
+        </pc:spChg>
         <pc:spChg chg="mod">
           <ac:chgData name="Fatima Pillosu" userId="a6295d4dc9e22643" providerId="LiveId" clId="{87453732-75AC-4426-B5D3-B7C69C2D4F54}" dt="2026-01-22T22:56:44.430" v="208" actId="164"/>
           <ac:spMkLst>
@@ -359,12 +519,76 @@
             <ac:spMk id="50" creationId="{16D7E8D5-094D-0801-2477-66BD27467E33}"/>
           </ac:spMkLst>
         </pc:spChg>
-        <pc:spChg chg="add mod">
-          <ac:chgData name="Fatima Pillosu" userId="a6295d4dc9e22643" providerId="LiveId" clId="{87453732-75AC-4426-B5D3-B7C69C2D4F54}" dt="2026-01-22T22:58:11.774" v="215"/>
+        <pc:spChg chg="mod">
+          <ac:chgData name="Fatima Pillosu" userId="a6295d4dc9e22643" providerId="LiveId" clId="{87453732-75AC-4426-B5D3-B7C69C2D4F54}" dt="2026-01-22T23:32:53.972" v="1143" actId="554"/>
+          <ac:spMkLst>
+            <pc:docMk/>
+            <pc:sldMk cId="1573992039" sldId="256"/>
+            <ac:spMk id="53" creationId="{8C2CF4A1-967C-6891-8D3E-E404ED5D4E82}"/>
+          </ac:spMkLst>
+        </pc:spChg>
+        <pc:spChg chg="mod">
+          <ac:chgData name="Fatima Pillosu" userId="a6295d4dc9e22643" providerId="LiveId" clId="{87453732-75AC-4426-B5D3-B7C69C2D4F54}" dt="2026-01-22T23:32:53.972" v="1143" actId="554"/>
+          <ac:spMkLst>
+            <pc:docMk/>
+            <pc:sldMk cId="1573992039" sldId="256"/>
+            <ac:spMk id="54" creationId="{748BB081-753E-2804-7F05-2F111730D61F}"/>
+          </ac:spMkLst>
+        </pc:spChg>
+        <pc:spChg chg="del mod">
+          <ac:chgData name="Fatima Pillosu" userId="a6295d4dc9e22643" providerId="LiveId" clId="{87453732-75AC-4426-B5D3-B7C69C2D4F54}" dt="2026-01-22T23:30:47.467" v="1075" actId="21"/>
+          <ac:spMkLst>
+            <pc:docMk/>
+            <pc:sldMk cId="1573992039" sldId="256"/>
+            <ac:spMk id="55" creationId="{863D7830-3EC5-1488-4779-4B842624939D}"/>
+          </ac:spMkLst>
+        </pc:spChg>
+        <pc:spChg chg="del">
+          <ac:chgData name="Fatima Pillosu" userId="a6295d4dc9e22643" providerId="LiveId" clId="{87453732-75AC-4426-B5D3-B7C69C2D4F54}" dt="2026-01-22T23:30:47.467" v="1075" actId="21"/>
+          <ac:spMkLst>
+            <pc:docMk/>
+            <pc:sldMk cId="1573992039" sldId="256"/>
+            <ac:spMk id="60" creationId="{F4E1EB47-FB49-B221-8F40-6FAAC8188E34}"/>
+          </ac:spMkLst>
+        </pc:spChg>
+        <pc:spChg chg="del mod">
+          <ac:chgData name="Fatima Pillosu" userId="a6295d4dc9e22643" providerId="LiveId" clId="{87453732-75AC-4426-B5D3-B7C69C2D4F54}" dt="2026-01-22T23:30:47.467" v="1075" actId="21"/>
+          <ac:spMkLst>
+            <pc:docMk/>
+            <pc:sldMk cId="1573992039" sldId="256"/>
+            <ac:spMk id="61" creationId="{ADEEF2B1-EBC8-9F1F-6B1F-DD1E6A4ADDB0}"/>
+          </ac:spMkLst>
+        </pc:spChg>
+        <pc:spChg chg="del mod">
+          <ac:chgData name="Fatima Pillosu" userId="a6295d4dc9e22643" providerId="LiveId" clId="{87453732-75AC-4426-B5D3-B7C69C2D4F54}" dt="2026-01-22T23:30:47.467" v="1075" actId="21"/>
+          <ac:spMkLst>
+            <pc:docMk/>
+            <pc:sldMk cId="1573992039" sldId="256"/>
+            <ac:spMk id="62" creationId="{CDB02FB9-7686-55B5-2237-CE34FE7138F4}"/>
+          </ac:spMkLst>
+        </pc:spChg>
+        <pc:spChg chg="add del mod">
+          <ac:chgData name="Fatima Pillosu" userId="a6295d4dc9e22643" providerId="LiveId" clId="{87453732-75AC-4426-B5D3-B7C69C2D4F54}" dt="2026-01-22T23:30:47.467" v="1075" actId="21"/>
           <ac:spMkLst>
             <pc:docMk/>
             <pc:sldMk cId="1573992039" sldId="256"/>
             <ac:spMk id="64" creationId="{F1CE41FF-7B22-BB87-5437-9C5A6D9C40EA}"/>
+          </ac:spMkLst>
+        </pc:spChg>
+        <pc:spChg chg="del mod">
+          <ac:chgData name="Fatima Pillosu" userId="a6295d4dc9e22643" providerId="LiveId" clId="{87453732-75AC-4426-B5D3-B7C69C2D4F54}" dt="2026-01-22T23:30:47.467" v="1075" actId="21"/>
+          <ac:spMkLst>
+            <pc:docMk/>
+            <pc:sldMk cId="1573992039" sldId="256"/>
+            <ac:spMk id="65" creationId="{3CDA144B-1F01-F0CC-A493-5631BE7BE96B}"/>
+          </ac:spMkLst>
+        </pc:spChg>
+        <pc:spChg chg="del mod">
+          <ac:chgData name="Fatima Pillosu" userId="a6295d4dc9e22643" providerId="LiveId" clId="{87453732-75AC-4426-B5D3-B7C69C2D4F54}" dt="2026-01-22T23:30:47.467" v="1075" actId="21"/>
+          <ac:spMkLst>
+            <pc:docMk/>
+            <pc:sldMk cId="1573992039" sldId="256"/>
+            <ac:spMk id="66" creationId="{9D4C28E0-97DE-3DC8-9344-F610BE62157D}"/>
           </ac:spMkLst>
         </pc:spChg>
         <pc:spChg chg="mod">
@@ -391,12 +615,20 @@
             <ac:spMk id="76" creationId="{CDF5D99F-239B-7286-E705-43476984C1FD}"/>
           </ac:spMkLst>
         </pc:spChg>
-        <pc:spChg chg="mod">
-          <ac:chgData name="Fatima Pillosu" userId="a6295d4dc9e22643" providerId="LiveId" clId="{87453732-75AC-4426-B5D3-B7C69C2D4F54}" dt="2026-01-22T23:02:40.072" v="278" actId="20577"/>
+        <pc:spChg chg="del mod">
+          <ac:chgData name="Fatima Pillosu" userId="a6295d4dc9e22643" providerId="LiveId" clId="{87453732-75AC-4426-B5D3-B7C69C2D4F54}" dt="2026-01-22T23:29:53.922" v="1068" actId="478"/>
           <ac:spMkLst>
             <pc:docMk/>
             <pc:sldMk cId="1573992039" sldId="256"/>
             <ac:spMk id="81" creationId="{7ED78E03-DDB8-9C4E-DC18-F07659A40AE4}"/>
+          </ac:spMkLst>
+        </pc:spChg>
+        <pc:spChg chg="del">
+          <ac:chgData name="Fatima Pillosu" userId="a6295d4dc9e22643" providerId="LiveId" clId="{87453732-75AC-4426-B5D3-B7C69C2D4F54}" dt="2026-01-22T23:29:56.599" v="1069" actId="478"/>
+          <ac:spMkLst>
+            <pc:docMk/>
+            <pc:sldMk cId="1573992039" sldId="256"/>
+            <ac:spMk id="82" creationId="{307BB4E1-82F3-30C4-2FB1-591A624180EF}"/>
           </ac:spMkLst>
         </pc:spChg>
         <pc:spChg chg="mod">
@@ -455,24 +687,24 @@
             <ac:spMk id="104" creationId="{5E7D516C-6098-CA78-A68A-A60E91A03B8B}"/>
           </ac:spMkLst>
         </pc:spChg>
-        <pc:spChg chg="add mod">
-          <ac:chgData name="Fatima Pillosu" userId="a6295d4dc9e22643" providerId="LiveId" clId="{87453732-75AC-4426-B5D3-B7C69C2D4F54}" dt="2026-01-22T23:14:06.291" v="1008" actId="1038"/>
+        <pc:spChg chg="add del mod">
+          <ac:chgData name="Fatima Pillosu" userId="a6295d4dc9e22643" providerId="LiveId" clId="{87453732-75AC-4426-B5D3-B7C69C2D4F54}" dt="2026-01-22T23:30:47.467" v="1075" actId="21"/>
           <ac:spMkLst>
             <pc:docMk/>
             <pc:sldMk cId="1573992039" sldId="256"/>
             <ac:spMk id="107" creationId="{8C2CF4A1-967C-6891-8D3E-E404ED5D4E82}"/>
           </ac:spMkLst>
         </pc:spChg>
-        <pc:spChg chg="add mod">
-          <ac:chgData name="Fatima Pillosu" userId="a6295d4dc9e22643" providerId="LiveId" clId="{87453732-75AC-4426-B5D3-B7C69C2D4F54}" dt="2026-01-22T23:14:06.291" v="1008" actId="1038"/>
+        <pc:spChg chg="add del mod">
+          <ac:chgData name="Fatima Pillosu" userId="a6295d4dc9e22643" providerId="LiveId" clId="{87453732-75AC-4426-B5D3-B7C69C2D4F54}" dt="2026-01-22T23:30:47.467" v="1075" actId="21"/>
           <ac:spMkLst>
             <pc:docMk/>
             <pc:sldMk cId="1573992039" sldId="256"/>
             <ac:spMk id="108" creationId="{748BB081-753E-2804-7F05-2F111730D61F}"/>
           </ac:spMkLst>
         </pc:spChg>
-        <pc:spChg chg="add mod">
-          <ac:chgData name="Fatima Pillosu" userId="a6295d4dc9e22643" providerId="LiveId" clId="{87453732-75AC-4426-B5D3-B7C69C2D4F54}" dt="2026-01-22T23:15:43.100" v="1066" actId="1036"/>
+        <pc:spChg chg="add del mod">
+          <ac:chgData name="Fatima Pillosu" userId="a6295d4dc9e22643" providerId="LiveId" clId="{87453732-75AC-4426-B5D3-B7C69C2D4F54}" dt="2026-01-22T23:29:50.841" v="1067" actId="478"/>
           <ac:spMkLst>
             <pc:docMk/>
             <pc:sldMk cId="1573992039" sldId="256"/>
@@ -487,12 +719,156 @@
             <ac:spMk id="110" creationId="{A65EA570-4E91-1F02-2093-70F878ABB862}"/>
           </ac:spMkLst>
         </pc:spChg>
+        <pc:spChg chg="add del">
+          <ac:chgData name="Fatima Pillosu" userId="a6295d4dc9e22643" providerId="LiveId" clId="{87453732-75AC-4426-B5D3-B7C69C2D4F54}" dt="2026-01-22T23:34:10.144" v="1168" actId="478"/>
+          <ac:spMkLst>
+            <pc:docMk/>
+            <pc:sldMk cId="1573992039" sldId="256"/>
+            <ac:spMk id="113" creationId="{D3502B21-66FF-F067-8143-EB43AB79BF3A}"/>
+          </ac:spMkLst>
+        </pc:spChg>
+        <pc:spChg chg="add mod">
+          <ac:chgData name="Fatima Pillosu" userId="a6295d4dc9e22643" providerId="LiveId" clId="{87453732-75AC-4426-B5D3-B7C69C2D4F54}" dt="2026-01-22T23:34:23.477" v="1170"/>
+          <ac:spMkLst>
+            <pc:docMk/>
+            <pc:sldMk cId="1573992039" sldId="256"/>
+            <ac:spMk id="114" creationId="{863D7830-3EC5-1488-4779-4B842624939D}"/>
+          </ac:spMkLst>
+        </pc:spChg>
+        <pc:spChg chg="add mod">
+          <ac:chgData name="Fatima Pillosu" userId="a6295d4dc9e22643" providerId="LiveId" clId="{87453732-75AC-4426-B5D3-B7C69C2D4F54}" dt="2026-01-22T23:34:23.477" v="1170"/>
+          <ac:spMkLst>
+            <pc:docMk/>
+            <pc:sldMk cId="1573992039" sldId="256"/>
+            <ac:spMk id="124" creationId="{3CDA144B-1F01-F0CC-A493-5631BE7BE96B}"/>
+          </ac:spMkLst>
+        </pc:spChg>
+        <pc:spChg chg="mod">
+          <ac:chgData name="Fatima Pillosu" userId="a6295d4dc9e22643" providerId="LiveId" clId="{87453732-75AC-4426-B5D3-B7C69C2D4F54}" dt="2026-01-22T23:34:37.804" v="1174" actId="1035"/>
+          <ac:spMkLst>
+            <pc:docMk/>
+            <pc:sldMk cId="1573992039" sldId="256"/>
+            <ac:spMk id="133" creationId="{DD906E7D-FF64-09FE-65EF-837BDD47046A}"/>
+          </ac:spMkLst>
+        </pc:spChg>
+        <pc:spChg chg="add mod">
+          <ac:chgData name="Fatima Pillosu" userId="a6295d4dc9e22643" providerId="LiveId" clId="{87453732-75AC-4426-B5D3-B7C69C2D4F54}" dt="2026-01-22T23:34:37.804" v="1174" actId="1035"/>
+          <ac:spMkLst>
+            <pc:docMk/>
+            <pc:sldMk cId="1573992039" sldId="256"/>
+            <ac:spMk id="139" creationId="{2D87FE8A-4BD4-D2C0-4981-4C00E52C4C21}"/>
+          </ac:spMkLst>
+        </pc:spChg>
+        <pc:spChg chg="mod">
+          <ac:chgData name="Fatima Pillosu" userId="a6295d4dc9e22643" providerId="LiveId" clId="{87453732-75AC-4426-B5D3-B7C69C2D4F54}" dt="2026-01-22T23:34:45.352" v="1175" actId="555"/>
+          <ac:spMkLst>
+            <pc:docMk/>
+            <pc:sldMk cId="1573992039" sldId="256"/>
+            <ac:spMk id="140" creationId="{65533EAA-5F83-EA70-6747-5F625123CB00}"/>
+          </ac:spMkLst>
+        </pc:spChg>
+        <pc:spChg chg="mod">
+          <ac:chgData name="Fatima Pillosu" userId="a6295d4dc9e22643" providerId="LiveId" clId="{87453732-75AC-4426-B5D3-B7C69C2D4F54}" dt="2026-01-22T23:34:37.804" v="1174" actId="1035"/>
+          <ac:spMkLst>
+            <pc:docMk/>
+            <pc:sldMk cId="1573992039" sldId="256"/>
+            <ac:spMk id="145" creationId="{88FD4609-03C7-48B1-EA84-375FFFEDBE06}"/>
+          </ac:spMkLst>
+        </pc:spChg>
+        <pc:spChg chg="add mod">
+          <ac:chgData name="Fatima Pillosu" userId="a6295d4dc9e22643" providerId="LiveId" clId="{87453732-75AC-4426-B5D3-B7C69C2D4F54}" dt="2026-01-22T23:34:37.804" v="1174" actId="1035"/>
+          <ac:spMkLst>
+            <pc:docMk/>
+            <pc:sldMk cId="1573992039" sldId="256"/>
+            <ac:spMk id="147" creationId="{D4A499F2-3420-098E-60B9-2B0BAC6336D7}"/>
+          </ac:spMkLst>
+        </pc:spChg>
+        <pc:spChg chg="mod">
+          <ac:chgData name="Fatima Pillosu" userId="a6295d4dc9e22643" providerId="LiveId" clId="{87453732-75AC-4426-B5D3-B7C69C2D4F54}" dt="2026-01-22T23:34:37.804" v="1174" actId="1035"/>
+          <ac:spMkLst>
+            <pc:docMk/>
+            <pc:sldMk cId="1573992039" sldId="256"/>
+            <ac:spMk id="148" creationId="{886A253C-800A-4473-19A4-5EC96B3D6DA8}"/>
+          </ac:spMkLst>
+        </pc:spChg>
+        <pc:spChg chg="add mod">
+          <ac:chgData name="Fatima Pillosu" userId="a6295d4dc9e22643" providerId="LiveId" clId="{87453732-75AC-4426-B5D3-B7C69C2D4F54}" dt="2026-01-22T23:34:37.804" v="1174" actId="1035"/>
+          <ac:spMkLst>
+            <pc:docMk/>
+            <pc:sldMk cId="1573992039" sldId="256"/>
+            <ac:spMk id="150" creationId="{2806A400-C100-A7CD-C682-9F752EF41C58}"/>
+          </ac:spMkLst>
+        </pc:spChg>
+        <pc:spChg chg="add mod">
+          <ac:chgData name="Fatima Pillosu" userId="a6295d4dc9e22643" providerId="LiveId" clId="{87453732-75AC-4426-B5D3-B7C69C2D4F54}" dt="2026-01-22T23:34:37.804" v="1174" actId="1035"/>
+          <ac:spMkLst>
+            <pc:docMk/>
+            <pc:sldMk cId="1573992039" sldId="256"/>
+            <ac:spMk id="153" creationId="{E1F6673A-1B0C-E424-8F99-86B139BD4918}"/>
+          </ac:spMkLst>
+        </pc:spChg>
+        <pc:spChg chg="add mod">
+          <ac:chgData name="Fatima Pillosu" userId="a6295d4dc9e22643" providerId="LiveId" clId="{87453732-75AC-4426-B5D3-B7C69C2D4F54}" dt="2026-01-22T23:34:37.804" v="1174" actId="1035"/>
+          <ac:spMkLst>
+            <pc:docMk/>
+            <pc:sldMk cId="1573992039" sldId="256"/>
+            <ac:spMk id="154" creationId="{7160EB10-8701-2F92-B2E3-BD9975B33EAB}"/>
+          </ac:spMkLst>
+        </pc:spChg>
+        <pc:spChg chg="add mod">
+          <ac:chgData name="Fatima Pillosu" userId="a6295d4dc9e22643" providerId="LiveId" clId="{87453732-75AC-4426-B5D3-B7C69C2D4F54}" dt="2026-01-22T23:34:37.804" v="1174" actId="1035"/>
+          <ac:spMkLst>
+            <pc:docMk/>
+            <pc:sldMk cId="1573992039" sldId="256"/>
+            <ac:spMk id="157" creationId="{BE8CA2C2-9A67-A315-55CF-D3B76C5B4ABF}"/>
+          </ac:spMkLst>
+        </pc:spChg>
+        <pc:spChg chg="add mod">
+          <ac:chgData name="Fatima Pillosu" userId="a6295d4dc9e22643" providerId="LiveId" clId="{87453732-75AC-4426-B5D3-B7C69C2D4F54}" dt="2026-01-22T23:34:37.804" v="1174" actId="1035"/>
+          <ac:spMkLst>
+            <pc:docMk/>
+            <pc:sldMk cId="1573992039" sldId="256"/>
+            <ac:spMk id="158" creationId="{16D7E8D5-094D-0801-2477-66BD27467E33}"/>
+          </ac:spMkLst>
+        </pc:spChg>
+        <pc:spChg chg="mod">
+          <ac:chgData name="Fatima Pillosu" userId="a6295d4dc9e22643" providerId="LiveId" clId="{87453732-75AC-4426-B5D3-B7C69C2D4F54}" dt="2026-01-22T23:34:52.514" v="1178" actId="1036"/>
+          <ac:spMkLst>
+            <pc:docMk/>
+            <pc:sldMk cId="1573992039" sldId="256"/>
+            <ac:spMk id="159" creationId="{5E7D516C-6098-CA78-A68A-A60E91A03B8B}"/>
+          </ac:spMkLst>
+        </pc:spChg>
+        <pc:spChg chg="add mod">
+          <ac:chgData name="Fatima Pillosu" userId="a6295d4dc9e22643" providerId="LiveId" clId="{87453732-75AC-4426-B5D3-B7C69C2D4F54}" dt="2026-01-22T23:34:23.477" v="1170"/>
+          <ac:spMkLst>
+            <pc:docMk/>
+            <pc:sldMk cId="1573992039" sldId="256"/>
+            <ac:spMk id="163" creationId="{748BB081-753E-2804-7F05-2F111730D61F}"/>
+          </ac:spMkLst>
+        </pc:spChg>
         <pc:grpChg chg="del mod">
           <ac:chgData name="Fatima Pillosu" userId="a6295d4dc9e22643" providerId="LiveId" clId="{87453732-75AC-4426-B5D3-B7C69C2D4F54}" dt="2026-01-22T22:57:57.325" v="214" actId="21"/>
           <ac:grpSpMkLst>
             <pc:docMk/>
             <pc:sldMk cId="1573992039" sldId="256"/>
             <ac:grpSpMk id="2" creationId="{CACA255C-6D4D-4370-696B-5DEA6A8AC9A4}"/>
+          </ac:grpSpMkLst>
+        </pc:grpChg>
+        <pc:grpChg chg="mod">
+          <ac:chgData name="Fatima Pillosu" userId="a6295d4dc9e22643" providerId="LiveId" clId="{87453732-75AC-4426-B5D3-B7C69C2D4F54}" dt="2026-01-22T23:32:59.705" v="1144" actId="554"/>
+          <ac:grpSpMkLst>
+            <pc:docMk/>
+            <pc:sldMk cId="1573992039" sldId="256"/>
+            <ac:grpSpMk id="16" creationId="{43A56C84-4F0C-4006-0C8C-7604A213D08E}"/>
+          </ac:grpSpMkLst>
+        </pc:grpChg>
+        <pc:grpChg chg="mod">
+          <ac:chgData name="Fatima Pillosu" userId="a6295d4dc9e22643" providerId="LiveId" clId="{87453732-75AC-4426-B5D3-B7C69C2D4F54}" dt="2026-01-22T23:32:59.705" v="1144" actId="554"/>
+          <ac:grpSpMkLst>
+            <pc:docMk/>
+            <pc:sldMk cId="1573992039" sldId="256"/>
+            <ac:grpSpMk id="33" creationId="{CACA255C-6D4D-4370-696B-5DEA6A8AC9A4}"/>
           </ac:grpSpMkLst>
         </pc:grpChg>
         <pc:grpChg chg="del mod">
@@ -503,8 +879,8 @@
             <ac:grpSpMk id="54" creationId="{43A56C84-4F0C-4006-0C8C-7604A213D08E}"/>
           </ac:grpSpMkLst>
         </pc:grpChg>
-        <pc:grpChg chg="mod">
-          <ac:chgData name="Fatima Pillosu" userId="a6295d4dc9e22643" providerId="LiveId" clId="{87453732-75AC-4426-B5D3-B7C69C2D4F54}" dt="2026-01-22T23:01:33.921" v="261" actId="1076"/>
+        <pc:grpChg chg="del mod">
+          <ac:chgData name="Fatima Pillosu" userId="a6295d4dc9e22643" providerId="LiveId" clId="{87453732-75AC-4426-B5D3-B7C69C2D4F54}" dt="2026-01-22T23:30:47.467" v="1075" actId="21"/>
           <ac:grpSpMkLst>
             <pc:docMk/>
             <pc:sldMk cId="1573992039" sldId="256"/>
@@ -512,7 +888,7 @@
           </ac:grpSpMkLst>
         </pc:grpChg>
         <pc:grpChg chg="mod">
-          <ac:chgData name="Fatima Pillosu" userId="a6295d4dc9e22643" providerId="LiveId" clId="{87453732-75AC-4426-B5D3-B7C69C2D4F54}" dt="2026-01-22T23:14:14.649" v="1022" actId="1035"/>
+          <ac:chgData name="Fatima Pillosu" userId="a6295d4dc9e22643" providerId="LiveId" clId="{87453732-75AC-4426-B5D3-B7C69C2D4F54}" dt="2026-01-22T23:30:06.339" v="1070" actId="1076"/>
           <ac:grpSpMkLst>
             <pc:docMk/>
             <pc:sldMk cId="1573992039" sldId="256"/>
@@ -525,6 +901,46 @@
             <pc:docMk/>
             <pc:sldMk cId="1573992039" sldId="256"/>
             <ac:cxnSpMk id="22" creationId="{E3E411FB-33CC-5F34-656E-94560D185092}"/>
+          </ac:cxnSpMkLst>
+        </pc:cxnChg>
+        <pc:cxnChg chg="mod">
+          <ac:chgData name="Fatima Pillosu" userId="a6295d4dc9e22643" providerId="LiveId" clId="{87453732-75AC-4426-B5D3-B7C69C2D4F54}" dt="2026-01-22T23:30:21.700" v="1072" actId="1076"/>
+          <ac:cxnSpMkLst>
+            <pc:docMk/>
+            <pc:sldMk cId="1573992039" sldId="256"/>
+            <ac:cxnSpMk id="56" creationId="{A9EAFB7D-EF2C-3FE3-1553-F2A5789D0B03}"/>
+          </ac:cxnSpMkLst>
+        </pc:cxnChg>
+        <pc:cxnChg chg="mod">
+          <ac:chgData name="Fatima Pillosu" userId="a6295d4dc9e22643" providerId="LiveId" clId="{87453732-75AC-4426-B5D3-B7C69C2D4F54}" dt="2026-01-22T23:30:21.700" v="1072" actId="1076"/>
+          <ac:cxnSpMkLst>
+            <pc:docMk/>
+            <pc:sldMk cId="1573992039" sldId="256"/>
+            <ac:cxnSpMk id="58" creationId="{5DDB82E1-2293-6864-7C4C-860BB6D52449}"/>
+          </ac:cxnSpMkLst>
+        </pc:cxnChg>
+        <pc:cxnChg chg="mod">
+          <ac:chgData name="Fatima Pillosu" userId="a6295d4dc9e22643" providerId="LiveId" clId="{87453732-75AC-4426-B5D3-B7C69C2D4F54}" dt="2026-01-22T23:30:21.700" v="1072" actId="1076"/>
+          <ac:cxnSpMkLst>
+            <pc:docMk/>
+            <pc:sldMk cId="1573992039" sldId="256"/>
+            <ac:cxnSpMk id="63" creationId="{98EEF7E7-0C5F-BA49-C209-AFA93EACC957}"/>
+          </ac:cxnSpMkLst>
+        </pc:cxnChg>
+        <pc:cxnChg chg="mod">
+          <ac:chgData name="Fatima Pillosu" userId="a6295d4dc9e22643" providerId="LiveId" clId="{87453732-75AC-4426-B5D3-B7C69C2D4F54}" dt="2026-01-22T23:30:21.700" v="1072" actId="1076"/>
+          <ac:cxnSpMkLst>
+            <pc:docMk/>
+            <pc:sldMk cId="1573992039" sldId="256"/>
+            <ac:cxnSpMk id="67" creationId="{E3E411FB-33CC-5F34-656E-94560D185092}"/>
+          </ac:cxnSpMkLst>
+        </pc:cxnChg>
+        <pc:cxnChg chg="add mod">
+          <ac:chgData name="Fatima Pillosu" userId="a6295d4dc9e22643" providerId="LiveId" clId="{87453732-75AC-4426-B5D3-B7C69C2D4F54}" dt="2026-01-22T23:33:55.144" v="1166" actId="14100"/>
+          <ac:cxnSpMkLst>
+            <pc:docMk/>
+            <pc:sldMk cId="1573992039" sldId="256"/>
+            <ac:cxnSpMk id="111" creationId="{4EE81F27-A2FC-54A4-9BD3-2E705EEA2164}"/>
           </ac:cxnSpMkLst>
         </pc:cxnChg>
       </pc:sldChg>
@@ -562,15 +978,15 @@
         </p:nvSpPr>
         <p:spPr>
           <a:xfrm>
-            <a:off x="310515" y="736551"/>
-            <a:ext cx="3519170" cy="1566863"/>
+            <a:off x="719931" y="412312"/>
+            <a:ext cx="4319588" cy="877112"/>
           </a:xfrm>
         </p:spPr>
         <p:txBody>
           <a:bodyPr anchor="b"/>
           <a:lstStyle>
             <a:lvl1pPr algn="ctr">
-              <a:defRPr sz="2717"/>
+              <a:defRPr sz="2204"/>
             </a:lvl1pPr>
           </a:lstStyle>
           <a:p>
@@ -594,8 +1010,8 @@
         </p:nvSpPr>
         <p:spPr>
           <a:xfrm>
-            <a:off x="517525" y="2363838"/>
-            <a:ext cx="3105150" cy="1086594"/>
+            <a:off x="719931" y="1323249"/>
+            <a:ext cx="4319588" cy="608263"/>
           </a:xfrm>
         </p:spPr>
         <p:txBody>
@@ -603,39 +1019,39 @@
           <a:lstStyle>
             <a:lvl1pPr marL="0" indent="0" algn="ctr">
               <a:buNone/>
-              <a:defRPr sz="1087"/>
+              <a:defRPr sz="882"/>
             </a:lvl1pPr>
-            <a:lvl2pPr marL="207020" indent="0" algn="ctr">
+            <a:lvl2pPr marL="167975" indent="0" algn="ctr">
               <a:buNone/>
-              <a:defRPr sz="906"/>
+              <a:defRPr sz="735"/>
             </a:lvl2pPr>
-            <a:lvl3pPr marL="414040" indent="0" algn="ctr">
+            <a:lvl3pPr marL="335951" indent="0" algn="ctr">
               <a:buNone/>
-              <a:defRPr sz="815"/>
+              <a:defRPr sz="661"/>
             </a:lvl3pPr>
-            <a:lvl4pPr marL="621060" indent="0" algn="ctr">
+            <a:lvl4pPr marL="503926" indent="0" algn="ctr">
               <a:buNone/>
-              <a:defRPr sz="724"/>
+              <a:defRPr sz="588"/>
             </a:lvl4pPr>
-            <a:lvl5pPr marL="828081" indent="0" algn="ctr">
+            <a:lvl5pPr marL="671901" indent="0" algn="ctr">
               <a:buNone/>
-              <a:defRPr sz="724"/>
+              <a:defRPr sz="588"/>
             </a:lvl5pPr>
-            <a:lvl6pPr marL="1035101" indent="0" algn="ctr">
+            <a:lvl6pPr marL="839876" indent="0" algn="ctr">
               <a:buNone/>
-              <a:defRPr sz="724"/>
+              <a:defRPr sz="588"/>
             </a:lvl6pPr>
-            <a:lvl7pPr marL="1242121" indent="0" algn="ctr">
+            <a:lvl7pPr marL="1007852" indent="0" algn="ctr">
               <a:buNone/>
-              <a:defRPr sz="724"/>
+              <a:defRPr sz="588"/>
             </a:lvl7pPr>
-            <a:lvl8pPr marL="1449141" indent="0" algn="ctr">
+            <a:lvl8pPr marL="1175827" indent="0" algn="ctr">
               <a:buNone/>
-              <a:defRPr sz="724"/>
+              <a:defRPr sz="588"/>
             </a:lvl8pPr>
-            <a:lvl9pPr marL="1656161" indent="0" algn="ctr">
+            <a:lvl9pPr marL="1343802" indent="0" algn="ctr">
               <a:buNone/>
-              <a:defRPr sz="724"/>
+              <a:defRPr sz="588"/>
             </a:lvl9pPr>
           </a:lstStyle>
           <a:p>
@@ -715,7 +1131,7 @@
     </p:spTree>
     <p:extLst>
       <p:ext uri="{BB962C8B-B14F-4D97-AF65-F5344CB8AC3E}">
-        <p14:creationId xmlns:p14="http://schemas.microsoft.com/office/powerpoint/2010/main" val="4215184418"/>
+        <p14:creationId xmlns:p14="http://schemas.microsoft.com/office/powerpoint/2010/main" val="966708158"/>
       </p:ext>
     </p:extLst>
   </p:cSld>
@@ -885,7 +1301,7 @@
     </p:spTree>
     <p:extLst>
       <p:ext uri="{BB962C8B-B14F-4D97-AF65-F5344CB8AC3E}">
-        <p14:creationId xmlns:p14="http://schemas.microsoft.com/office/powerpoint/2010/main" val="3240061376"/>
+        <p14:creationId xmlns:p14="http://schemas.microsoft.com/office/powerpoint/2010/main" val="1015252624"/>
       </p:ext>
     </p:extLst>
   </p:cSld>
@@ -924,8 +1340,8 @@
         </p:nvSpPr>
         <p:spPr>
           <a:xfrm>
-            <a:off x="2962831" y="239613"/>
-            <a:ext cx="892731" cy="3814019"/>
+            <a:off x="4121607" y="134133"/>
+            <a:ext cx="1241881" cy="2135044"/>
           </a:xfrm>
         </p:spPr>
         <p:txBody>
@@ -952,8 +1368,8 @@
         </p:nvSpPr>
         <p:spPr>
           <a:xfrm>
-            <a:off x="284639" y="239613"/>
-            <a:ext cx="2626439" cy="3814019"/>
+            <a:off x="395962" y="134133"/>
+            <a:ext cx="3653651" cy="2135044"/>
           </a:xfrm>
         </p:spPr>
         <p:txBody>
@@ -1065,7 +1481,7 @@
     </p:spTree>
     <p:extLst>
       <p:ext uri="{BB962C8B-B14F-4D97-AF65-F5344CB8AC3E}">
-        <p14:creationId xmlns:p14="http://schemas.microsoft.com/office/powerpoint/2010/main" val="3290670060"/>
+        <p14:creationId xmlns:p14="http://schemas.microsoft.com/office/powerpoint/2010/main" val="2190298995"/>
       </p:ext>
     </p:extLst>
   </p:cSld>
@@ -1235,7 +1651,7 @@
     </p:spTree>
     <p:extLst>
       <p:ext uri="{BB962C8B-B14F-4D97-AF65-F5344CB8AC3E}">
-        <p14:creationId xmlns:p14="http://schemas.microsoft.com/office/powerpoint/2010/main" val="2570768429"/>
+        <p14:creationId xmlns:p14="http://schemas.microsoft.com/office/powerpoint/2010/main" val="1379433252"/>
       </p:ext>
     </p:extLst>
   </p:cSld>
@@ -1274,15 +1690,15 @@
         </p:nvSpPr>
         <p:spPr>
           <a:xfrm>
-            <a:off x="282482" y="1122017"/>
-            <a:ext cx="3570923" cy="1872109"/>
+            <a:off x="392962" y="628091"/>
+            <a:ext cx="4967526" cy="1047985"/>
           </a:xfrm>
         </p:spPr>
         <p:txBody>
           <a:bodyPr anchor="b"/>
           <a:lstStyle>
             <a:lvl1pPr>
-              <a:defRPr sz="2717"/>
+              <a:defRPr sz="2204"/>
             </a:lvl1pPr>
           </a:lstStyle>
           <a:p>
@@ -1306,8 +1722,8 @@
         </p:nvSpPr>
         <p:spPr>
           <a:xfrm>
-            <a:off x="282482" y="3011836"/>
-            <a:ext cx="3570923" cy="984498"/>
+            <a:off x="392962" y="1685991"/>
+            <a:ext cx="4967526" cy="551110"/>
           </a:xfrm>
         </p:spPr>
         <p:txBody>
@@ -1315,7 +1731,7 @@
           <a:lstStyle>
             <a:lvl1pPr marL="0" indent="0">
               <a:buNone/>
-              <a:defRPr sz="1087">
+              <a:defRPr sz="882">
                 <a:solidFill>
                   <a:schemeClr val="tx1">
                     <a:tint val="82000"/>
@@ -1323,9 +1739,9 @@
                 </a:solidFill>
               </a:defRPr>
             </a:lvl1pPr>
-            <a:lvl2pPr marL="207020" indent="0">
+            <a:lvl2pPr marL="167975" indent="0">
               <a:buNone/>
-              <a:defRPr sz="906">
+              <a:defRPr sz="735">
                 <a:solidFill>
                   <a:schemeClr val="tx1">
                     <a:tint val="82000"/>
@@ -1333,9 +1749,9 @@
                 </a:solidFill>
               </a:defRPr>
             </a:lvl2pPr>
-            <a:lvl3pPr marL="414040" indent="0">
+            <a:lvl3pPr marL="335951" indent="0">
               <a:buNone/>
-              <a:defRPr sz="815">
+              <a:defRPr sz="661">
                 <a:solidFill>
                   <a:schemeClr val="tx1">
                     <a:tint val="82000"/>
@@ -1343,9 +1759,9 @@
                 </a:solidFill>
               </a:defRPr>
             </a:lvl3pPr>
-            <a:lvl4pPr marL="621060" indent="0">
+            <a:lvl4pPr marL="503926" indent="0">
               <a:buNone/>
-              <a:defRPr sz="724">
+              <a:defRPr sz="588">
                 <a:solidFill>
                   <a:schemeClr val="tx1">
                     <a:tint val="82000"/>
@@ -1353,9 +1769,9 @@
                 </a:solidFill>
               </a:defRPr>
             </a:lvl4pPr>
-            <a:lvl5pPr marL="828081" indent="0">
+            <a:lvl5pPr marL="671901" indent="0">
               <a:buNone/>
-              <a:defRPr sz="724">
+              <a:defRPr sz="588">
                 <a:solidFill>
                   <a:schemeClr val="tx1">
                     <a:tint val="82000"/>
@@ -1363,9 +1779,9 @@
                 </a:solidFill>
               </a:defRPr>
             </a:lvl5pPr>
-            <a:lvl6pPr marL="1035101" indent="0">
+            <a:lvl6pPr marL="839876" indent="0">
               <a:buNone/>
-              <a:defRPr sz="724">
+              <a:defRPr sz="588">
                 <a:solidFill>
                   <a:schemeClr val="tx1">
                     <a:tint val="82000"/>
@@ -1373,9 +1789,9 @@
                 </a:solidFill>
               </a:defRPr>
             </a:lvl6pPr>
-            <a:lvl7pPr marL="1242121" indent="0">
+            <a:lvl7pPr marL="1007852" indent="0">
               <a:buNone/>
-              <a:defRPr sz="724">
+              <a:defRPr sz="588">
                 <a:solidFill>
                   <a:schemeClr val="tx1">
                     <a:tint val="82000"/>
@@ -1383,9 +1799,9 @@
                 </a:solidFill>
               </a:defRPr>
             </a:lvl7pPr>
-            <a:lvl8pPr marL="1449141" indent="0">
+            <a:lvl8pPr marL="1175827" indent="0">
               <a:buNone/>
-              <a:defRPr sz="724">
+              <a:defRPr sz="588">
                 <a:solidFill>
                   <a:schemeClr val="tx1">
                     <a:tint val="82000"/>
@@ -1393,9 +1809,9 @@
                 </a:solidFill>
               </a:defRPr>
             </a:lvl8pPr>
-            <a:lvl9pPr marL="1656161" indent="0">
+            <a:lvl9pPr marL="1343802" indent="0">
               <a:buNone/>
-              <a:defRPr sz="724">
+              <a:defRPr sz="588">
                 <a:solidFill>
                   <a:schemeClr val="tx1">
                     <a:tint val="82000"/>
@@ -1481,7 +1897,7 @@
     </p:spTree>
     <p:extLst>
       <p:ext uri="{BB962C8B-B14F-4D97-AF65-F5344CB8AC3E}">
-        <p14:creationId xmlns:p14="http://schemas.microsoft.com/office/powerpoint/2010/main" val="1086882721"/>
+        <p14:creationId xmlns:p14="http://schemas.microsoft.com/office/powerpoint/2010/main" val="4022177778"/>
       </p:ext>
     </p:extLst>
   </p:cSld>
@@ -1543,8 +1959,8 @@
         </p:nvSpPr>
         <p:spPr>
           <a:xfrm>
-            <a:off x="284639" y="1198066"/>
-            <a:ext cx="1759585" cy="2855566"/>
+            <a:off x="395962" y="670664"/>
+            <a:ext cx="2447766" cy="1598513"/>
           </a:xfrm>
         </p:spPr>
         <p:txBody>
@@ -1600,8 +2016,8 @@
         </p:nvSpPr>
         <p:spPr>
           <a:xfrm>
-            <a:off x="2095976" y="1198066"/>
-            <a:ext cx="1759585" cy="2855566"/>
+            <a:off x="2915722" y="670664"/>
+            <a:ext cx="2447766" cy="1598513"/>
           </a:xfrm>
         </p:spPr>
         <p:txBody>
@@ -1713,7 +2129,7 @@
     </p:spTree>
     <p:extLst>
       <p:ext uri="{BB962C8B-B14F-4D97-AF65-F5344CB8AC3E}">
-        <p14:creationId xmlns:p14="http://schemas.microsoft.com/office/powerpoint/2010/main" val="2485809336"/>
+        <p14:creationId xmlns:p14="http://schemas.microsoft.com/office/powerpoint/2010/main" val="3030428987"/>
       </p:ext>
     </p:extLst>
   </p:cSld>
@@ -1752,8 +2168,8 @@
         </p:nvSpPr>
         <p:spPr>
           <a:xfrm>
-            <a:off x="285178" y="239614"/>
-            <a:ext cx="3570923" cy="869901"/>
+            <a:off x="396712" y="134133"/>
+            <a:ext cx="4967526" cy="486960"/>
           </a:xfrm>
         </p:spPr>
         <p:txBody>
@@ -1780,8 +2196,8 @@
         </p:nvSpPr>
         <p:spPr>
           <a:xfrm>
-            <a:off x="285179" y="1103263"/>
-            <a:ext cx="1751498" cy="540692"/>
+            <a:off x="396713" y="617594"/>
+            <a:ext cx="2436517" cy="302673"/>
           </a:xfrm>
         </p:spPr>
         <p:txBody>
@@ -1789,39 +2205,39 @@
           <a:lstStyle>
             <a:lvl1pPr marL="0" indent="0">
               <a:buNone/>
-              <a:defRPr sz="1087" b="1"/>
+              <a:defRPr sz="882" b="1"/>
             </a:lvl1pPr>
-            <a:lvl2pPr marL="207020" indent="0">
+            <a:lvl2pPr marL="167975" indent="0">
               <a:buNone/>
-              <a:defRPr sz="906" b="1"/>
+              <a:defRPr sz="735" b="1"/>
             </a:lvl2pPr>
-            <a:lvl3pPr marL="414040" indent="0">
+            <a:lvl3pPr marL="335951" indent="0">
               <a:buNone/>
-              <a:defRPr sz="815" b="1"/>
+              <a:defRPr sz="661" b="1"/>
             </a:lvl3pPr>
-            <a:lvl4pPr marL="621060" indent="0">
+            <a:lvl4pPr marL="503926" indent="0">
               <a:buNone/>
-              <a:defRPr sz="724" b="1"/>
+              <a:defRPr sz="588" b="1"/>
             </a:lvl4pPr>
-            <a:lvl5pPr marL="828081" indent="0">
+            <a:lvl5pPr marL="671901" indent="0">
               <a:buNone/>
-              <a:defRPr sz="724" b="1"/>
+              <a:defRPr sz="588" b="1"/>
             </a:lvl5pPr>
-            <a:lvl6pPr marL="1035101" indent="0">
+            <a:lvl6pPr marL="839876" indent="0">
               <a:buNone/>
-              <a:defRPr sz="724" b="1"/>
+              <a:defRPr sz="588" b="1"/>
             </a:lvl6pPr>
-            <a:lvl7pPr marL="1242121" indent="0">
+            <a:lvl7pPr marL="1007852" indent="0">
               <a:buNone/>
-              <a:defRPr sz="724" b="1"/>
+              <a:defRPr sz="588" b="1"/>
             </a:lvl7pPr>
-            <a:lvl8pPr marL="1449141" indent="0">
+            <a:lvl8pPr marL="1175827" indent="0">
               <a:buNone/>
-              <a:defRPr sz="724" b="1"/>
+              <a:defRPr sz="588" b="1"/>
             </a:lvl8pPr>
-            <a:lvl9pPr marL="1656161" indent="0">
+            <a:lvl9pPr marL="1343802" indent="0">
               <a:buNone/>
-              <a:defRPr sz="724" b="1"/>
+              <a:defRPr sz="588" b="1"/>
             </a:lvl9pPr>
           </a:lstStyle>
           <a:p>
@@ -1845,8 +2261,8 @@
         </p:nvSpPr>
         <p:spPr>
           <a:xfrm>
-            <a:off x="285179" y="1643956"/>
-            <a:ext cx="1751498" cy="2418011"/>
+            <a:off x="396713" y="920267"/>
+            <a:ext cx="2436517" cy="1353575"/>
           </a:xfrm>
         </p:spPr>
         <p:txBody>
@@ -1902,8 +2318,8 @@
         </p:nvSpPr>
         <p:spPr>
           <a:xfrm>
-            <a:off x="2095977" y="1103263"/>
-            <a:ext cx="1760124" cy="540692"/>
+            <a:off x="2915722" y="617594"/>
+            <a:ext cx="2448516" cy="302673"/>
           </a:xfrm>
         </p:spPr>
         <p:txBody>
@@ -1911,39 +2327,39 @@
           <a:lstStyle>
             <a:lvl1pPr marL="0" indent="0">
               <a:buNone/>
-              <a:defRPr sz="1087" b="1"/>
+              <a:defRPr sz="882" b="1"/>
             </a:lvl1pPr>
-            <a:lvl2pPr marL="207020" indent="0">
+            <a:lvl2pPr marL="167975" indent="0">
               <a:buNone/>
-              <a:defRPr sz="906" b="1"/>
+              <a:defRPr sz="735" b="1"/>
             </a:lvl2pPr>
-            <a:lvl3pPr marL="414040" indent="0">
+            <a:lvl3pPr marL="335951" indent="0">
               <a:buNone/>
-              <a:defRPr sz="815" b="1"/>
+              <a:defRPr sz="661" b="1"/>
             </a:lvl3pPr>
-            <a:lvl4pPr marL="621060" indent="0">
+            <a:lvl4pPr marL="503926" indent="0">
               <a:buNone/>
-              <a:defRPr sz="724" b="1"/>
+              <a:defRPr sz="588" b="1"/>
             </a:lvl4pPr>
-            <a:lvl5pPr marL="828081" indent="0">
+            <a:lvl5pPr marL="671901" indent="0">
               <a:buNone/>
-              <a:defRPr sz="724" b="1"/>
+              <a:defRPr sz="588" b="1"/>
             </a:lvl5pPr>
-            <a:lvl6pPr marL="1035101" indent="0">
+            <a:lvl6pPr marL="839876" indent="0">
               <a:buNone/>
-              <a:defRPr sz="724" b="1"/>
+              <a:defRPr sz="588" b="1"/>
             </a:lvl6pPr>
-            <a:lvl7pPr marL="1242121" indent="0">
+            <a:lvl7pPr marL="1007852" indent="0">
               <a:buNone/>
-              <a:defRPr sz="724" b="1"/>
+              <a:defRPr sz="588" b="1"/>
             </a:lvl7pPr>
-            <a:lvl8pPr marL="1449141" indent="0">
+            <a:lvl8pPr marL="1175827" indent="0">
               <a:buNone/>
-              <a:defRPr sz="724" b="1"/>
+              <a:defRPr sz="588" b="1"/>
             </a:lvl8pPr>
-            <a:lvl9pPr marL="1656161" indent="0">
+            <a:lvl9pPr marL="1343802" indent="0">
               <a:buNone/>
-              <a:defRPr sz="724" b="1"/>
+              <a:defRPr sz="588" b="1"/>
             </a:lvl9pPr>
           </a:lstStyle>
           <a:p>
@@ -1967,8 +2383,8 @@
         </p:nvSpPr>
         <p:spPr>
           <a:xfrm>
-            <a:off x="2095977" y="1643956"/>
-            <a:ext cx="1760124" cy="2418011"/>
+            <a:off x="2915722" y="920267"/>
+            <a:ext cx="2448516" cy="1353575"/>
           </a:xfrm>
         </p:spPr>
         <p:txBody>
@@ -2080,7 +2496,7 @@
     </p:spTree>
     <p:extLst>
       <p:ext uri="{BB962C8B-B14F-4D97-AF65-F5344CB8AC3E}">
-        <p14:creationId xmlns:p14="http://schemas.microsoft.com/office/powerpoint/2010/main" val="3425147199"/>
+        <p14:creationId xmlns:p14="http://schemas.microsoft.com/office/powerpoint/2010/main" val="3726321075"/>
       </p:ext>
     </p:extLst>
   </p:cSld>
@@ -2198,7 +2614,7 @@
     </p:spTree>
     <p:extLst>
       <p:ext uri="{BB962C8B-B14F-4D97-AF65-F5344CB8AC3E}">
-        <p14:creationId xmlns:p14="http://schemas.microsoft.com/office/powerpoint/2010/main" val="4166872336"/>
+        <p14:creationId xmlns:p14="http://schemas.microsoft.com/office/powerpoint/2010/main" val="1138051211"/>
       </p:ext>
     </p:extLst>
   </p:cSld>
@@ -2293,7 +2709,7 @@
     </p:spTree>
     <p:extLst>
       <p:ext uri="{BB962C8B-B14F-4D97-AF65-F5344CB8AC3E}">
-        <p14:creationId xmlns:p14="http://schemas.microsoft.com/office/powerpoint/2010/main" val="2230682355"/>
+        <p14:creationId xmlns:p14="http://schemas.microsoft.com/office/powerpoint/2010/main" val="2601565038"/>
       </p:ext>
     </p:extLst>
   </p:cSld>
@@ -2332,15 +2748,15 @@
         </p:nvSpPr>
         <p:spPr>
           <a:xfrm>
-            <a:off x="285178" y="300038"/>
-            <a:ext cx="1335322" cy="1050131"/>
+            <a:off x="396713" y="167958"/>
+            <a:ext cx="1857572" cy="587851"/>
           </a:xfrm>
         </p:spPr>
         <p:txBody>
           <a:bodyPr anchor="b"/>
           <a:lstStyle>
             <a:lvl1pPr>
-              <a:defRPr sz="1449"/>
+              <a:defRPr sz="1176"/>
             </a:lvl1pPr>
           </a:lstStyle>
           <a:p>
@@ -2364,39 +2780,39 @@
         </p:nvSpPr>
         <p:spPr>
           <a:xfrm>
-            <a:off x="1760124" y="647999"/>
-            <a:ext cx="2095976" cy="3198317"/>
+            <a:off x="2448516" y="362742"/>
+            <a:ext cx="2915722" cy="1790381"/>
           </a:xfrm>
         </p:spPr>
         <p:txBody>
           <a:bodyPr/>
           <a:lstStyle>
             <a:lvl1pPr>
-              <a:defRPr sz="1449"/>
+              <a:defRPr sz="1176"/>
             </a:lvl1pPr>
             <a:lvl2pPr>
-              <a:defRPr sz="1268"/>
+              <a:defRPr sz="1029"/>
             </a:lvl2pPr>
             <a:lvl3pPr>
-              <a:defRPr sz="1087"/>
+              <a:defRPr sz="882"/>
             </a:lvl3pPr>
             <a:lvl4pPr>
-              <a:defRPr sz="906"/>
+              <a:defRPr sz="735"/>
             </a:lvl4pPr>
             <a:lvl5pPr>
-              <a:defRPr sz="906"/>
+              <a:defRPr sz="735"/>
             </a:lvl5pPr>
             <a:lvl6pPr>
-              <a:defRPr sz="906"/>
+              <a:defRPr sz="735"/>
             </a:lvl6pPr>
             <a:lvl7pPr>
-              <a:defRPr sz="906"/>
+              <a:defRPr sz="735"/>
             </a:lvl7pPr>
             <a:lvl8pPr>
-              <a:defRPr sz="906"/>
+              <a:defRPr sz="735"/>
             </a:lvl8pPr>
             <a:lvl9pPr>
-              <a:defRPr sz="906"/>
+              <a:defRPr sz="735"/>
             </a:lvl9pPr>
           </a:lstStyle>
           <a:p>
@@ -2449,8 +2865,8 @@
         </p:nvSpPr>
         <p:spPr>
           <a:xfrm>
-            <a:off x="285178" y="1350169"/>
-            <a:ext cx="1335322" cy="2501355"/>
+            <a:off x="396713" y="755809"/>
+            <a:ext cx="1857572" cy="1400229"/>
           </a:xfrm>
         </p:spPr>
         <p:txBody>
@@ -2458,39 +2874,39 @@
           <a:lstStyle>
             <a:lvl1pPr marL="0" indent="0">
               <a:buNone/>
-              <a:defRPr sz="724"/>
+              <a:defRPr sz="588"/>
             </a:lvl1pPr>
-            <a:lvl2pPr marL="207020" indent="0">
+            <a:lvl2pPr marL="167975" indent="0">
               <a:buNone/>
-              <a:defRPr sz="634"/>
+              <a:defRPr sz="514"/>
             </a:lvl2pPr>
-            <a:lvl3pPr marL="414040" indent="0">
+            <a:lvl3pPr marL="335951" indent="0">
               <a:buNone/>
-              <a:defRPr sz="543"/>
+              <a:defRPr sz="441"/>
             </a:lvl3pPr>
-            <a:lvl4pPr marL="621060" indent="0">
+            <a:lvl4pPr marL="503926" indent="0">
               <a:buNone/>
-              <a:defRPr sz="453"/>
+              <a:defRPr sz="367"/>
             </a:lvl4pPr>
-            <a:lvl5pPr marL="828081" indent="0">
+            <a:lvl5pPr marL="671901" indent="0">
               <a:buNone/>
-              <a:defRPr sz="453"/>
+              <a:defRPr sz="367"/>
             </a:lvl5pPr>
-            <a:lvl6pPr marL="1035101" indent="0">
+            <a:lvl6pPr marL="839876" indent="0">
               <a:buNone/>
-              <a:defRPr sz="453"/>
+              <a:defRPr sz="367"/>
             </a:lvl6pPr>
-            <a:lvl7pPr marL="1242121" indent="0">
+            <a:lvl7pPr marL="1007852" indent="0">
               <a:buNone/>
-              <a:defRPr sz="453"/>
+              <a:defRPr sz="367"/>
             </a:lvl7pPr>
-            <a:lvl8pPr marL="1449141" indent="0">
+            <a:lvl8pPr marL="1175827" indent="0">
               <a:buNone/>
-              <a:defRPr sz="453"/>
+              <a:defRPr sz="367"/>
             </a:lvl8pPr>
-            <a:lvl9pPr marL="1656161" indent="0">
+            <a:lvl9pPr marL="1343802" indent="0">
               <a:buNone/>
-              <a:defRPr sz="453"/>
+              <a:defRPr sz="367"/>
             </a:lvl9pPr>
           </a:lstStyle>
           <a:p>
@@ -2570,7 +2986,7 @@
     </p:spTree>
     <p:extLst>
       <p:ext uri="{BB962C8B-B14F-4D97-AF65-F5344CB8AC3E}">
-        <p14:creationId xmlns:p14="http://schemas.microsoft.com/office/powerpoint/2010/main" val="1129559582"/>
+        <p14:creationId xmlns:p14="http://schemas.microsoft.com/office/powerpoint/2010/main" val="2030451596"/>
       </p:ext>
     </p:extLst>
   </p:cSld>
@@ -2609,15 +3025,15 @@
         </p:nvSpPr>
         <p:spPr>
           <a:xfrm>
-            <a:off x="285178" y="300038"/>
-            <a:ext cx="1335322" cy="1050131"/>
+            <a:off x="396713" y="167958"/>
+            <a:ext cx="1857572" cy="587851"/>
           </a:xfrm>
         </p:spPr>
         <p:txBody>
           <a:bodyPr anchor="b"/>
           <a:lstStyle>
             <a:lvl1pPr>
-              <a:defRPr sz="1449"/>
+              <a:defRPr sz="1176"/>
             </a:lvl1pPr>
           </a:lstStyle>
           <a:p>
@@ -2641,8 +3057,8 @@
         </p:nvSpPr>
         <p:spPr>
           <a:xfrm>
-            <a:off x="1760124" y="647999"/>
-            <a:ext cx="2095976" cy="3198317"/>
+            <a:off x="2448516" y="362742"/>
+            <a:ext cx="2915722" cy="1790381"/>
           </a:xfrm>
         </p:spPr>
         <p:txBody>
@@ -2650,39 +3066,39 @@
           <a:lstStyle>
             <a:lvl1pPr marL="0" indent="0">
               <a:buNone/>
-              <a:defRPr sz="1449"/>
+              <a:defRPr sz="1176"/>
             </a:lvl1pPr>
-            <a:lvl2pPr marL="207020" indent="0">
+            <a:lvl2pPr marL="167975" indent="0">
               <a:buNone/>
-              <a:defRPr sz="1268"/>
+              <a:defRPr sz="1029"/>
             </a:lvl2pPr>
-            <a:lvl3pPr marL="414040" indent="0">
+            <a:lvl3pPr marL="335951" indent="0">
               <a:buNone/>
-              <a:defRPr sz="1087"/>
+              <a:defRPr sz="882"/>
             </a:lvl3pPr>
-            <a:lvl4pPr marL="621060" indent="0">
+            <a:lvl4pPr marL="503926" indent="0">
               <a:buNone/>
-              <a:defRPr sz="906"/>
+              <a:defRPr sz="735"/>
             </a:lvl4pPr>
-            <a:lvl5pPr marL="828081" indent="0">
+            <a:lvl5pPr marL="671901" indent="0">
               <a:buNone/>
-              <a:defRPr sz="906"/>
+              <a:defRPr sz="735"/>
             </a:lvl5pPr>
-            <a:lvl6pPr marL="1035101" indent="0">
+            <a:lvl6pPr marL="839876" indent="0">
               <a:buNone/>
-              <a:defRPr sz="906"/>
+              <a:defRPr sz="735"/>
             </a:lvl6pPr>
-            <a:lvl7pPr marL="1242121" indent="0">
+            <a:lvl7pPr marL="1007852" indent="0">
               <a:buNone/>
-              <a:defRPr sz="906"/>
+              <a:defRPr sz="735"/>
             </a:lvl7pPr>
-            <a:lvl8pPr marL="1449141" indent="0">
+            <a:lvl8pPr marL="1175827" indent="0">
               <a:buNone/>
-              <a:defRPr sz="906"/>
+              <a:defRPr sz="735"/>
             </a:lvl8pPr>
-            <a:lvl9pPr marL="1656161" indent="0">
+            <a:lvl9pPr marL="1343802" indent="0">
               <a:buNone/>
-              <a:defRPr sz="906"/>
+              <a:defRPr sz="735"/>
             </a:lvl9pPr>
           </a:lstStyle>
           <a:p>
@@ -2706,8 +3122,8 @@
         </p:nvSpPr>
         <p:spPr>
           <a:xfrm>
-            <a:off x="285178" y="1350169"/>
-            <a:ext cx="1335322" cy="2501355"/>
+            <a:off x="396713" y="755809"/>
+            <a:ext cx="1857572" cy="1400229"/>
           </a:xfrm>
         </p:spPr>
         <p:txBody>
@@ -2715,39 +3131,39 @@
           <a:lstStyle>
             <a:lvl1pPr marL="0" indent="0">
               <a:buNone/>
-              <a:defRPr sz="724"/>
+              <a:defRPr sz="588"/>
             </a:lvl1pPr>
-            <a:lvl2pPr marL="207020" indent="0">
+            <a:lvl2pPr marL="167975" indent="0">
               <a:buNone/>
-              <a:defRPr sz="634"/>
+              <a:defRPr sz="514"/>
             </a:lvl2pPr>
-            <a:lvl3pPr marL="414040" indent="0">
+            <a:lvl3pPr marL="335951" indent="0">
               <a:buNone/>
-              <a:defRPr sz="543"/>
+              <a:defRPr sz="441"/>
             </a:lvl3pPr>
-            <a:lvl4pPr marL="621060" indent="0">
+            <a:lvl4pPr marL="503926" indent="0">
               <a:buNone/>
-              <a:defRPr sz="453"/>
+              <a:defRPr sz="367"/>
             </a:lvl4pPr>
-            <a:lvl5pPr marL="828081" indent="0">
+            <a:lvl5pPr marL="671901" indent="0">
               <a:buNone/>
-              <a:defRPr sz="453"/>
+              <a:defRPr sz="367"/>
             </a:lvl5pPr>
-            <a:lvl6pPr marL="1035101" indent="0">
+            <a:lvl6pPr marL="839876" indent="0">
               <a:buNone/>
-              <a:defRPr sz="453"/>
+              <a:defRPr sz="367"/>
             </a:lvl6pPr>
-            <a:lvl7pPr marL="1242121" indent="0">
+            <a:lvl7pPr marL="1007852" indent="0">
               <a:buNone/>
-              <a:defRPr sz="453"/>
+              <a:defRPr sz="367"/>
             </a:lvl7pPr>
-            <a:lvl8pPr marL="1449141" indent="0">
+            <a:lvl8pPr marL="1175827" indent="0">
               <a:buNone/>
-              <a:defRPr sz="453"/>
+              <a:defRPr sz="367"/>
             </a:lvl8pPr>
-            <a:lvl9pPr marL="1656161" indent="0">
+            <a:lvl9pPr marL="1343802" indent="0">
               <a:buNone/>
-              <a:defRPr sz="453"/>
+              <a:defRPr sz="367"/>
             </a:lvl9pPr>
           </a:lstStyle>
           <a:p>
@@ -2827,7 +3243,7 @@
     </p:spTree>
     <p:extLst>
       <p:ext uri="{BB962C8B-B14F-4D97-AF65-F5344CB8AC3E}">
-        <p14:creationId xmlns:p14="http://schemas.microsoft.com/office/powerpoint/2010/main" val="1295419014"/>
+        <p14:creationId xmlns:p14="http://schemas.microsoft.com/office/powerpoint/2010/main" val="281532981"/>
       </p:ext>
     </p:extLst>
   </p:cSld>
@@ -2871,8 +3287,8 @@
         </p:nvSpPr>
         <p:spPr>
           <a:xfrm>
-            <a:off x="284639" y="239614"/>
-            <a:ext cx="3570923" cy="869901"/>
+            <a:off x="395962" y="134133"/>
+            <a:ext cx="4967526" cy="486960"/>
           </a:xfrm>
           <a:prstGeom prst="rect">
             <a:avLst/>
@@ -2904,8 +3320,8 @@
         </p:nvSpPr>
         <p:spPr>
           <a:xfrm>
-            <a:off x="284639" y="1198066"/>
-            <a:ext cx="3570923" cy="2855566"/>
+            <a:off x="395962" y="670664"/>
+            <a:ext cx="4967526" cy="1598513"/>
           </a:xfrm>
           <a:prstGeom prst="rect">
             <a:avLst/>
@@ -2966,8 +3382,8 @@
         </p:nvSpPr>
         <p:spPr>
           <a:xfrm>
-            <a:off x="284639" y="4171356"/>
-            <a:ext cx="931545" cy="239613"/>
+            <a:off x="395962" y="2335076"/>
+            <a:ext cx="1295876" cy="134133"/>
           </a:xfrm>
           <a:prstGeom prst="rect">
             <a:avLst/>
@@ -2977,7 +3393,7 @@
           <a:bodyPr vert="horz" lIns="91440" tIns="45720" rIns="91440" bIns="45720" rtlCol="0" anchor="ctr"/>
           <a:lstStyle>
             <a:lvl1pPr algn="l">
-              <a:defRPr sz="543">
+              <a:defRPr sz="441">
                 <a:solidFill>
                   <a:schemeClr val="tx1">
                     <a:tint val="82000"/>
@@ -3007,8 +3423,8 @@
         </p:nvSpPr>
         <p:spPr>
           <a:xfrm>
-            <a:off x="1371441" y="4171356"/>
-            <a:ext cx="1397318" cy="239613"/>
+            <a:off x="1907818" y="2335076"/>
+            <a:ext cx="1943814" cy="134133"/>
           </a:xfrm>
           <a:prstGeom prst="rect">
             <a:avLst/>
@@ -3018,7 +3434,7 @@
           <a:bodyPr vert="horz" lIns="91440" tIns="45720" rIns="91440" bIns="45720" rtlCol="0" anchor="ctr"/>
           <a:lstStyle>
             <a:lvl1pPr algn="ctr">
-              <a:defRPr sz="543">
+              <a:defRPr sz="441">
                 <a:solidFill>
                   <a:schemeClr val="tx1">
                     <a:tint val="82000"/>
@@ -3044,8 +3460,8 @@
         </p:nvSpPr>
         <p:spPr>
           <a:xfrm>
-            <a:off x="2924016" y="4171356"/>
-            <a:ext cx="931545" cy="239613"/>
+            <a:off x="4067612" y="2335076"/>
+            <a:ext cx="1295876" cy="134133"/>
           </a:xfrm>
           <a:prstGeom prst="rect">
             <a:avLst/>
@@ -3055,7 +3471,7 @@
           <a:bodyPr vert="horz" lIns="91440" tIns="45720" rIns="91440" bIns="45720" rtlCol="0" anchor="ctr"/>
           <a:lstStyle>
             <a:lvl1pPr algn="r">
-              <a:defRPr sz="543">
+              <a:defRPr sz="441">
                 <a:solidFill>
                   <a:schemeClr val="tx1">
                     <a:tint val="82000"/>
@@ -3076,27 +3492,27 @@
     </p:spTree>
     <p:extLst>
       <p:ext uri="{BB962C8B-B14F-4D97-AF65-F5344CB8AC3E}">
-        <p14:creationId xmlns:p14="http://schemas.microsoft.com/office/powerpoint/2010/main" val="3423585590"/>
+        <p14:creationId xmlns:p14="http://schemas.microsoft.com/office/powerpoint/2010/main" val="2391288883"/>
       </p:ext>
     </p:extLst>
   </p:cSld>
   <p:clrMap bg1="lt1" tx1="dk1" bg2="lt2" tx2="dk2" accent1="accent1" accent2="accent2" accent3="accent3" accent4="accent4" accent5="accent5" accent6="accent6" hlink="hlink" folHlink="folHlink"/>
   <p:sldLayoutIdLst>
-    <p:sldLayoutId id="2147483757" r:id="rId1"/>
-    <p:sldLayoutId id="2147483758" r:id="rId2"/>
-    <p:sldLayoutId id="2147483759" r:id="rId3"/>
-    <p:sldLayoutId id="2147483760" r:id="rId4"/>
-    <p:sldLayoutId id="2147483761" r:id="rId5"/>
-    <p:sldLayoutId id="2147483762" r:id="rId6"/>
-    <p:sldLayoutId id="2147483763" r:id="rId7"/>
-    <p:sldLayoutId id="2147483764" r:id="rId8"/>
-    <p:sldLayoutId id="2147483765" r:id="rId9"/>
-    <p:sldLayoutId id="2147483766" r:id="rId10"/>
-    <p:sldLayoutId id="2147483767" r:id="rId11"/>
+    <p:sldLayoutId id="2147483781" r:id="rId1"/>
+    <p:sldLayoutId id="2147483782" r:id="rId2"/>
+    <p:sldLayoutId id="2147483783" r:id="rId3"/>
+    <p:sldLayoutId id="2147483784" r:id="rId4"/>
+    <p:sldLayoutId id="2147483785" r:id="rId5"/>
+    <p:sldLayoutId id="2147483786" r:id="rId6"/>
+    <p:sldLayoutId id="2147483787" r:id="rId7"/>
+    <p:sldLayoutId id="2147483788" r:id="rId8"/>
+    <p:sldLayoutId id="2147483789" r:id="rId9"/>
+    <p:sldLayoutId id="2147483790" r:id="rId10"/>
+    <p:sldLayoutId id="2147483791" r:id="rId11"/>
   </p:sldLayoutIdLst>
   <p:txStyles>
     <p:titleStyle>
-      <a:lvl1pPr algn="l" defTabSz="414040" rtl="0" eaLnBrk="1" latinLnBrk="0" hangingPunct="1">
+      <a:lvl1pPr algn="l" defTabSz="335951" rtl="0" eaLnBrk="1" latinLnBrk="0" hangingPunct="1">
         <a:lnSpc>
           <a:spcPct val="90000"/>
         </a:lnSpc>
@@ -3104,7 +3520,7 @@
           <a:spcPct val="0"/>
         </a:spcBef>
         <a:buNone/>
-        <a:defRPr sz="1992" kern="1200">
+        <a:defRPr sz="1617" kern="1200">
           <a:solidFill>
             <a:schemeClr val="tx1"/>
           </a:solidFill>
@@ -3115,16 +3531,16 @@
       </a:lvl1pPr>
     </p:titleStyle>
     <p:bodyStyle>
-      <a:lvl1pPr marL="103510" indent="-103510" algn="l" defTabSz="414040" rtl="0" eaLnBrk="1" latinLnBrk="0" hangingPunct="1">
+      <a:lvl1pPr marL="83988" indent="-83988" algn="l" defTabSz="335951" rtl="0" eaLnBrk="1" latinLnBrk="0" hangingPunct="1">
         <a:lnSpc>
           <a:spcPct val="90000"/>
         </a:lnSpc>
         <a:spcBef>
-          <a:spcPts val="453"/>
+          <a:spcPts val="367"/>
         </a:spcBef>
         <a:buFont typeface="Arial" panose="020B0604020202020204" pitchFamily="34" charset="0"/>
         <a:buChar char="•"/>
-        <a:defRPr sz="1268" kern="1200">
+        <a:defRPr sz="1029" kern="1200">
           <a:solidFill>
             <a:schemeClr val="tx1"/>
           </a:solidFill>
@@ -3133,16 +3549,16 @@
           <a:cs typeface="+mn-cs"/>
         </a:defRPr>
       </a:lvl1pPr>
-      <a:lvl2pPr marL="310530" indent="-103510" algn="l" defTabSz="414040" rtl="0" eaLnBrk="1" latinLnBrk="0" hangingPunct="1">
+      <a:lvl2pPr marL="251963" indent="-83988" algn="l" defTabSz="335951" rtl="0" eaLnBrk="1" latinLnBrk="0" hangingPunct="1">
         <a:lnSpc>
           <a:spcPct val="90000"/>
         </a:lnSpc>
         <a:spcBef>
-          <a:spcPts val="226"/>
+          <a:spcPts val="184"/>
         </a:spcBef>
         <a:buFont typeface="Arial" panose="020B0604020202020204" pitchFamily="34" charset="0"/>
         <a:buChar char="•"/>
-        <a:defRPr sz="1087" kern="1200">
+        <a:defRPr sz="882" kern="1200">
           <a:solidFill>
             <a:schemeClr val="tx1"/>
           </a:solidFill>
@@ -3151,16 +3567,16 @@
           <a:cs typeface="+mn-cs"/>
         </a:defRPr>
       </a:lvl2pPr>
-      <a:lvl3pPr marL="517550" indent="-103510" algn="l" defTabSz="414040" rtl="0" eaLnBrk="1" latinLnBrk="0" hangingPunct="1">
+      <a:lvl3pPr marL="419938" indent="-83988" algn="l" defTabSz="335951" rtl="0" eaLnBrk="1" latinLnBrk="0" hangingPunct="1">
         <a:lnSpc>
           <a:spcPct val="90000"/>
         </a:lnSpc>
         <a:spcBef>
-          <a:spcPts val="226"/>
+          <a:spcPts val="184"/>
         </a:spcBef>
         <a:buFont typeface="Arial" panose="020B0604020202020204" pitchFamily="34" charset="0"/>
         <a:buChar char="•"/>
-        <a:defRPr sz="906" kern="1200">
+        <a:defRPr sz="735" kern="1200">
           <a:solidFill>
             <a:schemeClr val="tx1"/>
           </a:solidFill>
@@ -3169,16 +3585,16 @@
           <a:cs typeface="+mn-cs"/>
         </a:defRPr>
       </a:lvl3pPr>
-      <a:lvl4pPr marL="724571" indent="-103510" algn="l" defTabSz="414040" rtl="0" eaLnBrk="1" latinLnBrk="0" hangingPunct="1">
+      <a:lvl4pPr marL="587913" indent="-83988" algn="l" defTabSz="335951" rtl="0" eaLnBrk="1" latinLnBrk="0" hangingPunct="1">
         <a:lnSpc>
           <a:spcPct val="90000"/>
         </a:lnSpc>
         <a:spcBef>
-          <a:spcPts val="226"/>
+          <a:spcPts val="184"/>
         </a:spcBef>
         <a:buFont typeface="Arial" panose="020B0604020202020204" pitchFamily="34" charset="0"/>
         <a:buChar char="•"/>
-        <a:defRPr sz="815" kern="1200">
+        <a:defRPr sz="661" kern="1200">
           <a:solidFill>
             <a:schemeClr val="tx1"/>
           </a:solidFill>
@@ -3187,16 +3603,16 @@
           <a:cs typeface="+mn-cs"/>
         </a:defRPr>
       </a:lvl4pPr>
-      <a:lvl5pPr marL="931591" indent="-103510" algn="l" defTabSz="414040" rtl="0" eaLnBrk="1" latinLnBrk="0" hangingPunct="1">
+      <a:lvl5pPr marL="755889" indent="-83988" algn="l" defTabSz="335951" rtl="0" eaLnBrk="1" latinLnBrk="0" hangingPunct="1">
         <a:lnSpc>
           <a:spcPct val="90000"/>
         </a:lnSpc>
         <a:spcBef>
-          <a:spcPts val="226"/>
+          <a:spcPts val="184"/>
         </a:spcBef>
         <a:buFont typeface="Arial" panose="020B0604020202020204" pitchFamily="34" charset="0"/>
         <a:buChar char="•"/>
-        <a:defRPr sz="815" kern="1200">
+        <a:defRPr sz="661" kern="1200">
           <a:solidFill>
             <a:schemeClr val="tx1"/>
           </a:solidFill>
@@ -3205,16 +3621,16 @@
           <a:cs typeface="+mn-cs"/>
         </a:defRPr>
       </a:lvl5pPr>
-      <a:lvl6pPr marL="1138611" indent="-103510" algn="l" defTabSz="414040" rtl="0" eaLnBrk="1" latinLnBrk="0" hangingPunct="1">
+      <a:lvl6pPr marL="923864" indent="-83988" algn="l" defTabSz="335951" rtl="0" eaLnBrk="1" latinLnBrk="0" hangingPunct="1">
         <a:lnSpc>
           <a:spcPct val="90000"/>
         </a:lnSpc>
         <a:spcBef>
-          <a:spcPts val="226"/>
+          <a:spcPts val="184"/>
         </a:spcBef>
         <a:buFont typeface="Arial" panose="020B0604020202020204" pitchFamily="34" charset="0"/>
         <a:buChar char="•"/>
-        <a:defRPr sz="815" kern="1200">
+        <a:defRPr sz="661" kern="1200">
           <a:solidFill>
             <a:schemeClr val="tx1"/>
           </a:solidFill>
@@ -3223,16 +3639,16 @@
           <a:cs typeface="+mn-cs"/>
         </a:defRPr>
       </a:lvl6pPr>
-      <a:lvl7pPr marL="1345631" indent="-103510" algn="l" defTabSz="414040" rtl="0" eaLnBrk="1" latinLnBrk="0" hangingPunct="1">
+      <a:lvl7pPr marL="1091839" indent="-83988" algn="l" defTabSz="335951" rtl="0" eaLnBrk="1" latinLnBrk="0" hangingPunct="1">
         <a:lnSpc>
           <a:spcPct val="90000"/>
         </a:lnSpc>
         <a:spcBef>
-          <a:spcPts val="226"/>
+          <a:spcPts val="184"/>
         </a:spcBef>
         <a:buFont typeface="Arial" panose="020B0604020202020204" pitchFamily="34" charset="0"/>
         <a:buChar char="•"/>
-        <a:defRPr sz="815" kern="1200">
+        <a:defRPr sz="661" kern="1200">
           <a:solidFill>
             <a:schemeClr val="tx1"/>
           </a:solidFill>
@@ -3241,16 +3657,16 @@
           <a:cs typeface="+mn-cs"/>
         </a:defRPr>
       </a:lvl7pPr>
-      <a:lvl8pPr marL="1552651" indent="-103510" algn="l" defTabSz="414040" rtl="0" eaLnBrk="1" latinLnBrk="0" hangingPunct="1">
+      <a:lvl8pPr marL="1259815" indent="-83988" algn="l" defTabSz="335951" rtl="0" eaLnBrk="1" latinLnBrk="0" hangingPunct="1">
         <a:lnSpc>
           <a:spcPct val="90000"/>
         </a:lnSpc>
         <a:spcBef>
-          <a:spcPts val="226"/>
+          <a:spcPts val="184"/>
         </a:spcBef>
         <a:buFont typeface="Arial" panose="020B0604020202020204" pitchFamily="34" charset="0"/>
         <a:buChar char="•"/>
-        <a:defRPr sz="815" kern="1200">
+        <a:defRPr sz="661" kern="1200">
           <a:solidFill>
             <a:schemeClr val="tx1"/>
           </a:solidFill>
@@ -3259,16 +3675,16 @@
           <a:cs typeface="+mn-cs"/>
         </a:defRPr>
       </a:lvl8pPr>
-      <a:lvl9pPr marL="1759671" indent="-103510" algn="l" defTabSz="414040" rtl="0" eaLnBrk="1" latinLnBrk="0" hangingPunct="1">
+      <a:lvl9pPr marL="1427790" indent="-83988" algn="l" defTabSz="335951" rtl="0" eaLnBrk="1" latinLnBrk="0" hangingPunct="1">
         <a:lnSpc>
           <a:spcPct val="90000"/>
         </a:lnSpc>
         <a:spcBef>
-          <a:spcPts val="226"/>
+          <a:spcPts val="184"/>
         </a:spcBef>
         <a:buFont typeface="Arial" panose="020B0604020202020204" pitchFamily="34" charset="0"/>
         <a:buChar char="•"/>
-        <a:defRPr sz="815" kern="1200">
+        <a:defRPr sz="661" kern="1200">
           <a:solidFill>
             <a:schemeClr val="tx1"/>
           </a:solidFill>
@@ -3282,8 +3698,8 @@
       <a:defPPr>
         <a:defRPr lang="en-US"/>
       </a:defPPr>
-      <a:lvl1pPr marL="0" algn="l" defTabSz="414040" rtl="0" eaLnBrk="1" latinLnBrk="0" hangingPunct="1">
-        <a:defRPr sz="815" kern="1200">
+      <a:lvl1pPr marL="0" algn="l" defTabSz="335951" rtl="0" eaLnBrk="1" latinLnBrk="0" hangingPunct="1">
+        <a:defRPr sz="661" kern="1200">
           <a:solidFill>
             <a:schemeClr val="tx1"/>
           </a:solidFill>
@@ -3292,8 +3708,8 @@
           <a:cs typeface="+mn-cs"/>
         </a:defRPr>
       </a:lvl1pPr>
-      <a:lvl2pPr marL="207020" algn="l" defTabSz="414040" rtl="0" eaLnBrk="1" latinLnBrk="0" hangingPunct="1">
-        <a:defRPr sz="815" kern="1200">
+      <a:lvl2pPr marL="167975" algn="l" defTabSz="335951" rtl="0" eaLnBrk="1" latinLnBrk="0" hangingPunct="1">
+        <a:defRPr sz="661" kern="1200">
           <a:solidFill>
             <a:schemeClr val="tx1"/>
           </a:solidFill>
@@ -3302,8 +3718,8 @@
           <a:cs typeface="+mn-cs"/>
         </a:defRPr>
       </a:lvl2pPr>
-      <a:lvl3pPr marL="414040" algn="l" defTabSz="414040" rtl="0" eaLnBrk="1" latinLnBrk="0" hangingPunct="1">
-        <a:defRPr sz="815" kern="1200">
+      <a:lvl3pPr marL="335951" algn="l" defTabSz="335951" rtl="0" eaLnBrk="1" latinLnBrk="0" hangingPunct="1">
+        <a:defRPr sz="661" kern="1200">
           <a:solidFill>
             <a:schemeClr val="tx1"/>
           </a:solidFill>
@@ -3312,8 +3728,8 @@
           <a:cs typeface="+mn-cs"/>
         </a:defRPr>
       </a:lvl3pPr>
-      <a:lvl4pPr marL="621060" algn="l" defTabSz="414040" rtl="0" eaLnBrk="1" latinLnBrk="0" hangingPunct="1">
-        <a:defRPr sz="815" kern="1200">
+      <a:lvl4pPr marL="503926" algn="l" defTabSz="335951" rtl="0" eaLnBrk="1" latinLnBrk="0" hangingPunct="1">
+        <a:defRPr sz="661" kern="1200">
           <a:solidFill>
             <a:schemeClr val="tx1"/>
           </a:solidFill>
@@ -3322,8 +3738,8 @@
           <a:cs typeface="+mn-cs"/>
         </a:defRPr>
       </a:lvl4pPr>
-      <a:lvl5pPr marL="828081" algn="l" defTabSz="414040" rtl="0" eaLnBrk="1" latinLnBrk="0" hangingPunct="1">
-        <a:defRPr sz="815" kern="1200">
+      <a:lvl5pPr marL="671901" algn="l" defTabSz="335951" rtl="0" eaLnBrk="1" latinLnBrk="0" hangingPunct="1">
+        <a:defRPr sz="661" kern="1200">
           <a:solidFill>
             <a:schemeClr val="tx1"/>
           </a:solidFill>
@@ -3332,8 +3748,8 @@
           <a:cs typeface="+mn-cs"/>
         </a:defRPr>
       </a:lvl5pPr>
-      <a:lvl6pPr marL="1035101" algn="l" defTabSz="414040" rtl="0" eaLnBrk="1" latinLnBrk="0" hangingPunct="1">
-        <a:defRPr sz="815" kern="1200">
+      <a:lvl6pPr marL="839876" algn="l" defTabSz="335951" rtl="0" eaLnBrk="1" latinLnBrk="0" hangingPunct="1">
+        <a:defRPr sz="661" kern="1200">
           <a:solidFill>
             <a:schemeClr val="tx1"/>
           </a:solidFill>
@@ -3342,8 +3758,8 @@
           <a:cs typeface="+mn-cs"/>
         </a:defRPr>
       </a:lvl6pPr>
-      <a:lvl7pPr marL="1242121" algn="l" defTabSz="414040" rtl="0" eaLnBrk="1" latinLnBrk="0" hangingPunct="1">
-        <a:defRPr sz="815" kern="1200">
+      <a:lvl7pPr marL="1007852" algn="l" defTabSz="335951" rtl="0" eaLnBrk="1" latinLnBrk="0" hangingPunct="1">
+        <a:defRPr sz="661" kern="1200">
           <a:solidFill>
             <a:schemeClr val="tx1"/>
           </a:solidFill>
@@ -3352,8 +3768,8 @@
           <a:cs typeface="+mn-cs"/>
         </a:defRPr>
       </a:lvl7pPr>
-      <a:lvl8pPr marL="1449141" algn="l" defTabSz="414040" rtl="0" eaLnBrk="1" latinLnBrk="0" hangingPunct="1">
-        <a:defRPr sz="815" kern="1200">
+      <a:lvl8pPr marL="1175827" algn="l" defTabSz="335951" rtl="0" eaLnBrk="1" latinLnBrk="0" hangingPunct="1">
+        <a:defRPr sz="661" kern="1200">
           <a:solidFill>
             <a:schemeClr val="tx1"/>
           </a:solidFill>
@@ -3362,8 +3778,8 @@
           <a:cs typeface="+mn-cs"/>
         </a:defRPr>
       </a:lvl8pPr>
-      <a:lvl9pPr marL="1656161" algn="l" defTabSz="414040" rtl="0" eaLnBrk="1" latinLnBrk="0" hangingPunct="1">
-        <a:defRPr sz="815" kern="1200">
+      <a:lvl9pPr marL="1343802" algn="l" defTabSz="335951" rtl="0" eaLnBrk="1" latinLnBrk="0" hangingPunct="1">
+        <a:defRPr sz="661" kern="1200">
           <a:solidFill>
             <a:schemeClr val="tx1"/>
           </a:solidFill>
@@ -3396,7 +3812,7 @@
       </p:grpSpPr>
       <p:sp>
         <p:nvSpPr>
-          <p:cNvPr id="55" name="Freeform: Shape 54">
+          <p:cNvPr id="114" name="Freeform: Shape 113">
             <a:extLst>
               <a:ext uri="{FF2B5EF4-FFF2-40B4-BE49-F238E27FC236}">
                 <a16:creationId xmlns:a16="http://schemas.microsoft.com/office/drawing/2014/main" id="{863D7830-3EC5-1488-4779-4B842624939D}"/>
@@ -3408,7 +3824,7 @@
         </p:nvSpPr>
         <p:spPr>
           <a:xfrm>
-            <a:off x="5748640" y="541458"/>
+            <a:off x="8115323" y="443629"/>
             <a:ext cx="625278" cy="1307389"/>
           </a:xfrm>
           <a:custGeom>
@@ -4789,7 +5205,7 @@
       </p:sp>
       <p:cxnSp>
         <p:nvCxnSpPr>
-          <p:cNvPr id="56" name="Straight Connector 55">
+          <p:cNvPr id="115" name="Straight Connector 114">
             <a:extLst>
               <a:ext uri="{FF2B5EF4-FFF2-40B4-BE49-F238E27FC236}">
                 <a16:creationId xmlns:a16="http://schemas.microsoft.com/office/drawing/2014/main" id="{A9EAFB7D-EF2C-3FE3-1553-F2A5789D0B03}"/>
@@ -4803,7 +5219,7 @@
         </p:nvCxnSpPr>
         <p:spPr>
           <a:xfrm>
-            <a:off x="5742449" y="330986"/>
+            <a:off x="8109132" y="233157"/>
             <a:ext cx="0" cy="1506295"/>
           </a:xfrm>
           <a:prstGeom prst="line">
@@ -4836,7 +5252,7 @@
       </p:cxnSp>
       <p:cxnSp>
         <p:nvCxnSpPr>
-          <p:cNvPr id="57" name="Straight Connector 56">
+          <p:cNvPr id="116" name="Straight Connector 115">
             <a:extLst>
               <a:ext uri="{FF2B5EF4-FFF2-40B4-BE49-F238E27FC236}">
                 <a16:creationId xmlns:a16="http://schemas.microsoft.com/office/drawing/2014/main" id="{E285F2A1-75BD-C1B8-AE9A-EABFD7341599}"/>
@@ -4850,7 +5266,7 @@
         </p:nvCxnSpPr>
         <p:spPr>
           <a:xfrm flipH="1">
-            <a:off x="5742449" y="1844814"/>
+            <a:off x="8109132" y="1746985"/>
             <a:ext cx="3282815" cy="0"/>
           </a:xfrm>
           <a:prstGeom prst="line">
@@ -4883,7 +5299,7 @@
       </p:cxnSp>
       <p:cxnSp>
         <p:nvCxnSpPr>
-          <p:cNvPr id="58" name="Straight Arrow Connector 57">
+          <p:cNvPr id="117" name="Straight Arrow Connector 116">
             <a:extLst>
               <a:ext uri="{FF2B5EF4-FFF2-40B4-BE49-F238E27FC236}">
                 <a16:creationId xmlns:a16="http://schemas.microsoft.com/office/drawing/2014/main" id="{5DDB82E1-2293-6864-7C4C-860BB6D52449}"/>
@@ -4897,7 +5313,7 @@
         </p:nvCxnSpPr>
         <p:spPr>
           <a:xfrm flipH="1">
-            <a:off x="5891780" y="794020"/>
+            <a:off x="8258463" y="696191"/>
             <a:ext cx="247561" cy="455361"/>
           </a:xfrm>
           <a:prstGeom prst="straightConnector1">
@@ -4930,7 +5346,7 @@
       </p:cxnSp>
       <p:cxnSp>
         <p:nvCxnSpPr>
-          <p:cNvPr id="59" name="Straight Arrow Connector 58">
+          <p:cNvPr id="118" name="Straight Arrow Connector 117">
             <a:extLst>
               <a:ext uri="{FF2B5EF4-FFF2-40B4-BE49-F238E27FC236}">
                 <a16:creationId xmlns:a16="http://schemas.microsoft.com/office/drawing/2014/main" id="{9C8F36A9-FFBF-D2AF-D86B-DB32A664D134}"/>
@@ -4944,7 +5360,7 @@
         </p:nvCxnSpPr>
         <p:spPr>
           <a:xfrm flipV="1">
-            <a:off x="6090745" y="1737457"/>
+            <a:off x="8457428" y="1639628"/>
             <a:ext cx="135420" cy="374204"/>
           </a:xfrm>
           <a:prstGeom prst="straightConnector1">
@@ -4977,7 +5393,7 @@
       </p:cxnSp>
       <p:sp>
         <p:nvSpPr>
-          <p:cNvPr id="60" name="TextBox 59">
+          <p:cNvPr id="119" name="TextBox 118">
             <a:extLst>
               <a:ext uri="{FF2B5EF4-FFF2-40B4-BE49-F238E27FC236}">
                 <a16:creationId xmlns:a16="http://schemas.microsoft.com/office/drawing/2014/main" id="{F4E1EB47-FB49-B221-8F40-6FAAC8188E34}"/>
@@ -5036,7 +5452,7 @@
       </p:sp>
       <p:sp>
         <p:nvSpPr>
-          <p:cNvPr id="61" name="Freeform: Shape 60">
+          <p:cNvPr id="120" name="Freeform: Shape 119">
             <a:extLst>
               <a:ext uri="{FF2B5EF4-FFF2-40B4-BE49-F238E27FC236}">
                 <a16:creationId xmlns:a16="http://schemas.microsoft.com/office/drawing/2014/main" id="{ADEEF2B1-EBC8-9F1F-6B1F-DD1E6A4ADDB0}"/>
@@ -5048,7 +5464,7 @@
         </p:nvSpPr>
         <p:spPr>
           <a:xfrm>
-            <a:off x="6373093" y="1120721"/>
+            <a:off x="8739776" y="1022892"/>
             <a:ext cx="1842284" cy="724814"/>
           </a:xfrm>
           <a:custGeom>
@@ -7727,7 +8143,7 @@
       </p:sp>
       <p:sp>
         <p:nvSpPr>
-          <p:cNvPr id="62" name="Freeform: Shape 61">
+          <p:cNvPr id="121" name="Freeform: Shape 120">
             <a:extLst>
               <a:ext uri="{FF2B5EF4-FFF2-40B4-BE49-F238E27FC236}">
                 <a16:creationId xmlns:a16="http://schemas.microsoft.com/office/drawing/2014/main" id="{CDB02FB9-7686-55B5-2237-CE34FE7138F4}"/>
@@ -7739,7 +8155,7 @@
         </p:nvSpPr>
         <p:spPr>
           <a:xfrm>
-            <a:off x="6374462" y="1669864"/>
+            <a:off x="8741145" y="1572035"/>
             <a:ext cx="631046" cy="172303"/>
           </a:xfrm>
           <a:custGeom>
@@ -8163,7 +8579,7 @@
       </p:sp>
       <p:cxnSp>
         <p:nvCxnSpPr>
-          <p:cNvPr id="63" name="Straight Arrow Connector 62">
+          <p:cNvPr id="122" name="Straight Arrow Connector 121">
             <a:extLst>
               <a:ext uri="{FF2B5EF4-FFF2-40B4-BE49-F238E27FC236}">
                 <a16:creationId xmlns:a16="http://schemas.microsoft.com/office/drawing/2014/main" id="{98EEF7E7-0C5F-BA49-C209-AFA93EACC957}"/>
@@ -8177,7 +8593,7 @@
         </p:nvCxnSpPr>
         <p:spPr>
           <a:xfrm flipH="1" flipV="1">
-            <a:off x="6512297" y="1821330"/>
+            <a:off x="8878980" y="1723501"/>
             <a:ext cx="172598" cy="242559"/>
           </a:xfrm>
           <a:prstGeom prst="straightConnector1">
@@ -8210,7 +8626,7 @@
       </p:cxnSp>
       <p:sp>
         <p:nvSpPr>
-          <p:cNvPr id="64" name="Freeform: Shape 63">
+          <p:cNvPr id="123" name="Freeform: Shape 122">
             <a:extLst>
               <a:ext uri="{FF2B5EF4-FFF2-40B4-BE49-F238E27FC236}">
                 <a16:creationId xmlns:a16="http://schemas.microsoft.com/office/drawing/2014/main" id="{F1CE41FF-7B22-BB87-5437-9C5A6D9C40EA}"/>
@@ -8222,7 +8638,7 @@
         </p:nvSpPr>
         <p:spPr>
           <a:xfrm>
-            <a:off x="5737796" y="1299408"/>
+            <a:off x="8104479" y="1201579"/>
             <a:ext cx="633754" cy="548571"/>
           </a:xfrm>
           <a:custGeom>
@@ -9310,7 +9726,7 @@
       </p:sp>
       <p:sp>
         <p:nvSpPr>
-          <p:cNvPr id="65" name="Freeform: Shape 64">
+          <p:cNvPr id="124" name="Freeform: Shape 123">
             <a:extLst>
               <a:ext uri="{FF2B5EF4-FFF2-40B4-BE49-F238E27FC236}">
                 <a16:creationId xmlns:a16="http://schemas.microsoft.com/office/drawing/2014/main" id="{3CDA144B-1F01-F0CC-A493-5631BE7BE96B}"/>
@@ -9322,7 +9738,7 @@
         </p:nvSpPr>
         <p:spPr>
           <a:xfrm>
-            <a:off x="5731342" y="1110993"/>
+            <a:off x="8098025" y="1013164"/>
             <a:ext cx="3060373" cy="739354"/>
           </a:xfrm>
           <a:custGeom>
@@ -11141,7 +11557,7 @@
       </p:sp>
       <p:sp>
         <p:nvSpPr>
-          <p:cNvPr id="66" name="Freeform: Shape 65">
+          <p:cNvPr id="125" name="Freeform: Shape 124">
             <a:extLst>
               <a:ext uri="{FF2B5EF4-FFF2-40B4-BE49-F238E27FC236}">
                 <a16:creationId xmlns:a16="http://schemas.microsoft.com/office/drawing/2014/main" id="{9D4C28E0-97DE-3DC8-9344-F610BE62157D}"/>
@@ -11153,7 +11569,7 @@
         </p:nvSpPr>
         <p:spPr>
           <a:xfrm>
-            <a:off x="5740207" y="535071"/>
+            <a:off x="8106890" y="437242"/>
             <a:ext cx="1259928" cy="1307577"/>
           </a:xfrm>
           <a:custGeom>
@@ -13612,7 +14028,7 @@
       </p:sp>
       <p:cxnSp>
         <p:nvCxnSpPr>
-          <p:cNvPr id="67" name="Straight Arrow Connector 66">
+          <p:cNvPr id="126" name="Straight Arrow Connector 125">
             <a:extLst>
               <a:ext uri="{FF2B5EF4-FFF2-40B4-BE49-F238E27FC236}">
                 <a16:creationId xmlns:a16="http://schemas.microsoft.com/office/drawing/2014/main" id="{E3E411FB-33CC-5F34-656E-94560D185092}"/>
@@ -13626,7 +14042,7 @@
         </p:nvCxnSpPr>
         <p:spPr>
           <a:xfrm flipH="1">
-            <a:off x="6645444" y="1259360"/>
+            <a:off x="9012127" y="1161531"/>
             <a:ext cx="193298" cy="215805"/>
           </a:xfrm>
           <a:prstGeom prst="straightConnector1">
@@ -13657,1976 +14073,12 @@
           </a:fontRef>
         </p:style>
       </p:cxnSp>
-      <p:grpSp>
-        <p:nvGrpSpPr>
-          <p:cNvPr id="68" name="Group 67">
+      <p:sp>
+        <p:nvSpPr>
+          <p:cNvPr id="127" name="TextBox 126">
             <a:extLst>
               <a:ext uri="{FF2B5EF4-FFF2-40B4-BE49-F238E27FC236}">
-                <a16:creationId xmlns:a16="http://schemas.microsoft.com/office/drawing/2014/main" id="{43A56C84-4F0C-4006-0C8C-7604A213D08E}"/>
-              </a:ext>
-            </a:extLst>
-          </p:cNvPr>
-          <p:cNvGrpSpPr/>
-          <p:nvPr/>
-        </p:nvGrpSpPr>
-        <p:grpSpPr>
-          <a:xfrm>
-            <a:off x="-78034" y="2602592"/>
-            <a:ext cx="4203348" cy="1897971"/>
-            <a:chOff x="-78034" y="403094"/>
-            <a:chExt cx="4203348" cy="1897971"/>
-          </a:xfrm>
-        </p:grpSpPr>
-        <p:sp>
-          <p:nvSpPr>
-            <p:cNvPr id="69" name="TextBox 68">
-              <a:extLst>
-                <a:ext uri="{FF2B5EF4-FFF2-40B4-BE49-F238E27FC236}">
-                  <a16:creationId xmlns:a16="http://schemas.microsoft.com/office/drawing/2014/main" id="{871F6875-B35B-38C5-3426-33D516CADAB5}"/>
-                </a:ext>
-              </a:extLst>
-            </p:cNvPr>
-            <p:cNvSpPr txBox="1"/>
-            <p:nvPr/>
-          </p:nvSpPr>
-          <p:spPr>
-            <a:xfrm>
-              <a:off x="256030" y="759281"/>
-              <a:ext cx="1080000" cy="720000"/>
-            </a:xfrm>
-            <a:prstGeom prst="rect">
-              <a:avLst/>
-            </a:prstGeom>
-            <a:noFill/>
-          </p:spPr>
-          <p:txBody>
-            <a:bodyPr wrap="square" rtlCol="0">
-              <a:spAutoFit/>
-            </a:bodyPr>
-            <a:lstStyle/>
-            <a:p>
-              <a:pPr algn="ctr"/>
-              <a:r>
-                <a:rPr lang="en-US" sz="800" b="1" dirty="0">
-                  <a:latin typeface="Calibri" panose="020F0502020204030204" pitchFamily="34" charset="0"/>
-                  <a:cs typeface="Calibri" panose="020F0502020204030204" pitchFamily="34" charset="0"/>
-                </a:rPr>
-                <a:t>HITS (H)</a:t>
-              </a:r>
-            </a:p>
-            <a:p>
-              <a:pPr algn="ctr"/>
-              <a:r>
-                <a:rPr lang="en-GB" sz="800" dirty="0">
-                  <a:latin typeface="Calibri Light" panose="020F0302020204030204" pitchFamily="34" charset="0"/>
-                  <a:cs typeface="Calibri Light" panose="020F0302020204030204" pitchFamily="34" charset="0"/>
-                </a:rPr>
-                <a:t>The event was predicted and it was observed</a:t>
-              </a:r>
-            </a:p>
-          </p:txBody>
-        </p:sp>
-        <p:sp>
-          <p:nvSpPr>
-            <p:cNvPr id="70" name="TextBox 69">
-              <a:extLst>
-                <a:ext uri="{FF2B5EF4-FFF2-40B4-BE49-F238E27FC236}">
-                  <a16:creationId xmlns:a16="http://schemas.microsoft.com/office/drawing/2014/main" id="{843DCFB4-D832-CE14-33FD-22FE10682A05}"/>
-                </a:ext>
-              </a:extLst>
-            </p:cNvPr>
-            <p:cNvSpPr txBox="1"/>
-            <p:nvPr/>
-          </p:nvSpPr>
-          <p:spPr>
-            <a:xfrm>
-              <a:off x="1449831" y="759281"/>
-              <a:ext cx="1080000" cy="720000"/>
-            </a:xfrm>
-            <a:prstGeom prst="rect">
-              <a:avLst/>
-            </a:prstGeom>
-            <a:noFill/>
-          </p:spPr>
-          <p:txBody>
-            <a:bodyPr wrap="square" rtlCol="0">
-              <a:spAutoFit/>
-            </a:bodyPr>
-            <a:lstStyle/>
-            <a:p>
-              <a:pPr algn="ctr"/>
-              <a:r>
-                <a:rPr lang="en-US" sz="800" b="1" dirty="0">
-                  <a:latin typeface="Calibri" panose="020F0502020204030204" pitchFamily="34" charset="0"/>
-                  <a:cs typeface="Calibri" panose="020F0502020204030204" pitchFamily="34" charset="0"/>
-                </a:rPr>
-                <a:t>MISSES (M)</a:t>
-              </a:r>
-            </a:p>
-            <a:p>
-              <a:pPr algn="ctr"/>
-              <a:r>
-                <a:rPr lang="en-GB" sz="800" dirty="0">
-                  <a:latin typeface="Calibri Light" panose="020F0302020204030204" pitchFamily="34" charset="0"/>
-                  <a:cs typeface="Calibri Light" panose="020F0302020204030204" pitchFamily="34" charset="0"/>
-                </a:rPr>
-                <a:t>The event was not predicted but it was observed</a:t>
-              </a:r>
-            </a:p>
-          </p:txBody>
-        </p:sp>
-        <p:sp>
-          <p:nvSpPr>
-            <p:cNvPr id="71" name="TextBox 70">
-              <a:extLst>
-                <a:ext uri="{FF2B5EF4-FFF2-40B4-BE49-F238E27FC236}">
-                  <a16:creationId xmlns:a16="http://schemas.microsoft.com/office/drawing/2014/main" id="{1ACBC9A4-96CE-2145-4C13-43843EED1EEE}"/>
-                </a:ext>
-              </a:extLst>
-            </p:cNvPr>
-            <p:cNvSpPr txBox="1"/>
-            <p:nvPr/>
-          </p:nvSpPr>
-          <p:spPr>
-            <a:xfrm>
-              <a:off x="256030" y="1578875"/>
-              <a:ext cx="1080000" cy="720000"/>
-            </a:xfrm>
-            <a:prstGeom prst="rect">
-              <a:avLst/>
-            </a:prstGeom>
-            <a:noFill/>
-          </p:spPr>
-          <p:txBody>
-            <a:bodyPr wrap="square" rtlCol="0">
-              <a:spAutoFit/>
-            </a:bodyPr>
-            <a:lstStyle/>
-            <a:p>
-              <a:pPr algn="ctr"/>
-              <a:r>
-                <a:rPr lang="en-US" sz="800" b="1" dirty="0">
-                  <a:latin typeface="Calibri" panose="020F0502020204030204" pitchFamily="34" charset="0"/>
-                  <a:cs typeface="Calibri" panose="020F0502020204030204" pitchFamily="34" charset="0"/>
-                </a:rPr>
-                <a:t>FALSE ALARMS (FA)</a:t>
-              </a:r>
-            </a:p>
-            <a:p>
-              <a:pPr algn="ctr"/>
-              <a:r>
-                <a:rPr lang="en-GB" sz="800" dirty="0">
-                  <a:latin typeface="Calibri Light" panose="020F0302020204030204" pitchFamily="34" charset="0"/>
-                  <a:cs typeface="Calibri Light" panose="020F0302020204030204" pitchFamily="34" charset="0"/>
-                </a:rPr>
-                <a:t>The event was predicted but it was not observed</a:t>
-              </a:r>
-            </a:p>
-          </p:txBody>
-        </p:sp>
-        <p:sp>
-          <p:nvSpPr>
-            <p:cNvPr id="72" name="TextBox 71">
-              <a:extLst>
-                <a:ext uri="{FF2B5EF4-FFF2-40B4-BE49-F238E27FC236}">
-                  <a16:creationId xmlns:a16="http://schemas.microsoft.com/office/drawing/2014/main" id="{5CCEEB50-0EB3-291D-2911-B86403C69D4E}"/>
-                </a:ext>
-              </a:extLst>
-            </p:cNvPr>
-            <p:cNvSpPr txBox="1"/>
-            <p:nvPr/>
-          </p:nvSpPr>
-          <p:spPr>
-            <a:xfrm>
-              <a:off x="1362574" y="1578875"/>
-              <a:ext cx="1254515" cy="584775"/>
-            </a:xfrm>
-            <a:prstGeom prst="rect">
-              <a:avLst/>
-            </a:prstGeom>
-            <a:noFill/>
-          </p:spPr>
-          <p:txBody>
-            <a:bodyPr wrap="square" rtlCol="0">
-              <a:spAutoFit/>
-            </a:bodyPr>
-            <a:lstStyle/>
-            <a:p>
-              <a:pPr algn="ctr"/>
-              <a:r>
-                <a:rPr lang="en-US" sz="800" b="1" dirty="0">
-                  <a:latin typeface="Calibri" panose="020F0502020204030204" pitchFamily="34" charset="0"/>
-                  <a:cs typeface="Calibri" panose="020F0502020204030204" pitchFamily="34" charset="0"/>
-                </a:rPr>
-                <a:t>CORRECT NEGATIVE (CN)</a:t>
-              </a:r>
-            </a:p>
-            <a:p>
-              <a:pPr algn="ctr"/>
-              <a:r>
-                <a:rPr lang="en-GB" sz="800" dirty="0">
-                  <a:latin typeface="Calibri Light" panose="020F0302020204030204" pitchFamily="34" charset="0"/>
-                  <a:cs typeface="Calibri Light" panose="020F0302020204030204" pitchFamily="34" charset="0"/>
-                </a:rPr>
-                <a:t>The event was not predicted and it was not observed</a:t>
-              </a:r>
-            </a:p>
-          </p:txBody>
-        </p:sp>
-        <p:cxnSp>
-          <p:nvCxnSpPr>
-            <p:cNvPr id="73" name="Straight Connector 72">
-              <a:extLst>
-                <a:ext uri="{FF2B5EF4-FFF2-40B4-BE49-F238E27FC236}">
-                  <a16:creationId xmlns:a16="http://schemas.microsoft.com/office/drawing/2014/main" id="{A0143ED4-4C89-1348-C278-56520894994E}"/>
-                </a:ext>
-              </a:extLst>
-            </p:cNvPr>
-            <p:cNvCxnSpPr>
-              <a:cxnSpLocks/>
-            </p:cNvCxnSpPr>
-            <p:nvPr/>
-          </p:nvCxnSpPr>
-          <p:spPr>
-            <a:xfrm>
-              <a:off x="1357050" y="626888"/>
-              <a:ext cx="0" cy="1639317"/>
-            </a:xfrm>
-            <a:prstGeom prst="line">
-              <a:avLst/>
-            </a:prstGeom>
-            <a:ln w="3175">
-              <a:solidFill>
-                <a:schemeClr val="tx1">
-                  <a:lumMod val="75000"/>
-                  <a:lumOff val="25000"/>
-                </a:schemeClr>
-              </a:solidFill>
-            </a:ln>
-          </p:spPr>
-          <p:style>
-            <a:lnRef idx="2">
-              <a:schemeClr val="accent1"/>
-            </a:lnRef>
-            <a:fillRef idx="0">
-              <a:schemeClr val="accent1"/>
-            </a:fillRef>
-            <a:effectRef idx="1">
-              <a:schemeClr val="accent1"/>
-            </a:effectRef>
-            <a:fontRef idx="minor">
-              <a:schemeClr val="tx1"/>
-            </a:fontRef>
-          </p:style>
-        </p:cxnSp>
-        <p:cxnSp>
-          <p:nvCxnSpPr>
-            <p:cNvPr id="74" name="Straight Connector 73">
-              <a:extLst>
-                <a:ext uri="{FF2B5EF4-FFF2-40B4-BE49-F238E27FC236}">
-                  <a16:creationId xmlns:a16="http://schemas.microsoft.com/office/drawing/2014/main" id="{F722787C-8461-E4FE-8414-D479477597C4}"/>
-                </a:ext>
-              </a:extLst>
-            </p:cNvPr>
-            <p:cNvCxnSpPr>
-              <a:cxnSpLocks/>
-            </p:cNvCxnSpPr>
-            <p:nvPr/>
-          </p:nvCxnSpPr>
-          <p:spPr>
-            <a:xfrm flipH="1">
-              <a:off x="216892" y="1525908"/>
-              <a:ext cx="2397547" cy="0"/>
-            </a:xfrm>
-            <a:prstGeom prst="line">
-              <a:avLst/>
-            </a:prstGeom>
-            <a:ln w="3175">
-              <a:solidFill>
-                <a:schemeClr val="tx1">
-                  <a:lumMod val="75000"/>
-                  <a:lumOff val="25000"/>
-                </a:schemeClr>
-              </a:solidFill>
-            </a:ln>
-          </p:spPr>
-          <p:style>
-            <a:lnRef idx="2">
-              <a:schemeClr val="accent1"/>
-            </a:lnRef>
-            <a:fillRef idx="0">
-              <a:schemeClr val="accent1"/>
-            </a:fillRef>
-            <a:effectRef idx="1">
-              <a:schemeClr val="accent1"/>
-            </a:effectRef>
-            <a:fontRef idx="minor">
-              <a:schemeClr val="tx1"/>
-            </a:fontRef>
-          </p:style>
-        </p:cxnSp>
-        <p:sp>
-          <p:nvSpPr>
-            <p:cNvPr id="75" name="TextBox 74">
-              <a:extLst>
-                <a:ext uri="{FF2B5EF4-FFF2-40B4-BE49-F238E27FC236}">
-                  <a16:creationId xmlns:a16="http://schemas.microsoft.com/office/drawing/2014/main" id="{DD906E7D-FF64-09FE-65EF-837BDD47046A}"/>
-                </a:ext>
-              </a:extLst>
-            </p:cNvPr>
-            <p:cNvSpPr txBox="1"/>
-            <p:nvPr/>
-          </p:nvSpPr>
-          <p:spPr>
-            <a:xfrm>
-              <a:off x="-78034" y="887761"/>
-              <a:ext cx="307777" cy="1275889"/>
-            </a:xfrm>
-            <a:prstGeom prst="rect">
-              <a:avLst/>
-            </a:prstGeom>
-            <a:noFill/>
-          </p:spPr>
-          <p:txBody>
-            <a:bodyPr vert="vert270" wrap="square" rtlCol="0">
-              <a:spAutoFit/>
-            </a:bodyPr>
-            <a:lstStyle/>
-            <a:p>
-              <a:pPr algn="ctr"/>
-              <a:r>
-                <a:rPr lang="en-US" sz="800" b="1" dirty="0">
-                  <a:solidFill>
-                    <a:schemeClr val="tx1">
-                      <a:lumMod val="95000"/>
-                      <a:lumOff val="5000"/>
-                    </a:schemeClr>
-                  </a:solidFill>
-                  <a:latin typeface="Calibri" panose="020F0502020204030204" pitchFamily="34" charset="0"/>
-                  <a:cs typeface="Calibri" panose="020F0502020204030204" pitchFamily="34" charset="0"/>
-                </a:rPr>
-                <a:t>Observed</a:t>
-              </a:r>
-              <a:endParaRPr lang="en-US" sz="800" dirty="0">
-                <a:solidFill>
-                  <a:srgbClr val="0000FF"/>
-                </a:solidFill>
-                <a:latin typeface="Calibri Light" panose="020F0302020204030204" pitchFamily="34" charset="0"/>
-                <a:cs typeface="Calibri Light" panose="020F0302020204030204" pitchFamily="34" charset="0"/>
-              </a:endParaRPr>
-            </a:p>
-          </p:txBody>
-        </p:sp>
-        <p:sp>
-          <p:nvSpPr>
-            <p:cNvPr id="76" name="TextBox 75">
-              <a:extLst>
-                <a:ext uri="{FF2B5EF4-FFF2-40B4-BE49-F238E27FC236}">
-                  <a16:creationId xmlns:a16="http://schemas.microsoft.com/office/drawing/2014/main" id="{CDF5D99F-239B-7286-E705-43476984C1FD}"/>
-                </a:ext>
-              </a:extLst>
-            </p:cNvPr>
-            <p:cNvSpPr txBox="1"/>
-            <p:nvPr/>
-          </p:nvSpPr>
-          <p:spPr>
-            <a:xfrm>
-              <a:off x="98296" y="760014"/>
-              <a:ext cx="307777" cy="736524"/>
-            </a:xfrm>
-            <a:prstGeom prst="rect">
-              <a:avLst/>
-            </a:prstGeom>
-            <a:noFill/>
-          </p:spPr>
-          <p:txBody>
-            <a:bodyPr vert="vert270" wrap="square" rtlCol="0">
-              <a:spAutoFit/>
-            </a:bodyPr>
-            <a:lstStyle/>
-            <a:p>
-              <a:pPr algn="ctr"/>
-              <a:r>
-                <a:rPr lang="en-US" sz="800" dirty="0">
-                  <a:solidFill>
-                    <a:srgbClr val="0000FF"/>
-                  </a:solidFill>
-                  <a:latin typeface="Calibri Light" panose="020F0302020204030204" pitchFamily="34" charset="0"/>
-                  <a:cs typeface="Calibri Light" panose="020F0302020204030204" pitchFamily="34" charset="0"/>
-                </a:rPr>
-                <a:t>yes-events</a:t>
-              </a:r>
-            </a:p>
-          </p:txBody>
-        </p:sp>
-        <p:sp>
-          <p:nvSpPr>
-            <p:cNvPr id="77" name="TextBox 76">
-              <a:extLst>
-                <a:ext uri="{FF2B5EF4-FFF2-40B4-BE49-F238E27FC236}">
-                  <a16:creationId xmlns:a16="http://schemas.microsoft.com/office/drawing/2014/main" id="{A09387BF-360E-1373-B4E2-484CDF5B6943}"/>
-                </a:ext>
-              </a:extLst>
-            </p:cNvPr>
-            <p:cNvSpPr txBox="1"/>
-            <p:nvPr/>
-          </p:nvSpPr>
-          <p:spPr>
-            <a:xfrm>
-              <a:off x="928929" y="403094"/>
-              <a:ext cx="863944" cy="215444"/>
-            </a:xfrm>
-            <a:prstGeom prst="rect">
-              <a:avLst/>
-            </a:prstGeom>
-            <a:noFill/>
-          </p:spPr>
-          <p:txBody>
-            <a:bodyPr wrap="square" rtlCol="0">
-              <a:spAutoFit/>
-            </a:bodyPr>
-            <a:lstStyle/>
-            <a:p>
-              <a:pPr algn="ctr"/>
-              <a:r>
-                <a:rPr lang="en-US" sz="800" b="1" dirty="0">
-                  <a:solidFill>
-                    <a:schemeClr val="tx1">
-                      <a:lumMod val="95000"/>
-                      <a:lumOff val="5000"/>
-                    </a:schemeClr>
-                  </a:solidFill>
-                  <a:latin typeface="Calibri" panose="020F0502020204030204" pitchFamily="34" charset="0"/>
-                  <a:cs typeface="Calibri" panose="020F0502020204030204" pitchFamily="34" charset="0"/>
-                </a:rPr>
-                <a:t>Predicted</a:t>
-              </a:r>
-              <a:endParaRPr lang="en-US" sz="800" dirty="0">
-                <a:solidFill>
-                  <a:srgbClr val="D6A300"/>
-                </a:solidFill>
-                <a:latin typeface="Calibri Light" panose="020F0302020204030204" pitchFamily="34" charset="0"/>
-                <a:cs typeface="Calibri Light" panose="020F0302020204030204" pitchFamily="34" charset="0"/>
-              </a:endParaRPr>
-            </a:p>
-          </p:txBody>
-        </p:sp>
-        <p:sp>
-          <p:nvSpPr>
-            <p:cNvPr id="78" name="TextBox 77">
-              <a:extLst>
-                <a:ext uri="{FF2B5EF4-FFF2-40B4-BE49-F238E27FC236}">
-                  <a16:creationId xmlns:a16="http://schemas.microsoft.com/office/drawing/2014/main" id="{FEE84F7D-562E-3E17-3F19-517232627412}"/>
-                </a:ext>
-              </a:extLst>
-            </p:cNvPr>
-            <p:cNvSpPr txBox="1"/>
-            <p:nvPr/>
-          </p:nvSpPr>
-          <p:spPr>
-            <a:xfrm>
-              <a:off x="1557859" y="563513"/>
-              <a:ext cx="863944" cy="215444"/>
-            </a:xfrm>
-            <a:prstGeom prst="rect">
-              <a:avLst/>
-            </a:prstGeom>
-            <a:noFill/>
-          </p:spPr>
-          <p:txBody>
-            <a:bodyPr wrap="square" rtlCol="0">
-              <a:spAutoFit/>
-            </a:bodyPr>
-            <a:lstStyle/>
-            <a:p>
-              <a:pPr algn="ctr"/>
-              <a:r>
-                <a:rPr lang="en-US" sz="800" dirty="0">
-                  <a:solidFill>
-                    <a:srgbClr val="D6A300"/>
-                  </a:solidFill>
-                  <a:latin typeface="Calibri Light" panose="020F0302020204030204" pitchFamily="34" charset="0"/>
-                  <a:cs typeface="Calibri Light" panose="020F0302020204030204" pitchFamily="34" charset="0"/>
-                </a:rPr>
-                <a:t>non-events</a:t>
-              </a:r>
-            </a:p>
-          </p:txBody>
-        </p:sp>
-        <p:sp>
-          <p:nvSpPr>
-            <p:cNvPr id="79" name="TextBox 78">
-              <a:extLst>
-                <a:ext uri="{FF2B5EF4-FFF2-40B4-BE49-F238E27FC236}">
-                  <a16:creationId xmlns:a16="http://schemas.microsoft.com/office/drawing/2014/main" id="{F3106249-1C45-1C12-2453-07133FF1CD86}"/>
-                </a:ext>
-              </a:extLst>
-            </p:cNvPr>
-            <p:cNvSpPr txBox="1"/>
-            <p:nvPr/>
-          </p:nvSpPr>
-          <p:spPr>
-            <a:xfrm>
-              <a:off x="364058" y="567326"/>
-              <a:ext cx="863944" cy="215444"/>
-            </a:xfrm>
-            <a:prstGeom prst="rect">
-              <a:avLst/>
-            </a:prstGeom>
-            <a:noFill/>
-          </p:spPr>
-          <p:txBody>
-            <a:bodyPr wrap="square" rtlCol="0">
-              <a:spAutoFit/>
-            </a:bodyPr>
-            <a:lstStyle/>
-            <a:p>
-              <a:pPr algn="ctr"/>
-              <a:r>
-                <a:rPr lang="en-US" sz="800" dirty="0">
-                  <a:solidFill>
-                    <a:srgbClr val="33CC33"/>
-                  </a:solidFill>
-                  <a:latin typeface="Calibri Light" panose="020F0302020204030204" pitchFamily="34" charset="0"/>
-                  <a:cs typeface="Calibri Light" panose="020F0302020204030204" pitchFamily="34" charset="0"/>
-                </a:rPr>
-                <a:t>yes-events</a:t>
-              </a:r>
-            </a:p>
-          </p:txBody>
-        </p:sp>
-        <p:sp>
-          <p:nvSpPr>
-            <p:cNvPr id="80" name="TextBox 79">
-              <a:extLst>
-                <a:ext uri="{FF2B5EF4-FFF2-40B4-BE49-F238E27FC236}">
-                  <a16:creationId xmlns:a16="http://schemas.microsoft.com/office/drawing/2014/main" id="{E3F5F678-30B9-E5A6-EDA8-349820A25D9E}"/>
-                </a:ext>
-              </a:extLst>
-            </p:cNvPr>
-            <p:cNvSpPr txBox="1"/>
-            <p:nvPr/>
-          </p:nvSpPr>
-          <p:spPr>
-            <a:xfrm>
-              <a:off x="99447" y="1564541"/>
-              <a:ext cx="307777" cy="736524"/>
-            </a:xfrm>
-            <a:prstGeom prst="rect">
-              <a:avLst/>
-            </a:prstGeom>
-            <a:noFill/>
-          </p:spPr>
-          <p:txBody>
-            <a:bodyPr vert="vert270" wrap="square" rtlCol="0">
-              <a:spAutoFit/>
-            </a:bodyPr>
-            <a:lstStyle/>
-            <a:p>
-              <a:pPr algn="ctr"/>
-              <a:r>
-                <a:rPr lang="en-US" sz="800" dirty="0">
-                  <a:solidFill>
-                    <a:srgbClr val="FF0066"/>
-                  </a:solidFill>
-                  <a:latin typeface="Calibri Light" panose="020F0302020204030204" pitchFamily="34" charset="0"/>
-                  <a:cs typeface="Calibri Light" panose="020F0302020204030204" pitchFamily="34" charset="0"/>
-                </a:rPr>
-                <a:t>non-events</a:t>
-              </a:r>
-            </a:p>
-          </p:txBody>
-        </p:sp>
-        <p:sp>
-          <p:nvSpPr>
-            <p:cNvPr id="81" name="TextBox 80">
-              <a:extLst>
-                <a:ext uri="{FF2B5EF4-FFF2-40B4-BE49-F238E27FC236}">
-                  <a16:creationId xmlns:a16="http://schemas.microsoft.com/office/drawing/2014/main" id="{7ED78E03-DDB8-9C4E-DC18-F07659A40AE4}"/>
-                </a:ext>
-              </a:extLst>
-            </p:cNvPr>
-            <p:cNvSpPr txBox="1"/>
-            <p:nvPr/>
-          </p:nvSpPr>
-          <p:spPr>
-            <a:xfrm>
-              <a:off x="2757314" y="759281"/>
-              <a:ext cx="1368000" cy="707886"/>
-            </a:xfrm>
-            <a:prstGeom prst="rect">
-              <a:avLst/>
-            </a:prstGeom>
-            <a:noFill/>
-            <a:ln w="3175">
-              <a:solidFill>
-                <a:schemeClr val="tx1">
-                  <a:lumMod val="75000"/>
-                  <a:lumOff val="25000"/>
-                </a:schemeClr>
-              </a:solidFill>
-            </a:ln>
-          </p:spPr>
-          <p:txBody>
-            <a:bodyPr wrap="square" rtlCol="0">
-              <a:spAutoFit/>
-            </a:bodyPr>
-            <a:lstStyle/>
-            <a:p>
-              <a:pPr algn="ctr"/>
-              <a:r>
-                <a:rPr lang="en-US" sz="800" b="1" i="1" dirty="0">
-                  <a:latin typeface="Calibri" panose="020F0502020204030204" pitchFamily="34" charset="0"/>
-                  <a:cs typeface="Calibri" panose="020F0502020204030204" pitchFamily="34" charset="0"/>
-                </a:rPr>
-                <a:t>HIT RATE</a:t>
-              </a:r>
-            </a:p>
-            <a:p>
-              <a:pPr algn="ctr"/>
-              <a:r>
-                <a:rPr lang="en-GB" sz="800" i="1" dirty="0">
-                  <a:latin typeface="Calibri Light" panose="020F0302020204030204" pitchFamily="34" charset="0"/>
-                  <a:cs typeface="Calibri Light" panose="020F0302020204030204" pitchFamily="34" charset="0"/>
-                </a:rPr>
-                <a:t>Proportion of observed yes-events that were correctly predicted</a:t>
-              </a:r>
-            </a:p>
-            <a:p>
-              <a:pPr algn="ctr"/>
-              <a:r>
-                <a:rPr lang="en-GB" sz="800" i="1" dirty="0">
-                  <a:latin typeface="Calibri Light" panose="020F0302020204030204" pitchFamily="34" charset="0"/>
-                  <a:cs typeface="Calibri Light" panose="020F0302020204030204" pitchFamily="34" charset="0"/>
-                </a:rPr>
-                <a:t>HR = H / (H + M)</a:t>
-              </a:r>
-            </a:p>
-          </p:txBody>
-        </p:sp>
-        <p:sp>
-          <p:nvSpPr>
-            <p:cNvPr id="82" name="TextBox 81">
-              <a:extLst>
-                <a:ext uri="{FF2B5EF4-FFF2-40B4-BE49-F238E27FC236}">
-                  <a16:creationId xmlns:a16="http://schemas.microsoft.com/office/drawing/2014/main" id="{307BB4E1-82F3-30C4-2FB1-591A624180EF}"/>
-                </a:ext>
-              </a:extLst>
-            </p:cNvPr>
-            <p:cNvSpPr txBox="1"/>
-            <p:nvPr/>
-          </p:nvSpPr>
-          <p:spPr>
-            <a:xfrm>
-              <a:off x="2757314" y="1578875"/>
-              <a:ext cx="1368000" cy="720000"/>
-            </a:xfrm>
-            <a:prstGeom prst="rect">
-              <a:avLst/>
-            </a:prstGeom>
-            <a:noFill/>
-            <a:ln w="3175">
-              <a:solidFill>
-                <a:schemeClr val="tx1">
-                  <a:lumMod val="75000"/>
-                  <a:lumOff val="25000"/>
-                </a:schemeClr>
-              </a:solidFill>
-            </a:ln>
-          </p:spPr>
-          <p:txBody>
-            <a:bodyPr wrap="square" rtlCol="0">
-              <a:spAutoFit/>
-            </a:bodyPr>
-            <a:lstStyle/>
-            <a:p>
-              <a:pPr algn="ctr"/>
-              <a:r>
-                <a:rPr lang="en-US" sz="800" b="1" i="1" dirty="0">
-                  <a:latin typeface="Calibri" panose="020F0502020204030204" pitchFamily="34" charset="0"/>
-                  <a:cs typeface="Calibri" panose="020F0502020204030204" pitchFamily="34" charset="0"/>
-                </a:rPr>
-                <a:t>FALSE ALARM RATE [-]</a:t>
-              </a:r>
-            </a:p>
-            <a:p>
-              <a:pPr algn="ctr"/>
-              <a:r>
-                <a:rPr lang="en-GB" sz="800" i="1" dirty="0">
-                  <a:latin typeface="Calibri Light" panose="020F0302020204030204" pitchFamily="34" charset="0"/>
-                  <a:cs typeface="Calibri Light" panose="020F0302020204030204" pitchFamily="34" charset="0"/>
-                </a:rPr>
-                <a:t>Proportion of observed non-events that were incorrectly predicted as yes-events</a:t>
-              </a:r>
-            </a:p>
-            <a:p>
-              <a:pPr algn="ctr"/>
-              <a:r>
-                <a:rPr lang="en-GB" sz="800" i="1" dirty="0">
-                  <a:latin typeface="Calibri Light" panose="020F0302020204030204" pitchFamily="34" charset="0"/>
-                  <a:cs typeface="Calibri Light" panose="020F0302020204030204" pitchFamily="34" charset="0"/>
-                </a:rPr>
-                <a:t>FAR = FA / (FA + CN)</a:t>
-              </a:r>
-            </a:p>
-          </p:txBody>
-        </p:sp>
-        <p:sp>
-          <p:nvSpPr>
-            <p:cNvPr id="83" name="Rectangle 82">
-              <a:extLst>
-                <a:ext uri="{FF2B5EF4-FFF2-40B4-BE49-F238E27FC236}">
-                  <a16:creationId xmlns:a16="http://schemas.microsoft.com/office/drawing/2014/main" id="{2D87FE8A-4BD4-D2C0-4981-4C00E52C4C21}"/>
-                </a:ext>
-              </a:extLst>
-            </p:cNvPr>
-            <p:cNvSpPr/>
-            <p:nvPr/>
-          </p:nvSpPr>
-          <p:spPr>
-            <a:xfrm>
-              <a:off x="1809831" y="2138288"/>
-              <a:ext cx="360000" cy="90000"/>
-            </a:xfrm>
-            <a:prstGeom prst="rect">
-              <a:avLst/>
-            </a:prstGeom>
-            <a:pattFill prst="dkHorz">
-              <a:fgClr>
-                <a:srgbClr val="E07A1A"/>
-              </a:fgClr>
-              <a:bgClr>
-                <a:schemeClr val="bg1"/>
-              </a:bgClr>
-            </a:pattFill>
-            <a:ln w="1270">
-              <a:solidFill>
-                <a:schemeClr val="bg1">
-                  <a:lumMod val="50000"/>
-                </a:schemeClr>
-              </a:solidFill>
-            </a:ln>
-          </p:spPr>
-          <p:style>
-            <a:lnRef idx="2">
-              <a:schemeClr val="accent1">
-                <a:shade val="15000"/>
-              </a:schemeClr>
-            </a:lnRef>
-            <a:fillRef idx="1">
-              <a:schemeClr val="accent1"/>
-            </a:fillRef>
-            <a:effectRef idx="0">
-              <a:schemeClr val="accent1"/>
-            </a:effectRef>
-            <a:fontRef idx="minor">
-              <a:schemeClr val="lt1"/>
-            </a:fontRef>
-          </p:style>
-          <p:txBody>
-            <a:bodyPr rtlCol="0" anchor="ctr"/>
-            <a:lstStyle/>
-            <a:p>
-              <a:pPr algn="ctr"/>
-              <a:endParaRPr lang="en-GB">
-                <a:latin typeface="Calibri" panose="020F0502020204030204" pitchFamily="34" charset="0"/>
-                <a:cs typeface="Calibri" panose="020F0502020204030204" pitchFamily="34" charset="0"/>
-              </a:endParaRPr>
-            </a:p>
-          </p:txBody>
-        </p:sp>
-        <p:sp>
-          <p:nvSpPr>
-            <p:cNvPr id="84" name="Rectangle 83">
-              <a:extLst>
-                <a:ext uri="{FF2B5EF4-FFF2-40B4-BE49-F238E27FC236}">
-                  <a16:creationId xmlns:a16="http://schemas.microsoft.com/office/drawing/2014/main" id="{65533EAA-5F83-EA70-6747-5F625123CB00}"/>
-                </a:ext>
-              </a:extLst>
-            </p:cNvPr>
-            <p:cNvSpPr/>
-            <p:nvPr/>
-          </p:nvSpPr>
-          <p:spPr>
-            <a:xfrm>
-              <a:off x="616030" y="2138288"/>
-              <a:ext cx="360000" cy="90000"/>
-            </a:xfrm>
-            <a:prstGeom prst="rect">
-              <a:avLst/>
-            </a:prstGeom>
-            <a:solidFill>
-              <a:srgbClr val="AD5252">
-                <a:alpha val="49804"/>
-              </a:srgbClr>
-            </a:solidFill>
-            <a:ln w="3175">
-              <a:solidFill>
-                <a:schemeClr val="bg1">
-                  <a:lumMod val="50000"/>
-                </a:schemeClr>
-              </a:solidFill>
-            </a:ln>
-          </p:spPr>
-          <p:style>
-            <a:lnRef idx="2">
-              <a:schemeClr val="accent1">
-                <a:shade val="15000"/>
-              </a:schemeClr>
-            </a:lnRef>
-            <a:fillRef idx="1">
-              <a:schemeClr val="accent1"/>
-            </a:fillRef>
-            <a:effectRef idx="0">
-              <a:schemeClr val="accent1"/>
-            </a:effectRef>
-            <a:fontRef idx="minor">
-              <a:schemeClr val="lt1"/>
-            </a:fontRef>
-          </p:style>
-          <p:txBody>
-            <a:bodyPr rtlCol="0" anchor="ctr"/>
-            <a:lstStyle/>
-            <a:p>
-              <a:pPr algn="ctr"/>
-              <a:endParaRPr lang="en-GB">
-                <a:latin typeface="Calibri" panose="020F0502020204030204" pitchFamily="34" charset="0"/>
-                <a:cs typeface="Calibri" panose="020F0502020204030204" pitchFamily="34" charset="0"/>
-              </a:endParaRPr>
-            </a:p>
-          </p:txBody>
-        </p:sp>
-        <p:sp>
-          <p:nvSpPr>
-            <p:cNvPr id="85" name="Rectangle 84">
-              <a:extLst>
-                <a:ext uri="{FF2B5EF4-FFF2-40B4-BE49-F238E27FC236}">
-                  <a16:creationId xmlns:a16="http://schemas.microsoft.com/office/drawing/2014/main" id="{545E5C43-F926-13EA-70BE-CA710E33D019}"/>
-                </a:ext>
-              </a:extLst>
-            </p:cNvPr>
-            <p:cNvSpPr/>
-            <p:nvPr/>
-          </p:nvSpPr>
-          <p:spPr>
-            <a:xfrm>
-              <a:off x="1809831" y="1332433"/>
-              <a:ext cx="360000" cy="90000"/>
-            </a:xfrm>
-            <a:prstGeom prst="rect">
-              <a:avLst/>
-            </a:prstGeom>
-            <a:solidFill>
-              <a:srgbClr val="96724C">
-                <a:alpha val="49804"/>
-              </a:srgbClr>
-            </a:solidFill>
-            <a:ln w="3175">
-              <a:solidFill>
-                <a:schemeClr val="bg1">
-                  <a:lumMod val="50000"/>
-                </a:schemeClr>
-              </a:solidFill>
-            </a:ln>
-          </p:spPr>
-          <p:style>
-            <a:lnRef idx="2">
-              <a:schemeClr val="accent1">
-                <a:shade val="15000"/>
-              </a:schemeClr>
-            </a:lnRef>
-            <a:fillRef idx="1">
-              <a:schemeClr val="accent1"/>
-            </a:fillRef>
-            <a:effectRef idx="0">
-              <a:schemeClr val="accent1"/>
-            </a:effectRef>
-            <a:fontRef idx="minor">
-              <a:schemeClr val="lt1"/>
-            </a:fontRef>
-          </p:style>
-          <p:txBody>
-            <a:bodyPr rtlCol="0" anchor="ctr"/>
-            <a:lstStyle/>
-            <a:p>
-              <a:pPr algn="ctr"/>
-              <a:endParaRPr lang="en-GB" dirty="0">
-                <a:latin typeface="Calibri" panose="020F0502020204030204" pitchFamily="34" charset="0"/>
-                <a:cs typeface="Calibri" panose="020F0502020204030204" pitchFamily="34" charset="0"/>
-              </a:endParaRPr>
-            </a:p>
-          </p:txBody>
-        </p:sp>
-        <p:sp>
-          <p:nvSpPr>
-            <p:cNvPr id="86" name="Rectangle 85">
-              <a:extLst>
-                <a:ext uri="{FF2B5EF4-FFF2-40B4-BE49-F238E27FC236}">
-                  <a16:creationId xmlns:a16="http://schemas.microsoft.com/office/drawing/2014/main" id="{4ABA71F5-F7CE-E653-5451-1F27E1EA51A4}"/>
-                </a:ext>
-              </a:extLst>
-            </p:cNvPr>
-            <p:cNvSpPr/>
-            <p:nvPr/>
-          </p:nvSpPr>
-          <p:spPr>
-            <a:xfrm>
-              <a:off x="616030" y="1334883"/>
-              <a:ext cx="360000" cy="90000"/>
-            </a:xfrm>
-            <a:prstGeom prst="rect">
-              <a:avLst/>
-            </a:prstGeom>
-            <a:pattFill prst="wdDnDiag">
-              <a:fgClr>
-                <a:srgbClr val="21857A"/>
-              </a:fgClr>
-              <a:bgClr>
-                <a:schemeClr val="bg1"/>
-              </a:bgClr>
-            </a:pattFill>
-            <a:ln w="3175">
-              <a:solidFill>
-                <a:schemeClr val="bg1">
-                  <a:lumMod val="50000"/>
-                </a:schemeClr>
-              </a:solidFill>
-            </a:ln>
-          </p:spPr>
-          <p:style>
-            <a:lnRef idx="2">
-              <a:schemeClr val="accent1">
-                <a:shade val="15000"/>
-              </a:schemeClr>
-            </a:lnRef>
-            <a:fillRef idx="1">
-              <a:schemeClr val="accent1"/>
-            </a:fillRef>
-            <a:effectRef idx="0">
-              <a:schemeClr val="accent1"/>
-            </a:effectRef>
-            <a:fontRef idx="minor">
-              <a:schemeClr val="lt1"/>
-            </a:fontRef>
-          </p:style>
-          <p:txBody>
-            <a:bodyPr rtlCol="0" anchor="ctr"/>
-            <a:lstStyle/>
-            <a:p>
-              <a:pPr algn="ctr"/>
-              <a:endParaRPr lang="en-GB" dirty="0">
-                <a:latin typeface="Calibri" panose="020F0502020204030204" pitchFamily="34" charset="0"/>
-                <a:cs typeface="Calibri" panose="020F0502020204030204" pitchFamily="34" charset="0"/>
-              </a:endParaRPr>
-            </a:p>
-          </p:txBody>
-        </p:sp>
-      </p:grpSp>
-      <p:grpSp>
-        <p:nvGrpSpPr>
-          <p:cNvPr id="87" name="Group 86">
-            <a:extLst>
-              <a:ext uri="{FF2B5EF4-FFF2-40B4-BE49-F238E27FC236}">
-                <a16:creationId xmlns:a16="http://schemas.microsoft.com/office/drawing/2014/main" id="{CACA255C-6D4D-4370-696B-5DEA6A8AC9A4}"/>
-              </a:ext>
-            </a:extLst>
-          </p:cNvPr>
-          <p:cNvGrpSpPr/>
-          <p:nvPr/>
-        </p:nvGrpSpPr>
-        <p:grpSpPr>
-          <a:xfrm>
-            <a:off x="796030" y="583049"/>
-            <a:ext cx="3065926" cy="1827868"/>
-            <a:chOff x="1385728" y="2365126"/>
-            <a:chExt cx="3065926" cy="1827868"/>
-          </a:xfrm>
-        </p:grpSpPr>
-        <p:pic>
-          <p:nvPicPr>
-            <p:cNvPr id="88" name="Picture 87">
-              <a:extLst>
-                <a:ext uri="{FF2B5EF4-FFF2-40B4-BE49-F238E27FC236}">
-                  <a16:creationId xmlns:a16="http://schemas.microsoft.com/office/drawing/2014/main" id="{B4B20B6B-3DAA-796C-8EA6-D7D94A189AD2}"/>
-                </a:ext>
-              </a:extLst>
-            </p:cNvPr>
-            <p:cNvPicPr>
-              <a:picLocks noChangeAspect="1"/>
-            </p:cNvPicPr>
-            <p:nvPr/>
-          </p:nvPicPr>
-          <p:blipFill>
-            <a:blip r:embed="rId2"/>
-            <a:stretch>
-              <a:fillRect/>
-            </a:stretch>
-          </p:blipFill>
-          <p:spPr>
-            <a:xfrm>
-              <a:off x="1978197" y="2707728"/>
-              <a:ext cx="1987063" cy="1079696"/>
-            </a:xfrm>
-            <a:prstGeom prst="rect">
-              <a:avLst/>
-            </a:prstGeom>
-          </p:spPr>
-        </p:pic>
-        <p:sp>
-          <p:nvSpPr>
-            <p:cNvPr id="89" name="TextBox 88">
-              <a:extLst>
-                <a:ext uri="{FF2B5EF4-FFF2-40B4-BE49-F238E27FC236}">
-                  <a16:creationId xmlns:a16="http://schemas.microsoft.com/office/drawing/2014/main" id="{D0B60395-29A9-5583-BABB-33B236329A61}"/>
-                </a:ext>
-              </a:extLst>
-            </p:cNvPr>
-            <p:cNvSpPr txBox="1"/>
-            <p:nvPr/>
-          </p:nvSpPr>
-          <p:spPr>
-            <a:xfrm>
-              <a:off x="2088845" y="2858109"/>
-              <a:ext cx="340242" cy="222175"/>
-            </a:xfrm>
-            <a:prstGeom prst="rect">
-              <a:avLst/>
-            </a:prstGeom>
-            <a:noFill/>
-          </p:spPr>
-          <p:txBody>
-            <a:bodyPr wrap="square" rtlCol="0">
-              <a:spAutoFit/>
-            </a:bodyPr>
-            <a:lstStyle/>
-            <a:p>
-              <a:pPr algn="ctr"/>
-              <a:r>
-                <a:rPr lang="en-US" sz="800" b="1" dirty="0">
-                  <a:solidFill>
-                    <a:schemeClr val="tx1">
-                      <a:lumMod val="95000"/>
-                      <a:lumOff val="5000"/>
-                    </a:schemeClr>
-                  </a:solidFill>
-                  <a:latin typeface="Calibri Light" panose="020F0302020204030204" pitchFamily="34" charset="0"/>
-                  <a:cs typeface="Calibri Light" panose="020F0302020204030204" pitchFamily="34" charset="0"/>
-                </a:rPr>
-                <a:t>CN</a:t>
-              </a:r>
-            </a:p>
-          </p:txBody>
-        </p:sp>
-        <p:sp>
-          <p:nvSpPr>
-            <p:cNvPr id="90" name="TextBox 89">
-              <a:extLst>
-                <a:ext uri="{FF2B5EF4-FFF2-40B4-BE49-F238E27FC236}">
-                  <a16:creationId xmlns:a16="http://schemas.microsoft.com/office/drawing/2014/main" id="{88FD4609-03C7-48B1-EA84-375FFFEDBE06}"/>
-                </a:ext>
-              </a:extLst>
-            </p:cNvPr>
-            <p:cNvSpPr txBox="1"/>
-            <p:nvPr/>
-          </p:nvSpPr>
-          <p:spPr>
-            <a:xfrm>
-              <a:off x="2935592" y="2767766"/>
-              <a:ext cx="1516062" cy="215444"/>
-            </a:xfrm>
-            <a:prstGeom prst="rect">
-              <a:avLst/>
-            </a:prstGeom>
-            <a:noFill/>
-          </p:spPr>
-          <p:txBody>
-            <a:bodyPr wrap="square" rtlCol="0">
-              <a:spAutoFit/>
-            </a:bodyPr>
-            <a:lstStyle/>
-            <a:p>
-              <a:r>
-                <a:rPr lang="en-US" sz="800" b="1" dirty="0">
-                  <a:solidFill>
-                    <a:schemeClr val="tx1">
-                      <a:lumMod val="95000"/>
-                      <a:lumOff val="5000"/>
-                    </a:schemeClr>
-                  </a:solidFill>
-                  <a:latin typeface="Calibri" panose="020F0502020204030204" pitchFamily="34" charset="0"/>
-                  <a:cs typeface="Calibri" panose="020F0502020204030204" pitchFamily="34" charset="0"/>
-                </a:rPr>
-                <a:t>(Moving) probability threshold</a:t>
-              </a:r>
-            </a:p>
-          </p:txBody>
-        </p:sp>
-        <p:sp>
-          <p:nvSpPr>
-            <p:cNvPr id="91" name="TextBox 90">
-              <a:extLst>
-                <a:ext uri="{FF2B5EF4-FFF2-40B4-BE49-F238E27FC236}">
-                  <a16:creationId xmlns:a16="http://schemas.microsoft.com/office/drawing/2014/main" id="{4C39D33D-2B26-F2D6-F8F4-09E6518093E9}"/>
-                </a:ext>
-              </a:extLst>
-            </p:cNvPr>
-            <p:cNvSpPr txBox="1"/>
-            <p:nvPr/>
-          </p:nvSpPr>
-          <p:spPr>
-            <a:xfrm>
-              <a:off x="1385728" y="2998584"/>
-              <a:ext cx="722453" cy="461665"/>
-            </a:xfrm>
-            <a:prstGeom prst="rect">
-              <a:avLst/>
-            </a:prstGeom>
-            <a:noFill/>
-          </p:spPr>
-          <p:txBody>
-            <a:bodyPr wrap="square" rtlCol="0">
-              <a:spAutoFit/>
-            </a:bodyPr>
-            <a:lstStyle/>
-            <a:p>
-              <a:r>
-                <a:rPr lang="en-US" sz="800" dirty="0">
-                  <a:solidFill>
-                    <a:schemeClr val="tx1">
-                      <a:lumMod val="95000"/>
-                      <a:lumOff val="5000"/>
-                    </a:schemeClr>
-                  </a:solidFill>
-                  <a:latin typeface="Calibri Light" panose="020F0302020204030204" pitchFamily="34" charset="0"/>
-                  <a:cs typeface="Calibri Light" panose="020F0302020204030204" pitchFamily="34" charset="0"/>
-                </a:rPr>
-                <a:t>Distribution of </a:t>
-              </a:r>
-              <a:r>
-                <a:rPr lang="en-US" sz="800" b="1" dirty="0">
-                  <a:solidFill>
-                    <a:schemeClr val="tx1">
-                      <a:lumMod val="95000"/>
-                      <a:lumOff val="5000"/>
-                    </a:schemeClr>
-                  </a:solidFill>
-                  <a:latin typeface="Calibri" panose="020F0502020204030204" pitchFamily="34" charset="0"/>
-                  <a:cs typeface="Calibri" panose="020F0502020204030204" pitchFamily="34" charset="0"/>
-                </a:rPr>
-                <a:t>observed</a:t>
-              </a:r>
-              <a:r>
-                <a:rPr lang="en-US" sz="800" dirty="0">
-                  <a:solidFill>
-                    <a:schemeClr val="tx1">
-                      <a:lumMod val="95000"/>
-                      <a:lumOff val="5000"/>
-                    </a:schemeClr>
-                  </a:solidFill>
-                  <a:latin typeface="Calibri Light" panose="020F0302020204030204" pitchFamily="34" charset="0"/>
-                  <a:cs typeface="Calibri Light" panose="020F0302020204030204" pitchFamily="34" charset="0"/>
-                </a:rPr>
-                <a:t> </a:t>
-              </a:r>
-              <a:r>
-                <a:rPr lang="en-US" sz="800" dirty="0">
-                  <a:solidFill>
-                    <a:srgbClr val="FF0066"/>
-                  </a:solidFill>
-                  <a:latin typeface="Calibri Light" panose="020F0302020204030204" pitchFamily="34" charset="0"/>
-                  <a:cs typeface="Calibri Light" panose="020F0302020204030204" pitchFamily="34" charset="0"/>
-                </a:rPr>
-                <a:t>non-events</a:t>
-              </a:r>
-            </a:p>
-          </p:txBody>
-        </p:sp>
-        <p:sp>
-          <p:nvSpPr>
-            <p:cNvPr id="92" name="TextBox 91">
-              <a:extLst>
-                <a:ext uri="{FF2B5EF4-FFF2-40B4-BE49-F238E27FC236}">
-                  <a16:creationId xmlns:a16="http://schemas.microsoft.com/office/drawing/2014/main" id="{D4A499F2-3420-098E-60B9-2B0BAC6336D7}"/>
-                </a:ext>
-              </a:extLst>
-            </p:cNvPr>
-            <p:cNvSpPr txBox="1"/>
-            <p:nvPr/>
-          </p:nvSpPr>
-          <p:spPr>
-            <a:xfrm>
-              <a:off x="1540753" y="2649223"/>
-              <a:ext cx="546256" cy="215444"/>
-            </a:xfrm>
-            <a:prstGeom prst="rect">
-              <a:avLst/>
-            </a:prstGeom>
-            <a:noFill/>
-          </p:spPr>
-          <p:txBody>
-            <a:bodyPr wrap="square" rtlCol="0">
-              <a:spAutoFit/>
-            </a:bodyPr>
-            <a:lstStyle/>
-            <a:p>
-              <a:pPr algn="ctr"/>
-              <a:r>
-                <a:rPr lang="en-US" sz="800" dirty="0">
-                  <a:solidFill>
-                    <a:schemeClr val="tx1">
-                      <a:lumMod val="95000"/>
-                      <a:lumOff val="5000"/>
-                    </a:schemeClr>
-                  </a:solidFill>
-                  <a:latin typeface="Calibri Light" panose="020F0302020204030204" pitchFamily="34" charset="0"/>
-                  <a:cs typeface="Calibri Light" panose="020F0302020204030204" pitchFamily="34" charset="0"/>
-                </a:rPr>
-                <a:t>Density</a:t>
-              </a:r>
-            </a:p>
-          </p:txBody>
-        </p:sp>
-        <p:sp>
-          <p:nvSpPr>
-            <p:cNvPr id="93" name="TextBox 92">
-              <a:extLst>
-                <a:ext uri="{FF2B5EF4-FFF2-40B4-BE49-F238E27FC236}">
-                  <a16:creationId xmlns:a16="http://schemas.microsoft.com/office/drawing/2014/main" id="{886A253C-800A-4473-19A4-5EC96B3D6DA8}"/>
-                </a:ext>
-              </a:extLst>
-            </p:cNvPr>
-            <p:cNvSpPr txBox="1"/>
-            <p:nvPr/>
-          </p:nvSpPr>
-          <p:spPr>
-            <a:xfrm>
-              <a:off x="1848450" y="3594738"/>
-              <a:ext cx="340242" cy="222175"/>
-            </a:xfrm>
-            <a:prstGeom prst="rect">
-              <a:avLst/>
-            </a:prstGeom>
-            <a:noFill/>
-          </p:spPr>
-          <p:txBody>
-            <a:bodyPr wrap="square" rtlCol="0">
-              <a:spAutoFit/>
-            </a:bodyPr>
-            <a:lstStyle/>
-            <a:p>
-              <a:pPr algn="ctr"/>
-              <a:r>
-                <a:rPr lang="en-US" sz="800" dirty="0">
-                  <a:solidFill>
-                    <a:schemeClr val="tx1">
-                      <a:lumMod val="95000"/>
-                      <a:lumOff val="5000"/>
-                    </a:schemeClr>
-                  </a:solidFill>
-                  <a:latin typeface="Calibri Light" panose="020F0302020204030204" pitchFamily="34" charset="0"/>
-                  <a:cs typeface="Calibri Light" panose="020F0302020204030204" pitchFamily="34" charset="0"/>
-                </a:rPr>
-                <a:t>0</a:t>
-              </a:r>
-            </a:p>
-          </p:txBody>
-        </p:sp>
-        <p:sp>
-          <p:nvSpPr>
-            <p:cNvPr id="94" name="TextBox 93">
-              <a:extLst>
-                <a:ext uri="{FF2B5EF4-FFF2-40B4-BE49-F238E27FC236}">
-                  <a16:creationId xmlns:a16="http://schemas.microsoft.com/office/drawing/2014/main" id="{31526C8F-65EA-4AE2-A6F7-E27D64A802EA}"/>
-                </a:ext>
-              </a:extLst>
-            </p:cNvPr>
-            <p:cNvSpPr txBox="1"/>
-            <p:nvPr/>
-          </p:nvSpPr>
-          <p:spPr>
-            <a:xfrm>
-              <a:off x="2726110" y="3594738"/>
-              <a:ext cx="410966" cy="215444"/>
-            </a:xfrm>
-            <a:prstGeom prst="rect">
-              <a:avLst/>
-            </a:prstGeom>
-            <a:noFill/>
-          </p:spPr>
-          <p:txBody>
-            <a:bodyPr wrap="square" rtlCol="0">
-              <a:spAutoFit/>
-            </a:bodyPr>
-            <a:lstStyle/>
-            <a:p>
-              <a:pPr algn="ctr"/>
-              <a:r>
-                <a:rPr lang="en-US" sz="800" dirty="0">
-                  <a:solidFill>
-                    <a:schemeClr val="tx1">
-                      <a:lumMod val="95000"/>
-                      <a:lumOff val="5000"/>
-                    </a:schemeClr>
-                  </a:solidFill>
-                  <a:latin typeface="Calibri Light" panose="020F0302020204030204" pitchFamily="34" charset="0"/>
-                  <a:cs typeface="Calibri Light" panose="020F0302020204030204" pitchFamily="34" charset="0"/>
-                </a:rPr>
-                <a:t>50</a:t>
-              </a:r>
-            </a:p>
-          </p:txBody>
-        </p:sp>
-        <p:sp>
-          <p:nvSpPr>
-            <p:cNvPr id="95" name="TextBox 94">
-              <a:extLst>
-                <a:ext uri="{FF2B5EF4-FFF2-40B4-BE49-F238E27FC236}">
-                  <a16:creationId xmlns:a16="http://schemas.microsoft.com/office/drawing/2014/main" id="{2806A400-C100-A7CD-C682-9F752EF41C58}"/>
-                </a:ext>
-              </a:extLst>
-            </p:cNvPr>
-            <p:cNvSpPr txBox="1"/>
-            <p:nvPr/>
-          </p:nvSpPr>
-          <p:spPr>
-            <a:xfrm>
-              <a:off x="2541044" y="3147230"/>
-              <a:ext cx="340242" cy="222175"/>
-            </a:xfrm>
-            <a:prstGeom prst="rect">
-              <a:avLst/>
-            </a:prstGeom>
-            <a:noFill/>
-          </p:spPr>
-          <p:txBody>
-            <a:bodyPr wrap="square" rtlCol="0">
-              <a:spAutoFit/>
-            </a:bodyPr>
-            <a:lstStyle/>
-            <a:p>
-              <a:pPr algn="ctr"/>
-              <a:r>
-                <a:rPr lang="en-US" sz="800" b="1" dirty="0">
-                  <a:solidFill>
-                    <a:schemeClr val="tx1">
-                      <a:lumMod val="95000"/>
-                      <a:lumOff val="5000"/>
-                    </a:schemeClr>
-                  </a:solidFill>
-                  <a:latin typeface="Calibri Light" panose="020F0302020204030204" pitchFamily="34" charset="0"/>
-                  <a:cs typeface="Calibri Light" panose="020F0302020204030204" pitchFamily="34" charset="0"/>
-                </a:rPr>
-                <a:t>H</a:t>
-              </a:r>
-            </a:p>
-          </p:txBody>
-        </p:sp>
-        <p:cxnSp>
-          <p:nvCxnSpPr>
-            <p:cNvPr id="96" name="Straight Connector 95">
-              <a:extLst>
-                <a:ext uri="{FF2B5EF4-FFF2-40B4-BE49-F238E27FC236}">
-                  <a16:creationId xmlns:a16="http://schemas.microsoft.com/office/drawing/2014/main" id="{3E482B56-9FB4-F1B3-4505-6BC8857291E6}"/>
-                </a:ext>
-              </a:extLst>
-            </p:cNvPr>
-            <p:cNvCxnSpPr>
-              <a:cxnSpLocks/>
-            </p:cNvCxnSpPr>
-            <p:nvPr/>
-          </p:nvCxnSpPr>
-          <p:spPr>
-            <a:xfrm>
-              <a:off x="2383371" y="2425953"/>
-              <a:ext cx="0" cy="1193088"/>
-            </a:xfrm>
-            <a:prstGeom prst="line">
-              <a:avLst/>
-            </a:prstGeom>
-            <a:ln w="12700">
-              <a:solidFill>
-                <a:schemeClr val="tx1"/>
-              </a:solidFill>
-              <a:prstDash val="lgDashDot"/>
-            </a:ln>
-          </p:spPr>
-          <p:style>
-            <a:lnRef idx="2">
-              <a:schemeClr val="accent1"/>
-            </a:lnRef>
-            <a:fillRef idx="0">
-              <a:schemeClr val="accent1"/>
-            </a:fillRef>
-            <a:effectRef idx="1">
-              <a:schemeClr val="accent1"/>
-            </a:effectRef>
-            <a:fontRef idx="minor">
-              <a:schemeClr val="tx1"/>
-            </a:fontRef>
-          </p:style>
-        </p:cxnSp>
-        <p:sp>
-          <p:nvSpPr>
-            <p:cNvPr id="97" name="TextBox 96">
-              <a:extLst>
-                <a:ext uri="{FF2B5EF4-FFF2-40B4-BE49-F238E27FC236}">
-                  <a16:creationId xmlns:a16="http://schemas.microsoft.com/office/drawing/2014/main" id="{1B78CC36-883D-5957-AD5C-423198EA1845}"/>
-                </a:ext>
-              </a:extLst>
-            </p:cNvPr>
-            <p:cNvSpPr txBox="1"/>
-            <p:nvPr/>
-          </p:nvSpPr>
-          <p:spPr>
-            <a:xfrm>
-              <a:off x="2379518" y="2365126"/>
-              <a:ext cx="863944" cy="338554"/>
-            </a:xfrm>
-            <a:prstGeom prst="rect">
-              <a:avLst/>
-            </a:prstGeom>
-            <a:noFill/>
-          </p:spPr>
-          <p:txBody>
-            <a:bodyPr wrap="square" rtlCol="0">
-              <a:spAutoFit/>
-            </a:bodyPr>
-            <a:lstStyle/>
-            <a:p>
-              <a:r>
-                <a:rPr lang="en-US" sz="800" b="1" dirty="0">
-                  <a:solidFill>
-                    <a:schemeClr val="tx1">
-                      <a:lumMod val="95000"/>
-                      <a:lumOff val="5000"/>
-                    </a:schemeClr>
-                  </a:solidFill>
-                  <a:latin typeface="Calibri" panose="020F0502020204030204" pitchFamily="34" charset="0"/>
-                  <a:cs typeface="Calibri" panose="020F0502020204030204" pitchFamily="34" charset="0"/>
-                </a:rPr>
-                <a:t>Predicted</a:t>
-              </a:r>
-              <a:r>
-                <a:rPr lang="en-US" sz="800" dirty="0">
-                  <a:solidFill>
-                    <a:schemeClr val="tx1">
-                      <a:lumMod val="95000"/>
-                      <a:lumOff val="5000"/>
-                    </a:schemeClr>
-                  </a:solidFill>
-                  <a:latin typeface="Calibri Light" panose="020F0302020204030204" pitchFamily="34" charset="0"/>
-                  <a:cs typeface="Calibri Light" panose="020F0302020204030204" pitchFamily="34" charset="0"/>
-                </a:rPr>
-                <a:t> </a:t>
-              </a:r>
-            </a:p>
-            <a:p>
-              <a:r>
-                <a:rPr lang="en-US" sz="800" dirty="0">
-                  <a:solidFill>
-                    <a:srgbClr val="33CC33"/>
-                  </a:solidFill>
-                  <a:latin typeface="Calibri Light" panose="020F0302020204030204" pitchFamily="34" charset="0"/>
-                  <a:cs typeface="Calibri Light" panose="020F0302020204030204" pitchFamily="34" charset="0"/>
-                </a:rPr>
-                <a:t>yes-events</a:t>
-              </a:r>
-            </a:p>
-          </p:txBody>
-        </p:sp>
-        <p:sp>
-          <p:nvSpPr>
-            <p:cNvPr id="98" name="TextBox 97">
-              <a:extLst>
-                <a:ext uri="{FF2B5EF4-FFF2-40B4-BE49-F238E27FC236}">
-                  <a16:creationId xmlns:a16="http://schemas.microsoft.com/office/drawing/2014/main" id="{E1F6673A-1B0C-E424-8F99-86B139BD4918}"/>
-                </a:ext>
-              </a:extLst>
-            </p:cNvPr>
-            <p:cNvSpPr txBox="1"/>
-            <p:nvPr/>
-          </p:nvSpPr>
-          <p:spPr>
-            <a:xfrm>
-              <a:off x="1540888" y="2365126"/>
-              <a:ext cx="863944" cy="338554"/>
-            </a:xfrm>
-            <a:prstGeom prst="rect">
-              <a:avLst/>
-            </a:prstGeom>
-            <a:noFill/>
-          </p:spPr>
-          <p:txBody>
-            <a:bodyPr wrap="square" rtlCol="0">
-              <a:spAutoFit/>
-            </a:bodyPr>
-            <a:lstStyle/>
-            <a:p>
-              <a:pPr algn="r"/>
-              <a:r>
-                <a:rPr lang="en-US" sz="800" b="1" dirty="0">
-                  <a:solidFill>
-                    <a:schemeClr val="tx1">
-                      <a:lumMod val="95000"/>
-                      <a:lumOff val="5000"/>
-                    </a:schemeClr>
-                  </a:solidFill>
-                  <a:latin typeface="Calibri" panose="020F0502020204030204" pitchFamily="34" charset="0"/>
-                  <a:cs typeface="Calibri" panose="020F0502020204030204" pitchFamily="34" charset="0"/>
-                </a:rPr>
-                <a:t>Predicted</a:t>
-              </a:r>
-              <a:r>
-                <a:rPr lang="en-US" sz="800" dirty="0">
-                  <a:solidFill>
-                    <a:schemeClr val="tx1">
-                      <a:lumMod val="95000"/>
-                      <a:lumOff val="5000"/>
-                    </a:schemeClr>
-                  </a:solidFill>
-                  <a:latin typeface="Calibri Light" panose="020F0302020204030204" pitchFamily="34" charset="0"/>
-                  <a:cs typeface="Calibri Light" panose="020F0302020204030204" pitchFamily="34" charset="0"/>
-                </a:rPr>
-                <a:t> </a:t>
-              </a:r>
-            </a:p>
-            <a:p>
-              <a:pPr algn="r"/>
-              <a:r>
-                <a:rPr lang="en-US" sz="800" dirty="0">
-                  <a:solidFill>
-                    <a:srgbClr val="D6A300"/>
-                  </a:solidFill>
-                  <a:latin typeface="Calibri Light" panose="020F0302020204030204" pitchFamily="34" charset="0"/>
-                  <a:cs typeface="Calibri Light" panose="020F0302020204030204" pitchFamily="34" charset="0"/>
-                </a:rPr>
-                <a:t>non-events</a:t>
-              </a:r>
-            </a:p>
-          </p:txBody>
-        </p:sp>
-        <p:sp>
-          <p:nvSpPr>
-            <p:cNvPr id="99" name="TextBox 98">
-              <a:extLst>
-                <a:ext uri="{FF2B5EF4-FFF2-40B4-BE49-F238E27FC236}">
-                  <a16:creationId xmlns:a16="http://schemas.microsoft.com/office/drawing/2014/main" id="{7160EB10-8701-2F92-B2E3-BD9975B33EAB}"/>
-                </a:ext>
-              </a:extLst>
-            </p:cNvPr>
-            <p:cNvSpPr txBox="1"/>
-            <p:nvPr/>
-          </p:nvSpPr>
-          <p:spPr>
-            <a:xfrm>
-              <a:off x="3219895" y="3160833"/>
-              <a:ext cx="713654" cy="461665"/>
-            </a:xfrm>
-            <a:prstGeom prst="rect">
-              <a:avLst/>
-            </a:prstGeom>
-            <a:noFill/>
-          </p:spPr>
-          <p:txBody>
-            <a:bodyPr wrap="square" rtlCol="0">
-              <a:spAutoFit/>
-            </a:bodyPr>
-            <a:lstStyle/>
-            <a:p>
-              <a:r>
-                <a:rPr lang="en-US" sz="800" dirty="0">
-                  <a:solidFill>
-                    <a:schemeClr val="tx1">
-                      <a:lumMod val="95000"/>
-                      <a:lumOff val="5000"/>
-                    </a:schemeClr>
-                  </a:solidFill>
-                  <a:latin typeface="Calibri Light" panose="020F0302020204030204" pitchFamily="34" charset="0"/>
-                  <a:cs typeface="Calibri Light" panose="020F0302020204030204" pitchFamily="34" charset="0"/>
-                </a:rPr>
-                <a:t>Distribution of </a:t>
-              </a:r>
-              <a:r>
-                <a:rPr lang="en-US" sz="800" b="1" dirty="0">
-                  <a:solidFill>
-                    <a:schemeClr val="tx1">
-                      <a:lumMod val="95000"/>
-                      <a:lumOff val="5000"/>
-                    </a:schemeClr>
-                  </a:solidFill>
-                  <a:latin typeface="Calibri" panose="020F0502020204030204" pitchFamily="34" charset="0"/>
-                  <a:cs typeface="Calibri" panose="020F0502020204030204" pitchFamily="34" charset="0"/>
-                </a:rPr>
-                <a:t>observed</a:t>
-              </a:r>
-              <a:r>
-                <a:rPr lang="en-US" sz="800" dirty="0">
-                  <a:solidFill>
-                    <a:schemeClr val="tx1">
-                      <a:lumMod val="95000"/>
-                      <a:lumOff val="5000"/>
-                    </a:schemeClr>
-                  </a:solidFill>
-                  <a:latin typeface="Calibri" panose="020F0502020204030204" pitchFamily="34" charset="0"/>
-                  <a:cs typeface="Calibri" panose="020F0502020204030204" pitchFamily="34" charset="0"/>
-                </a:rPr>
-                <a:t> </a:t>
-              </a:r>
-              <a:r>
-                <a:rPr lang="en-US" sz="800" dirty="0">
-                  <a:solidFill>
-                    <a:srgbClr val="0000FF"/>
-                  </a:solidFill>
-                  <a:latin typeface="Calibri Light" panose="020F0302020204030204" pitchFamily="34" charset="0"/>
-                  <a:cs typeface="Calibri Light" panose="020F0302020204030204" pitchFamily="34" charset="0"/>
-                </a:rPr>
-                <a:t>yes-events</a:t>
-              </a:r>
-            </a:p>
-          </p:txBody>
-        </p:sp>
-        <p:sp>
-          <p:nvSpPr>
-            <p:cNvPr id="100" name="TextBox 99">
-              <a:extLst>
-                <a:ext uri="{FF2B5EF4-FFF2-40B4-BE49-F238E27FC236}">
-                  <a16:creationId xmlns:a16="http://schemas.microsoft.com/office/drawing/2014/main" id="{C700B7F9-A72E-559F-D17A-BFCCF191350D}"/>
-                </a:ext>
-              </a:extLst>
-            </p:cNvPr>
-            <p:cNvSpPr txBox="1"/>
-            <p:nvPr/>
-          </p:nvSpPr>
-          <p:spPr>
-            <a:xfrm>
-              <a:off x="3674495" y="3594738"/>
-              <a:ext cx="527261" cy="215444"/>
-            </a:xfrm>
-            <a:prstGeom prst="rect">
-              <a:avLst/>
-            </a:prstGeom>
-            <a:noFill/>
-          </p:spPr>
-          <p:txBody>
-            <a:bodyPr wrap="square" rtlCol="0">
-              <a:spAutoFit/>
-            </a:bodyPr>
-            <a:lstStyle/>
-            <a:p>
-              <a:pPr algn="ctr"/>
-              <a:r>
-                <a:rPr lang="en-US" sz="800" dirty="0">
-                  <a:solidFill>
-                    <a:schemeClr val="tx1">
-                      <a:lumMod val="95000"/>
-                      <a:lumOff val="5000"/>
-                    </a:schemeClr>
-                  </a:solidFill>
-                  <a:latin typeface="Calibri Light" panose="020F0302020204030204" pitchFamily="34" charset="0"/>
-                  <a:cs typeface="Calibri Light" panose="020F0302020204030204" pitchFamily="34" charset="0"/>
-                </a:rPr>
-                <a:t>100 %</a:t>
-              </a:r>
-            </a:p>
-          </p:txBody>
-        </p:sp>
-        <p:sp>
-          <p:nvSpPr>
-            <p:cNvPr id="101" name="Rectangle 100">
-              <a:extLst>
-                <a:ext uri="{FF2B5EF4-FFF2-40B4-BE49-F238E27FC236}">
-                  <a16:creationId xmlns:a16="http://schemas.microsoft.com/office/drawing/2014/main" id="{BA6B5728-94FF-1C7C-CD97-4D776F6436FF}"/>
-                </a:ext>
-              </a:extLst>
-            </p:cNvPr>
-            <p:cNvSpPr/>
-            <p:nvPr/>
-          </p:nvSpPr>
-          <p:spPr>
-            <a:xfrm>
-              <a:off x="2164356" y="3701449"/>
-              <a:ext cx="539909" cy="130163"/>
-            </a:xfrm>
-            <a:prstGeom prst="rect">
-              <a:avLst/>
-            </a:prstGeom>
-            <a:solidFill>
-              <a:schemeClr val="bg1"/>
-            </a:solidFill>
-            <a:ln>
-              <a:noFill/>
-            </a:ln>
-            <a:effectLst/>
-          </p:spPr>
-          <p:style>
-            <a:lnRef idx="2">
-              <a:schemeClr val="accent1">
-                <a:shade val="15000"/>
-              </a:schemeClr>
-            </a:lnRef>
-            <a:fillRef idx="1">
-              <a:schemeClr val="accent1"/>
-            </a:fillRef>
-            <a:effectRef idx="0">
-              <a:schemeClr val="accent1"/>
-            </a:effectRef>
-            <a:fontRef idx="minor">
-              <a:schemeClr val="lt1"/>
-            </a:fontRef>
-          </p:style>
-          <p:txBody>
-            <a:bodyPr rtlCol="0" anchor="ctr"/>
-            <a:lstStyle/>
-            <a:p>
-              <a:pPr algn="ctr"/>
-              <a:endParaRPr lang="en-GB"/>
-            </a:p>
-          </p:txBody>
-        </p:sp>
-        <p:sp>
-          <p:nvSpPr>
-            <p:cNvPr id="102" name="TextBox 101">
-              <a:extLst>
-                <a:ext uri="{FF2B5EF4-FFF2-40B4-BE49-F238E27FC236}">
-                  <a16:creationId xmlns:a16="http://schemas.microsoft.com/office/drawing/2014/main" id="{BE8CA2C2-9A67-A315-55CF-D3B76C5B4ABF}"/>
-                </a:ext>
-              </a:extLst>
-            </p:cNvPr>
-            <p:cNvSpPr txBox="1"/>
-            <p:nvPr/>
-          </p:nvSpPr>
-          <p:spPr>
-            <a:xfrm>
-              <a:off x="2063032" y="3668843"/>
-              <a:ext cx="340242" cy="222175"/>
-            </a:xfrm>
-            <a:prstGeom prst="rect">
-              <a:avLst/>
-            </a:prstGeom>
-            <a:noFill/>
-          </p:spPr>
-          <p:txBody>
-            <a:bodyPr wrap="square" rtlCol="0">
-              <a:spAutoFit/>
-            </a:bodyPr>
-            <a:lstStyle/>
-            <a:p>
-              <a:pPr algn="ctr"/>
-              <a:r>
-                <a:rPr lang="en-US" sz="800" b="1" dirty="0">
-                  <a:solidFill>
-                    <a:schemeClr val="tx1">
-                      <a:lumMod val="95000"/>
-                      <a:lumOff val="5000"/>
-                    </a:schemeClr>
-                  </a:solidFill>
-                  <a:latin typeface="Calibri Light" panose="020F0302020204030204" pitchFamily="34" charset="0"/>
-                  <a:cs typeface="Calibri Light" panose="020F0302020204030204" pitchFamily="34" charset="0"/>
-                </a:rPr>
-                <a:t>M</a:t>
-              </a:r>
-            </a:p>
-          </p:txBody>
-        </p:sp>
-        <p:sp>
-          <p:nvSpPr>
-            <p:cNvPr id="103" name="TextBox 102">
-              <a:extLst>
-                <a:ext uri="{FF2B5EF4-FFF2-40B4-BE49-F238E27FC236}">
-                  <a16:creationId xmlns:a16="http://schemas.microsoft.com/office/drawing/2014/main" id="{16D7E8D5-094D-0801-2477-66BD27467E33}"/>
-                </a:ext>
-              </a:extLst>
-            </p:cNvPr>
-            <p:cNvSpPr txBox="1"/>
-            <p:nvPr/>
-          </p:nvSpPr>
-          <p:spPr>
-            <a:xfrm>
-              <a:off x="2370923" y="3664967"/>
-              <a:ext cx="340242" cy="222175"/>
-            </a:xfrm>
-            <a:prstGeom prst="rect">
-              <a:avLst/>
-            </a:prstGeom>
-            <a:noFill/>
-          </p:spPr>
-          <p:txBody>
-            <a:bodyPr wrap="square" rtlCol="0">
-              <a:spAutoFit/>
-            </a:bodyPr>
-            <a:lstStyle/>
-            <a:p>
-              <a:pPr algn="ctr"/>
-              <a:r>
-                <a:rPr lang="en-US" sz="800" b="1" dirty="0">
-                  <a:solidFill>
-                    <a:schemeClr val="tx1">
-                      <a:lumMod val="95000"/>
-                      <a:lumOff val="5000"/>
-                    </a:schemeClr>
-                  </a:solidFill>
-                  <a:latin typeface="Calibri Light" panose="020F0302020204030204" pitchFamily="34" charset="0"/>
-                  <a:cs typeface="Calibri Light" panose="020F0302020204030204" pitchFamily="34" charset="0"/>
-                </a:rPr>
-                <a:t>FA</a:t>
-              </a:r>
-            </a:p>
-          </p:txBody>
-        </p:sp>
-        <p:sp>
-          <p:nvSpPr>
-            <p:cNvPr id="104" name="TextBox 103">
-              <a:extLst>
-                <a:ext uri="{FF2B5EF4-FFF2-40B4-BE49-F238E27FC236}">
-                  <a16:creationId xmlns:a16="http://schemas.microsoft.com/office/drawing/2014/main" id="{5E7D516C-6098-CA78-A68A-A60E91A03B8B}"/>
-                </a:ext>
-              </a:extLst>
-            </p:cNvPr>
-            <p:cNvSpPr txBox="1"/>
-            <p:nvPr/>
-          </p:nvSpPr>
-          <p:spPr>
-            <a:xfrm>
-              <a:off x="2548095" y="3731329"/>
-              <a:ext cx="1650154" cy="461665"/>
-            </a:xfrm>
-            <a:prstGeom prst="rect">
-              <a:avLst/>
-            </a:prstGeom>
-            <a:noFill/>
-          </p:spPr>
-          <p:txBody>
-            <a:bodyPr wrap="square" rtlCol="0">
-              <a:spAutoFit/>
-            </a:bodyPr>
-            <a:lstStyle/>
-            <a:p>
-              <a:pPr algn="r"/>
-              <a:r>
-                <a:rPr lang="en-US" sz="800" dirty="0">
-                  <a:solidFill>
-                    <a:schemeClr val="tx1">
-                      <a:lumMod val="95000"/>
-                      <a:lumOff val="5000"/>
-                    </a:schemeClr>
-                  </a:solidFill>
-                  <a:latin typeface="Calibri Light" panose="020F0302020204030204" pitchFamily="34" charset="0"/>
-                  <a:cs typeface="Calibri Light" panose="020F0302020204030204" pitchFamily="34" charset="0"/>
-                </a:rPr>
-                <a:t>Probabilities of exceeding the verifying rainfall threshold (defined as a percentile or return period)</a:t>
-              </a:r>
-            </a:p>
-          </p:txBody>
-        </p:sp>
-        <p:cxnSp>
-          <p:nvCxnSpPr>
-            <p:cNvPr id="105" name="Straight Arrow Connector 104">
-              <a:extLst>
-                <a:ext uri="{FF2B5EF4-FFF2-40B4-BE49-F238E27FC236}">
-                  <a16:creationId xmlns:a16="http://schemas.microsoft.com/office/drawing/2014/main" id="{9F83BDF9-60EC-1D45-016B-A09DF554F68E}"/>
-                </a:ext>
-              </a:extLst>
-            </p:cNvPr>
-            <p:cNvCxnSpPr>
-              <a:cxnSpLocks/>
-            </p:cNvCxnSpPr>
-            <p:nvPr/>
-          </p:nvCxnSpPr>
-          <p:spPr>
-            <a:xfrm flipV="1">
-              <a:off x="2381535" y="2870752"/>
-              <a:ext cx="601864" cy="0"/>
-            </a:xfrm>
-            <a:prstGeom prst="straightConnector1">
-              <a:avLst/>
-            </a:prstGeom>
-            <a:ln w="3175">
-              <a:solidFill>
-                <a:schemeClr val="tx1">
-                  <a:lumMod val="95000"/>
-                  <a:lumOff val="5000"/>
-                </a:schemeClr>
-              </a:solidFill>
-              <a:tailEnd type="triangle"/>
-            </a:ln>
-          </p:spPr>
-          <p:style>
-            <a:lnRef idx="2">
-              <a:schemeClr val="accent1"/>
-            </a:lnRef>
-            <a:fillRef idx="0">
-              <a:schemeClr val="accent1"/>
-            </a:fillRef>
-            <a:effectRef idx="1">
-              <a:schemeClr val="accent1"/>
-            </a:effectRef>
-            <a:fontRef idx="minor">
-              <a:schemeClr val="tx1"/>
-            </a:fontRef>
-          </p:style>
-        </p:cxnSp>
-        <p:sp>
-          <p:nvSpPr>
-            <p:cNvPr id="106" name="Oval 105">
-              <a:extLst>
-                <a:ext uri="{FF2B5EF4-FFF2-40B4-BE49-F238E27FC236}">
-                  <a16:creationId xmlns:a16="http://schemas.microsoft.com/office/drawing/2014/main" id="{19C06D92-10F2-6629-738B-329DDCC22607}"/>
-                </a:ext>
-              </a:extLst>
-            </p:cNvPr>
-            <p:cNvSpPr/>
-            <p:nvPr/>
-          </p:nvSpPr>
-          <p:spPr>
-            <a:xfrm>
-              <a:off x="2347112" y="3592356"/>
-              <a:ext cx="72000" cy="72000"/>
-            </a:xfrm>
-            <a:prstGeom prst="ellipse">
-              <a:avLst/>
-            </a:prstGeom>
-            <a:solidFill>
-              <a:schemeClr val="accent5">
-                <a:lumMod val="60000"/>
-                <a:lumOff val="40000"/>
-              </a:schemeClr>
-            </a:solidFill>
-            <a:ln>
-              <a:noFill/>
-            </a:ln>
-          </p:spPr>
-          <p:style>
-            <a:lnRef idx="2">
-              <a:schemeClr val="accent1">
-                <a:shade val="15000"/>
-              </a:schemeClr>
-            </a:lnRef>
-            <a:fillRef idx="1">
-              <a:schemeClr val="accent1"/>
-            </a:fillRef>
-            <a:effectRef idx="0">
-              <a:schemeClr val="accent1"/>
-            </a:effectRef>
-            <a:fontRef idx="minor">
-              <a:schemeClr val="lt1"/>
-            </a:fontRef>
-          </p:style>
-          <p:txBody>
-            <a:bodyPr rtlCol="0" anchor="ctr"/>
-            <a:lstStyle/>
-            <a:p>
-              <a:pPr algn="ctr"/>
-              <a:endParaRPr lang="en-GB"/>
-            </a:p>
-          </p:txBody>
-        </p:sp>
-      </p:grpSp>
-      <p:sp>
-        <p:nvSpPr>
-          <p:cNvPr id="107" name="TextBox 106">
-            <a:extLst>
-              <a:ext uri="{FF2B5EF4-FFF2-40B4-BE49-F238E27FC236}">
-                <a16:creationId xmlns:a16="http://schemas.microsoft.com/office/drawing/2014/main" id="{8C2CF4A1-967C-6891-8D3E-E404ED5D4E82}"/>
+                <a16:creationId xmlns:a16="http://schemas.microsoft.com/office/drawing/2014/main" id="{871F6875-B35B-38C5-3426-33D516CADAB5}"/>
               </a:ext>
             </a:extLst>
           </p:cNvPr>
@@ -15635,8 +14087,952 @@
         </p:nvSpPr>
         <p:spPr>
           <a:xfrm>
-            <a:off x="-74557" y="408529"/>
-            <a:ext cx="4181942" cy="215444"/>
+            <a:off x="3352914" y="993650"/>
+            <a:ext cx="1080000" cy="720000"/>
+          </a:xfrm>
+          <a:prstGeom prst="rect">
+            <a:avLst/>
+          </a:prstGeom>
+          <a:noFill/>
+        </p:spPr>
+        <p:txBody>
+          <a:bodyPr wrap="square" rtlCol="0">
+            <a:spAutoFit/>
+          </a:bodyPr>
+          <a:lstStyle/>
+          <a:p>
+            <a:pPr algn="ctr"/>
+            <a:r>
+              <a:rPr lang="en-US" sz="800" b="1" dirty="0">
+                <a:latin typeface="Calibri" panose="020F0502020204030204" pitchFamily="34" charset="0"/>
+                <a:cs typeface="Calibri" panose="020F0502020204030204" pitchFamily="34" charset="0"/>
+              </a:rPr>
+              <a:t>HITS (H)</a:t>
+            </a:r>
+          </a:p>
+          <a:p>
+            <a:pPr algn="ctr"/>
+            <a:r>
+              <a:rPr lang="en-GB" sz="800" dirty="0">
+                <a:latin typeface="Calibri Light" panose="020F0302020204030204" pitchFamily="34" charset="0"/>
+                <a:cs typeface="Calibri Light" panose="020F0302020204030204" pitchFamily="34" charset="0"/>
+              </a:rPr>
+              <a:t>The event was predicted and it was observed</a:t>
+            </a:r>
+          </a:p>
+        </p:txBody>
+      </p:sp>
+      <p:sp>
+        <p:nvSpPr>
+          <p:cNvPr id="128" name="TextBox 127">
+            <a:extLst>
+              <a:ext uri="{FF2B5EF4-FFF2-40B4-BE49-F238E27FC236}">
+                <a16:creationId xmlns:a16="http://schemas.microsoft.com/office/drawing/2014/main" id="{843DCFB4-D832-CE14-33FD-22FE10682A05}"/>
+              </a:ext>
+            </a:extLst>
+          </p:cNvPr>
+          <p:cNvSpPr txBox="1"/>
+          <p:nvPr/>
+        </p:nvSpPr>
+        <p:spPr>
+          <a:xfrm>
+            <a:off x="4546715" y="993650"/>
+            <a:ext cx="1080000" cy="720000"/>
+          </a:xfrm>
+          <a:prstGeom prst="rect">
+            <a:avLst/>
+          </a:prstGeom>
+          <a:noFill/>
+        </p:spPr>
+        <p:txBody>
+          <a:bodyPr wrap="square" rtlCol="0">
+            <a:spAutoFit/>
+          </a:bodyPr>
+          <a:lstStyle/>
+          <a:p>
+            <a:pPr algn="ctr"/>
+            <a:r>
+              <a:rPr lang="en-US" sz="800" b="1" dirty="0">
+                <a:latin typeface="Calibri" panose="020F0502020204030204" pitchFamily="34" charset="0"/>
+                <a:cs typeface="Calibri" panose="020F0502020204030204" pitchFamily="34" charset="0"/>
+              </a:rPr>
+              <a:t>MISSES (M)</a:t>
+            </a:r>
+          </a:p>
+          <a:p>
+            <a:pPr algn="ctr"/>
+            <a:r>
+              <a:rPr lang="en-GB" sz="800" dirty="0">
+                <a:latin typeface="Calibri Light" panose="020F0302020204030204" pitchFamily="34" charset="0"/>
+                <a:cs typeface="Calibri Light" panose="020F0302020204030204" pitchFamily="34" charset="0"/>
+              </a:rPr>
+              <a:t>The event was not predicted but it was observed</a:t>
+            </a:r>
+          </a:p>
+        </p:txBody>
+      </p:sp>
+      <p:sp>
+        <p:nvSpPr>
+          <p:cNvPr id="129" name="TextBox 128">
+            <a:extLst>
+              <a:ext uri="{FF2B5EF4-FFF2-40B4-BE49-F238E27FC236}">
+                <a16:creationId xmlns:a16="http://schemas.microsoft.com/office/drawing/2014/main" id="{1ACBC9A4-96CE-2145-4C13-43843EED1EEE}"/>
+              </a:ext>
+            </a:extLst>
+          </p:cNvPr>
+          <p:cNvSpPr txBox="1"/>
+          <p:nvPr/>
+        </p:nvSpPr>
+        <p:spPr>
+          <a:xfrm>
+            <a:off x="3352914" y="1813244"/>
+            <a:ext cx="1080000" cy="720000"/>
+          </a:xfrm>
+          <a:prstGeom prst="rect">
+            <a:avLst/>
+          </a:prstGeom>
+          <a:noFill/>
+        </p:spPr>
+        <p:txBody>
+          <a:bodyPr wrap="square" rtlCol="0">
+            <a:spAutoFit/>
+          </a:bodyPr>
+          <a:lstStyle/>
+          <a:p>
+            <a:pPr algn="ctr"/>
+            <a:r>
+              <a:rPr lang="en-US" sz="800" b="1" dirty="0">
+                <a:latin typeface="Calibri" panose="020F0502020204030204" pitchFamily="34" charset="0"/>
+                <a:cs typeface="Calibri" panose="020F0502020204030204" pitchFamily="34" charset="0"/>
+              </a:rPr>
+              <a:t>FALSE ALARMS (FA)</a:t>
+            </a:r>
+          </a:p>
+          <a:p>
+            <a:pPr algn="ctr"/>
+            <a:r>
+              <a:rPr lang="en-GB" sz="800" dirty="0">
+                <a:latin typeface="Calibri Light" panose="020F0302020204030204" pitchFamily="34" charset="0"/>
+                <a:cs typeface="Calibri Light" panose="020F0302020204030204" pitchFamily="34" charset="0"/>
+              </a:rPr>
+              <a:t>The event was predicted but it was not observed</a:t>
+            </a:r>
+          </a:p>
+        </p:txBody>
+      </p:sp>
+      <p:sp>
+        <p:nvSpPr>
+          <p:cNvPr id="130" name="TextBox 129">
+            <a:extLst>
+              <a:ext uri="{FF2B5EF4-FFF2-40B4-BE49-F238E27FC236}">
+                <a16:creationId xmlns:a16="http://schemas.microsoft.com/office/drawing/2014/main" id="{5CCEEB50-0EB3-291D-2911-B86403C69D4E}"/>
+              </a:ext>
+            </a:extLst>
+          </p:cNvPr>
+          <p:cNvSpPr txBox="1"/>
+          <p:nvPr/>
+        </p:nvSpPr>
+        <p:spPr>
+          <a:xfrm>
+            <a:off x="4459458" y="1813244"/>
+            <a:ext cx="1254515" cy="584775"/>
+          </a:xfrm>
+          <a:prstGeom prst="rect">
+            <a:avLst/>
+          </a:prstGeom>
+          <a:noFill/>
+        </p:spPr>
+        <p:txBody>
+          <a:bodyPr wrap="square" rtlCol="0">
+            <a:spAutoFit/>
+          </a:bodyPr>
+          <a:lstStyle/>
+          <a:p>
+            <a:pPr algn="ctr"/>
+            <a:r>
+              <a:rPr lang="en-US" sz="800" b="1" dirty="0">
+                <a:latin typeface="Calibri" panose="020F0502020204030204" pitchFamily="34" charset="0"/>
+                <a:cs typeface="Calibri" panose="020F0502020204030204" pitchFamily="34" charset="0"/>
+              </a:rPr>
+              <a:t>CORRECT NEGATIVE (CN)</a:t>
+            </a:r>
+          </a:p>
+          <a:p>
+            <a:pPr algn="ctr"/>
+            <a:r>
+              <a:rPr lang="en-GB" sz="800" dirty="0">
+                <a:latin typeface="Calibri Light" panose="020F0302020204030204" pitchFamily="34" charset="0"/>
+                <a:cs typeface="Calibri Light" panose="020F0302020204030204" pitchFamily="34" charset="0"/>
+              </a:rPr>
+              <a:t>The event was not predicted and it was not observed</a:t>
+            </a:r>
+          </a:p>
+        </p:txBody>
+      </p:sp>
+      <p:cxnSp>
+        <p:nvCxnSpPr>
+          <p:cNvPr id="131" name="Straight Connector 130">
+            <a:extLst>
+              <a:ext uri="{FF2B5EF4-FFF2-40B4-BE49-F238E27FC236}">
+                <a16:creationId xmlns:a16="http://schemas.microsoft.com/office/drawing/2014/main" id="{A0143ED4-4C89-1348-C278-56520894994E}"/>
+              </a:ext>
+            </a:extLst>
+          </p:cNvPr>
+          <p:cNvCxnSpPr>
+            <a:cxnSpLocks/>
+          </p:cNvCxnSpPr>
+          <p:nvPr/>
+        </p:nvCxnSpPr>
+        <p:spPr>
+          <a:xfrm>
+            <a:off x="4453934" y="861257"/>
+            <a:ext cx="0" cy="1639317"/>
+          </a:xfrm>
+          <a:prstGeom prst="line">
+            <a:avLst/>
+          </a:prstGeom>
+          <a:ln w="3175">
+            <a:solidFill>
+              <a:schemeClr val="tx1">
+                <a:lumMod val="75000"/>
+                <a:lumOff val="25000"/>
+              </a:schemeClr>
+            </a:solidFill>
+          </a:ln>
+        </p:spPr>
+        <p:style>
+          <a:lnRef idx="2">
+            <a:schemeClr val="accent1"/>
+          </a:lnRef>
+          <a:fillRef idx="0">
+            <a:schemeClr val="accent1"/>
+          </a:fillRef>
+          <a:effectRef idx="1">
+            <a:schemeClr val="accent1"/>
+          </a:effectRef>
+          <a:fontRef idx="minor">
+            <a:schemeClr val="tx1"/>
+          </a:fontRef>
+        </p:style>
+      </p:cxnSp>
+      <p:cxnSp>
+        <p:nvCxnSpPr>
+          <p:cNvPr id="132" name="Straight Connector 131">
+            <a:extLst>
+              <a:ext uri="{FF2B5EF4-FFF2-40B4-BE49-F238E27FC236}">
+                <a16:creationId xmlns:a16="http://schemas.microsoft.com/office/drawing/2014/main" id="{F722787C-8461-E4FE-8414-D479477597C4}"/>
+              </a:ext>
+            </a:extLst>
+          </p:cNvPr>
+          <p:cNvCxnSpPr>
+            <a:cxnSpLocks/>
+          </p:cNvCxnSpPr>
+          <p:nvPr/>
+        </p:nvCxnSpPr>
+        <p:spPr>
+          <a:xfrm flipH="1">
+            <a:off x="3313776" y="1760277"/>
+            <a:ext cx="2397547" cy="0"/>
+          </a:xfrm>
+          <a:prstGeom prst="line">
+            <a:avLst/>
+          </a:prstGeom>
+          <a:ln w="3175">
+            <a:solidFill>
+              <a:schemeClr val="tx1">
+                <a:lumMod val="75000"/>
+                <a:lumOff val="25000"/>
+              </a:schemeClr>
+            </a:solidFill>
+          </a:ln>
+        </p:spPr>
+        <p:style>
+          <a:lnRef idx="2">
+            <a:schemeClr val="accent1"/>
+          </a:lnRef>
+          <a:fillRef idx="0">
+            <a:schemeClr val="accent1"/>
+          </a:fillRef>
+          <a:effectRef idx="1">
+            <a:schemeClr val="accent1"/>
+          </a:effectRef>
+          <a:fontRef idx="minor">
+            <a:schemeClr val="tx1"/>
+          </a:fontRef>
+        </p:style>
+      </p:cxnSp>
+      <p:sp>
+        <p:nvSpPr>
+          <p:cNvPr id="133" name="TextBox 132">
+            <a:extLst>
+              <a:ext uri="{FF2B5EF4-FFF2-40B4-BE49-F238E27FC236}">
+                <a16:creationId xmlns:a16="http://schemas.microsoft.com/office/drawing/2014/main" id="{DD906E7D-FF64-09FE-65EF-837BDD47046A}"/>
+              </a:ext>
+            </a:extLst>
+          </p:cNvPr>
+          <p:cNvSpPr txBox="1"/>
+          <p:nvPr/>
+        </p:nvSpPr>
+        <p:spPr>
+          <a:xfrm>
+            <a:off x="3018850" y="1122130"/>
+            <a:ext cx="307777" cy="1275889"/>
+          </a:xfrm>
+          <a:prstGeom prst="rect">
+            <a:avLst/>
+          </a:prstGeom>
+          <a:noFill/>
+        </p:spPr>
+        <p:txBody>
+          <a:bodyPr vert="vert270" wrap="square" rtlCol="0">
+            <a:spAutoFit/>
+          </a:bodyPr>
+          <a:lstStyle/>
+          <a:p>
+            <a:pPr algn="ctr"/>
+            <a:r>
+              <a:rPr lang="en-US" sz="800" b="1" dirty="0">
+                <a:solidFill>
+                  <a:schemeClr val="tx1">
+                    <a:lumMod val="95000"/>
+                    <a:lumOff val="5000"/>
+                  </a:schemeClr>
+                </a:solidFill>
+                <a:latin typeface="Calibri" panose="020F0502020204030204" pitchFamily="34" charset="0"/>
+                <a:cs typeface="Calibri" panose="020F0502020204030204" pitchFamily="34" charset="0"/>
+              </a:rPr>
+              <a:t>Observed</a:t>
+            </a:r>
+            <a:endParaRPr lang="en-US" sz="800" dirty="0">
+              <a:solidFill>
+                <a:srgbClr val="0000FF"/>
+              </a:solidFill>
+              <a:latin typeface="Calibri Light" panose="020F0302020204030204" pitchFamily="34" charset="0"/>
+              <a:cs typeface="Calibri Light" panose="020F0302020204030204" pitchFamily="34" charset="0"/>
+            </a:endParaRPr>
+          </a:p>
+        </p:txBody>
+      </p:sp>
+      <p:sp>
+        <p:nvSpPr>
+          <p:cNvPr id="134" name="TextBox 133">
+            <a:extLst>
+              <a:ext uri="{FF2B5EF4-FFF2-40B4-BE49-F238E27FC236}">
+                <a16:creationId xmlns:a16="http://schemas.microsoft.com/office/drawing/2014/main" id="{CDF5D99F-239B-7286-E705-43476984C1FD}"/>
+              </a:ext>
+            </a:extLst>
+          </p:cNvPr>
+          <p:cNvSpPr txBox="1"/>
+          <p:nvPr/>
+        </p:nvSpPr>
+        <p:spPr>
+          <a:xfrm>
+            <a:off x="3195180" y="994383"/>
+            <a:ext cx="307777" cy="736524"/>
+          </a:xfrm>
+          <a:prstGeom prst="rect">
+            <a:avLst/>
+          </a:prstGeom>
+          <a:noFill/>
+        </p:spPr>
+        <p:txBody>
+          <a:bodyPr vert="vert270" wrap="square" rtlCol="0">
+            <a:spAutoFit/>
+          </a:bodyPr>
+          <a:lstStyle/>
+          <a:p>
+            <a:pPr algn="ctr"/>
+            <a:r>
+              <a:rPr lang="en-US" sz="800" dirty="0">
+                <a:solidFill>
+                  <a:srgbClr val="0000FF"/>
+                </a:solidFill>
+                <a:latin typeface="Calibri Light" panose="020F0302020204030204" pitchFamily="34" charset="0"/>
+                <a:cs typeface="Calibri Light" panose="020F0302020204030204" pitchFamily="34" charset="0"/>
+              </a:rPr>
+              <a:t>yes-events</a:t>
+            </a:r>
+          </a:p>
+        </p:txBody>
+      </p:sp>
+      <p:sp>
+        <p:nvSpPr>
+          <p:cNvPr id="135" name="TextBox 134">
+            <a:extLst>
+              <a:ext uri="{FF2B5EF4-FFF2-40B4-BE49-F238E27FC236}">
+                <a16:creationId xmlns:a16="http://schemas.microsoft.com/office/drawing/2014/main" id="{A09387BF-360E-1373-B4E2-484CDF5B6943}"/>
+              </a:ext>
+            </a:extLst>
+          </p:cNvPr>
+          <p:cNvSpPr txBox="1"/>
+          <p:nvPr/>
+        </p:nvSpPr>
+        <p:spPr>
+          <a:xfrm>
+            <a:off x="4025813" y="637463"/>
+            <a:ext cx="863944" cy="215444"/>
+          </a:xfrm>
+          <a:prstGeom prst="rect">
+            <a:avLst/>
+          </a:prstGeom>
+          <a:noFill/>
+        </p:spPr>
+        <p:txBody>
+          <a:bodyPr wrap="square" rtlCol="0">
+            <a:spAutoFit/>
+          </a:bodyPr>
+          <a:lstStyle/>
+          <a:p>
+            <a:pPr algn="ctr"/>
+            <a:r>
+              <a:rPr lang="en-US" sz="800" b="1" dirty="0">
+                <a:solidFill>
+                  <a:schemeClr val="tx1">
+                    <a:lumMod val="95000"/>
+                    <a:lumOff val="5000"/>
+                  </a:schemeClr>
+                </a:solidFill>
+                <a:latin typeface="Calibri" panose="020F0502020204030204" pitchFamily="34" charset="0"/>
+                <a:cs typeface="Calibri" panose="020F0502020204030204" pitchFamily="34" charset="0"/>
+              </a:rPr>
+              <a:t>Predicted</a:t>
+            </a:r>
+            <a:endParaRPr lang="en-US" sz="800" dirty="0">
+              <a:solidFill>
+                <a:srgbClr val="D6A300"/>
+              </a:solidFill>
+              <a:latin typeface="Calibri Light" panose="020F0302020204030204" pitchFamily="34" charset="0"/>
+              <a:cs typeface="Calibri Light" panose="020F0302020204030204" pitchFamily="34" charset="0"/>
+            </a:endParaRPr>
+          </a:p>
+        </p:txBody>
+      </p:sp>
+      <p:sp>
+        <p:nvSpPr>
+          <p:cNvPr id="136" name="TextBox 135">
+            <a:extLst>
+              <a:ext uri="{FF2B5EF4-FFF2-40B4-BE49-F238E27FC236}">
+                <a16:creationId xmlns:a16="http://schemas.microsoft.com/office/drawing/2014/main" id="{FEE84F7D-562E-3E17-3F19-517232627412}"/>
+              </a:ext>
+            </a:extLst>
+          </p:cNvPr>
+          <p:cNvSpPr txBox="1"/>
+          <p:nvPr/>
+        </p:nvSpPr>
+        <p:spPr>
+          <a:xfrm>
+            <a:off x="4654743" y="797882"/>
+            <a:ext cx="863944" cy="215444"/>
+          </a:xfrm>
+          <a:prstGeom prst="rect">
+            <a:avLst/>
+          </a:prstGeom>
+          <a:noFill/>
+        </p:spPr>
+        <p:txBody>
+          <a:bodyPr wrap="square" rtlCol="0">
+            <a:spAutoFit/>
+          </a:bodyPr>
+          <a:lstStyle/>
+          <a:p>
+            <a:pPr algn="ctr"/>
+            <a:r>
+              <a:rPr lang="en-US" sz="800" dirty="0">
+                <a:solidFill>
+                  <a:srgbClr val="D6A300"/>
+                </a:solidFill>
+                <a:latin typeface="Calibri Light" panose="020F0302020204030204" pitchFamily="34" charset="0"/>
+                <a:cs typeface="Calibri Light" panose="020F0302020204030204" pitchFamily="34" charset="0"/>
+              </a:rPr>
+              <a:t>non-events</a:t>
+            </a:r>
+          </a:p>
+        </p:txBody>
+      </p:sp>
+      <p:sp>
+        <p:nvSpPr>
+          <p:cNvPr id="137" name="TextBox 136">
+            <a:extLst>
+              <a:ext uri="{FF2B5EF4-FFF2-40B4-BE49-F238E27FC236}">
+                <a16:creationId xmlns:a16="http://schemas.microsoft.com/office/drawing/2014/main" id="{F3106249-1C45-1C12-2453-07133FF1CD86}"/>
+              </a:ext>
+            </a:extLst>
+          </p:cNvPr>
+          <p:cNvSpPr txBox="1"/>
+          <p:nvPr/>
+        </p:nvSpPr>
+        <p:spPr>
+          <a:xfrm>
+            <a:off x="3460942" y="801695"/>
+            <a:ext cx="863944" cy="215444"/>
+          </a:xfrm>
+          <a:prstGeom prst="rect">
+            <a:avLst/>
+          </a:prstGeom>
+          <a:noFill/>
+        </p:spPr>
+        <p:txBody>
+          <a:bodyPr wrap="square" rtlCol="0">
+            <a:spAutoFit/>
+          </a:bodyPr>
+          <a:lstStyle/>
+          <a:p>
+            <a:pPr algn="ctr"/>
+            <a:r>
+              <a:rPr lang="en-US" sz="800" dirty="0">
+                <a:solidFill>
+                  <a:srgbClr val="33CC33"/>
+                </a:solidFill>
+                <a:latin typeface="Calibri Light" panose="020F0302020204030204" pitchFamily="34" charset="0"/>
+                <a:cs typeface="Calibri Light" panose="020F0302020204030204" pitchFamily="34" charset="0"/>
+              </a:rPr>
+              <a:t>yes-events</a:t>
+            </a:r>
+          </a:p>
+        </p:txBody>
+      </p:sp>
+      <p:sp>
+        <p:nvSpPr>
+          <p:cNvPr id="138" name="TextBox 137">
+            <a:extLst>
+              <a:ext uri="{FF2B5EF4-FFF2-40B4-BE49-F238E27FC236}">
+                <a16:creationId xmlns:a16="http://schemas.microsoft.com/office/drawing/2014/main" id="{E3F5F678-30B9-E5A6-EDA8-349820A25D9E}"/>
+              </a:ext>
+            </a:extLst>
+          </p:cNvPr>
+          <p:cNvSpPr txBox="1"/>
+          <p:nvPr/>
+        </p:nvSpPr>
+        <p:spPr>
+          <a:xfrm>
+            <a:off x="3196331" y="1798910"/>
+            <a:ext cx="307777" cy="736524"/>
+          </a:xfrm>
+          <a:prstGeom prst="rect">
+            <a:avLst/>
+          </a:prstGeom>
+          <a:noFill/>
+        </p:spPr>
+        <p:txBody>
+          <a:bodyPr vert="vert270" wrap="square" rtlCol="0">
+            <a:spAutoFit/>
+          </a:bodyPr>
+          <a:lstStyle/>
+          <a:p>
+            <a:pPr algn="ctr"/>
+            <a:r>
+              <a:rPr lang="en-US" sz="800" dirty="0">
+                <a:solidFill>
+                  <a:srgbClr val="FF0066"/>
+                </a:solidFill>
+                <a:latin typeface="Calibri Light" panose="020F0302020204030204" pitchFamily="34" charset="0"/>
+                <a:cs typeface="Calibri Light" panose="020F0302020204030204" pitchFamily="34" charset="0"/>
+              </a:rPr>
+              <a:t>non-events</a:t>
+            </a:r>
+          </a:p>
+        </p:txBody>
+      </p:sp>
+      <p:sp>
+        <p:nvSpPr>
+          <p:cNvPr id="139" name="Rectangle 138">
+            <a:extLst>
+              <a:ext uri="{FF2B5EF4-FFF2-40B4-BE49-F238E27FC236}">
+                <a16:creationId xmlns:a16="http://schemas.microsoft.com/office/drawing/2014/main" id="{2D87FE8A-4BD4-D2C0-4981-4C00E52C4C21}"/>
+              </a:ext>
+            </a:extLst>
+          </p:cNvPr>
+          <p:cNvSpPr/>
+          <p:nvPr/>
+        </p:nvSpPr>
+        <p:spPr>
+          <a:xfrm>
+            <a:off x="4906715" y="2372657"/>
+            <a:ext cx="360000" cy="90000"/>
+          </a:xfrm>
+          <a:prstGeom prst="rect">
+            <a:avLst/>
+          </a:prstGeom>
+          <a:pattFill prst="dkHorz">
+            <a:fgClr>
+              <a:srgbClr val="E07A1A"/>
+            </a:fgClr>
+            <a:bgClr>
+              <a:schemeClr val="bg1"/>
+            </a:bgClr>
+          </a:pattFill>
+          <a:ln w="1270">
+            <a:solidFill>
+              <a:schemeClr val="bg1">
+                <a:lumMod val="50000"/>
+              </a:schemeClr>
+            </a:solidFill>
+          </a:ln>
+        </p:spPr>
+        <p:style>
+          <a:lnRef idx="2">
+            <a:schemeClr val="accent1">
+              <a:shade val="15000"/>
+            </a:schemeClr>
+          </a:lnRef>
+          <a:fillRef idx="1">
+            <a:schemeClr val="accent1"/>
+          </a:fillRef>
+          <a:effectRef idx="0">
+            <a:schemeClr val="accent1"/>
+          </a:effectRef>
+          <a:fontRef idx="minor">
+            <a:schemeClr val="lt1"/>
+          </a:fontRef>
+        </p:style>
+        <p:txBody>
+          <a:bodyPr rtlCol="0" anchor="ctr"/>
+          <a:lstStyle/>
+          <a:p>
+            <a:pPr algn="ctr"/>
+            <a:endParaRPr lang="en-GB">
+              <a:latin typeface="Calibri" panose="020F0502020204030204" pitchFamily="34" charset="0"/>
+              <a:cs typeface="Calibri" panose="020F0502020204030204" pitchFamily="34" charset="0"/>
+            </a:endParaRPr>
+          </a:p>
+        </p:txBody>
+      </p:sp>
+      <p:sp>
+        <p:nvSpPr>
+          <p:cNvPr id="140" name="Rectangle 139">
+            <a:extLst>
+              <a:ext uri="{FF2B5EF4-FFF2-40B4-BE49-F238E27FC236}">
+                <a16:creationId xmlns:a16="http://schemas.microsoft.com/office/drawing/2014/main" id="{65533EAA-5F83-EA70-6747-5F625123CB00}"/>
+              </a:ext>
+            </a:extLst>
+          </p:cNvPr>
+          <p:cNvSpPr/>
+          <p:nvPr/>
+        </p:nvSpPr>
+        <p:spPr>
+          <a:xfrm>
+            <a:off x="3712914" y="2375331"/>
+            <a:ext cx="360000" cy="90000"/>
+          </a:xfrm>
+          <a:prstGeom prst="rect">
+            <a:avLst/>
+          </a:prstGeom>
+          <a:solidFill>
+            <a:srgbClr val="AD5252">
+              <a:alpha val="49804"/>
+            </a:srgbClr>
+          </a:solidFill>
+          <a:ln w="3175">
+            <a:solidFill>
+              <a:schemeClr val="bg1">
+                <a:lumMod val="50000"/>
+              </a:schemeClr>
+            </a:solidFill>
+          </a:ln>
+        </p:spPr>
+        <p:style>
+          <a:lnRef idx="2">
+            <a:schemeClr val="accent1">
+              <a:shade val="15000"/>
+            </a:schemeClr>
+          </a:lnRef>
+          <a:fillRef idx="1">
+            <a:schemeClr val="accent1"/>
+          </a:fillRef>
+          <a:effectRef idx="0">
+            <a:schemeClr val="accent1"/>
+          </a:effectRef>
+          <a:fontRef idx="minor">
+            <a:schemeClr val="lt1"/>
+          </a:fontRef>
+        </p:style>
+        <p:txBody>
+          <a:bodyPr rtlCol="0" anchor="ctr"/>
+          <a:lstStyle/>
+          <a:p>
+            <a:pPr algn="ctr"/>
+            <a:endParaRPr lang="en-GB">
+              <a:latin typeface="Calibri" panose="020F0502020204030204" pitchFamily="34" charset="0"/>
+              <a:cs typeface="Calibri" panose="020F0502020204030204" pitchFamily="34" charset="0"/>
+            </a:endParaRPr>
+          </a:p>
+        </p:txBody>
+      </p:sp>
+      <p:sp>
+        <p:nvSpPr>
+          <p:cNvPr id="141" name="Rectangle 140">
+            <a:extLst>
+              <a:ext uri="{FF2B5EF4-FFF2-40B4-BE49-F238E27FC236}">
+                <a16:creationId xmlns:a16="http://schemas.microsoft.com/office/drawing/2014/main" id="{545E5C43-F926-13EA-70BE-CA710E33D019}"/>
+              </a:ext>
+            </a:extLst>
+          </p:cNvPr>
+          <p:cNvSpPr/>
+          <p:nvPr/>
+        </p:nvSpPr>
+        <p:spPr>
+          <a:xfrm>
+            <a:off x="4906715" y="1566802"/>
+            <a:ext cx="360000" cy="90000"/>
+          </a:xfrm>
+          <a:prstGeom prst="rect">
+            <a:avLst/>
+          </a:prstGeom>
+          <a:solidFill>
+            <a:srgbClr val="96724C">
+              <a:alpha val="49804"/>
+            </a:srgbClr>
+          </a:solidFill>
+          <a:ln w="3175">
+            <a:solidFill>
+              <a:schemeClr val="bg1">
+                <a:lumMod val="50000"/>
+              </a:schemeClr>
+            </a:solidFill>
+          </a:ln>
+        </p:spPr>
+        <p:style>
+          <a:lnRef idx="2">
+            <a:schemeClr val="accent1">
+              <a:shade val="15000"/>
+            </a:schemeClr>
+          </a:lnRef>
+          <a:fillRef idx="1">
+            <a:schemeClr val="accent1"/>
+          </a:fillRef>
+          <a:effectRef idx="0">
+            <a:schemeClr val="accent1"/>
+          </a:effectRef>
+          <a:fontRef idx="minor">
+            <a:schemeClr val="lt1"/>
+          </a:fontRef>
+        </p:style>
+        <p:txBody>
+          <a:bodyPr rtlCol="0" anchor="ctr"/>
+          <a:lstStyle/>
+          <a:p>
+            <a:pPr algn="ctr"/>
+            <a:endParaRPr lang="en-GB" dirty="0">
+              <a:latin typeface="Calibri" panose="020F0502020204030204" pitchFamily="34" charset="0"/>
+              <a:cs typeface="Calibri" panose="020F0502020204030204" pitchFamily="34" charset="0"/>
+            </a:endParaRPr>
+          </a:p>
+        </p:txBody>
+      </p:sp>
+      <p:sp>
+        <p:nvSpPr>
+          <p:cNvPr id="142" name="Rectangle 141">
+            <a:extLst>
+              <a:ext uri="{FF2B5EF4-FFF2-40B4-BE49-F238E27FC236}">
+                <a16:creationId xmlns:a16="http://schemas.microsoft.com/office/drawing/2014/main" id="{4ABA71F5-F7CE-E653-5451-1F27E1EA51A4}"/>
+              </a:ext>
+            </a:extLst>
+          </p:cNvPr>
+          <p:cNvSpPr/>
+          <p:nvPr/>
+        </p:nvSpPr>
+        <p:spPr>
+          <a:xfrm>
+            <a:off x="3712914" y="1569252"/>
+            <a:ext cx="360000" cy="90000"/>
+          </a:xfrm>
+          <a:prstGeom prst="rect">
+            <a:avLst/>
+          </a:prstGeom>
+          <a:pattFill prst="wdDnDiag">
+            <a:fgClr>
+              <a:srgbClr val="21857A"/>
+            </a:fgClr>
+            <a:bgClr>
+              <a:schemeClr val="bg1"/>
+            </a:bgClr>
+          </a:pattFill>
+          <a:ln w="3175">
+            <a:solidFill>
+              <a:schemeClr val="bg1">
+                <a:lumMod val="50000"/>
+              </a:schemeClr>
+            </a:solidFill>
+          </a:ln>
+        </p:spPr>
+        <p:style>
+          <a:lnRef idx="2">
+            <a:schemeClr val="accent1">
+              <a:shade val="15000"/>
+            </a:schemeClr>
+          </a:lnRef>
+          <a:fillRef idx="1">
+            <a:schemeClr val="accent1"/>
+          </a:fillRef>
+          <a:effectRef idx="0">
+            <a:schemeClr val="accent1"/>
+          </a:effectRef>
+          <a:fontRef idx="minor">
+            <a:schemeClr val="lt1"/>
+          </a:fontRef>
+        </p:style>
+        <p:txBody>
+          <a:bodyPr rtlCol="0" anchor="ctr"/>
+          <a:lstStyle/>
+          <a:p>
+            <a:pPr algn="ctr"/>
+            <a:endParaRPr lang="en-GB" dirty="0">
+              <a:latin typeface="Calibri" panose="020F0502020204030204" pitchFamily="34" charset="0"/>
+              <a:cs typeface="Calibri" panose="020F0502020204030204" pitchFamily="34" charset="0"/>
+            </a:endParaRPr>
+          </a:p>
+        </p:txBody>
+      </p:sp>
+      <p:pic>
+        <p:nvPicPr>
+          <p:cNvPr id="143" name="Picture 142">
+            <a:extLst>
+              <a:ext uri="{FF2B5EF4-FFF2-40B4-BE49-F238E27FC236}">
+                <a16:creationId xmlns:a16="http://schemas.microsoft.com/office/drawing/2014/main" id="{B4B20B6B-3DAA-796C-8EA6-D7D94A189AD2}"/>
+              </a:ext>
+            </a:extLst>
+          </p:cNvPr>
+          <p:cNvPicPr>
+            <a:picLocks noChangeAspect="1"/>
+          </p:cNvPicPr>
+          <p:nvPr/>
+        </p:nvPicPr>
+        <p:blipFill>
+          <a:blip r:embed="rId2"/>
+          <a:stretch>
+            <a:fillRect/>
+          </a:stretch>
+        </p:blipFill>
+        <p:spPr>
+          <a:xfrm>
+            <a:off x="516369" y="980065"/>
+            <a:ext cx="1987063" cy="1079696"/>
+          </a:xfrm>
+          <a:prstGeom prst="rect">
+            <a:avLst/>
+          </a:prstGeom>
+        </p:spPr>
+      </p:pic>
+      <p:sp>
+        <p:nvSpPr>
+          <p:cNvPr id="144" name="TextBox 143">
+            <a:extLst>
+              <a:ext uri="{FF2B5EF4-FFF2-40B4-BE49-F238E27FC236}">
+                <a16:creationId xmlns:a16="http://schemas.microsoft.com/office/drawing/2014/main" id="{D0B60395-29A9-5583-BABB-33B236329A61}"/>
+              </a:ext>
+            </a:extLst>
+          </p:cNvPr>
+          <p:cNvSpPr txBox="1"/>
+          <p:nvPr/>
+        </p:nvSpPr>
+        <p:spPr>
+          <a:xfrm>
+            <a:off x="627017" y="1130446"/>
+            <a:ext cx="340242" cy="222175"/>
+          </a:xfrm>
+          <a:prstGeom prst="rect">
+            <a:avLst/>
+          </a:prstGeom>
+          <a:noFill/>
+        </p:spPr>
+        <p:txBody>
+          <a:bodyPr wrap="square" rtlCol="0">
+            <a:spAutoFit/>
+          </a:bodyPr>
+          <a:lstStyle/>
+          <a:p>
+            <a:pPr algn="ctr"/>
+            <a:r>
+              <a:rPr lang="en-US" sz="800" b="1" dirty="0">
+                <a:solidFill>
+                  <a:schemeClr val="tx1">
+                    <a:lumMod val="95000"/>
+                    <a:lumOff val="5000"/>
+                  </a:schemeClr>
+                </a:solidFill>
+                <a:latin typeface="Calibri Light" panose="020F0302020204030204" pitchFamily="34" charset="0"/>
+                <a:cs typeface="Calibri Light" panose="020F0302020204030204" pitchFamily="34" charset="0"/>
+              </a:rPr>
+              <a:t>CN</a:t>
+            </a:r>
+          </a:p>
+        </p:txBody>
+      </p:sp>
+      <p:sp>
+        <p:nvSpPr>
+          <p:cNvPr id="145" name="TextBox 144">
+            <a:extLst>
+              <a:ext uri="{FF2B5EF4-FFF2-40B4-BE49-F238E27FC236}">
+                <a16:creationId xmlns:a16="http://schemas.microsoft.com/office/drawing/2014/main" id="{88FD4609-03C7-48B1-EA84-375FFFEDBE06}"/>
+              </a:ext>
+            </a:extLst>
+          </p:cNvPr>
+          <p:cNvSpPr txBox="1"/>
+          <p:nvPr/>
+        </p:nvSpPr>
+        <p:spPr>
+          <a:xfrm>
+            <a:off x="1473765" y="985785"/>
+            <a:ext cx="1516062" cy="338554"/>
+          </a:xfrm>
+          <a:prstGeom prst="rect">
+            <a:avLst/>
+          </a:prstGeom>
+          <a:noFill/>
+        </p:spPr>
+        <p:txBody>
+          <a:bodyPr wrap="square" rtlCol="0">
+            <a:spAutoFit/>
+          </a:bodyPr>
+          <a:lstStyle/>
+          <a:p>
+            <a:r>
+              <a:rPr lang="en-US" sz="800" b="1" dirty="0">
+                <a:solidFill>
+                  <a:schemeClr val="tx1">
+                    <a:lumMod val="95000"/>
+                    <a:lumOff val="5000"/>
+                  </a:schemeClr>
+                </a:solidFill>
+                <a:latin typeface="Calibri" panose="020F0502020204030204" pitchFamily="34" charset="0"/>
+                <a:cs typeface="Calibri" panose="020F0502020204030204" pitchFamily="34" charset="0"/>
+              </a:rPr>
+              <a:t>(Moving) probability </a:t>
+            </a:r>
+          </a:p>
+          <a:p>
+            <a:r>
+              <a:rPr lang="en-US" sz="800" b="1" dirty="0">
+                <a:solidFill>
+                  <a:schemeClr val="tx1">
+                    <a:lumMod val="95000"/>
+                    <a:lumOff val="5000"/>
+                  </a:schemeClr>
+                </a:solidFill>
+                <a:latin typeface="Calibri" panose="020F0502020204030204" pitchFamily="34" charset="0"/>
+                <a:cs typeface="Calibri" panose="020F0502020204030204" pitchFamily="34" charset="0"/>
+              </a:rPr>
+              <a:t>threshold</a:t>
+            </a:r>
+          </a:p>
+        </p:txBody>
+      </p:sp>
+      <p:sp>
+        <p:nvSpPr>
+          <p:cNvPr id="146" name="TextBox 145">
+            <a:extLst>
+              <a:ext uri="{FF2B5EF4-FFF2-40B4-BE49-F238E27FC236}">
+                <a16:creationId xmlns:a16="http://schemas.microsoft.com/office/drawing/2014/main" id="{4C39D33D-2B26-F2D6-F8F4-09E6518093E9}"/>
+              </a:ext>
+            </a:extLst>
+          </p:cNvPr>
+          <p:cNvSpPr txBox="1"/>
+          <p:nvPr/>
+        </p:nvSpPr>
+        <p:spPr>
+          <a:xfrm>
+            <a:off x="-76100" y="1270921"/>
+            <a:ext cx="722453" cy="461665"/>
           </a:xfrm>
           <a:prstGeom prst="rect">
             <a:avLst/>
@@ -15660,17 +15056,53 @@
                 <a:latin typeface="Calibri Light" panose="020F0302020204030204" pitchFamily="34" charset="0"/>
                 <a:cs typeface="Calibri Light" panose="020F0302020204030204" pitchFamily="34" charset="0"/>
               </a:rPr>
-              <a:t>(a) Conceptual schematic for the contingency table definition for probabilistic forecasts</a:t>
+              <a:t>Distribution of </a:t>
+            </a:r>
+            <a:r>
+              <a:rPr lang="en-US" sz="800" b="1" dirty="0">
+                <a:solidFill>
+                  <a:schemeClr val="tx1">
+                    <a:lumMod val="95000"/>
+                    <a:lumOff val="5000"/>
+                  </a:schemeClr>
+                </a:solidFill>
+                <a:latin typeface="Calibri" panose="020F0502020204030204" pitchFamily="34" charset="0"/>
+                <a:cs typeface="Calibri" panose="020F0502020204030204" pitchFamily="34" charset="0"/>
+              </a:rPr>
+              <a:t>observed</a:t>
+            </a:r>
+            <a:r>
+              <a:rPr lang="en-US" sz="800" dirty="0">
+                <a:solidFill>
+                  <a:schemeClr val="tx1">
+                    <a:lumMod val="95000"/>
+                    <a:lumOff val="5000"/>
+                  </a:schemeClr>
+                </a:solidFill>
+                <a:latin typeface="Calibri Light" panose="020F0302020204030204" pitchFamily="34" charset="0"/>
+                <a:cs typeface="Calibri Light" panose="020F0302020204030204" pitchFamily="34" charset="0"/>
+              </a:rPr>
+              <a:t> </a:t>
+            </a:r>
+            <a:r>
+              <a:rPr lang="en-US" sz="800" dirty="0">
+                <a:solidFill>
+                  <a:srgbClr val="FF0066"/>
+                </a:solidFill>
+                <a:latin typeface="Calibri Light" panose="020F0302020204030204" pitchFamily="34" charset="0"/>
+                <a:cs typeface="Calibri Light" panose="020F0302020204030204" pitchFamily="34" charset="0"/>
+              </a:rPr>
+              <a:t>non-events</a:t>
             </a:r>
           </a:p>
         </p:txBody>
       </p:sp>
       <p:sp>
         <p:nvSpPr>
-          <p:cNvPr id="108" name="TextBox 107">
+          <p:cNvPr id="147" name="TextBox 146">
             <a:extLst>
               <a:ext uri="{FF2B5EF4-FFF2-40B4-BE49-F238E27FC236}">
-                <a16:creationId xmlns:a16="http://schemas.microsoft.com/office/drawing/2014/main" id="{748BB081-753E-2804-7F05-2F111730D61F}"/>
+                <a16:creationId xmlns:a16="http://schemas.microsoft.com/office/drawing/2014/main" id="{D4A499F2-3420-098E-60B9-2B0BAC6336D7}"/>
               </a:ext>
             </a:extLst>
           </p:cNvPr>
@@ -15679,7 +15111,786 @@
         </p:nvSpPr>
         <p:spPr>
           <a:xfrm>
-            <a:off x="-74557" y="2432378"/>
+            <a:off x="78925" y="921560"/>
+            <a:ext cx="546256" cy="215444"/>
+          </a:xfrm>
+          <a:prstGeom prst="rect">
+            <a:avLst/>
+          </a:prstGeom>
+          <a:noFill/>
+        </p:spPr>
+        <p:txBody>
+          <a:bodyPr wrap="square" rtlCol="0">
+            <a:spAutoFit/>
+          </a:bodyPr>
+          <a:lstStyle/>
+          <a:p>
+            <a:pPr algn="ctr"/>
+            <a:r>
+              <a:rPr lang="en-US" sz="800" dirty="0">
+                <a:solidFill>
+                  <a:schemeClr val="tx1">
+                    <a:lumMod val="95000"/>
+                    <a:lumOff val="5000"/>
+                  </a:schemeClr>
+                </a:solidFill>
+                <a:latin typeface="Calibri Light" panose="020F0302020204030204" pitchFamily="34" charset="0"/>
+                <a:cs typeface="Calibri Light" panose="020F0302020204030204" pitchFamily="34" charset="0"/>
+              </a:rPr>
+              <a:t>Density</a:t>
+            </a:r>
+          </a:p>
+        </p:txBody>
+      </p:sp>
+      <p:sp>
+        <p:nvSpPr>
+          <p:cNvPr id="148" name="TextBox 147">
+            <a:extLst>
+              <a:ext uri="{FF2B5EF4-FFF2-40B4-BE49-F238E27FC236}">
+                <a16:creationId xmlns:a16="http://schemas.microsoft.com/office/drawing/2014/main" id="{886A253C-800A-4473-19A4-5EC96B3D6DA8}"/>
+              </a:ext>
+            </a:extLst>
+          </p:cNvPr>
+          <p:cNvSpPr txBox="1"/>
+          <p:nvPr/>
+        </p:nvSpPr>
+        <p:spPr>
+          <a:xfrm>
+            <a:off x="386622" y="1867075"/>
+            <a:ext cx="340242" cy="222175"/>
+          </a:xfrm>
+          <a:prstGeom prst="rect">
+            <a:avLst/>
+          </a:prstGeom>
+          <a:noFill/>
+        </p:spPr>
+        <p:txBody>
+          <a:bodyPr wrap="square" rtlCol="0">
+            <a:spAutoFit/>
+          </a:bodyPr>
+          <a:lstStyle/>
+          <a:p>
+            <a:pPr algn="ctr"/>
+            <a:r>
+              <a:rPr lang="en-US" sz="800" dirty="0">
+                <a:solidFill>
+                  <a:schemeClr val="tx1">
+                    <a:lumMod val="95000"/>
+                    <a:lumOff val="5000"/>
+                  </a:schemeClr>
+                </a:solidFill>
+                <a:latin typeface="Calibri Light" panose="020F0302020204030204" pitchFamily="34" charset="0"/>
+                <a:cs typeface="Calibri Light" panose="020F0302020204030204" pitchFamily="34" charset="0"/>
+              </a:rPr>
+              <a:t>0</a:t>
+            </a:r>
+          </a:p>
+        </p:txBody>
+      </p:sp>
+      <p:sp>
+        <p:nvSpPr>
+          <p:cNvPr id="149" name="TextBox 148">
+            <a:extLst>
+              <a:ext uri="{FF2B5EF4-FFF2-40B4-BE49-F238E27FC236}">
+                <a16:creationId xmlns:a16="http://schemas.microsoft.com/office/drawing/2014/main" id="{31526C8F-65EA-4AE2-A6F7-E27D64A802EA}"/>
+              </a:ext>
+            </a:extLst>
+          </p:cNvPr>
+          <p:cNvSpPr txBox="1"/>
+          <p:nvPr/>
+        </p:nvSpPr>
+        <p:spPr>
+          <a:xfrm>
+            <a:off x="1264282" y="1867075"/>
+            <a:ext cx="410966" cy="215444"/>
+          </a:xfrm>
+          <a:prstGeom prst="rect">
+            <a:avLst/>
+          </a:prstGeom>
+          <a:noFill/>
+        </p:spPr>
+        <p:txBody>
+          <a:bodyPr wrap="square" rtlCol="0">
+            <a:spAutoFit/>
+          </a:bodyPr>
+          <a:lstStyle/>
+          <a:p>
+            <a:pPr algn="ctr"/>
+            <a:r>
+              <a:rPr lang="en-US" sz="800" dirty="0">
+                <a:solidFill>
+                  <a:schemeClr val="tx1">
+                    <a:lumMod val="95000"/>
+                    <a:lumOff val="5000"/>
+                  </a:schemeClr>
+                </a:solidFill>
+                <a:latin typeface="Calibri Light" panose="020F0302020204030204" pitchFamily="34" charset="0"/>
+                <a:cs typeface="Calibri Light" panose="020F0302020204030204" pitchFamily="34" charset="0"/>
+              </a:rPr>
+              <a:t>50</a:t>
+            </a:r>
+          </a:p>
+        </p:txBody>
+      </p:sp>
+      <p:sp>
+        <p:nvSpPr>
+          <p:cNvPr id="150" name="TextBox 149">
+            <a:extLst>
+              <a:ext uri="{FF2B5EF4-FFF2-40B4-BE49-F238E27FC236}">
+                <a16:creationId xmlns:a16="http://schemas.microsoft.com/office/drawing/2014/main" id="{2806A400-C100-A7CD-C682-9F752EF41C58}"/>
+              </a:ext>
+            </a:extLst>
+          </p:cNvPr>
+          <p:cNvSpPr txBox="1"/>
+          <p:nvPr/>
+        </p:nvSpPr>
+        <p:spPr>
+          <a:xfrm>
+            <a:off x="1079216" y="1419567"/>
+            <a:ext cx="340242" cy="222175"/>
+          </a:xfrm>
+          <a:prstGeom prst="rect">
+            <a:avLst/>
+          </a:prstGeom>
+          <a:noFill/>
+        </p:spPr>
+        <p:txBody>
+          <a:bodyPr wrap="square" rtlCol="0">
+            <a:spAutoFit/>
+          </a:bodyPr>
+          <a:lstStyle/>
+          <a:p>
+            <a:pPr algn="ctr"/>
+            <a:r>
+              <a:rPr lang="en-US" sz="800" b="1" dirty="0">
+                <a:solidFill>
+                  <a:schemeClr val="tx1">
+                    <a:lumMod val="95000"/>
+                    <a:lumOff val="5000"/>
+                  </a:schemeClr>
+                </a:solidFill>
+                <a:latin typeface="Calibri Light" panose="020F0302020204030204" pitchFamily="34" charset="0"/>
+                <a:cs typeface="Calibri Light" panose="020F0302020204030204" pitchFamily="34" charset="0"/>
+              </a:rPr>
+              <a:t>H</a:t>
+            </a:r>
+          </a:p>
+        </p:txBody>
+      </p:sp>
+      <p:cxnSp>
+        <p:nvCxnSpPr>
+          <p:cNvPr id="151" name="Straight Connector 150">
+            <a:extLst>
+              <a:ext uri="{FF2B5EF4-FFF2-40B4-BE49-F238E27FC236}">
+                <a16:creationId xmlns:a16="http://schemas.microsoft.com/office/drawing/2014/main" id="{3E482B56-9FB4-F1B3-4505-6BC8857291E6}"/>
+              </a:ext>
+            </a:extLst>
+          </p:cNvPr>
+          <p:cNvCxnSpPr>
+            <a:cxnSpLocks/>
+          </p:cNvCxnSpPr>
+          <p:nvPr/>
+        </p:nvCxnSpPr>
+        <p:spPr>
+          <a:xfrm>
+            <a:off x="921543" y="698290"/>
+            <a:ext cx="0" cy="1193088"/>
+          </a:xfrm>
+          <a:prstGeom prst="line">
+            <a:avLst/>
+          </a:prstGeom>
+          <a:ln w="12700">
+            <a:solidFill>
+              <a:schemeClr val="tx1"/>
+            </a:solidFill>
+            <a:prstDash val="lgDashDot"/>
+          </a:ln>
+        </p:spPr>
+        <p:style>
+          <a:lnRef idx="2">
+            <a:schemeClr val="accent1"/>
+          </a:lnRef>
+          <a:fillRef idx="0">
+            <a:schemeClr val="accent1"/>
+          </a:fillRef>
+          <a:effectRef idx="1">
+            <a:schemeClr val="accent1"/>
+          </a:effectRef>
+          <a:fontRef idx="minor">
+            <a:schemeClr val="tx1"/>
+          </a:fontRef>
+        </p:style>
+      </p:cxnSp>
+      <p:sp>
+        <p:nvSpPr>
+          <p:cNvPr id="152" name="TextBox 151">
+            <a:extLst>
+              <a:ext uri="{FF2B5EF4-FFF2-40B4-BE49-F238E27FC236}">
+                <a16:creationId xmlns:a16="http://schemas.microsoft.com/office/drawing/2014/main" id="{1B78CC36-883D-5957-AD5C-423198EA1845}"/>
+              </a:ext>
+            </a:extLst>
+          </p:cNvPr>
+          <p:cNvSpPr txBox="1"/>
+          <p:nvPr/>
+        </p:nvSpPr>
+        <p:spPr>
+          <a:xfrm>
+            <a:off x="917690" y="637463"/>
+            <a:ext cx="863944" cy="338554"/>
+          </a:xfrm>
+          <a:prstGeom prst="rect">
+            <a:avLst/>
+          </a:prstGeom>
+          <a:noFill/>
+        </p:spPr>
+        <p:txBody>
+          <a:bodyPr wrap="square" rtlCol="0">
+            <a:spAutoFit/>
+          </a:bodyPr>
+          <a:lstStyle/>
+          <a:p>
+            <a:r>
+              <a:rPr lang="en-US" sz="800" b="1" dirty="0">
+                <a:solidFill>
+                  <a:schemeClr val="tx1">
+                    <a:lumMod val="95000"/>
+                    <a:lumOff val="5000"/>
+                  </a:schemeClr>
+                </a:solidFill>
+                <a:latin typeface="Calibri" panose="020F0502020204030204" pitchFamily="34" charset="0"/>
+                <a:cs typeface="Calibri" panose="020F0502020204030204" pitchFamily="34" charset="0"/>
+              </a:rPr>
+              <a:t>Predicted</a:t>
+            </a:r>
+            <a:r>
+              <a:rPr lang="en-US" sz="800" dirty="0">
+                <a:solidFill>
+                  <a:schemeClr val="tx1">
+                    <a:lumMod val="95000"/>
+                    <a:lumOff val="5000"/>
+                  </a:schemeClr>
+                </a:solidFill>
+                <a:latin typeface="Calibri Light" panose="020F0302020204030204" pitchFamily="34" charset="0"/>
+                <a:cs typeface="Calibri Light" panose="020F0302020204030204" pitchFamily="34" charset="0"/>
+              </a:rPr>
+              <a:t> </a:t>
+            </a:r>
+          </a:p>
+          <a:p>
+            <a:r>
+              <a:rPr lang="en-US" sz="800" dirty="0">
+                <a:solidFill>
+                  <a:srgbClr val="33CC33"/>
+                </a:solidFill>
+                <a:latin typeface="Calibri Light" panose="020F0302020204030204" pitchFamily="34" charset="0"/>
+                <a:cs typeface="Calibri Light" panose="020F0302020204030204" pitchFamily="34" charset="0"/>
+              </a:rPr>
+              <a:t>yes-events</a:t>
+            </a:r>
+          </a:p>
+        </p:txBody>
+      </p:sp>
+      <p:sp>
+        <p:nvSpPr>
+          <p:cNvPr id="153" name="TextBox 152">
+            <a:extLst>
+              <a:ext uri="{FF2B5EF4-FFF2-40B4-BE49-F238E27FC236}">
+                <a16:creationId xmlns:a16="http://schemas.microsoft.com/office/drawing/2014/main" id="{E1F6673A-1B0C-E424-8F99-86B139BD4918}"/>
+              </a:ext>
+            </a:extLst>
+          </p:cNvPr>
+          <p:cNvSpPr txBox="1"/>
+          <p:nvPr/>
+        </p:nvSpPr>
+        <p:spPr>
+          <a:xfrm>
+            <a:off x="79060" y="637463"/>
+            <a:ext cx="863944" cy="338554"/>
+          </a:xfrm>
+          <a:prstGeom prst="rect">
+            <a:avLst/>
+          </a:prstGeom>
+          <a:noFill/>
+        </p:spPr>
+        <p:txBody>
+          <a:bodyPr wrap="square" rtlCol="0">
+            <a:spAutoFit/>
+          </a:bodyPr>
+          <a:lstStyle/>
+          <a:p>
+            <a:pPr algn="r"/>
+            <a:r>
+              <a:rPr lang="en-US" sz="800" b="1" dirty="0">
+                <a:solidFill>
+                  <a:schemeClr val="tx1">
+                    <a:lumMod val="95000"/>
+                    <a:lumOff val="5000"/>
+                  </a:schemeClr>
+                </a:solidFill>
+                <a:latin typeface="Calibri" panose="020F0502020204030204" pitchFamily="34" charset="0"/>
+                <a:cs typeface="Calibri" panose="020F0502020204030204" pitchFamily="34" charset="0"/>
+              </a:rPr>
+              <a:t>Predicted</a:t>
+            </a:r>
+            <a:r>
+              <a:rPr lang="en-US" sz="800" dirty="0">
+                <a:solidFill>
+                  <a:schemeClr val="tx1">
+                    <a:lumMod val="95000"/>
+                    <a:lumOff val="5000"/>
+                  </a:schemeClr>
+                </a:solidFill>
+                <a:latin typeface="Calibri Light" panose="020F0302020204030204" pitchFamily="34" charset="0"/>
+                <a:cs typeface="Calibri Light" panose="020F0302020204030204" pitchFamily="34" charset="0"/>
+              </a:rPr>
+              <a:t> </a:t>
+            </a:r>
+          </a:p>
+          <a:p>
+            <a:pPr algn="r"/>
+            <a:r>
+              <a:rPr lang="en-US" sz="800" dirty="0">
+                <a:solidFill>
+                  <a:srgbClr val="D6A300"/>
+                </a:solidFill>
+                <a:latin typeface="Calibri Light" panose="020F0302020204030204" pitchFamily="34" charset="0"/>
+                <a:cs typeface="Calibri Light" panose="020F0302020204030204" pitchFamily="34" charset="0"/>
+              </a:rPr>
+              <a:t>non-events</a:t>
+            </a:r>
+          </a:p>
+        </p:txBody>
+      </p:sp>
+      <p:sp>
+        <p:nvSpPr>
+          <p:cNvPr id="154" name="TextBox 153">
+            <a:extLst>
+              <a:ext uri="{FF2B5EF4-FFF2-40B4-BE49-F238E27FC236}">
+                <a16:creationId xmlns:a16="http://schemas.microsoft.com/office/drawing/2014/main" id="{7160EB10-8701-2F92-B2E3-BD9975B33EAB}"/>
+              </a:ext>
+            </a:extLst>
+          </p:cNvPr>
+          <p:cNvSpPr txBox="1"/>
+          <p:nvPr/>
+        </p:nvSpPr>
+        <p:spPr>
+          <a:xfrm>
+            <a:off x="1758067" y="1433170"/>
+            <a:ext cx="713654" cy="461665"/>
+          </a:xfrm>
+          <a:prstGeom prst="rect">
+            <a:avLst/>
+          </a:prstGeom>
+          <a:noFill/>
+        </p:spPr>
+        <p:txBody>
+          <a:bodyPr wrap="square" rtlCol="0">
+            <a:spAutoFit/>
+          </a:bodyPr>
+          <a:lstStyle/>
+          <a:p>
+            <a:r>
+              <a:rPr lang="en-US" sz="800" dirty="0">
+                <a:solidFill>
+                  <a:schemeClr val="tx1">
+                    <a:lumMod val="95000"/>
+                    <a:lumOff val="5000"/>
+                  </a:schemeClr>
+                </a:solidFill>
+                <a:latin typeface="Calibri Light" panose="020F0302020204030204" pitchFamily="34" charset="0"/>
+                <a:cs typeface="Calibri Light" panose="020F0302020204030204" pitchFamily="34" charset="0"/>
+              </a:rPr>
+              <a:t>Distribution of </a:t>
+            </a:r>
+            <a:r>
+              <a:rPr lang="en-US" sz="800" b="1" dirty="0">
+                <a:solidFill>
+                  <a:schemeClr val="tx1">
+                    <a:lumMod val="95000"/>
+                    <a:lumOff val="5000"/>
+                  </a:schemeClr>
+                </a:solidFill>
+                <a:latin typeface="Calibri" panose="020F0502020204030204" pitchFamily="34" charset="0"/>
+                <a:cs typeface="Calibri" panose="020F0502020204030204" pitchFamily="34" charset="0"/>
+              </a:rPr>
+              <a:t>observed</a:t>
+            </a:r>
+            <a:r>
+              <a:rPr lang="en-US" sz="800" dirty="0">
+                <a:solidFill>
+                  <a:schemeClr val="tx1">
+                    <a:lumMod val="95000"/>
+                    <a:lumOff val="5000"/>
+                  </a:schemeClr>
+                </a:solidFill>
+                <a:latin typeface="Calibri" panose="020F0502020204030204" pitchFamily="34" charset="0"/>
+                <a:cs typeface="Calibri" panose="020F0502020204030204" pitchFamily="34" charset="0"/>
+              </a:rPr>
+              <a:t> </a:t>
+            </a:r>
+            <a:r>
+              <a:rPr lang="en-US" sz="800" dirty="0">
+                <a:solidFill>
+                  <a:srgbClr val="0000FF"/>
+                </a:solidFill>
+                <a:latin typeface="Calibri Light" panose="020F0302020204030204" pitchFamily="34" charset="0"/>
+                <a:cs typeface="Calibri Light" panose="020F0302020204030204" pitchFamily="34" charset="0"/>
+              </a:rPr>
+              <a:t>yes-events</a:t>
+            </a:r>
+          </a:p>
+        </p:txBody>
+      </p:sp>
+      <p:sp>
+        <p:nvSpPr>
+          <p:cNvPr id="155" name="TextBox 154">
+            <a:extLst>
+              <a:ext uri="{FF2B5EF4-FFF2-40B4-BE49-F238E27FC236}">
+                <a16:creationId xmlns:a16="http://schemas.microsoft.com/office/drawing/2014/main" id="{C700B7F9-A72E-559F-D17A-BFCCF191350D}"/>
+              </a:ext>
+            </a:extLst>
+          </p:cNvPr>
+          <p:cNvSpPr txBox="1"/>
+          <p:nvPr/>
+        </p:nvSpPr>
+        <p:spPr>
+          <a:xfrm>
+            <a:off x="2212667" y="1867075"/>
+            <a:ext cx="527261" cy="215444"/>
+          </a:xfrm>
+          <a:prstGeom prst="rect">
+            <a:avLst/>
+          </a:prstGeom>
+          <a:noFill/>
+        </p:spPr>
+        <p:txBody>
+          <a:bodyPr wrap="square" rtlCol="0">
+            <a:spAutoFit/>
+          </a:bodyPr>
+          <a:lstStyle/>
+          <a:p>
+            <a:pPr algn="ctr"/>
+            <a:r>
+              <a:rPr lang="en-US" sz="800" dirty="0">
+                <a:solidFill>
+                  <a:schemeClr val="tx1">
+                    <a:lumMod val="95000"/>
+                    <a:lumOff val="5000"/>
+                  </a:schemeClr>
+                </a:solidFill>
+                <a:latin typeface="Calibri Light" panose="020F0302020204030204" pitchFamily="34" charset="0"/>
+                <a:cs typeface="Calibri Light" panose="020F0302020204030204" pitchFamily="34" charset="0"/>
+              </a:rPr>
+              <a:t>100 %</a:t>
+            </a:r>
+          </a:p>
+        </p:txBody>
+      </p:sp>
+      <p:sp>
+        <p:nvSpPr>
+          <p:cNvPr id="156" name="Rectangle 155">
+            <a:extLst>
+              <a:ext uri="{FF2B5EF4-FFF2-40B4-BE49-F238E27FC236}">
+                <a16:creationId xmlns:a16="http://schemas.microsoft.com/office/drawing/2014/main" id="{BA6B5728-94FF-1C7C-CD97-4D776F6436FF}"/>
+              </a:ext>
+            </a:extLst>
+          </p:cNvPr>
+          <p:cNvSpPr/>
+          <p:nvPr/>
+        </p:nvSpPr>
+        <p:spPr>
+          <a:xfrm>
+            <a:off x="702528" y="1973786"/>
+            <a:ext cx="539909" cy="130163"/>
+          </a:xfrm>
+          <a:prstGeom prst="rect">
+            <a:avLst/>
+          </a:prstGeom>
+          <a:solidFill>
+            <a:schemeClr val="bg1"/>
+          </a:solidFill>
+          <a:ln>
+            <a:noFill/>
+          </a:ln>
+          <a:effectLst/>
+        </p:spPr>
+        <p:style>
+          <a:lnRef idx="2">
+            <a:schemeClr val="accent1">
+              <a:shade val="15000"/>
+            </a:schemeClr>
+          </a:lnRef>
+          <a:fillRef idx="1">
+            <a:schemeClr val="accent1"/>
+          </a:fillRef>
+          <a:effectRef idx="0">
+            <a:schemeClr val="accent1"/>
+          </a:effectRef>
+          <a:fontRef idx="minor">
+            <a:schemeClr val="lt1"/>
+          </a:fontRef>
+        </p:style>
+        <p:txBody>
+          <a:bodyPr rtlCol="0" anchor="ctr"/>
+          <a:lstStyle/>
+          <a:p>
+            <a:pPr algn="ctr"/>
+            <a:endParaRPr lang="en-GB"/>
+          </a:p>
+        </p:txBody>
+      </p:sp>
+      <p:sp>
+        <p:nvSpPr>
+          <p:cNvPr id="157" name="TextBox 156">
+            <a:extLst>
+              <a:ext uri="{FF2B5EF4-FFF2-40B4-BE49-F238E27FC236}">
+                <a16:creationId xmlns:a16="http://schemas.microsoft.com/office/drawing/2014/main" id="{BE8CA2C2-9A67-A315-55CF-D3B76C5B4ABF}"/>
+              </a:ext>
+            </a:extLst>
+          </p:cNvPr>
+          <p:cNvSpPr txBox="1"/>
+          <p:nvPr/>
+        </p:nvSpPr>
+        <p:spPr>
+          <a:xfrm>
+            <a:off x="601204" y="1941180"/>
+            <a:ext cx="340242" cy="222175"/>
+          </a:xfrm>
+          <a:prstGeom prst="rect">
+            <a:avLst/>
+          </a:prstGeom>
+          <a:noFill/>
+        </p:spPr>
+        <p:txBody>
+          <a:bodyPr wrap="square" rtlCol="0">
+            <a:spAutoFit/>
+          </a:bodyPr>
+          <a:lstStyle/>
+          <a:p>
+            <a:pPr algn="ctr"/>
+            <a:r>
+              <a:rPr lang="en-US" sz="800" b="1" dirty="0">
+                <a:solidFill>
+                  <a:schemeClr val="tx1">
+                    <a:lumMod val="95000"/>
+                    <a:lumOff val="5000"/>
+                  </a:schemeClr>
+                </a:solidFill>
+                <a:latin typeface="Calibri Light" panose="020F0302020204030204" pitchFamily="34" charset="0"/>
+                <a:cs typeface="Calibri Light" panose="020F0302020204030204" pitchFamily="34" charset="0"/>
+              </a:rPr>
+              <a:t>M</a:t>
+            </a:r>
+          </a:p>
+        </p:txBody>
+      </p:sp>
+      <p:sp>
+        <p:nvSpPr>
+          <p:cNvPr id="158" name="TextBox 157">
+            <a:extLst>
+              <a:ext uri="{FF2B5EF4-FFF2-40B4-BE49-F238E27FC236}">
+                <a16:creationId xmlns:a16="http://schemas.microsoft.com/office/drawing/2014/main" id="{16D7E8D5-094D-0801-2477-66BD27467E33}"/>
+              </a:ext>
+            </a:extLst>
+          </p:cNvPr>
+          <p:cNvSpPr txBox="1"/>
+          <p:nvPr/>
+        </p:nvSpPr>
+        <p:spPr>
+          <a:xfrm>
+            <a:off x="909095" y="1937304"/>
+            <a:ext cx="340242" cy="222175"/>
+          </a:xfrm>
+          <a:prstGeom prst="rect">
+            <a:avLst/>
+          </a:prstGeom>
+          <a:noFill/>
+        </p:spPr>
+        <p:txBody>
+          <a:bodyPr wrap="square" rtlCol="0">
+            <a:spAutoFit/>
+          </a:bodyPr>
+          <a:lstStyle/>
+          <a:p>
+            <a:pPr algn="ctr"/>
+            <a:r>
+              <a:rPr lang="en-US" sz="800" b="1" dirty="0">
+                <a:solidFill>
+                  <a:schemeClr val="tx1">
+                    <a:lumMod val="95000"/>
+                    <a:lumOff val="5000"/>
+                  </a:schemeClr>
+                </a:solidFill>
+                <a:latin typeface="Calibri Light" panose="020F0302020204030204" pitchFamily="34" charset="0"/>
+                <a:cs typeface="Calibri Light" panose="020F0302020204030204" pitchFamily="34" charset="0"/>
+              </a:rPr>
+              <a:t>FA</a:t>
+            </a:r>
+          </a:p>
+        </p:txBody>
+      </p:sp>
+      <p:sp>
+        <p:nvSpPr>
+          <p:cNvPr id="159" name="TextBox 158">
+            <a:extLst>
+              <a:ext uri="{FF2B5EF4-FFF2-40B4-BE49-F238E27FC236}">
+                <a16:creationId xmlns:a16="http://schemas.microsoft.com/office/drawing/2014/main" id="{5E7D516C-6098-CA78-A68A-A60E91A03B8B}"/>
+              </a:ext>
+            </a:extLst>
+          </p:cNvPr>
+          <p:cNvSpPr txBox="1"/>
+          <p:nvPr/>
+        </p:nvSpPr>
+        <p:spPr>
+          <a:xfrm>
+            <a:off x="1086267" y="2032241"/>
+            <a:ext cx="1650154" cy="461665"/>
+          </a:xfrm>
+          <a:prstGeom prst="rect">
+            <a:avLst/>
+          </a:prstGeom>
+          <a:noFill/>
+        </p:spPr>
+        <p:txBody>
+          <a:bodyPr wrap="square" rtlCol="0">
+            <a:spAutoFit/>
+          </a:bodyPr>
+          <a:lstStyle/>
+          <a:p>
+            <a:pPr algn="r"/>
+            <a:r>
+              <a:rPr lang="en-US" sz="800" dirty="0">
+                <a:solidFill>
+                  <a:schemeClr val="tx1">
+                    <a:lumMod val="95000"/>
+                    <a:lumOff val="5000"/>
+                  </a:schemeClr>
+                </a:solidFill>
+                <a:latin typeface="Calibri Light" panose="020F0302020204030204" pitchFamily="34" charset="0"/>
+                <a:cs typeface="Calibri Light" panose="020F0302020204030204" pitchFamily="34" charset="0"/>
+              </a:rPr>
+              <a:t>Probabilities of exceeding the verifying rainfall threshold (defined as a percentile or return period)</a:t>
+            </a:r>
+          </a:p>
+        </p:txBody>
+      </p:sp>
+      <p:cxnSp>
+        <p:nvCxnSpPr>
+          <p:cNvPr id="160" name="Straight Arrow Connector 159">
+            <a:extLst>
+              <a:ext uri="{FF2B5EF4-FFF2-40B4-BE49-F238E27FC236}">
+                <a16:creationId xmlns:a16="http://schemas.microsoft.com/office/drawing/2014/main" id="{9F83BDF9-60EC-1D45-016B-A09DF554F68E}"/>
+              </a:ext>
+            </a:extLst>
+          </p:cNvPr>
+          <p:cNvCxnSpPr>
+            <a:cxnSpLocks/>
+          </p:cNvCxnSpPr>
+          <p:nvPr/>
+        </p:nvCxnSpPr>
+        <p:spPr>
+          <a:xfrm flipV="1">
+            <a:off x="919707" y="1143089"/>
+            <a:ext cx="601864" cy="0"/>
+          </a:xfrm>
+          <a:prstGeom prst="straightConnector1">
+            <a:avLst/>
+          </a:prstGeom>
+          <a:ln w="3175">
+            <a:solidFill>
+              <a:schemeClr val="tx1">
+                <a:lumMod val="95000"/>
+                <a:lumOff val="5000"/>
+              </a:schemeClr>
+            </a:solidFill>
+            <a:tailEnd type="triangle"/>
+          </a:ln>
+        </p:spPr>
+        <p:style>
+          <a:lnRef idx="2">
+            <a:schemeClr val="accent1"/>
+          </a:lnRef>
+          <a:fillRef idx="0">
+            <a:schemeClr val="accent1"/>
+          </a:fillRef>
+          <a:effectRef idx="1">
+            <a:schemeClr val="accent1"/>
+          </a:effectRef>
+          <a:fontRef idx="minor">
+            <a:schemeClr val="tx1"/>
+          </a:fontRef>
+        </p:style>
+      </p:cxnSp>
+      <p:sp>
+        <p:nvSpPr>
+          <p:cNvPr id="161" name="Oval 160">
+            <a:extLst>
+              <a:ext uri="{FF2B5EF4-FFF2-40B4-BE49-F238E27FC236}">
+                <a16:creationId xmlns:a16="http://schemas.microsoft.com/office/drawing/2014/main" id="{19C06D92-10F2-6629-738B-329DDCC22607}"/>
+              </a:ext>
+            </a:extLst>
+          </p:cNvPr>
+          <p:cNvSpPr/>
+          <p:nvPr/>
+        </p:nvSpPr>
+        <p:spPr>
+          <a:xfrm>
+            <a:off x="885284" y="1864693"/>
+            <a:ext cx="72000" cy="72000"/>
+          </a:xfrm>
+          <a:prstGeom prst="ellipse">
+            <a:avLst/>
+          </a:prstGeom>
+          <a:solidFill>
+            <a:schemeClr val="accent5">
+              <a:lumMod val="60000"/>
+              <a:lumOff val="40000"/>
+            </a:schemeClr>
+          </a:solidFill>
+          <a:ln>
+            <a:noFill/>
+          </a:ln>
+        </p:spPr>
+        <p:style>
+          <a:lnRef idx="2">
+            <a:schemeClr val="accent1">
+              <a:shade val="15000"/>
+            </a:schemeClr>
+          </a:lnRef>
+          <a:fillRef idx="1">
+            <a:schemeClr val="accent1"/>
+          </a:fillRef>
+          <a:effectRef idx="0">
+            <a:schemeClr val="accent1"/>
+          </a:effectRef>
+          <a:fontRef idx="minor">
+            <a:schemeClr val="lt1"/>
+          </a:fontRef>
+        </p:style>
+        <p:txBody>
+          <a:bodyPr rtlCol="0" anchor="ctr"/>
+          <a:lstStyle/>
+          <a:p>
+            <a:pPr algn="ctr"/>
+            <a:endParaRPr lang="en-GB"/>
+          </a:p>
+        </p:txBody>
+      </p:sp>
+      <p:sp>
+        <p:nvSpPr>
+          <p:cNvPr id="162" name="TextBox 161">
+            <a:extLst>
+              <a:ext uri="{FF2B5EF4-FFF2-40B4-BE49-F238E27FC236}">
+                <a16:creationId xmlns:a16="http://schemas.microsoft.com/office/drawing/2014/main" id="{8C2CF4A1-967C-6891-8D3E-E404ED5D4E82}"/>
+              </a:ext>
+            </a:extLst>
+          </p:cNvPr>
+          <p:cNvSpPr txBox="1"/>
+          <p:nvPr/>
+        </p:nvSpPr>
+        <p:spPr>
+          <a:xfrm>
+            <a:off x="-74557" y="378031"/>
             <a:ext cx="2940174" cy="215444"/>
           </a:xfrm>
           <a:prstGeom prst="rect">
@@ -15704,17 +15915,17 @@
                 <a:latin typeface="Calibri Light" panose="020F0302020204030204" pitchFamily="34" charset="0"/>
                 <a:cs typeface="Calibri Light" panose="020F0302020204030204" pitchFamily="34" charset="0"/>
               </a:rPr>
-              <a:t>(b) Contingency table for a given probability threshold</a:t>
+              <a:t>(a) Schematic of the contingency table for probabilistic forecasts</a:t>
             </a:r>
           </a:p>
         </p:txBody>
       </p:sp>
       <p:sp>
         <p:nvSpPr>
-          <p:cNvPr id="109" name="TextBox 108">
+          <p:cNvPr id="163" name="TextBox 162">
             <a:extLst>
               <a:ext uri="{FF2B5EF4-FFF2-40B4-BE49-F238E27FC236}">
-                <a16:creationId xmlns:a16="http://schemas.microsoft.com/office/drawing/2014/main" id="{0A54A4DA-82CE-F662-6560-4E4EB66C1AE8}"/>
+                <a16:creationId xmlns:a16="http://schemas.microsoft.com/office/drawing/2014/main" id="{748BB081-753E-2804-7F05-2F111730D61F}"/>
               </a:ext>
             </a:extLst>
           </p:cNvPr>
@@ -15723,8 +15934,8 @@
         </p:nvSpPr>
         <p:spPr>
           <a:xfrm>
-            <a:off x="2647521" y="2715105"/>
-            <a:ext cx="1492679" cy="215444"/>
+            <a:off x="3018850" y="378031"/>
+            <a:ext cx="2940174" cy="215444"/>
           </a:xfrm>
           <a:prstGeom prst="rect">
             <a:avLst/>
@@ -15748,11 +15959,57 @@
                 <a:latin typeface="Calibri Light" panose="020F0302020204030204" pitchFamily="34" charset="0"/>
                 <a:cs typeface="Calibri Light" panose="020F0302020204030204" pitchFamily="34" charset="0"/>
               </a:rPr>
-              <a:t>(c) Derived verification metrics</a:t>
+              <a:t>(b) 2x2 contingency table for a given probability threshold</a:t>
             </a:r>
           </a:p>
         </p:txBody>
       </p:sp>
+      <p:cxnSp>
+        <p:nvCxnSpPr>
+          <p:cNvPr id="164" name="Straight Connector 163">
+            <a:extLst>
+              <a:ext uri="{FF2B5EF4-FFF2-40B4-BE49-F238E27FC236}">
+                <a16:creationId xmlns:a16="http://schemas.microsoft.com/office/drawing/2014/main" id="{4EE81F27-A2FC-54A4-9BD3-2E705EEA2164}"/>
+              </a:ext>
+            </a:extLst>
+          </p:cNvPr>
+          <p:cNvCxnSpPr>
+            <a:cxnSpLocks/>
+          </p:cNvCxnSpPr>
+          <p:nvPr/>
+        </p:nvCxnSpPr>
+        <p:spPr>
+          <a:xfrm>
+            <a:off x="2877809" y="451183"/>
+            <a:ext cx="0" cy="2049574"/>
+          </a:xfrm>
+          <a:prstGeom prst="line">
+            <a:avLst/>
+          </a:prstGeom>
+          <a:ln w="3175">
+            <a:solidFill>
+              <a:schemeClr val="tx1">
+                <a:lumMod val="65000"/>
+                <a:lumOff val="35000"/>
+              </a:schemeClr>
+            </a:solidFill>
+          </a:ln>
+        </p:spPr>
+        <p:style>
+          <a:lnRef idx="2">
+            <a:schemeClr val="accent1"/>
+          </a:lnRef>
+          <a:fillRef idx="0">
+            <a:schemeClr val="accent1"/>
+          </a:fillRef>
+          <a:effectRef idx="1">
+            <a:schemeClr val="accent1"/>
+          </a:effectRef>
+          <a:fontRef idx="minor">
+            <a:schemeClr val="tx1"/>
+          </a:fontRef>
+        </p:style>
+      </p:cxnSp>
     </p:spTree>
     <p:extLst>
       <p:ext uri="{BB962C8B-B14F-4D97-AF65-F5344CB8AC3E}">

--- a/chapter_05/figures/contingency_table_prob_fc.pptx
+++ b/chapter_05/figures/contingency_table_prob_fc.pptx
@@ -2,12 +2,12 @@
 <file path=ppt/presentation.xml><?xml version="1.0" encoding="utf-8"?>
 <p:presentation xmlns:a="http://schemas.openxmlformats.org/drawingml/2006/main" xmlns:r="http://schemas.openxmlformats.org/officeDocument/2006/relationships" xmlns:p="http://schemas.openxmlformats.org/presentationml/2006/main" saveSubsetFonts="1">
   <p:sldMasterIdLst>
-    <p:sldMasterId id="2147483780" r:id="rId1"/>
+    <p:sldMasterId id="2147483804" r:id="rId1"/>
   </p:sldMasterIdLst>
   <p:sldIdLst>
     <p:sldId id="256" r:id="rId2"/>
   </p:sldIdLst>
-  <p:sldSz cx="5759450" cy="2519363"/>
+  <p:sldSz cx="5759450" cy="4427538"/>
   <p:notesSz cx="6858000" cy="9144000"/>
   <p:defaultTextStyle>
     <a:defPPr>
@@ -115,7 +115,7 @@
 <file path=ppt/revisionInfo.xml><?xml version="1.0" encoding="utf-8"?>
 <p1510:revInfo xmlns:a="http://schemas.openxmlformats.org/drawingml/2006/main" xmlns:r="http://schemas.openxmlformats.org/officeDocument/2006/relationships" xmlns:p1510="http://schemas.microsoft.com/office/powerpoint/2015/10/main">
   <p1510:revLst>
-    <p1510:client id="{8AA7C05A-A40B-47BE-AD88-53F73456539F}" v="16" dt="2026-01-22T23:34:23.477"/>
+    <p1510:client id="{8AA7C05A-A40B-47BE-AD88-53F73456539F}" v="32" dt="2026-01-23T00:37:55.151"/>
   </p1510:revLst>
 </p1510:revInfo>
 </file>
@@ -125,12 +125,12 @@
   <pc:docChgLst>
     <pc:chgData name="Fatima Pillosu" userId="a6295d4dc9e22643" providerId="LiveId" clId="{87453732-75AC-4426-B5D3-B7C69C2D4F54}"/>
     <pc:docChg chg="undo custSel modSld">
-      <pc:chgData name="Fatima Pillosu" userId="a6295d4dc9e22643" providerId="LiveId" clId="{87453732-75AC-4426-B5D3-B7C69C2D4F54}" dt="2026-01-22T23:34:52.514" v="1178" actId="1036"/>
+      <pc:chgData name="Fatima Pillosu" userId="a6295d4dc9e22643" providerId="LiveId" clId="{87453732-75AC-4426-B5D3-B7C69C2D4F54}" dt="2026-01-23T00:38:00.791" v="1786" actId="1035"/>
       <pc:docMkLst>
         <pc:docMk/>
       </pc:docMkLst>
       <pc:sldChg chg="addSp delSp modSp mod">
-        <pc:chgData name="Fatima Pillosu" userId="a6295d4dc9e22643" providerId="LiveId" clId="{87453732-75AC-4426-B5D3-B7C69C2D4F54}" dt="2026-01-22T23:34:52.514" v="1178" actId="1036"/>
+        <pc:chgData name="Fatima Pillosu" userId="a6295d4dc9e22643" providerId="LiveId" clId="{87453732-75AC-4426-B5D3-B7C69C2D4F54}" dt="2026-01-23T00:38:00.791" v="1786" actId="1035"/>
         <pc:sldMkLst>
           <pc:docMk/>
           <pc:sldMk cId="1573992039" sldId="256"/>
@@ -141,6 +141,14 @@
             <pc:docMk/>
             <pc:sldMk cId="1573992039" sldId="256"/>
             <ac:spMk id="2" creationId="{34FB978C-5A46-EB58-15FD-D1D6FE42766B}"/>
+          </ac:spMkLst>
+        </pc:spChg>
+        <pc:spChg chg="add mod">
+          <ac:chgData name="Fatima Pillosu" userId="a6295d4dc9e22643" providerId="LiveId" clId="{87453732-75AC-4426-B5D3-B7C69C2D4F54}" dt="2026-01-23T00:20:11.463" v="1180"/>
+          <ac:spMkLst>
+            <pc:docMk/>
+            <pc:sldMk cId="1573992039" sldId="256"/>
+            <ac:spMk id="2" creationId="{863D7830-3EC5-1488-4779-4B842624939D}"/>
           </ac:spMkLst>
         </pc:spChg>
         <pc:spChg chg="add del mod">
@@ -159,12 +167,28 @@
             <ac:spMk id="4" creationId="{863D7830-3EC5-1488-4779-4B842624939D}"/>
           </ac:spMkLst>
         </pc:spChg>
+        <pc:spChg chg="mod">
+          <ac:chgData name="Fatima Pillosu" userId="a6295d4dc9e22643" providerId="LiveId" clId="{87453732-75AC-4426-B5D3-B7C69C2D4F54}" dt="2026-01-23T00:28:33.856" v="1263" actId="207"/>
+          <ac:spMkLst>
+            <pc:docMk/>
+            <pc:sldMk cId="1573992039" sldId="256"/>
+            <ac:spMk id="8" creationId="{ADEEF2B1-EBC8-9F1F-6B1F-DD1E6A4ADDB0}"/>
+          </ac:spMkLst>
+        </pc:spChg>
         <pc:spChg chg="add del mod">
           <ac:chgData name="Fatima Pillosu" userId="a6295d4dc9e22643" providerId="LiveId" clId="{87453732-75AC-4426-B5D3-B7C69C2D4F54}" dt="2026-01-22T23:34:11.915" v="1169" actId="21"/>
           <ac:spMkLst>
             <pc:docMk/>
             <pc:sldMk cId="1573992039" sldId="256"/>
             <ac:spMk id="9" creationId="{ADEEF2B1-EBC8-9F1F-6B1F-DD1E6A4ADDB0}"/>
+          </ac:spMkLst>
+        </pc:spChg>
+        <pc:spChg chg="add del mod">
+          <ac:chgData name="Fatima Pillosu" userId="a6295d4dc9e22643" providerId="LiveId" clId="{87453732-75AC-4426-B5D3-B7C69C2D4F54}" dt="2026-01-23T00:37:43.961" v="1781" actId="21"/>
+          <ac:spMkLst>
+            <pc:docMk/>
+            <pc:sldMk cId="1573992039" sldId="256"/>
+            <ac:spMk id="9" creationId="{CDB02FB9-7686-55B5-2237-CE34FE7138F4}"/>
           </ac:spMkLst>
         </pc:spChg>
         <pc:spChg chg="add mod">
@@ -199,6 +223,14 @@
             <ac:spMk id="15" creationId="{31526C8F-65EA-4AE2-A6F7-E27D64A802EA}"/>
           </ac:spMkLst>
         </pc:spChg>
+        <pc:spChg chg="del">
+          <ac:chgData name="Fatima Pillosu" userId="a6295d4dc9e22643" providerId="LiveId" clId="{87453732-75AC-4426-B5D3-B7C69C2D4F54}" dt="2026-01-23T00:37:43.961" v="1781" actId="21"/>
+          <ac:spMkLst>
+            <pc:docMk/>
+            <pc:sldMk cId="1573992039" sldId="256"/>
+            <ac:spMk id="15" creationId="{871F6875-B35B-38C5-3426-33D516CADAB5}"/>
+          </ac:spMkLst>
+        </pc:spChg>
         <pc:spChg chg="add del mod">
           <ac:chgData name="Fatima Pillosu" userId="a6295d4dc9e22643" providerId="LiveId" clId="{87453732-75AC-4426-B5D3-B7C69C2D4F54}" dt="2026-01-22T22:57:57.325" v="214" actId="21"/>
           <ac:spMkLst>
@@ -208,11 +240,27 @@
           </ac:spMkLst>
         </pc:spChg>
         <pc:spChg chg="del">
+          <ac:chgData name="Fatima Pillosu" userId="a6295d4dc9e22643" providerId="LiveId" clId="{87453732-75AC-4426-B5D3-B7C69C2D4F54}" dt="2026-01-23T00:37:43.961" v="1781" actId="21"/>
+          <ac:spMkLst>
+            <pc:docMk/>
+            <pc:sldMk cId="1573992039" sldId="256"/>
+            <ac:spMk id="17" creationId="{1ACBC9A4-96CE-2145-4C13-43843EED1EEE}"/>
+          </ac:spMkLst>
+        </pc:spChg>
+        <pc:spChg chg="del">
           <ac:chgData name="Fatima Pillosu" userId="a6295d4dc9e22643" providerId="LiveId" clId="{87453732-75AC-4426-B5D3-B7C69C2D4F54}" dt="2026-01-22T22:57:57.325" v="214" actId="21"/>
           <ac:spMkLst>
             <pc:docMk/>
             <pc:sldMk cId="1573992039" sldId="256"/>
             <ac:spMk id="17" creationId="{CDB02FB9-7686-55B5-2237-CE34FE7138F4}"/>
+          </ac:spMkLst>
+        </pc:spChg>
+        <pc:spChg chg="del">
+          <ac:chgData name="Fatima Pillosu" userId="a6295d4dc9e22643" providerId="LiveId" clId="{87453732-75AC-4426-B5D3-B7C69C2D4F54}" dt="2026-01-23T00:37:43.961" v="1781" actId="21"/>
+          <ac:spMkLst>
+            <pc:docMk/>
+            <pc:sldMk cId="1573992039" sldId="256"/>
+            <ac:spMk id="18" creationId="{5CCEEB50-0EB3-291D-2911-B86403C69D4E}"/>
           </ac:spMkLst>
         </pc:spChg>
         <pc:spChg chg="mod topLvl">
@@ -271,12 +319,28 @@
             <ac:spMk id="25" creationId="{A09387BF-360E-1373-B4E2-484CDF5B6943}"/>
           </ac:spMkLst>
         </pc:spChg>
+        <pc:spChg chg="add del mod">
+          <ac:chgData name="Fatima Pillosu" userId="a6295d4dc9e22643" providerId="LiveId" clId="{87453732-75AC-4426-B5D3-B7C69C2D4F54}" dt="2026-01-23T00:37:43.961" v="1781" actId="21"/>
+          <ac:spMkLst>
+            <pc:docMk/>
+            <pc:sldMk cId="1573992039" sldId="256"/>
+            <ac:spMk id="25" creationId="{F3106249-1C45-1C12-2453-07133FF1CD86}"/>
+          </ac:spMkLst>
+        </pc:spChg>
         <pc:spChg chg="mod">
           <ac:chgData name="Fatima Pillosu" userId="a6295d4dc9e22643" providerId="LiveId" clId="{87453732-75AC-4426-B5D3-B7C69C2D4F54}" dt="2026-01-22T22:56:44.430" v="208" actId="164"/>
           <ac:spMkLst>
             <pc:docMk/>
             <pc:sldMk cId="1573992039" sldId="256"/>
             <ac:spMk id="26" creationId="{E1F6673A-1B0C-E424-8F99-86B139BD4918}"/>
+          </ac:spMkLst>
+        </pc:spChg>
+        <pc:spChg chg="add del mod">
+          <ac:chgData name="Fatima Pillosu" userId="a6295d4dc9e22643" providerId="LiveId" clId="{87453732-75AC-4426-B5D3-B7C69C2D4F54}" dt="2026-01-23T00:37:43.961" v="1781" actId="21"/>
+          <ac:spMkLst>
+            <pc:docMk/>
+            <pc:sldMk cId="1573992039" sldId="256"/>
+            <ac:spMk id="27" creationId="{2D87FE8A-4BD4-D2C0-4981-4C00E52C4C21}"/>
           </ac:spMkLst>
         </pc:spChg>
         <pc:spChg chg="mod">
@@ -312,11 +376,35 @@
           </ac:spMkLst>
         </pc:spChg>
         <pc:spChg chg="mod">
+          <ac:chgData name="Fatima Pillosu" userId="a6295d4dc9e22643" providerId="LiveId" clId="{87453732-75AC-4426-B5D3-B7C69C2D4F54}" dt="2026-01-23T00:29:24.574" v="1272" actId="207"/>
+          <ac:spMkLst>
+            <pc:docMk/>
+            <pc:sldMk cId="1573992039" sldId="256"/>
+            <ac:spMk id="30" creationId="{4ABA71F5-F7CE-E653-5451-1F27E1EA51A4}"/>
+          </ac:spMkLst>
+        </pc:spChg>
+        <pc:spChg chg="mod">
           <ac:chgData name="Fatima Pillosu" userId="a6295d4dc9e22643" providerId="LiveId" clId="{87453732-75AC-4426-B5D3-B7C69C2D4F54}" dt="2026-01-22T22:57:26.135" v="211" actId="164"/>
           <ac:spMkLst>
             <pc:docMk/>
             <pc:sldMk cId="1573992039" sldId="256"/>
             <ac:spMk id="31" creationId="{5CCEEB50-0EB3-291D-2911-B86403C69D4E}"/>
+          </ac:spMkLst>
+        </pc:spChg>
+        <pc:spChg chg="del">
+          <ac:chgData name="Fatima Pillosu" userId="a6295d4dc9e22643" providerId="LiveId" clId="{87453732-75AC-4426-B5D3-B7C69C2D4F54}" dt="2026-01-23T00:37:43.961" v="1781" actId="21"/>
+          <ac:spMkLst>
+            <pc:docMk/>
+            <pc:sldMk cId="1573992039" sldId="256"/>
+            <ac:spMk id="32" creationId="{D0B60395-29A9-5583-BABB-33B236329A61}"/>
+          </ac:spMkLst>
+        </pc:spChg>
+        <pc:spChg chg="add mod">
+          <ac:chgData name="Fatima Pillosu" userId="a6295d4dc9e22643" providerId="LiveId" clId="{87453732-75AC-4426-B5D3-B7C69C2D4F54}" dt="2026-01-23T00:20:11.463" v="1180"/>
+          <ac:spMkLst>
+            <pc:docMk/>
+            <pc:sldMk cId="1573992039" sldId="256"/>
+            <ac:spMk id="34" creationId="{4C39D33D-2B26-F2D6-F8F4-09E6518093E9}"/>
           </ac:spMkLst>
         </pc:spChg>
         <pc:spChg chg="mod">
@@ -359,6 +447,14 @@
             <ac:spMk id="37" creationId="{4C39D33D-2B26-F2D6-F8F4-09E6518093E9}"/>
           </ac:spMkLst>
         </pc:spChg>
+        <pc:spChg chg="add mod">
+          <ac:chgData name="Fatima Pillosu" userId="a6295d4dc9e22643" providerId="LiveId" clId="{87453732-75AC-4426-B5D3-B7C69C2D4F54}" dt="2026-01-23T00:20:11.463" v="1180"/>
+          <ac:spMkLst>
+            <pc:docMk/>
+            <pc:sldMk cId="1573992039" sldId="256"/>
+            <ac:spMk id="38" creationId="{2806A400-C100-A7CD-C682-9F752EF41C58}"/>
+          </ac:spMkLst>
+        </pc:spChg>
         <pc:spChg chg="del mod topLvl">
           <ac:chgData name="Fatima Pillosu" userId="a6295d4dc9e22643" providerId="LiveId" clId="{87453732-75AC-4426-B5D3-B7C69C2D4F54}" dt="2026-01-22T23:34:11.915" v="1169" actId="21"/>
           <ac:spMkLst>
@@ -391,6 +487,14 @@
             <ac:spMk id="39" creationId="{E3F5F678-30B9-E5A6-EDA8-349820A25D9E}"/>
           </ac:spMkLst>
         </pc:spChg>
+        <pc:spChg chg="add del mod">
+          <ac:chgData name="Fatima Pillosu" userId="a6295d4dc9e22643" providerId="LiveId" clId="{87453732-75AC-4426-B5D3-B7C69C2D4F54}" dt="2026-01-23T00:37:43.961" v="1781" actId="21"/>
+          <ac:spMkLst>
+            <pc:docMk/>
+            <pc:sldMk cId="1573992039" sldId="256"/>
+            <ac:spMk id="40" creationId="{1B78CC36-883D-5957-AD5C-423198EA1845}"/>
+          </ac:spMkLst>
+        </pc:spChg>
         <pc:spChg chg="mod topLvl">
           <ac:chgData name="Fatima Pillosu" userId="a6295d4dc9e22643" providerId="LiveId" clId="{87453732-75AC-4426-B5D3-B7C69C2D4F54}" dt="2026-01-22T23:33:12.635" v="1145" actId="165"/>
           <ac:spMkLst>
@@ -413,6 +517,14 @@
             <pc:docMk/>
             <pc:sldMk cId="1573992039" sldId="256"/>
             <ac:spMk id="41" creationId="{2806A400-C100-A7CD-C682-9F752EF41C58}"/>
+          </ac:spMkLst>
+        </pc:spChg>
+        <pc:spChg chg="add mod">
+          <ac:chgData name="Fatima Pillosu" userId="a6295d4dc9e22643" providerId="LiveId" clId="{87453732-75AC-4426-B5D3-B7C69C2D4F54}" dt="2026-01-23T00:20:11.463" v="1180"/>
+          <ac:spMkLst>
+            <pc:docMk/>
+            <pc:sldMk cId="1573992039" sldId="256"/>
+            <ac:spMk id="41" creationId="{E1F6673A-1B0C-E424-8F99-86B139BD4918}"/>
           </ac:spMkLst>
         </pc:spChg>
         <pc:spChg chg="del">
@@ -463,12 +575,28 @@
             <ac:spMk id="45" creationId="{7160EB10-8701-2F92-B2E3-BD9975B33EAB}"/>
           </ac:spMkLst>
         </pc:spChg>
+        <pc:spChg chg="add mod">
+          <ac:chgData name="Fatima Pillosu" userId="a6295d4dc9e22643" providerId="LiveId" clId="{87453732-75AC-4426-B5D3-B7C69C2D4F54}" dt="2026-01-23T00:20:11.463" v="1180"/>
+          <ac:spMkLst>
+            <pc:docMk/>
+            <pc:sldMk cId="1573992039" sldId="256"/>
+            <ac:spMk id="45" creationId="{BE8CA2C2-9A67-A315-55CF-D3B76C5B4ABF}"/>
+          </ac:spMkLst>
+        </pc:spChg>
         <pc:spChg chg="mod topLvl">
           <ac:chgData name="Fatima Pillosu" userId="a6295d4dc9e22643" providerId="LiveId" clId="{87453732-75AC-4426-B5D3-B7C69C2D4F54}" dt="2026-01-22T23:33:12.635" v="1145" actId="165"/>
           <ac:spMkLst>
             <pc:docMk/>
             <pc:sldMk cId="1573992039" sldId="256"/>
             <ac:spMk id="46" creationId="{C700B7F9-A72E-559F-D17A-BFCCF191350D}"/>
+          </ac:spMkLst>
+        </pc:spChg>
+        <pc:spChg chg="add del mod">
+          <ac:chgData name="Fatima Pillosu" userId="a6295d4dc9e22643" providerId="LiveId" clId="{87453732-75AC-4426-B5D3-B7C69C2D4F54}" dt="2026-01-23T00:37:43.961" v="1781" actId="21"/>
+          <ac:spMkLst>
+            <pc:docMk/>
+            <pc:sldMk cId="1573992039" sldId="256"/>
+            <ac:spMk id="47" creationId="{5E7D516C-6098-CA78-A68A-A60E91A03B8B}"/>
           </ac:spMkLst>
         </pc:spChg>
         <pc:spChg chg="del mod">
@@ -519,12 +647,28 @@
             <ac:spMk id="50" creationId="{16D7E8D5-094D-0801-2477-66BD27467E33}"/>
           </ac:spMkLst>
         </pc:spChg>
+        <pc:spChg chg="del">
+          <ac:chgData name="Fatima Pillosu" userId="a6295d4dc9e22643" providerId="LiveId" clId="{87453732-75AC-4426-B5D3-B7C69C2D4F54}" dt="2026-01-23T00:37:43.961" v="1781" actId="21"/>
+          <ac:spMkLst>
+            <pc:docMk/>
+            <pc:sldMk cId="1573992039" sldId="256"/>
+            <ac:spMk id="51" creationId="{748BB081-753E-2804-7F05-2F111730D61F}"/>
+          </ac:spMkLst>
+        </pc:spChg>
         <pc:spChg chg="mod">
           <ac:chgData name="Fatima Pillosu" userId="a6295d4dc9e22643" providerId="LiveId" clId="{87453732-75AC-4426-B5D3-B7C69C2D4F54}" dt="2026-01-22T23:32:53.972" v="1143" actId="554"/>
           <ac:spMkLst>
             <pc:docMk/>
             <pc:sldMk cId="1573992039" sldId="256"/>
             <ac:spMk id="53" creationId="{8C2CF4A1-967C-6891-8D3E-E404ED5D4E82}"/>
+          </ac:spMkLst>
+        </pc:spChg>
+        <pc:spChg chg="add mod">
+          <ac:chgData name="Fatima Pillosu" userId="a6295d4dc9e22643" providerId="LiveId" clId="{87453732-75AC-4426-B5D3-B7C69C2D4F54}" dt="2026-01-23T00:37:31.935" v="1778" actId="14100"/>
+          <ac:spMkLst>
+            <pc:docMk/>
+            <pc:sldMk cId="1573992039" sldId="256"/>
+            <ac:spMk id="53" creationId="{B9DACAD8-B9E0-E96C-4ACB-CB40C5842B50}"/>
           </ac:spMkLst>
         </pc:spChg>
         <pc:spChg chg="mod">
@@ -543,6 +687,22 @@
             <ac:spMk id="55" creationId="{863D7830-3EC5-1488-4779-4B842624939D}"/>
           </ac:spMkLst>
         </pc:spChg>
+        <pc:spChg chg="add mod">
+          <ac:chgData name="Fatima Pillosu" userId="a6295d4dc9e22643" providerId="LiveId" clId="{87453732-75AC-4426-B5D3-B7C69C2D4F54}" dt="2026-01-23T00:36:41.724" v="1701" actId="1037"/>
+          <ac:spMkLst>
+            <pc:docMk/>
+            <pc:sldMk cId="1573992039" sldId="256"/>
+            <ac:spMk id="59" creationId="{7F9A54EC-7677-98F3-A2A9-8D12ECCFFC18}"/>
+          </ac:spMkLst>
+        </pc:spChg>
+        <pc:spChg chg="add mod">
+          <ac:chgData name="Fatima Pillosu" userId="a6295d4dc9e22643" providerId="LiveId" clId="{87453732-75AC-4426-B5D3-B7C69C2D4F54}" dt="2026-01-23T00:36:30.315" v="1686" actId="1038"/>
+          <ac:spMkLst>
+            <pc:docMk/>
+            <pc:sldMk cId="1573992039" sldId="256"/>
+            <ac:spMk id="60" creationId="{69264F16-B69D-6B4B-97B4-69D4F6D781F7}"/>
+          </ac:spMkLst>
+        </pc:spChg>
         <pc:spChg chg="del">
           <ac:chgData name="Fatima Pillosu" userId="a6295d4dc9e22643" providerId="LiveId" clId="{87453732-75AC-4426-B5D3-B7C69C2D4F54}" dt="2026-01-22T23:30:47.467" v="1075" actId="21"/>
           <ac:spMkLst>
@@ -557,6 +717,22 @@
             <pc:docMk/>
             <pc:sldMk cId="1573992039" sldId="256"/>
             <ac:spMk id="61" creationId="{ADEEF2B1-EBC8-9F1F-6B1F-DD1E6A4ADDB0}"/>
+          </ac:spMkLst>
+        </pc:spChg>
+        <pc:spChg chg="add del mod">
+          <ac:chgData name="Fatima Pillosu" userId="a6295d4dc9e22643" providerId="LiveId" clId="{87453732-75AC-4426-B5D3-B7C69C2D4F54}" dt="2026-01-23T00:32:25.220" v="1469"/>
+          <ac:spMkLst>
+            <pc:docMk/>
+            <pc:sldMk cId="1573992039" sldId="256"/>
+            <ac:spMk id="61" creationId="{F5EC5E94-7B9D-1D9C-809B-B2AFC4F6F305}"/>
+          </ac:spMkLst>
+        </pc:spChg>
+        <pc:spChg chg="add mod">
+          <ac:chgData name="Fatima Pillosu" userId="a6295d4dc9e22643" providerId="LiveId" clId="{87453732-75AC-4426-B5D3-B7C69C2D4F54}" dt="2026-01-23T00:36:37.550" v="1689" actId="1038"/>
+          <ac:spMkLst>
+            <pc:docMk/>
+            <pc:sldMk cId="1573992039" sldId="256"/>
+            <ac:spMk id="62" creationId="{7B459E9B-BC54-D128-00BB-242594E7828F}"/>
           </ac:spMkLst>
         </pc:spChg>
         <pc:spChg chg="del mod">
@@ -575,6 +751,14 @@
             <ac:spMk id="64" creationId="{F1CE41FF-7B22-BB87-5437-9C5A6D9C40EA}"/>
           </ac:spMkLst>
         </pc:spChg>
+        <pc:spChg chg="add mod">
+          <ac:chgData name="Fatima Pillosu" userId="a6295d4dc9e22643" providerId="LiveId" clId="{87453732-75AC-4426-B5D3-B7C69C2D4F54}" dt="2026-01-23T00:36:25.910" v="1675" actId="1038"/>
+          <ac:spMkLst>
+            <pc:docMk/>
+            <pc:sldMk cId="1573992039" sldId="256"/>
+            <ac:spMk id="65" creationId="{1398DA6C-3D5E-DD45-9EEB-E8E386580228}"/>
+          </ac:spMkLst>
+        </pc:spChg>
         <pc:spChg chg="del mod">
           <ac:chgData name="Fatima Pillosu" userId="a6295d4dc9e22643" providerId="LiveId" clId="{87453732-75AC-4426-B5D3-B7C69C2D4F54}" dt="2026-01-22T23:30:47.467" v="1075" actId="21"/>
           <ac:spMkLst>
@@ -583,12 +767,28 @@
             <ac:spMk id="65" creationId="{3CDA144B-1F01-F0CC-A493-5631BE7BE96B}"/>
           </ac:spMkLst>
         </pc:spChg>
+        <pc:spChg chg="add mod">
+          <ac:chgData name="Fatima Pillosu" userId="a6295d4dc9e22643" providerId="LiveId" clId="{87453732-75AC-4426-B5D3-B7C69C2D4F54}" dt="2026-01-23T00:36:18.900" v="1661" actId="12789"/>
+          <ac:spMkLst>
+            <pc:docMk/>
+            <pc:sldMk cId="1573992039" sldId="256"/>
+            <ac:spMk id="66" creationId="{8E734807-A9EC-31E5-F187-A3C719CDF111}"/>
+          </ac:spMkLst>
+        </pc:spChg>
         <pc:spChg chg="del mod">
           <ac:chgData name="Fatima Pillosu" userId="a6295d4dc9e22643" providerId="LiveId" clId="{87453732-75AC-4426-B5D3-B7C69C2D4F54}" dt="2026-01-22T23:30:47.467" v="1075" actId="21"/>
           <ac:spMkLst>
             <pc:docMk/>
             <pc:sldMk cId="1573992039" sldId="256"/>
             <ac:spMk id="66" creationId="{9D4C28E0-97DE-3DC8-9344-F610BE62157D}"/>
+          </ac:spMkLst>
+        </pc:spChg>
+        <pc:spChg chg="add del">
+          <ac:chgData name="Fatima Pillosu" userId="a6295d4dc9e22643" providerId="LiveId" clId="{87453732-75AC-4426-B5D3-B7C69C2D4F54}" dt="2026-01-23T00:37:42.111" v="1780" actId="478"/>
+          <ac:spMkLst>
+            <pc:docMk/>
+            <pc:sldMk cId="1573992039" sldId="256"/>
+            <ac:spMk id="67" creationId="{60494B35-9ED6-E052-6C41-849A1F811BF5}"/>
           </ac:spMkLst>
         </pc:spChg>
         <pc:spChg chg="mod">
@@ -613,6 +813,22 @@
             <pc:docMk/>
             <pc:sldMk cId="1573992039" sldId="256"/>
             <ac:spMk id="76" creationId="{CDF5D99F-239B-7286-E705-43476984C1FD}"/>
+          </ac:spMkLst>
+        </pc:spChg>
+        <pc:spChg chg="add mod">
+          <ac:chgData name="Fatima Pillosu" userId="a6295d4dc9e22643" providerId="LiveId" clId="{87453732-75AC-4426-B5D3-B7C69C2D4F54}" dt="2026-01-23T00:37:55.151" v="1782"/>
+          <ac:spMkLst>
+            <pc:docMk/>
+            <pc:sldMk cId="1573992039" sldId="256"/>
+            <ac:spMk id="78" creationId="{F1CE41FF-7B22-BB87-5437-9C5A6D9C40EA}"/>
+          </ac:spMkLst>
+        </pc:spChg>
+        <pc:spChg chg="add mod">
+          <ac:chgData name="Fatima Pillosu" userId="a6295d4dc9e22643" providerId="LiveId" clId="{87453732-75AC-4426-B5D3-B7C69C2D4F54}" dt="2026-01-23T00:37:55.151" v="1782"/>
+          <ac:spMkLst>
+            <pc:docMk/>
+            <pc:sldMk cId="1573992039" sldId="256"/>
+            <ac:spMk id="79" creationId="{3CDA144B-1F01-F0CC-A493-5631BE7BE96B}"/>
           </ac:spMkLst>
         </pc:spChg>
         <pc:spChg chg="del mod">
@@ -655,6 +871,14 @@
             <ac:spMk id="90" creationId="{88FD4609-03C7-48B1-EA84-375FFFEDBE06}"/>
           </ac:spMkLst>
         </pc:spChg>
+        <pc:spChg chg="add mod">
+          <ac:chgData name="Fatima Pillosu" userId="a6295d4dc9e22643" providerId="LiveId" clId="{87453732-75AC-4426-B5D3-B7C69C2D4F54}" dt="2026-01-23T00:37:55.151" v="1782"/>
+          <ac:spMkLst>
+            <pc:docMk/>
+            <pc:sldMk cId="1573992039" sldId="256"/>
+            <ac:spMk id="91" creationId="{FEE84F7D-562E-3E17-3F19-517232627412}"/>
+          </ac:spMkLst>
+        </pc:spChg>
         <pc:spChg chg="mod">
           <ac:chgData name="Fatima Pillosu" userId="a6295d4dc9e22643" providerId="LiveId" clId="{87453732-75AC-4426-B5D3-B7C69C2D4F54}" dt="2026-01-22T22:58:11.774" v="215"/>
           <ac:spMkLst>
@@ -679,12 +903,44 @@
             <ac:spMk id="95" creationId="{2806A400-C100-A7CD-C682-9F752EF41C58}"/>
           </ac:spMkLst>
         </pc:spChg>
+        <pc:spChg chg="add mod">
+          <ac:chgData name="Fatima Pillosu" userId="a6295d4dc9e22643" providerId="LiveId" clId="{87453732-75AC-4426-B5D3-B7C69C2D4F54}" dt="2026-01-23T00:37:55.151" v="1782"/>
+          <ac:spMkLst>
+            <pc:docMk/>
+            <pc:sldMk cId="1573992039" sldId="256"/>
+            <ac:spMk id="95" creationId="{65533EAA-5F83-EA70-6747-5F625123CB00}"/>
+          </ac:spMkLst>
+        </pc:spChg>
+        <pc:spChg chg="add mod">
+          <ac:chgData name="Fatima Pillosu" userId="a6295d4dc9e22643" providerId="LiveId" clId="{87453732-75AC-4426-B5D3-B7C69C2D4F54}" dt="2026-01-23T00:37:55.151" v="1782"/>
+          <ac:spMkLst>
+            <pc:docMk/>
+            <pc:sldMk cId="1573992039" sldId="256"/>
+            <ac:spMk id="99" creationId="{88FD4609-03C7-48B1-EA84-375FFFEDBE06}"/>
+          </ac:spMkLst>
+        </pc:spChg>
+        <pc:spChg chg="add mod">
+          <ac:chgData name="Fatima Pillosu" userId="a6295d4dc9e22643" providerId="LiveId" clId="{87453732-75AC-4426-B5D3-B7C69C2D4F54}" dt="2026-01-23T00:37:55.151" v="1782"/>
+          <ac:spMkLst>
+            <pc:docMk/>
+            <pc:sldMk cId="1573992039" sldId="256"/>
+            <ac:spMk id="104" creationId="{2806A400-C100-A7CD-C682-9F752EF41C58}"/>
+          </ac:spMkLst>
+        </pc:spChg>
         <pc:spChg chg="mod">
           <ac:chgData name="Fatima Pillosu" userId="a6295d4dc9e22643" providerId="LiveId" clId="{87453732-75AC-4426-B5D3-B7C69C2D4F54}" dt="2026-01-22T23:14:40.498" v="1030" actId="1036"/>
           <ac:spMkLst>
             <pc:docMk/>
             <pc:sldMk cId="1573992039" sldId="256"/>
             <ac:spMk id="104" creationId="{5E7D516C-6098-CA78-A68A-A60E91A03B8B}"/>
+          </ac:spMkLst>
+        </pc:spChg>
+        <pc:spChg chg="add mod">
+          <ac:chgData name="Fatima Pillosu" userId="a6295d4dc9e22643" providerId="LiveId" clId="{87453732-75AC-4426-B5D3-B7C69C2D4F54}" dt="2026-01-23T00:37:55.151" v="1782"/>
+          <ac:spMkLst>
+            <pc:docMk/>
+            <pc:sldMk cId="1573992039" sldId="256"/>
+            <ac:spMk id="106" creationId="{1B78CC36-883D-5957-AD5C-423198EA1845}"/>
           </ac:spMkLst>
         </pc:spChg>
         <pc:spChg chg="add del mod">
@@ -743,12 +999,36 @@
             <ac:spMk id="124" creationId="{3CDA144B-1F01-F0CC-A493-5631BE7BE96B}"/>
           </ac:spMkLst>
         </pc:spChg>
-        <pc:spChg chg="mod">
-          <ac:chgData name="Fatima Pillosu" userId="a6295d4dc9e22643" providerId="LiveId" clId="{87453732-75AC-4426-B5D3-B7C69C2D4F54}" dt="2026-01-22T23:34:37.804" v="1174" actId="1035"/>
+        <pc:spChg chg="del">
+          <ac:chgData name="Fatima Pillosu" userId="a6295d4dc9e22643" providerId="LiveId" clId="{87453732-75AC-4426-B5D3-B7C69C2D4F54}" dt="2026-01-23T00:19:57.956" v="1179" actId="21"/>
+          <ac:spMkLst>
+            <pc:docMk/>
+            <pc:sldMk cId="1573992039" sldId="256"/>
+            <ac:spMk id="130" creationId="{5CCEEB50-0EB3-291D-2911-B86403C69D4E}"/>
+          </ac:spMkLst>
+        </pc:spChg>
+        <pc:spChg chg="del mod">
+          <ac:chgData name="Fatima Pillosu" userId="a6295d4dc9e22643" providerId="LiveId" clId="{87453732-75AC-4426-B5D3-B7C69C2D4F54}" dt="2026-01-23T00:19:57.956" v="1179" actId="21"/>
           <ac:spMkLst>
             <pc:docMk/>
             <pc:sldMk cId="1573992039" sldId="256"/>
             <ac:spMk id="133" creationId="{DD906E7D-FF64-09FE-65EF-837BDD47046A}"/>
+          </ac:spMkLst>
+        </pc:spChg>
+        <pc:spChg chg="del">
+          <ac:chgData name="Fatima Pillosu" userId="a6295d4dc9e22643" providerId="LiveId" clId="{87453732-75AC-4426-B5D3-B7C69C2D4F54}" dt="2026-01-23T00:19:57.956" v="1179" actId="21"/>
+          <ac:spMkLst>
+            <pc:docMk/>
+            <pc:sldMk cId="1573992039" sldId="256"/>
+            <ac:spMk id="137" creationId="{F3106249-1C45-1C12-2453-07133FF1CD86}"/>
+          </ac:spMkLst>
+        </pc:spChg>
+        <pc:spChg chg="del">
+          <ac:chgData name="Fatima Pillosu" userId="a6295d4dc9e22643" providerId="LiveId" clId="{87453732-75AC-4426-B5D3-B7C69C2D4F54}" dt="2026-01-23T00:19:57.956" v="1179" actId="21"/>
+          <ac:spMkLst>
+            <pc:docMk/>
+            <pc:sldMk cId="1573992039" sldId="256"/>
+            <ac:spMk id="138" creationId="{E3F5F678-30B9-E5A6-EDA8-349820A25D9E}"/>
           </ac:spMkLst>
         </pc:spChg>
         <pc:spChg chg="add mod">
@@ -775,16 +1055,24 @@
             <ac:spMk id="145" creationId="{88FD4609-03C7-48B1-EA84-375FFFEDBE06}"/>
           </ac:spMkLst>
         </pc:spChg>
-        <pc:spChg chg="add mod">
-          <ac:chgData name="Fatima Pillosu" userId="a6295d4dc9e22643" providerId="LiveId" clId="{87453732-75AC-4426-B5D3-B7C69C2D4F54}" dt="2026-01-22T23:34:37.804" v="1174" actId="1035"/>
+        <pc:spChg chg="del">
+          <ac:chgData name="Fatima Pillosu" userId="a6295d4dc9e22643" providerId="LiveId" clId="{87453732-75AC-4426-B5D3-B7C69C2D4F54}" dt="2026-01-23T00:19:57.956" v="1179" actId="21"/>
+          <ac:spMkLst>
+            <pc:docMk/>
+            <pc:sldMk cId="1573992039" sldId="256"/>
+            <ac:spMk id="146" creationId="{4C39D33D-2B26-F2D6-F8F4-09E6518093E9}"/>
+          </ac:spMkLst>
+        </pc:spChg>
+        <pc:spChg chg="add del mod">
+          <ac:chgData name="Fatima Pillosu" userId="a6295d4dc9e22643" providerId="LiveId" clId="{87453732-75AC-4426-B5D3-B7C69C2D4F54}" dt="2026-01-23T00:19:57.956" v="1179" actId="21"/>
           <ac:spMkLst>
             <pc:docMk/>
             <pc:sldMk cId="1573992039" sldId="256"/>
             <ac:spMk id="147" creationId="{D4A499F2-3420-098E-60B9-2B0BAC6336D7}"/>
           </ac:spMkLst>
         </pc:spChg>
-        <pc:spChg chg="mod">
-          <ac:chgData name="Fatima Pillosu" userId="a6295d4dc9e22643" providerId="LiveId" clId="{87453732-75AC-4426-B5D3-B7C69C2D4F54}" dt="2026-01-22T23:34:37.804" v="1174" actId="1035"/>
+        <pc:spChg chg="del mod">
+          <ac:chgData name="Fatima Pillosu" userId="a6295d4dc9e22643" providerId="LiveId" clId="{87453732-75AC-4426-B5D3-B7C69C2D4F54}" dt="2026-01-23T00:19:57.956" v="1179" actId="21"/>
           <ac:spMkLst>
             <pc:docMk/>
             <pc:sldMk cId="1573992039" sldId="256"/>
@@ -815,8 +1103,8 @@
             <ac:spMk id="154" creationId="{7160EB10-8701-2F92-B2E3-BD9975B33EAB}"/>
           </ac:spMkLst>
         </pc:spChg>
-        <pc:spChg chg="add mod">
-          <ac:chgData name="Fatima Pillosu" userId="a6295d4dc9e22643" providerId="LiveId" clId="{87453732-75AC-4426-B5D3-B7C69C2D4F54}" dt="2026-01-22T23:34:37.804" v="1174" actId="1035"/>
+        <pc:spChg chg="add del mod">
+          <ac:chgData name="Fatima Pillosu" userId="a6295d4dc9e22643" providerId="LiveId" clId="{87453732-75AC-4426-B5D3-B7C69C2D4F54}" dt="2026-01-23T00:19:57.956" v="1179" actId="21"/>
           <ac:spMkLst>
             <pc:docMk/>
             <pc:sldMk cId="1573992039" sldId="256"/>
@@ -839,12 +1127,68 @@
             <ac:spMk id="159" creationId="{5E7D516C-6098-CA78-A68A-A60E91A03B8B}"/>
           </ac:spMkLst>
         </pc:spChg>
-        <pc:spChg chg="add mod">
-          <ac:chgData name="Fatima Pillosu" userId="a6295d4dc9e22643" providerId="LiveId" clId="{87453732-75AC-4426-B5D3-B7C69C2D4F54}" dt="2026-01-22T23:34:23.477" v="1170"/>
+        <pc:spChg chg="del">
+          <ac:chgData name="Fatima Pillosu" userId="a6295d4dc9e22643" providerId="LiveId" clId="{87453732-75AC-4426-B5D3-B7C69C2D4F54}" dt="2026-01-23T00:19:57.956" v="1179" actId="21"/>
+          <ac:spMkLst>
+            <pc:docMk/>
+            <pc:sldMk cId="1573992039" sldId="256"/>
+            <ac:spMk id="161" creationId="{19C06D92-10F2-6629-738B-329DDCC22607}"/>
+          </ac:spMkLst>
+        </pc:spChg>
+        <pc:spChg chg="add del mod">
+          <ac:chgData name="Fatima Pillosu" userId="a6295d4dc9e22643" providerId="LiveId" clId="{87453732-75AC-4426-B5D3-B7C69C2D4F54}" dt="2026-01-23T00:19:57.956" v="1179" actId="21"/>
           <ac:spMkLst>
             <pc:docMk/>
             <pc:sldMk cId="1573992039" sldId="256"/>
             <ac:spMk id="163" creationId="{748BB081-753E-2804-7F05-2F111730D61F}"/>
+          </ac:spMkLst>
+        </pc:spChg>
+        <pc:spChg chg="add mod">
+          <ac:chgData name="Fatima Pillosu" userId="a6295d4dc9e22643" providerId="LiveId" clId="{87453732-75AC-4426-B5D3-B7C69C2D4F54}" dt="2026-01-23T00:38:00.791" v="1786" actId="1035"/>
+          <ac:spMkLst>
+            <pc:docMk/>
+            <pc:sldMk cId="1573992039" sldId="256"/>
+            <ac:spMk id="170" creationId="{B9DACAD8-B9E0-E96C-4ACB-CB40C5842B50}"/>
+          </ac:spMkLst>
+        </pc:spChg>
+        <pc:spChg chg="add mod">
+          <ac:chgData name="Fatima Pillosu" userId="a6295d4dc9e22643" providerId="LiveId" clId="{87453732-75AC-4426-B5D3-B7C69C2D4F54}" dt="2026-01-23T00:38:00.791" v="1786" actId="1035"/>
+          <ac:spMkLst>
+            <pc:docMk/>
+            <pc:sldMk cId="1573992039" sldId="256"/>
+            <ac:spMk id="172" creationId="{7F9A54EC-7677-98F3-A2A9-8D12ECCFFC18}"/>
+          </ac:spMkLst>
+        </pc:spChg>
+        <pc:spChg chg="add mod">
+          <ac:chgData name="Fatima Pillosu" userId="a6295d4dc9e22643" providerId="LiveId" clId="{87453732-75AC-4426-B5D3-B7C69C2D4F54}" dt="2026-01-23T00:38:00.791" v="1786" actId="1035"/>
+          <ac:spMkLst>
+            <pc:docMk/>
+            <pc:sldMk cId="1573992039" sldId="256"/>
+            <ac:spMk id="173" creationId="{69264F16-B69D-6B4B-97B4-69D4F6D781F7}"/>
+          </ac:spMkLst>
+        </pc:spChg>
+        <pc:spChg chg="mod">
+          <ac:chgData name="Fatima Pillosu" userId="a6295d4dc9e22643" providerId="LiveId" clId="{87453732-75AC-4426-B5D3-B7C69C2D4F54}" dt="2026-01-23T00:38:00.791" v="1786" actId="1035"/>
+          <ac:spMkLst>
+            <pc:docMk/>
+            <pc:sldMk cId="1573992039" sldId="256"/>
+            <ac:spMk id="174" creationId="{7B459E9B-BC54-D128-00BB-242594E7828F}"/>
+          </ac:spMkLst>
+        </pc:spChg>
+        <pc:spChg chg="mod">
+          <ac:chgData name="Fatima Pillosu" userId="a6295d4dc9e22643" providerId="LiveId" clId="{87453732-75AC-4426-B5D3-B7C69C2D4F54}" dt="2026-01-23T00:38:00.791" v="1786" actId="1035"/>
+          <ac:spMkLst>
+            <pc:docMk/>
+            <pc:sldMk cId="1573992039" sldId="256"/>
+            <ac:spMk id="177" creationId="{1398DA6C-3D5E-DD45-9EEB-E8E386580228}"/>
+          </ac:spMkLst>
+        </pc:spChg>
+        <pc:spChg chg="mod">
+          <ac:chgData name="Fatima Pillosu" userId="a6295d4dc9e22643" providerId="LiveId" clId="{87453732-75AC-4426-B5D3-B7C69C2D4F54}" dt="2026-01-23T00:38:00.791" v="1786" actId="1035"/>
+          <ac:spMkLst>
+            <pc:docMk/>
+            <pc:sldMk cId="1573992039" sldId="256"/>
+            <ac:spMk id="178" creationId="{8E734807-A9EC-31E5-F187-A3C719CDF111}"/>
           </ac:spMkLst>
         </pc:spChg>
         <pc:grpChg chg="del mod">
@@ -895,6 +1239,78 @@
             <ac:grpSpMk id="87" creationId="{CACA255C-6D4D-4370-696B-5DEA6A8AC9A4}"/>
           </ac:grpSpMkLst>
         </pc:grpChg>
+        <pc:picChg chg="del">
+          <ac:chgData name="Fatima Pillosu" userId="a6295d4dc9e22643" providerId="LiveId" clId="{87453732-75AC-4426-B5D3-B7C69C2D4F54}" dt="2026-01-23T00:29:08.133" v="1270" actId="478"/>
+          <ac:picMkLst>
+            <pc:docMk/>
+            <pc:sldMk cId="1573992039" sldId="256"/>
+            <ac:picMk id="31" creationId="{B4B20B6B-3DAA-796C-8EA6-D7D94A189AD2}"/>
+          </ac:picMkLst>
+        </pc:picChg>
+        <pc:picChg chg="add del mod">
+          <ac:chgData name="Fatima Pillosu" userId="a6295d4dc9e22643" providerId="LiveId" clId="{87453732-75AC-4426-B5D3-B7C69C2D4F54}" dt="2026-01-23T00:27:49.707" v="1259" actId="478"/>
+          <ac:picMkLst>
+            <pc:docMk/>
+            <pc:sldMk cId="1573992039" sldId="256"/>
+            <ac:picMk id="55" creationId="{DDD1B0BC-C353-C1B1-877E-EA8749306290}"/>
+          </ac:picMkLst>
+        </pc:picChg>
+        <pc:picChg chg="add mod modCrop">
+          <ac:chgData name="Fatima Pillosu" userId="a6295d4dc9e22643" providerId="LiveId" clId="{87453732-75AC-4426-B5D3-B7C69C2D4F54}" dt="2026-01-23T00:36:18.900" v="1661" actId="12789"/>
+          <ac:picMkLst>
+            <pc:docMk/>
+            <pc:sldMk cId="1573992039" sldId="256"/>
+            <ac:picMk id="57" creationId="{499574A5-DBB1-A835-3099-B6F210FD833C}"/>
+          </ac:picMkLst>
+        </pc:picChg>
+        <pc:picChg chg="add mod ord">
+          <ac:chgData name="Fatima Pillosu" userId="a6295d4dc9e22643" providerId="LiveId" clId="{87453732-75AC-4426-B5D3-B7C69C2D4F54}" dt="2026-01-23T00:29:05.491" v="1269" actId="167"/>
+          <ac:picMkLst>
+            <pc:docMk/>
+            <pc:sldMk cId="1573992039" sldId="256"/>
+            <ac:picMk id="58" creationId="{F45F7555-78D7-C8CF-FA3E-833AF9A9DC4F}"/>
+          </ac:picMkLst>
+        </pc:picChg>
+        <pc:picChg chg="add mod modCrop">
+          <ac:chgData name="Fatima Pillosu" userId="a6295d4dc9e22643" providerId="LiveId" clId="{87453732-75AC-4426-B5D3-B7C69C2D4F54}" dt="2026-01-23T00:36:18.900" v="1661" actId="12789"/>
+          <ac:picMkLst>
+            <pc:docMk/>
+            <pc:sldMk cId="1573992039" sldId="256"/>
+            <ac:picMk id="63" creationId="{33171DA4-F999-1BCA-6CDC-E62EB7A0D3A4}"/>
+          </ac:picMkLst>
+        </pc:picChg>
+        <pc:picChg chg="add mod modCrop">
+          <ac:chgData name="Fatima Pillosu" userId="a6295d4dc9e22643" providerId="LiveId" clId="{87453732-75AC-4426-B5D3-B7C69C2D4F54}" dt="2026-01-23T00:36:18.900" v="1661" actId="12789"/>
+          <ac:picMkLst>
+            <pc:docMk/>
+            <pc:sldMk cId="1573992039" sldId="256"/>
+            <ac:picMk id="64" creationId="{631A71EA-6234-2CC1-4520-6B28E47168AD}"/>
+          </ac:picMkLst>
+        </pc:picChg>
+        <pc:picChg chg="mod">
+          <ac:chgData name="Fatima Pillosu" userId="a6295d4dc9e22643" providerId="LiveId" clId="{87453732-75AC-4426-B5D3-B7C69C2D4F54}" dt="2026-01-23T00:38:00.791" v="1786" actId="1035"/>
+          <ac:picMkLst>
+            <pc:docMk/>
+            <pc:sldMk cId="1573992039" sldId="256"/>
+            <ac:picMk id="171" creationId="{499574A5-DBB1-A835-3099-B6F210FD833C}"/>
+          </ac:picMkLst>
+        </pc:picChg>
+        <pc:picChg chg="mod">
+          <ac:chgData name="Fatima Pillosu" userId="a6295d4dc9e22643" providerId="LiveId" clId="{87453732-75AC-4426-B5D3-B7C69C2D4F54}" dt="2026-01-23T00:38:00.791" v="1786" actId="1035"/>
+          <ac:picMkLst>
+            <pc:docMk/>
+            <pc:sldMk cId="1573992039" sldId="256"/>
+            <ac:picMk id="175" creationId="{33171DA4-F999-1BCA-6CDC-E62EB7A0D3A4}"/>
+          </ac:picMkLst>
+        </pc:picChg>
+        <pc:picChg chg="mod">
+          <ac:chgData name="Fatima Pillosu" userId="a6295d4dc9e22643" providerId="LiveId" clId="{87453732-75AC-4426-B5D3-B7C69C2D4F54}" dt="2026-01-23T00:38:00.791" v="1786" actId="1035"/>
+          <ac:picMkLst>
+            <pc:docMk/>
+            <pc:sldMk cId="1573992039" sldId="256"/>
+            <ac:picMk id="176" creationId="{631A71EA-6234-2CC1-4520-6B28E47168AD}"/>
+          </ac:picMkLst>
+        </pc:picChg>
         <pc:cxnChg chg="del">
           <ac:chgData name="Fatima Pillosu" userId="a6295d4dc9e22643" providerId="LiveId" clId="{87453732-75AC-4426-B5D3-B7C69C2D4F54}" dt="2026-01-22T22:57:57.325" v="214" actId="21"/>
           <ac:cxnSpMkLst>
@@ -978,15 +1394,15 @@
         </p:nvSpPr>
         <p:spPr>
           <a:xfrm>
-            <a:off x="719931" y="412312"/>
-            <a:ext cx="4319588" cy="877112"/>
+            <a:off x="431959" y="724600"/>
+            <a:ext cx="4895533" cy="1541439"/>
           </a:xfrm>
         </p:spPr>
         <p:txBody>
           <a:bodyPr anchor="b"/>
           <a:lstStyle>
             <a:lvl1pPr algn="ctr">
-              <a:defRPr sz="2204"/>
+              <a:defRPr sz="3779"/>
             </a:lvl1pPr>
           </a:lstStyle>
           <a:p>
@@ -1010,8 +1426,8 @@
         </p:nvSpPr>
         <p:spPr>
           <a:xfrm>
-            <a:off x="719931" y="1323249"/>
-            <a:ext cx="4319588" cy="608263"/>
+            <a:off x="719931" y="2325483"/>
+            <a:ext cx="4319588" cy="1068963"/>
           </a:xfrm>
         </p:spPr>
         <p:txBody>
@@ -1019,39 +1435,39 @@
           <a:lstStyle>
             <a:lvl1pPr marL="0" indent="0" algn="ctr">
               <a:buNone/>
-              <a:defRPr sz="882"/>
+              <a:defRPr sz="1512"/>
             </a:lvl1pPr>
-            <a:lvl2pPr marL="167975" indent="0" algn="ctr">
+            <a:lvl2pPr marL="287990" indent="0" algn="ctr">
               <a:buNone/>
-              <a:defRPr sz="735"/>
+              <a:defRPr sz="1260"/>
             </a:lvl2pPr>
-            <a:lvl3pPr marL="335951" indent="0" algn="ctr">
+            <a:lvl3pPr marL="575981" indent="0" algn="ctr">
               <a:buNone/>
-              <a:defRPr sz="661"/>
+              <a:defRPr sz="1134"/>
             </a:lvl3pPr>
-            <a:lvl4pPr marL="503926" indent="0" algn="ctr">
+            <a:lvl4pPr marL="863971" indent="0" algn="ctr">
               <a:buNone/>
-              <a:defRPr sz="588"/>
+              <a:defRPr sz="1008"/>
             </a:lvl4pPr>
-            <a:lvl5pPr marL="671901" indent="0" algn="ctr">
+            <a:lvl5pPr marL="1151961" indent="0" algn="ctr">
               <a:buNone/>
-              <a:defRPr sz="588"/>
+              <a:defRPr sz="1008"/>
             </a:lvl5pPr>
-            <a:lvl6pPr marL="839876" indent="0" algn="ctr">
+            <a:lvl6pPr marL="1439951" indent="0" algn="ctr">
               <a:buNone/>
-              <a:defRPr sz="588"/>
+              <a:defRPr sz="1008"/>
             </a:lvl6pPr>
-            <a:lvl7pPr marL="1007852" indent="0" algn="ctr">
+            <a:lvl7pPr marL="1727942" indent="0" algn="ctr">
               <a:buNone/>
-              <a:defRPr sz="588"/>
+              <a:defRPr sz="1008"/>
             </a:lvl7pPr>
-            <a:lvl8pPr marL="1175827" indent="0" algn="ctr">
+            <a:lvl8pPr marL="2015932" indent="0" algn="ctr">
               <a:buNone/>
-              <a:defRPr sz="588"/>
+              <a:defRPr sz="1008"/>
             </a:lvl8pPr>
-            <a:lvl9pPr marL="1343802" indent="0" algn="ctr">
+            <a:lvl9pPr marL="2303922" indent="0" algn="ctr">
               <a:buNone/>
-              <a:defRPr sz="588"/>
+              <a:defRPr sz="1008"/>
             </a:lvl9pPr>
           </a:lstStyle>
           <a:p>
@@ -1080,7 +1496,7 @@
           <a:p>
             <a:fld id="{1B0A7230-9229-4B4E-8CC9-329D15B7627B}" type="datetimeFigureOut">
               <a:rPr lang="en-GB" smtClean="0"/>
-              <a:t>22/01/2026</a:t>
+              <a:t>23/01/2026</a:t>
             </a:fld>
             <a:endParaRPr lang="en-GB"/>
           </a:p>
@@ -1131,7 +1547,7 @@
     </p:spTree>
     <p:extLst>
       <p:ext uri="{BB962C8B-B14F-4D97-AF65-F5344CB8AC3E}">
-        <p14:creationId xmlns:p14="http://schemas.microsoft.com/office/powerpoint/2010/main" val="966708158"/>
+        <p14:creationId xmlns:p14="http://schemas.microsoft.com/office/powerpoint/2010/main" val="2043131675"/>
       </p:ext>
     </p:extLst>
   </p:cSld>
@@ -1250,7 +1666,7 @@
           <a:p>
             <a:fld id="{1B0A7230-9229-4B4E-8CC9-329D15B7627B}" type="datetimeFigureOut">
               <a:rPr lang="en-GB" smtClean="0"/>
-              <a:t>22/01/2026</a:t>
+              <a:t>23/01/2026</a:t>
             </a:fld>
             <a:endParaRPr lang="en-GB"/>
           </a:p>
@@ -1301,7 +1717,7 @@
     </p:spTree>
     <p:extLst>
       <p:ext uri="{BB962C8B-B14F-4D97-AF65-F5344CB8AC3E}">
-        <p14:creationId xmlns:p14="http://schemas.microsoft.com/office/powerpoint/2010/main" val="1015252624"/>
+        <p14:creationId xmlns:p14="http://schemas.microsoft.com/office/powerpoint/2010/main" val="2089826117"/>
       </p:ext>
     </p:extLst>
   </p:cSld>
@@ -1340,8 +1756,8 @@
         </p:nvSpPr>
         <p:spPr>
           <a:xfrm>
-            <a:off x="4121607" y="134133"/>
-            <a:ext cx="1241881" cy="2135044"/>
+            <a:off x="4121607" y="235725"/>
+            <a:ext cx="1241881" cy="3752134"/>
           </a:xfrm>
         </p:spPr>
         <p:txBody>
@@ -1368,8 +1784,8 @@
         </p:nvSpPr>
         <p:spPr>
           <a:xfrm>
-            <a:off x="395962" y="134133"/>
-            <a:ext cx="3653651" cy="2135044"/>
+            <a:off x="395963" y="235725"/>
+            <a:ext cx="3653651" cy="3752134"/>
           </a:xfrm>
         </p:spPr>
         <p:txBody>
@@ -1430,7 +1846,7 @@
           <a:p>
             <a:fld id="{1B0A7230-9229-4B4E-8CC9-329D15B7627B}" type="datetimeFigureOut">
               <a:rPr lang="en-GB" smtClean="0"/>
-              <a:t>22/01/2026</a:t>
+              <a:t>23/01/2026</a:t>
             </a:fld>
             <a:endParaRPr lang="en-GB"/>
           </a:p>
@@ -1481,7 +1897,7 @@
     </p:spTree>
     <p:extLst>
       <p:ext uri="{BB962C8B-B14F-4D97-AF65-F5344CB8AC3E}">
-        <p14:creationId xmlns:p14="http://schemas.microsoft.com/office/powerpoint/2010/main" val="2190298995"/>
+        <p14:creationId xmlns:p14="http://schemas.microsoft.com/office/powerpoint/2010/main" val="2129849350"/>
       </p:ext>
     </p:extLst>
   </p:cSld>
@@ -1600,7 +2016,7 @@
           <a:p>
             <a:fld id="{1B0A7230-9229-4B4E-8CC9-329D15B7627B}" type="datetimeFigureOut">
               <a:rPr lang="en-GB" smtClean="0"/>
-              <a:t>22/01/2026</a:t>
+              <a:t>23/01/2026</a:t>
             </a:fld>
             <a:endParaRPr lang="en-GB"/>
           </a:p>
@@ -1651,7 +2067,7 @@
     </p:spTree>
     <p:extLst>
       <p:ext uri="{BB962C8B-B14F-4D97-AF65-F5344CB8AC3E}">
-        <p14:creationId xmlns:p14="http://schemas.microsoft.com/office/powerpoint/2010/main" val="1379433252"/>
+        <p14:creationId xmlns:p14="http://schemas.microsoft.com/office/powerpoint/2010/main" val="4029098185"/>
       </p:ext>
     </p:extLst>
   </p:cSld>
@@ -1690,15 +2106,15 @@
         </p:nvSpPr>
         <p:spPr>
           <a:xfrm>
-            <a:off x="392962" y="628091"/>
-            <a:ext cx="4967526" cy="1047985"/>
+            <a:off x="392963" y="1103811"/>
+            <a:ext cx="4967526" cy="1841732"/>
           </a:xfrm>
         </p:spPr>
         <p:txBody>
           <a:bodyPr anchor="b"/>
           <a:lstStyle>
             <a:lvl1pPr>
-              <a:defRPr sz="2204"/>
+              <a:defRPr sz="3779"/>
             </a:lvl1pPr>
           </a:lstStyle>
           <a:p>
@@ -1722,8 +2138,8 @@
         </p:nvSpPr>
         <p:spPr>
           <a:xfrm>
-            <a:off x="392962" y="1685991"/>
-            <a:ext cx="4967526" cy="551110"/>
+            <a:off x="392963" y="2962967"/>
+            <a:ext cx="4967526" cy="968524"/>
           </a:xfrm>
         </p:spPr>
         <p:txBody>
@@ -1731,7 +2147,7 @@
           <a:lstStyle>
             <a:lvl1pPr marL="0" indent="0">
               <a:buNone/>
-              <a:defRPr sz="882">
+              <a:defRPr sz="1512">
                 <a:solidFill>
                   <a:schemeClr val="tx1">
                     <a:tint val="82000"/>
@@ -1739,9 +2155,9 @@
                 </a:solidFill>
               </a:defRPr>
             </a:lvl1pPr>
-            <a:lvl2pPr marL="167975" indent="0">
+            <a:lvl2pPr marL="287990" indent="0">
               <a:buNone/>
-              <a:defRPr sz="735">
+              <a:defRPr sz="1260">
                 <a:solidFill>
                   <a:schemeClr val="tx1">
                     <a:tint val="82000"/>
@@ -1749,9 +2165,9 @@
                 </a:solidFill>
               </a:defRPr>
             </a:lvl2pPr>
-            <a:lvl3pPr marL="335951" indent="0">
+            <a:lvl3pPr marL="575981" indent="0">
               <a:buNone/>
-              <a:defRPr sz="661">
+              <a:defRPr sz="1134">
                 <a:solidFill>
                   <a:schemeClr val="tx1">
                     <a:tint val="82000"/>
@@ -1759,9 +2175,9 @@
                 </a:solidFill>
               </a:defRPr>
             </a:lvl3pPr>
-            <a:lvl4pPr marL="503926" indent="0">
+            <a:lvl4pPr marL="863971" indent="0">
               <a:buNone/>
-              <a:defRPr sz="588">
+              <a:defRPr sz="1008">
                 <a:solidFill>
                   <a:schemeClr val="tx1">
                     <a:tint val="82000"/>
@@ -1769,9 +2185,9 @@
                 </a:solidFill>
               </a:defRPr>
             </a:lvl4pPr>
-            <a:lvl5pPr marL="671901" indent="0">
+            <a:lvl5pPr marL="1151961" indent="0">
               <a:buNone/>
-              <a:defRPr sz="588">
+              <a:defRPr sz="1008">
                 <a:solidFill>
                   <a:schemeClr val="tx1">
                     <a:tint val="82000"/>
@@ -1779,9 +2195,9 @@
                 </a:solidFill>
               </a:defRPr>
             </a:lvl5pPr>
-            <a:lvl6pPr marL="839876" indent="0">
+            <a:lvl6pPr marL="1439951" indent="0">
               <a:buNone/>
-              <a:defRPr sz="588">
+              <a:defRPr sz="1008">
                 <a:solidFill>
                   <a:schemeClr val="tx1">
                     <a:tint val="82000"/>
@@ -1789,9 +2205,9 @@
                 </a:solidFill>
               </a:defRPr>
             </a:lvl6pPr>
-            <a:lvl7pPr marL="1007852" indent="0">
+            <a:lvl7pPr marL="1727942" indent="0">
               <a:buNone/>
-              <a:defRPr sz="588">
+              <a:defRPr sz="1008">
                 <a:solidFill>
                   <a:schemeClr val="tx1">
                     <a:tint val="82000"/>
@@ -1799,9 +2215,9 @@
                 </a:solidFill>
               </a:defRPr>
             </a:lvl7pPr>
-            <a:lvl8pPr marL="1175827" indent="0">
+            <a:lvl8pPr marL="2015932" indent="0">
               <a:buNone/>
-              <a:defRPr sz="588">
+              <a:defRPr sz="1008">
                 <a:solidFill>
                   <a:schemeClr val="tx1">
                     <a:tint val="82000"/>
@@ -1809,9 +2225,9 @@
                 </a:solidFill>
               </a:defRPr>
             </a:lvl8pPr>
-            <a:lvl9pPr marL="1343802" indent="0">
+            <a:lvl9pPr marL="2303922" indent="0">
               <a:buNone/>
-              <a:defRPr sz="588">
+              <a:defRPr sz="1008">
                 <a:solidFill>
                   <a:schemeClr val="tx1">
                     <a:tint val="82000"/>
@@ -1846,7 +2262,7 @@
           <a:p>
             <a:fld id="{1B0A7230-9229-4B4E-8CC9-329D15B7627B}" type="datetimeFigureOut">
               <a:rPr lang="en-GB" smtClean="0"/>
-              <a:t>22/01/2026</a:t>
+              <a:t>23/01/2026</a:t>
             </a:fld>
             <a:endParaRPr lang="en-GB"/>
           </a:p>
@@ -1897,7 +2313,7 @@
     </p:spTree>
     <p:extLst>
       <p:ext uri="{BB962C8B-B14F-4D97-AF65-F5344CB8AC3E}">
-        <p14:creationId xmlns:p14="http://schemas.microsoft.com/office/powerpoint/2010/main" val="4022177778"/>
+        <p14:creationId xmlns:p14="http://schemas.microsoft.com/office/powerpoint/2010/main" val="3905935856"/>
       </p:ext>
     </p:extLst>
   </p:cSld>
@@ -1959,8 +2375,8 @@
         </p:nvSpPr>
         <p:spPr>
           <a:xfrm>
-            <a:off x="395962" y="670664"/>
-            <a:ext cx="2447766" cy="1598513"/>
+            <a:off x="395962" y="1178627"/>
+            <a:ext cx="2447766" cy="2809232"/>
           </a:xfrm>
         </p:spPr>
         <p:txBody>
@@ -2016,8 +2432,8 @@
         </p:nvSpPr>
         <p:spPr>
           <a:xfrm>
-            <a:off x="2915722" y="670664"/>
-            <a:ext cx="2447766" cy="1598513"/>
+            <a:off x="2915722" y="1178627"/>
+            <a:ext cx="2447766" cy="2809232"/>
           </a:xfrm>
         </p:spPr>
         <p:txBody>
@@ -2078,7 +2494,7 @@
           <a:p>
             <a:fld id="{1B0A7230-9229-4B4E-8CC9-329D15B7627B}" type="datetimeFigureOut">
               <a:rPr lang="en-GB" smtClean="0"/>
-              <a:t>22/01/2026</a:t>
+              <a:t>23/01/2026</a:t>
             </a:fld>
             <a:endParaRPr lang="en-GB"/>
           </a:p>
@@ -2129,7 +2545,7 @@
     </p:spTree>
     <p:extLst>
       <p:ext uri="{BB962C8B-B14F-4D97-AF65-F5344CB8AC3E}">
-        <p14:creationId xmlns:p14="http://schemas.microsoft.com/office/powerpoint/2010/main" val="3030428987"/>
+        <p14:creationId xmlns:p14="http://schemas.microsoft.com/office/powerpoint/2010/main" val="52126247"/>
       </p:ext>
     </p:extLst>
   </p:cSld>
@@ -2168,8 +2584,8 @@
         </p:nvSpPr>
         <p:spPr>
           <a:xfrm>
-            <a:off x="396712" y="134133"/>
-            <a:ext cx="4967526" cy="486960"/>
+            <a:off x="396712" y="235726"/>
+            <a:ext cx="4967526" cy="855786"/>
           </a:xfrm>
         </p:spPr>
         <p:txBody>
@@ -2196,8 +2612,8 @@
         </p:nvSpPr>
         <p:spPr>
           <a:xfrm>
-            <a:off x="396713" y="617594"/>
-            <a:ext cx="2436517" cy="302673"/>
+            <a:off x="396713" y="1085362"/>
+            <a:ext cx="2436517" cy="531919"/>
           </a:xfrm>
         </p:spPr>
         <p:txBody>
@@ -2205,39 +2621,39 @@
           <a:lstStyle>
             <a:lvl1pPr marL="0" indent="0">
               <a:buNone/>
-              <a:defRPr sz="882" b="1"/>
+              <a:defRPr sz="1512" b="1"/>
             </a:lvl1pPr>
-            <a:lvl2pPr marL="167975" indent="0">
+            <a:lvl2pPr marL="287990" indent="0">
               <a:buNone/>
-              <a:defRPr sz="735" b="1"/>
+              <a:defRPr sz="1260" b="1"/>
             </a:lvl2pPr>
-            <a:lvl3pPr marL="335951" indent="0">
+            <a:lvl3pPr marL="575981" indent="0">
               <a:buNone/>
-              <a:defRPr sz="661" b="1"/>
+              <a:defRPr sz="1134" b="1"/>
             </a:lvl3pPr>
-            <a:lvl4pPr marL="503926" indent="0">
+            <a:lvl4pPr marL="863971" indent="0">
               <a:buNone/>
-              <a:defRPr sz="588" b="1"/>
+              <a:defRPr sz="1008" b="1"/>
             </a:lvl4pPr>
-            <a:lvl5pPr marL="671901" indent="0">
+            <a:lvl5pPr marL="1151961" indent="0">
               <a:buNone/>
-              <a:defRPr sz="588" b="1"/>
+              <a:defRPr sz="1008" b="1"/>
             </a:lvl5pPr>
-            <a:lvl6pPr marL="839876" indent="0">
+            <a:lvl6pPr marL="1439951" indent="0">
               <a:buNone/>
-              <a:defRPr sz="588" b="1"/>
+              <a:defRPr sz="1008" b="1"/>
             </a:lvl6pPr>
-            <a:lvl7pPr marL="1007852" indent="0">
+            <a:lvl7pPr marL="1727942" indent="0">
               <a:buNone/>
-              <a:defRPr sz="588" b="1"/>
+              <a:defRPr sz="1008" b="1"/>
             </a:lvl7pPr>
-            <a:lvl8pPr marL="1175827" indent="0">
+            <a:lvl8pPr marL="2015932" indent="0">
               <a:buNone/>
-              <a:defRPr sz="588" b="1"/>
+              <a:defRPr sz="1008" b="1"/>
             </a:lvl8pPr>
-            <a:lvl9pPr marL="1343802" indent="0">
+            <a:lvl9pPr marL="2303922" indent="0">
               <a:buNone/>
-              <a:defRPr sz="588" b="1"/>
+              <a:defRPr sz="1008" b="1"/>
             </a:lvl9pPr>
           </a:lstStyle>
           <a:p>
@@ -2261,8 +2677,8 @@
         </p:nvSpPr>
         <p:spPr>
           <a:xfrm>
-            <a:off x="396713" y="920267"/>
-            <a:ext cx="2436517" cy="1353575"/>
+            <a:off x="396713" y="1617281"/>
+            <a:ext cx="2436517" cy="2378777"/>
           </a:xfrm>
         </p:spPr>
         <p:txBody>
@@ -2318,8 +2734,8 @@
         </p:nvSpPr>
         <p:spPr>
           <a:xfrm>
-            <a:off x="2915722" y="617594"/>
-            <a:ext cx="2448516" cy="302673"/>
+            <a:off x="2915722" y="1085362"/>
+            <a:ext cx="2448516" cy="531919"/>
           </a:xfrm>
         </p:spPr>
         <p:txBody>
@@ -2327,39 +2743,39 @@
           <a:lstStyle>
             <a:lvl1pPr marL="0" indent="0">
               <a:buNone/>
-              <a:defRPr sz="882" b="1"/>
+              <a:defRPr sz="1512" b="1"/>
             </a:lvl1pPr>
-            <a:lvl2pPr marL="167975" indent="0">
+            <a:lvl2pPr marL="287990" indent="0">
               <a:buNone/>
-              <a:defRPr sz="735" b="1"/>
+              <a:defRPr sz="1260" b="1"/>
             </a:lvl2pPr>
-            <a:lvl3pPr marL="335951" indent="0">
+            <a:lvl3pPr marL="575981" indent="0">
               <a:buNone/>
-              <a:defRPr sz="661" b="1"/>
+              <a:defRPr sz="1134" b="1"/>
             </a:lvl3pPr>
-            <a:lvl4pPr marL="503926" indent="0">
+            <a:lvl4pPr marL="863971" indent="0">
               <a:buNone/>
-              <a:defRPr sz="588" b="1"/>
+              <a:defRPr sz="1008" b="1"/>
             </a:lvl4pPr>
-            <a:lvl5pPr marL="671901" indent="0">
+            <a:lvl5pPr marL="1151961" indent="0">
               <a:buNone/>
-              <a:defRPr sz="588" b="1"/>
+              <a:defRPr sz="1008" b="1"/>
             </a:lvl5pPr>
-            <a:lvl6pPr marL="839876" indent="0">
+            <a:lvl6pPr marL="1439951" indent="0">
               <a:buNone/>
-              <a:defRPr sz="588" b="1"/>
+              <a:defRPr sz="1008" b="1"/>
             </a:lvl6pPr>
-            <a:lvl7pPr marL="1007852" indent="0">
+            <a:lvl7pPr marL="1727942" indent="0">
               <a:buNone/>
-              <a:defRPr sz="588" b="1"/>
+              <a:defRPr sz="1008" b="1"/>
             </a:lvl7pPr>
-            <a:lvl8pPr marL="1175827" indent="0">
+            <a:lvl8pPr marL="2015932" indent="0">
               <a:buNone/>
-              <a:defRPr sz="588" b="1"/>
+              <a:defRPr sz="1008" b="1"/>
             </a:lvl8pPr>
-            <a:lvl9pPr marL="1343802" indent="0">
+            <a:lvl9pPr marL="2303922" indent="0">
               <a:buNone/>
-              <a:defRPr sz="588" b="1"/>
+              <a:defRPr sz="1008" b="1"/>
             </a:lvl9pPr>
           </a:lstStyle>
           <a:p>
@@ -2383,8 +2799,8 @@
         </p:nvSpPr>
         <p:spPr>
           <a:xfrm>
-            <a:off x="2915722" y="920267"/>
-            <a:ext cx="2448516" cy="1353575"/>
+            <a:off x="2915722" y="1617281"/>
+            <a:ext cx="2448516" cy="2378777"/>
           </a:xfrm>
         </p:spPr>
         <p:txBody>
@@ -2445,7 +2861,7 @@
           <a:p>
             <a:fld id="{1B0A7230-9229-4B4E-8CC9-329D15B7627B}" type="datetimeFigureOut">
               <a:rPr lang="en-GB" smtClean="0"/>
-              <a:t>22/01/2026</a:t>
+              <a:t>23/01/2026</a:t>
             </a:fld>
             <a:endParaRPr lang="en-GB"/>
           </a:p>
@@ -2496,7 +2912,7 @@
     </p:spTree>
     <p:extLst>
       <p:ext uri="{BB962C8B-B14F-4D97-AF65-F5344CB8AC3E}">
-        <p14:creationId xmlns:p14="http://schemas.microsoft.com/office/powerpoint/2010/main" val="3726321075"/>
+        <p14:creationId xmlns:p14="http://schemas.microsoft.com/office/powerpoint/2010/main" val="2714661730"/>
       </p:ext>
     </p:extLst>
   </p:cSld>
@@ -2563,7 +2979,7 @@
           <a:p>
             <a:fld id="{1B0A7230-9229-4B4E-8CC9-329D15B7627B}" type="datetimeFigureOut">
               <a:rPr lang="en-GB" smtClean="0"/>
-              <a:t>22/01/2026</a:t>
+              <a:t>23/01/2026</a:t>
             </a:fld>
             <a:endParaRPr lang="en-GB"/>
           </a:p>
@@ -2614,7 +3030,7 @@
     </p:spTree>
     <p:extLst>
       <p:ext uri="{BB962C8B-B14F-4D97-AF65-F5344CB8AC3E}">
-        <p14:creationId xmlns:p14="http://schemas.microsoft.com/office/powerpoint/2010/main" val="1138051211"/>
+        <p14:creationId xmlns:p14="http://schemas.microsoft.com/office/powerpoint/2010/main" val="2753695947"/>
       </p:ext>
     </p:extLst>
   </p:cSld>
@@ -2658,7 +3074,7 @@
           <a:p>
             <a:fld id="{1B0A7230-9229-4B4E-8CC9-329D15B7627B}" type="datetimeFigureOut">
               <a:rPr lang="en-GB" smtClean="0"/>
-              <a:t>22/01/2026</a:t>
+              <a:t>23/01/2026</a:t>
             </a:fld>
             <a:endParaRPr lang="en-GB"/>
           </a:p>
@@ -2709,7 +3125,7 @@
     </p:spTree>
     <p:extLst>
       <p:ext uri="{BB962C8B-B14F-4D97-AF65-F5344CB8AC3E}">
-        <p14:creationId xmlns:p14="http://schemas.microsoft.com/office/powerpoint/2010/main" val="2601565038"/>
+        <p14:creationId xmlns:p14="http://schemas.microsoft.com/office/powerpoint/2010/main" val="2494000983"/>
       </p:ext>
     </p:extLst>
   </p:cSld>
@@ -2748,15 +3164,15 @@
         </p:nvSpPr>
         <p:spPr>
           <a:xfrm>
-            <a:off x="396713" y="167958"/>
-            <a:ext cx="1857572" cy="587851"/>
+            <a:off x="396712" y="295169"/>
+            <a:ext cx="1857573" cy="1033092"/>
           </a:xfrm>
         </p:spPr>
         <p:txBody>
           <a:bodyPr anchor="b"/>
           <a:lstStyle>
             <a:lvl1pPr>
-              <a:defRPr sz="1176"/>
+              <a:defRPr sz="2016"/>
             </a:lvl1pPr>
           </a:lstStyle>
           <a:p>
@@ -2780,39 +3196,39 @@
         </p:nvSpPr>
         <p:spPr>
           <a:xfrm>
-            <a:off x="2448516" y="362742"/>
-            <a:ext cx="2915722" cy="1790381"/>
+            <a:off x="2448516" y="637484"/>
+            <a:ext cx="2915722" cy="3146422"/>
           </a:xfrm>
         </p:spPr>
         <p:txBody>
           <a:bodyPr/>
           <a:lstStyle>
             <a:lvl1pPr>
-              <a:defRPr sz="1176"/>
+              <a:defRPr sz="2016"/>
             </a:lvl1pPr>
             <a:lvl2pPr>
-              <a:defRPr sz="1029"/>
+              <a:defRPr sz="1764"/>
             </a:lvl2pPr>
             <a:lvl3pPr>
-              <a:defRPr sz="882"/>
+              <a:defRPr sz="1512"/>
             </a:lvl3pPr>
             <a:lvl4pPr>
-              <a:defRPr sz="735"/>
+              <a:defRPr sz="1260"/>
             </a:lvl4pPr>
             <a:lvl5pPr>
-              <a:defRPr sz="735"/>
+              <a:defRPr sz="1260"/>
             </a:lvl5pPr>
             <a:lvl6pPr>
-              <a:defRPr sz="735"/>
+              <a:defRPr sz="1260"/>
             </a:lvl6pPr>
             <a:lvl7pPr>
-              <a:defRPr sz="735"/>
+              <a:defRPr sz="1260"/>
             </a:lvl7pPr>
             <a:lvl8pPr>
-              <a:defRPr sz="735"/>
+              <a:defRPr sz="1260"/>
             </a:lvl8pPr>
             <a:lvl9pPr>
-              <a:defRPr sz="735"/>
+              <a:defRPr sz="1260"/>
             </a:lvl9pPr>
           </a:lstStyle>
           <a:p>
@@ -2865,8 +3281,8 @@
         </p:nvSpPr>
         <p:spPr>
           <a:xfrm>
-            <a:off x="396713" y="755809"/>
-            <a:ext cx="1857572" cy="1400229"/>
+            <a:off x="396712" y="1328261"/>
+            <a:ext cx="1857573" cy="2460769"/>
           </a:xfrm>
         </p:spPr>
         <p:txBody>
@@ -2874,39 +3290,39 @@
           <a:lstStyle>
             <a:lvl1pPr marL="0" indent="0">
               <a:buNone/>
-              <a:defRPr sz="588"/>
+              <a:defRPr sz="1008"/>
             </a:lvl1pPr>
-            <a:lvl2pPr marL="167975" indent="0">
+            <a:lvl2pPr marL="287990" indent="0">
               <a:buNone/>
-              <a:defRPr sz="514"/>
+              <a:defRPr sz="882"/>
             </a:lvl2pPr>
-            <a:lvl3pPr marL="335951" indent="0">
+            <a:lvl3pPr marL="575981" indent="0">
               <a:buNone/>
-              <a:defRPr sz="441"/>
+              <a:defRPr sz="756"/>
             </a:lvl3pPr>
-            <a:lvl4pPr marL="503926" indent="0">
+            <a:lvl4pPr marL="863971" indent="0">
               <a:buNone/>
-              <a:defRPr sz="367"/>
+              <a:defRPr sz="630"/>
             </a:lvl4pPr>
-            <a:lvl5pPr marL="671901" indent="0">
+            <a:lvl5pPr marL="1151961" indent="0">
               <a:buNone/>
-              <a:defRPr sz="367"/>
+              <a:defRPr sz="630"/>
             </a:lvl5pPr>
-            <a:lvl6pPr marL="839876" indent="0">
+            <a:lvl6pPr marL="1439951" indent="0">
               <a:buNone/>
-              <a:defRPr sz="367"/>
+              <a:defRPr sz="630"/>
             </a:lvl6pPr>
-            <a:lvl7pPr marL="1007852" indent="0">
+            <a:lvl7pPr marL="1727942" indent="0">
               <a:buNone/>
-              <a:defRPr sz="367"/>
+              <a:defRPr sz="630"/>
             </a:lvl7pPr>
-            <a:lvl8pPr marL="1175827" indent="0">
+            <a:lvl8pPr marL="2015932" indent="0">
               <a:buNone/>
-              <a:defRPr sz="367"/>
+              <a:defRPr sz="630"/>
             </a:lvl8pPr>
-            <a:lvl9pPr marL="1343802" indent="0">
+            <a:lvl9pPr marL="2303922" indent="0">
               <a:buNone/>
-              <a:defRPr sz="367"/>
+              <a:defRPr sz="630"/>
             </a:lvl9pPr>
           </a:lstStyle>
           <a:p>
@@ -2935,7 +3351,7 @@
           <a:p>
             <a:fld id="{1B0A7230-9229-4B4E-8CC9-329D15B7627B}" type="datetimeFigureOut">
               <a:rPr lang="en-GB" smtClean="0"/>
-              <a:t>22/01/2026</a:t>
+              <a:t>23/01/2026</a:t>
             </a:fld>
             <a:endParaRPr lang="en-GB"/>
           </a:p>
@@ -2986,7 +3402,7 @@
     </p:spTree>
     <p:extLst>
       <p:ext uri="{BB962C8B-B14F-4D97-AF65-F5344CB8AC3E}">
-        <p14:creationId xmlns:p14="http://schemas.microsoft.com/office/powerpoint/2010/main" val="2030451596"/>
+        <p14:creationId xmlns:p14="http://schemas.microsoft.com/office/powerpoint/2010/main" val="1519721966"/>
       </p:ext>
     </p:extLst>
   </p:cSld>
@@ -3025,15 +3441,15 @@
         </p:nvSpPr>
         <p:spPr>
           <a:xfrm>
-            <a:off x="396713" y="167958"/>
-            <a:ext cx="1857572" cy="587851"/>
+            <a:off x="396712" y="295169"/>
+            <a:ext cx="1857573" cy="1033092"/>
           </a:xfrm>
         </p:spPr>
         <p:txBody>
           <a:bodyPr anchor="b"/>
           <a:lstStyle>
             <a:lvl1pPr>
-              <a:defRPr sz="1176"/>
+              <a:defRPr sz="2016"/>
             </a:lvl1pPr>
           </a:lstStyle>
           <a:p>
@@ -3057,8 +3473,8 @@
         </p:nvSpPr>
         <p:spPr>
           <a:xfrm>
-            <a:off x="2448516" y="362742"/>
-            <a:ext cx="2915722" cy="1790381"/>
+            <a:off x="2448516" y="637484"/>
+            <a:ext cx="2915722" cy="3146422"/>
           </a:xfrm>
         </p:spPr>
         <p:txBody>
@@ -3066,39 +3482,39 @@
           <a:lstStyle>
             <a:lvl1pPr marL="0" indent="0">
               <a:buNone/>
-              <a:defRPr sz="1176"/>
+              <a:defRPr sz="2016"/>
             </a:lvl1pPr>
-            <a:lvl2pPr marL="167975" indent="0">
+            <a:lvl2pPr marL="287990" indent="0">
               <a:buNone/>
-              <a:defRPr sz="1029"/>
+              <a:defRPr sz="1764"/>
             </a:lvl2pPr>
-            <a:lvl3pPr marL="335951" indent="0">
+            <a:lvl3pPr marL="575981" indent="0">
               <a:buNone/>
-              <a:defRPr sz="882"/>
+              <a:defRPr sz="1512"/>
             </a:lvl3pPr>
-            <a:lvl4pPr marL="503926" indent="0">
+            <a:lvl4pPr marL="863971" indent="0">
               <a:buNone/>
-              <a:defRPr sz="735"/>
+              <a:defRPr sz="1260"/>
             </a:lvl4pPr>
-            <a:lvl5pPr marL="671901" indent="0">
+            <a:lvl5pPr marL="1151961" indent="0">
               <a:buNone/>
-              <a:defRPr sz="735"/>
+              <a:defRPr sz="1260"/>
             </a:lvl5pPr>
-            <a:lvl6pPr marL="839876" indent="0">
+            <a:lvl6pPr marL="1439951" indent="0">
               <a:buNone/>
-              <a:defRPr sz="735"/>
+              <a:defRPr sz="1260"/>
             </a:lvl6pPr>
-            <a:lvl7pPr marL="1007852" indent="0">
+            <a:lvl7pPr marL="1727942" indent="0">
               <a:buNone/>
-              <a:defRPr sz="735"/>
+              <a:defRPr sz="1260"/>
             </a:lvl7pPr>
-            <a:lvl8pPr marL="1175827" indent="0">
+            <a:lvl8pPr marL="2015932" indent="0">
               <a:buNone/>
-              <a:defRPr sz="735"/>
+              <a:defRPr sz="1260"/>
             </a:lvl8pPr>
-            <a:lvl9pPr marL="1343802" indent="0">
+            <a:lvl9pPr marL="2303922" indent="0">
               <a:buNone/>
-              <a:defRPr sz="735"/>
+              <a:defRPr sz="1260"/>
             </a:lvl9pPr>
           </a:lstStyle>
           <a:p>
@@ -3122,8 +3538,8 @@
         </p:nvSpPr>
         <p:spPr>
           <a:xfrm>
-            <a:off x="396713" y="755809"/>
-            <a:ext cx="1857572" cy="1400229"/>
+            <a:off x="396712" y="1328261"/>
+            <a:ext cx="1857573" cy="2460769"/>
           </a:xfrm>
         </p:spPr>
         <p:txBody>
@@ -3131,39 +3547,39 @@
           <a:lstStyle>
             <a:lvl1pPr marL="0" indent="0">
               <a:buNone/>
-              <a:defRPr sz="588"/>
+              <a:defRPr sz="1008"/>
             </a:lvl1pPr>
-            <a:lvl2pPr marL="167975" indent="0">
+            <a:lvl2pPr marL="287990" indent="0">
               <a:buNone/>
-              <a:defRPr sz="514"/>
+              <a:defRPr sz="882"/>
             </a:lvl2pPr>
-            <a:lvl3pPr marL="335951" indent="0">
+            <a:lvl3pPr marL="575981" indent="0">
               <a:buNone/>
-              <a:defRPr sz="441"/>
+              <a:defRPr sz="756"/>
             </a:lvl3pPr>
-            <a:lvl4pPr marL="503926" indent="0">
+            <a:lvl4pPr marL="863971" indent="0">
               <a:buNone/>
-              <a:defRPr sz="367"/>
+              <a:defRPr sz="630"/>
             </a:lvl4pPr>
-            <a:lvl5pPr marL="671901" indent="0">
+            <a:lvl5pPr marL="1151961" indent="0">
               <a:buNone/>
-              <a:defRPr sz="367"/>
+              <a:defRPr sz="630"/>
             </a:lvl5pPr>
-            <a:lvl6pPr marL="839876" indent="0">
+            <a:lvl6pPr marL="1439951" indent="0">
               <a:buNone/>
-              <a:defRPr sz="367"/>
+              <a:defRPr sz="630"/>
             </a:lvl6pPr>
-            <a:lvl7pPr marL="1007852" indent="0">
+            <a:lvl7pPr marL="1727942" indent="0">
               <a:buNone/>
-              <a:defRPr sz="367"/>
+              <a:defRPr sz="630"/>
             </a:lvl7pPr>
-            <a:lvl8pPr marL="1175827" indent="0">
+            <a:lvl8pPr marL="2015932" indent="0">
               <a:buNone/>
-              <a:defRPr sz="367"/>
+              <a:defRPr sz="630"/>
             </a:lvl8pPr>
-            <a:lvl9pPr marL="1343802" indent="0">
+            <a:lvl9pPr marL="2303922" indent="0">
               <a:buNone/>
-              <a:defRPr sz="367"/>
+              <a:defRPr sz="630"/>
             </a:lvl9pPr>
           </a:lstStyle>
           <a:p>
@@ -3192,7 +3608,7 @@
           <a:p>
             <a:fld id="{1B0A7230-9229-4B4E-8CC9-329D15B7627B}" type="datetimeFigureOut">
               <a:rPr lang="en-GB" smtClean="0"/>
-              <a:t>22/01/2026</a:t>
+              <a:t>23/01/2026</a:t>
             </a:fld>
             <a:endParaRPr lang="en-GB"/>
           </a:p>
@@ -3243,7 +3659,7 @@
     </p:spTree>
     <p:extLst>
       <p:ext uri="{BB962C8B-B14F-4D97-AF65-F5344CB8AC3E}">
-        <p14:creationId xmlns:p14="http://schemas.microsoft.com/office/powerpoint/2010/main" val="281532981"/>
+        <p14:creationId xmlns:p14="http://schemas.microsoft.com/office/powerpoint/2010/main" val="225792783"/>
       </p:ext>
     </p:extLst>
   </p:cSld>
@@ -3287,8 +3703,8 @@
         </p:nvSpPr>
         <p:spPr>
           <a:xfrm>
-            <a:off x="395962" y="134133"/>
-            <a:ext cx="4967526" cy="486960"/>
+            <a:off x="395962" y="235726"/>
+            <a:ext cx="4967526" cy="855786"/>
           </a:xfrm>
           <a:prstGeom prst="rect">
             <a:avLst/>
@@ -3320,8 +3736,8 @@
         </p:nvSpPr>
         <p:spPr>
           <a:xfrm>
-            <a:off x="395962" y="670664"/>
-            <a:ext cx="4967526" cy="1598513"/>
+            <a:off x="395962" y="1178627"/>
+            <a:ext cx="4967526" cy="2809232"/>
           </a:xfrm>
           <a:prstGeom prst="rect">
             <a:avLst/>
@@ -3382,8 +3798,8 @@
         </p:nvSpPr>
         <p:spPr>
           <a:xfrm>
-            <a:off x="395962" y="2335076"/>
-            <a:ext cx="1295876" cy="134133"/>
+            <a:off x="395962" y="4103673"/>
+            <a:ext cx="1295876" cy="235725"/>
           </a:xfrm>
           <a:prstGeom prst="rect">
             <a:avLst/>
@@ -3393,7 +3809,7 @@
           <a:bodyPr vert="horz" lIns="91440" tIns="45720" rIns="91440" bIns="45720" rtlCol="0" anchor="ctr"/>
           <a:lstStyle>
             <a:lvl1pPr algn="l">
-              <a:defRPr sz="441">
+              <a:defRPr sz="756">
                 <a:solidFill>
                   <a:schemeClr val="tx1">
                     <a:tint val="82000"/>
@@ -3405,7 +3821,7 @@
           <a:p>
             <a:fld id="{1B0A7230-9229-4B4E-8CC9-329D15B7627B}" type="datetimeFigureOut">
               <a:rPr lang="en-GB" smtClean="0"/>
-              <a:t>22/01/2026</a:t>
+              <a:t>23/01/2026</a:t>
             </a:fld>
             <a:endParaRPr lang="en-GB"/>
           </a:p>
@@ -3423,8 +3839,8 @@
         </p:nvSpPr>
         <p:spPr>
           <a:xfrm>
-            <a:off x="1907818" y="2335076"/>
-            <a:ext cx="1943814" cy="134133"/>
+            <a:off x="1907818" y="4103673"/>
+            <a:ext cx="1943814" cy="235725"/>
           </a:xfrm>
           <a:prstGeom prst="rect">
             <a:avLst/>
@@ -3434,7 +3850,7 @@
           <a:bodyPr vert="horz" lIns="91440" tIns="45720" rIns="91440" bIns="45720" rtlCol="0" anchor="ctr"/>
           <a:lstStyle>
             <a:lvl1pPr algn="ctr">
-              <a:defRPr sz="441">
+              <a:defRPr sz="756">
                 <a:solidFill>
                   <a:schemeClr val="tx1">
                     <a:tint val="82000"/>
@@ -3460,8 +3876,8 @@
         </p:nvSpPr>
         <p:spPr>
           <a:xfrm>
-            <a:off x="4067612" y="2335076"/>
-            <a:ext cx="1295876" cy="134133"/>
+            <a:off x="4067612" y="4103673"/>
+            <a:ext cx="1295876" cy="235725"/>
           </a:xfrm>
           <a:prstGeom prst="rect">
             <a:avLst/>
@@ -3471,7 +3887,7 @@
           <a:bodyPr vert="horz" lIns="91440" tIns="45720" rIns="91440" bIns="45720" rtlCol="0" anchor="ctr"/>
           <a:lstStyle>
             <a:lvl1pPr algn="r">
-              <a:defRPr sz="441">
+              <a:defRPr sz="756">
                 <a:solidFill>
                   <a:schemeClr val="tx1">
                     <a:tint val="82000"/>
@@ -3492,27 +3908,27 @@
     </p:spTree>
     <p:extLst>
       <p:ext uri="{BB962C8B-B14F-4D97-AF65-F5344CB8AC3E}">
-        <p14:creationId xmlns:p14="http://schemas.microsoft.com/office/powerpoint/2010/main" val="2391288883"/>
+        <p14:creationId xmlns:p14="http://schemas.microsoft.com/office/powerpoint/2010/main" val="314637908"/>
       </p:ext>
     </p:extLst>
   </p:cSld>
   <p:clrMap bg1="lt1" tx1="dk1" bg2="lt2" tx2="dk2" accent1="accent1" accent2="accent2" accent3="accent3" accent4="accent4" accent5="accent5" accent6="accent6" hlink="hlink" folHlink="folHlink"/>
   <p:sldLayoutIdLst>
-    <p:sldLayoutId id="2147483781" r:id="rId1"/>
-    <p:sldLayoutId id="2147483782" r:id="rId2"/>
-    <p:sldLayoutId id="2147483783" r:id="rId3"/>
-    <p:sldLayoutId id="2147483784" r:id="rId4"/>
-    <p:sldLayoutId id="2147483785" r:id="rId5"/>
-    <p:sldLayoutId id="2147483786" r:id="rId6"/>
-    <p:sldLayoutId id="2147483787" r:id="rId7"/>
-    <p:sldLayoutId id="2147483788" r:id="rId8"/>
-    <p:sldLayoutId id="2147483789" r:id="rId9"/>
-    <p:sldLayoutId id="2147483790" r:id="rId10"/>
-    <p:sldLayoutId id="2147483791" r:id="rId11"/>
+    <p:sldLayoutId id="2147483805" r:id="rId1"/>
+    <p:sldLayoutId id="2147483806" r:id="rId2"/>
+    <p:sldLayoutId id="2147483807" r:id="rId3"/>
+    <p:sldLayoutId id="2147483808" r:id="rId4"/>
+    <p:sldLayoutId id="2147483809" r:id="rId5"/>
+    <p:sldLayoutId id="2147483810" r:id="rId6"/>
+    <p:sldLayoutId id="2147483811" r:id="rId7"/>
+    <p:sldLayoutId id="2147483812" r:id="rId8"/>
+    <p:sldLayoutId id="2147483813" r:id="rId9"/>
+    <p:sldLayoutId id="2147483814" r:id="rId10"/>
+    <p:sldLayoutId id="2147483815" r:id="rId11"/>
   </p:sldLayoutIdLst>
   <p:txStyles>
     <p:titleStyle>
-      <a:lvl1pPr algn="l" defTabSz="335951" rtl="0" eaLnBrk="1" latinLnBrk="0" hangingPunct="1">
+      <a:lvl1pPr algn="l" defTabSz="575981" rtl="0" eaLnBrk="1" latinLnBrk="0" hangingPunct="1">
         <a:lnSpc>
           <a:spcPct val="90000"/>
         </a:lnSpc>
@@ -3520,7 +3936,7 @@
           <a:spcPct val="0"/>
         </a:spcBef>
         <a:buNone/>
-        <a:defRPr sz="1617" kern="1200">
+        <a:defRPr sz="2772" kern="1200">
           <a:solidFill>
             <a:schemeClr val="tx1"/>
           </a:solidFill>
@@ -3531,16 +3947,16 @@
       </a:lvl1pPr>
     </p:titleStyle>
     <p:bodyStyle>
-      <a:lvl1pPr marL="83988" indent="-83988" algn="l" defTabSz="335951" rtl="0" eaLnBrk="1" latinLnBrk="0" hangingPunct="1">
+      <a:lvl1pPr marL="143995" indent="-143995" algn="l" defTabSz="575981" rtl="0" eaLnBrk="1" latinLnBrk="0" hangingPunct="1">
         <a:lnSpc>
           <a:spcPct val="90000"/>
         </a:lnSpc>
         <a:spcBef>
-          <a:spcPts val="367"/>
+          <a:spcPts val="630"/>
         </a:spcBef>
         <a:buFont typeface="Arial" panose="020B0604020202020204" pitchFamily="34" charset="0"/>
         <a:buChar char="•"/>
-        <a:defRPr sz="1029" kern="1200">
+        <a:defRPr sz="1764" kern="1200">
           <a:solidFill>
             <a:schemeClr val="tx1"/>
           </a:solidFill>
@@ -3549,16 +3965,16 @@
           <a:cs typeface="+mn-cs"/>
         </a:defRPr>
       </a:lvl1pPr>
-      <a:lvl2pPr marL="251963" indent="-83988" algn="l" defTabSz="335951" rtl="0" eaLnBrk="1" latinLnBrk="0" hangingPunct="1">
+      <a:lvl2pPr marL="431985" indent="-143995" algn="l" defTabSz="575981" rtl="0" eaLnBrk="1" latinLnBrk="0" hangingPunct="1">
         <a:lnSpc>
           <a:spcPct val="90000"/>
         </a:lnSpc>
         <a:spcBef>
-          <a:spcPts val="184"/>
+          <a:spcPts val="315"/>
         </a:spcBef>
         <a:buFont typeface="Arial" panose="020B0604020202020204" pitchFamily="34" charset="0"/>
         <a:buChar char="•"/>
-        <a:defRPr sz="882" kern="1200">
+        <a:defRPr sz="1512" kern="1200">
           <a:solidFill>
             <a:schemeClr val="tx1"/>
           </a:solidFill>
@@ -3567,16 +3983,16 @@
           <a:cs typeface="+mn-cs"/>
         </a:defRPr>
       </a:lvl2pPr>
-      <a:lvl3pPr marL="419938" indent="-83988" algn="l" defTabSz="335951" rtl="0" eaLnBrk="1" latinLnBrk="0" hangingPunct="1">
+      <a:lvl3pPr marL="719976" indent="-143995" algn="l" defTabSz="575981" rtl="0" eaLnBrk="1" latinLnBrk="0" hangingPunct="1">
         <a:lnSpc>
           <a:spcPct val="90000"/>
         </a:lnSpc>
         <a:spcBef>
-          <a:spcPts val="184"/>
+          <a:spcPts val="315"/>
         </a:spcBef>
         <a:buFont typeface="Arial" panose="020B0604020202020204" pitchFamily="34" charset="0"/>
         <a:buChar char="•"/>
-        <a:defRPr sz="735" kern="1200">
+        <a:defRPr sz="1260" kern="1200">
           <a:solidFill>
             <a:schemeClr val="tx1"/>
           </a:solidFill>
@@ -3585,16 +4001,16 @@
           <a:cs typeface="+mn-cs"/>
         </a:defRPr>
       </a:lvl3pPr>
-      <a:lvl4pPr marL="587913" indent="-83988" algn="l" defTabSz="335951" rtl="0" eaLnBrk="1" latinLnBrk="0" hangingPunct="1">
+      <a:lvl4pPr marL="1007966" indent="-143995" algn="l" defTabSz="575981" rtl="0" eaLnBrk="1" latinLnBrk="0" hangingPunct="1">
         <a:lnSpc>
           <a:spcPct val="90000"/>
         </a:lnSpc>
         <a:spcBef>
-          <a:spcPts val="184"/>
+          <a:spcPts val="315"/>
         </a:spcBef>
         <a:buFont typeface="Arial" panose="020B0604020202020204" pitchFamily="34" charset="0"/>
         <a:buChar char="•"/>
-        <a:defRPr sz="661" kern="1200">
+        <a:defRPr sz="1134" kern="1200">
           <a:solidFill>
             <a:schemeClr val="tx1"/>
           </a:solidFill>
@@ -3603,16 +4019,16 @@
           <a:cs typeface="+mn-cs"/>
         </a:defRPr>
       </a:lvl4pPr>
-      <a:lvl5pPr marL="755889" indent="-83988" algn="l" defTabSz="335951" rtl="0" eaLnBrk="1" latinLnBrk="0" hangingPunct="1">
+      <a:lvl5pPr marL="1295956" indent="-143995" algn="l" defTabSz="575981" rtl="0" eaLnBrk="1" latinLnBrk="0" hangingPunct="1">
         <a:lnSpc>
           <a:spcPct val="90000"/>
         </a:lnSpc>
         <a:spcBef>
-          <a:spcPts val="184"/>
+          <a:spcPts val="315"/>
         </a:spcBef>
         <a:buFont typeface="Arial" panose="020B0604020202020204" pitchFamily="34" charset="0"/>
         <a:buChar char="•"/>
-        <a:defRPr sz="661" kern="1200">
+        <a:defRPr sz="1134" kern="1200">
           <a:solidFill>
             <a:schemeClr val="tx1"/>
           </a:solidFill>
@@ -3621,16 +4037,16 @@
           <a:cs typeface="+mn-cs"/>
         </a:defRPr>
       </a:lvl5pPr>
-      <a:lvl6pPr marL="923864" indent="-83988" algn="l" defTabSz="335951" rtl="0" eaLnBrk="1" latinLnBrk="0" hangingPunct="1">
+      <a:lvl6pPr marL="1583947" indent="-143995" algn="l" defTabSz="575981" rtl="0" eaLnBrk="1" latinLnBrk="0" hangingPunct="1">
         <a:lnSpc>
           <a:spcPct val="90000"/>
         </a:lnSpc>
         <a:spcBef>
-          <a:spcPts val="184"/>
+          <a:spcPts val="315"/>
         </a:spcBef>
         <a:buFont typeface="Arial" panose="020B0604020202020204" pitchFamily="34" charset="0"/>
         <a:buChar char="•"/>
-        <a:defRPr sz="661" kern="1200">
+        <a:defRPr sz="1134" kern="1200">
           <a:solidFill>
             <a:schemeClr val="tx1"/>
           </a:solidFill>
@@ -3639,16 +4055,16 @@
           <a:cs typeface="+mn-cs"/>
         </a:defRPr>
       </a:lvl6pPr>
-      <a:lvl7pPr marL="1091839" indent="-83988" algn="l" defTabSz="335951" rtl="0" eaLnBrk="1" latinLnBrk="0" hangingPunct="1">
+      <a:lvl7pPr marL="1871937" indent="-143995" algn="l" defTabSz="575981" rtl="0" eaLnBrk="1" latinLnBrk="0" hangingPunct="1">
         <a:lnSpc>
           <a:spcPct val="90000"/>
         </a:lnSpc>
         <a:spcBef>
-          <a:spcPts val="184"/>
+          <a:spcPts val="315"/>
         </a:spcBef>
         <a:buFont typeface="Arial" panose="020B0604020202020204" pitchFamily="34" charset="0"/>
         <a:buChar char="•"/>
-        <a:defRPr sz="661" kern="1200">
+        <a:defRPr sz="1134" kern="1200">
           <a:solidFill>
             <a:schemeClr val="tx1"/>
           </a:solidFill>
@@ -3657,16 +4073,16 @@
           <a:cs typeface="+mn-cs"/>
         </a:defRPr>
       </a:lvl7pPr>
-      <a:lvl8pPr marL="1259815" indent="-83988" algn="l" defTabSz="335951" rtl="0" eaLnBrk="1" latinLnBrk="0" hangingPunct="1">
+      <a:lvl8pPr marL="2159927" indent="-143995" algn="l" defTabSz="575981" rtl="0" eaLnBrk="1" latinLnBrk="0" hangingPunct="1">
         <a:lnSpc>
           <a:spcPct val="90000"/>
         </a:lnSpc>
         <a:spcBef>
-          <a:spcPts val="184"/>
+          <a:spcPts val="315"/>
         </a:spcBef>
         <a:buFont typeface="Arial" panose="020B0604020202020204" pitchFamily="34" charset="0"/>
         <a:buChar char="•"/>
-        <a:defRPr sz="661" kern="1200">
+        <a:defRPr sz="1134" kern="1200">
           <a:solidFill>
             <a:schemeClr val="tx1"/>
           </a:solidFill>
@@ -3675,16 +4091,16 @@
           <a:cs typeface="+mn-cs"/>
         </a:defRPr>
       </a:lvl8pPr>
-      <a:lvl9pPr marL="1427790" indent="-83988" algn="l" defTabSz="335951" rtl="0" eaLnBrk="1" latinLnBrk="0" hangingPunct="1">
+      <a:lvl9pPr marL="2447917" indent="-143995" algn="l" defTabSz="575981" rtl="0" eaLnBrk="1" latinLnBrk="0" hangingPunct="1">
         <a:lnSpc>
           <a:spcPct val="90000"/>
         </a:lnSpc>
         <a:spcBef>
-          <a:spcPts val="184"/>
+          <a:spcPts val="315"/>
         </a:spcBef>
         <a:buFont typeface="Arial" panose="020B0604020202020204" pitchFamily="34" charset="0"/>
         <a:buChar char="•"/>
-        <a:defRPr sz="661" kern="1200">
+        <a:defRPr sz="1134" kern="1200">
           <a:solidFill>
             <a:schemeClr val="tx1"/>
           </a:solidFill>
@@ -3698,8 +4114,8 @@
       <a:defPPr>
         <a:defRPr lang="en-US"/>
       </a:defPPr>
-      <a:lvl1pPr marL="0" algn="l" defTabSz="335951" rtl="0" eaLnBrk="1" latinLnBrk="0" hangingPunct="1">
-        <a:defRPr sz="661" kern="1200">
+      <a:lvl1pPr marL="0" algn="l" defTabSz="575981" rtl="0" eaLnBrk="1" latinLnBrk="0" hangingPunct="1">
+        <a:defRPr sz="1134" kern="1200">
           <a:solidFill>
             <a:schemeClr val="tx1"/>
           </a:solidFill>
@@ -3708,8 +4124,8 @@
           <a:cs typeface="+mn-cs"/>
         </a:defRPr>
       </a:lvl1pPr>
-      <a:lvl2pPr marL="167975" algn="l" defTabSz="335951" rtl="0" eaLnBrk="1" latinLnBrk="0" hangingPunct="1">
-        <a:defRPr sz="661" kern="1200">
+      <a:lvl2pPr marL="287990" algn="l" defTabSz="575981" rtl="0" eaLnBrk="1" latinLnBrk="0" hangingPunct="1">
+        <a:defRPr sz="1134" kern="1200">
           <a:solidFill>
             <a:schemeClr val="tx1"/>
           </a:solidFill>
@@ -3718,8 +4134,8 @@
           <a:cs typeface="+mn-cs"/>
         </a:defRPr>
       </a:lvl2pPr>
-      <a:lvl3pPr marL="335951" algn="l" defTabSz="335951" rtl="0" eaLnBrk="1" latinLnBrk="0" hangingPunct="1">
-        <a:defRPr sz="661" kern="1200">
+      <a:lvl3pPr marL="575981" algn="l" defTabSz="575981" rtl="0" eaLnBrk="1" latinLnBrk="0" hangingPunct="1">
+        <a:defRPr sz="1134" kern="1200">
           <a:solidFill>
             <a:schemeClr val="tx1"/>
           </a:solidFill>
@@ -3728,8 +4144,8 @@
           <a:cs typeface="+mn-cs"/>
         </a:defRPr>
       </a:lvl3pPr>
-      <a:lvl4pPr marL="503926" algn="l" defTabSz="335951" rtl="0" eaLnBrk="1" latinLnBrk="0" hangingPunct="1">
-        <a:defRPr sz="661" kern="1200">
+      <a:lvl4pPr marL="863971" algn="l" defTabSz="575981" rtl="0" eaLnBrk="1" latinLnBrk="0" hangingPunct="1">
+        <a:defRPr sz="1134" kern="1200">
           <a:solidFill>
             <a:schemeClr val="tx1"/>
           </a:solidFill>
@@ -3738,8 +4154,8 @@
           <a:cs typeface="+mn-cs"/>
         </a:defRPr>
       </a:lvl4pPr>
-      <a:lvl5pPr marL="671901" algn="l" defTabSz="335951" rtl="0" eaLnBrk="1" latinLnBrk="0" hangingPunct="1">
-        <a:defRPr sz="661" kern="1200">
+      <a:lvl5pPr marL="1151961" algn="l" defTabSz="575981" rtl="0" eaLnBrk="1" latinLnBrk="0" hangingPunct="1">
+        <a:defRPr sz="1134" kern="1200">
           <a:solidFill>
             <a:schemeClr val="tx1"/>
           </a:solidFill>
@@ -3748,8 +4164,8 @@
           <a:cs typeface="+mn-cs"/>
         </a:defRPr>
       </a:lvl5pPr>
-      <a:lvl6pPr marL="839876" algn="l" defTabSz="335951" rtl="0" eaLnBrk="1" latinLnBrk="0" hangingPunct="1">
-        <a:defRPr sz="661" kern="1200">
+      <a:lvl6pPr marL="1439951" algn="l" defTabSz="575981" rtl="0" eaLnBrk="1" latinLnBrk="0" hangingPunct="1">
+        <a:defRPr sz="1134" kern="1200">
           <a:solidFill>
             <a:schemeClr val="tx1"/>
           </a:solidFill>
@@ -3758,8 +4174,8 @@
           <a:cs typeface="+mn-cs"/>
         </a:defRPr>
       </a:lvl6pPr>
-      <a:lvl7pPr marL="1007852" algn="l" defTabSz="335951" rtl="0" eaLnBrk="1" latinLnBrk="0" hangingPunct="1">
-        <a:defRPr sz="661" kern="1200">
+      <a:lvl7pPr marL="1727942" algn="l" defTabSz="575981" rtl="0" eaLnBrk="1" latinLnBrk="0" hangingPunct="1">
+        <a:defRPr sz="1134" kern="1200">
           <a:solidFill>
             <a:schemeClr val="tx1"/>
           </a:solidFill>
@@ -3768,8 +4184,8 @@
           <a:cs typeface="+mn-cs"/>
         </a:defRPr>
       </a:lvl7pPr>
-      <a:lvl8pPr marL="1175827" algn="l" defTabSz="335951" rtl="0" eaLnBrk="1" latinLnBrk="0" hangingPunct="1">
-        <a:defRPr sz="661" kern="1200">
+      <a:lvl8pPr marL="2015932" algn="l" defTabSz="575981" rtl="0" eaLnBrk="1" latinLnBrk="0" hangingPunct="1">
+        <a:defRPr sz="1134" kern="1200">
           <a:solidFill>
             <a:schemeClr val="tx1"/>
           </a:solidFill>
@@ -3778,8 +4194,8 @@
           <a:cs typeface="+mn-cs"/>
         </a:defRPr>
       </a:lvl8pPr>
-      <a:lvl9pPr marL="1343802" algn="l" defTabSz="335951" rtl="0" eaLnBrk="1" latinLnBrk="0" hangingPunct="1">
-        <a:defRPr sz="661" kern="1200">
+      <a:lvl9pPr marL="2303922" algn="l" defTabSz="575981" rtl="0" eaLnBrk="1" latinLnBrk="0" hangingPunct="1">
+        <a:defRPr sz="1134" kern="1200">
           <a:solidFill>
             <a:schemeClr val="tx1"/>
           </a:solidFill>
@@ -3810,9 +4226,39 @@
           <a:chExt cx="0" cy="0"/>
         </a:xfrm>
       </p:grpSpPr>
+      <p:pic>
+        <p:nvPicPr>
+          <p:cNvPr id="68" name="Picture 67">
+            <a:extLst>
+              <a:ext uri="{FF2B5EF4-FFF2-40B4-BE49-F238E27FC236}">
+                <a16:creationId xmlns:a16="http://schemas.microsoft.com/office/drawing/2014/main" id="{F45F7555-78D7-C8CF-FA3E-833AF9A9DC4F}"/>
+              </a:ext>
+            </a:extLst>
+          </p:cNvPr>
+          <p:cNvPicPr>
+            <a:picLocks noChangeAspect="1"/>
+          </p:cNvPicPr>
+          <p:nvPr/>
+        </p:nvPicPr>
+        <p:blipFill>
+          <a:blip r:embed="rId2"/>
+          <a:stretch>
+            <a:fillRect/>
+          </a:stretch>
+        </p:blipFill>
+        <p:spPr>
+          <a:xfrm>
+            <a:off x="518514" y="962714"/>
+            <a:ext cx="2060879" cy="1119805"/>
+          </a:xfrm>
+          <a:prstGeom prst="rect">
+            <a:avLst/>
+          </a:prstGeom>
+        </p:spPr>
+      </p:pic>
       <p:sp>
         <p:nvSpPr>
-          <p:cNvPr id="114" name="Freeform: Shape 113">
+          <p:cNvPr id="69" name="Freeform: Shape 68">
             <a:extLst>
               <a:ext uri="{FF2B5EF4-FFF2-40B4-BE49-F238E27FC236}">
                 <a16:creationId xmlns:a16="http://schemas.microsoft.com/office/drawing/2014/main" id="{863D7830-3EC5-1488-4779-4B842624939D}"/>
@@ -5205,7 +5651,7 @@
       </p:sp>
       <p:cxnSp>
         <p:nvCxnSpPr>
-          <p:cNvPr id="115" name="Straight Connector 114">
+          <p:cNvPr id="70" name="Straight Connector 69">
             <a:extLst>
               <a:ext uri="{FF2B5EF4-FFF2-40B4-BE49-F238E27FC236}">
                 <a16:creationId xmlns:a16="http://schemas.microsoft.com/office/drawing/2014/main" id="{A9EAFB7D-EF2C-3FE3-1553-F2A5789D0B03}"/>
@@ -5252,7 +5698,7 @@
       </p:cxnSp>
       <p:cxnSp>
         <p:nvCxnSpPr>
-          <p:cNvPr id="116" name="Straight Connector 115">
+          <p:cNvPr id="71" name="Straight Connector 70">
             <a:extLst>
               <a:ext uri="{FF2B5EF4-FFF2-40B4-BE49-F238E27FC236}">
                 <a16:creationId xmlns:a16="http://schemas.microsoft.com/office/drawing/2014/main" id="{E285F2A1-75BD-C1B8-AE9A-EABFD7341599}"/>
@@ -5299,7 +5745,7 @@
       </p:cxnSp>
       <p:cxnSp>
         <p:nvCxnSpPr>
-          <p:cNvPr id="117" name="Straight Arrow Connector 116">
+          <p:cNvPr id="72" name="Straight Arrow Connector 71">
             <a:extLst>
               <a:ext uri="{FF2B5EF4-FFF2-40B4-BE49-F238E27FC236}">
                 <a16:creationId xmlns:a16="http://schemas.microsoft.com/office/drawing/2014/main" id="{5DDB82E1-2293-6864-7C4C-860BB6D52449}"/>
@@ -5346,7 +5792,7 @@
       </p:cxnSp>
       <p:cxnSp>
         <p:nvCxnSpPr>
-          <p:cNvPr id="118" name="Straight Arrow Connector 117">
+          <p:cNvPr id="73" name="Straight Arrow Connector 72">
             <a:extLst>
               <a:ext uri="{FF2B5EF4-FFF2-40B4-BE49-F238E27FC236}">
                 <a16:creationId xmlns:a16="http://schemas.microsoft.com/office/drawing/2014/main" id="{9C8F36A9-FFBF-D2AF-D86B-DB32A664D134}"/>
@@ -5393,7 +5839,7 @@
       </p:cxnSp>
       <p:sp>
         <p:nvSpPr>
-          <p:cNvPr id="119" name="TextBox 118">
+          <p:cNvPr id="74" name="TextBox 73">
             <a:extLst>
               <a:ext uri="{FF2B5EF4-FFF2-40B4-BE49-F238E27FC236}">
                 <a16:creationId xmlns:a16="http://schemas.microsoft.com/office/drawing/2014/main" id="{F4E1EB47-FB49-B221-8F40-6FAAC8188E34}"/>
@@ -5452,7 +5898,7 @@
       </p:sp>
       <p:sp>
         <p:nvSpPr>
-          <p:cNvPr id="120" name="Freeform: Shape 119">
+          <p:cNvPr id="75" name="Freeform: Shape 74">
             <a:extLst>
               <a:ext uri="{FF2B5EF4-FFF2-40B4-BE49-F238E27FC236}">
                 <a16:creationId xmlns:a16="http://schemas.microsoft.com/office/drawing/2014/main" id="{ADEEF2B1-EBC8-9F1F-6B1F-DD1E6A4ADDB0}"/>
@@ -8101,7 +8547,7 @@
               </a:path>
             </a:pathLst>
           </a:custGeom>
-          <a:pattFill prst="wdDnDiag">
+          <a:pattFill prst="wdUpDiag">
             <a:fgClr>
               <a:srgbClr val="21857A"/>
             </a:fgClr>
@@ -8143,7 +8589,7 @@
       </p:sp>
       <p:sp>
         <p:nvSpPr>
-          <p:cNvPr id="121" name="Freeform: Shape 120">
+          <p:cNvPr id="76" name="Freeform: Shape 75">
             <a:extLst>
               <a:ext uri="{FF2B5EF4-FFF2-40B4-BE49-F238E27FC236}">
                 <a16:creationId xmlns:a16="http://schemas.microsoft.com/office/drawing/2014/main" id="{CDB02FB9-7686-55B5-2237-CE34FE7138F4}"/>
@@ -8579,7 +9025,7 @@
       </p:sp>
       <p:cxnSp>
         <p:nvCxnSpPr>
-          <p:cNvPr id="122" name="Straight Arrow Connector 121">
+          <p:cNvPr id="77" name="Straight Arrow Connector 76">
             <a:extLst>
               <a:ext uri="{FF2B5EF4-FFF2-40B4-BE49-F238E27FC236}">
                 <a16:creationId xmlns:a16="http://schemas.microsoft.com/office/drawing/2014/main" id="{98EEF7E7-0C5F-BA49-C209-AFA93EACC957}"/>
@@ -8626,7 +9072,7 @@
       </p:cxnSp>
       <p:sp>
         <p:nvSpPr>
-          <p:cNvPr id="123" name="Freeform: Shape 122">
+          <p:cNvPr id="78" name="Freeform: Shape 77">
             <a:extLst>
               <a:ext uri="{FF2B5EF4-FFF2-40B4-BE49-F238E27FC236}">
                 <a16:creationId xmlns:a16="http://schemas.microsoft.com/office/drawing/2014/main" id="{F1CE41FF-7B22-BB87-5437-9C5A6D9C40EA}"/>
@@ -9726,7 +10172,7 @@
       </p:sp>
       <p:sp>
         <p:nvSpPr>
-          <p:cNvPr id="124" name="Freeform: Shape 123">
+          <p:cNvPr id="79" name="Freeform: Shape 78">
             <a:extLst>
               <a:ext uri="{FF2B5EF4-FFF2-40B4-BE49-F238E27FC236}">
                 <a16:creationId xmlns:a16="http://schemas.microsoft.com/office/drawing/2014/main" id="{3CDA144B-1F01-F0CC-A493-5631BE7BE96B}"/>
@@ -11557,7 +12003,7 @@
       </p:sp>
       <p:sp>
         <p:nvSpPr>
-          <p:cNvPr id="125" name="Freeform: Shape 124">
+          <p:cNvPr id="80" name="Freeform: Shape 79">
             <a:extLst>
               <a:ext uri="{FF2B5EF4-FFF2-40B4-BE49-F238E27FC236}">
                 <a16:creationId xmlns:a16="http://schemas.microsoft.com/office/drawing/2014/main" id="{9D4C28E0-97DE-3DC8-9344-F610BE62157D}"/>
@@ -14028,7 +14474,7 @@
       </p:sp>
       <p:cxnSp>
         <p:nvCxnSpPr>
-          <p:cNvPr id="126" name="Straight Arrow Connector 125">
+          <p:cNvPr id="81" name="Straight Arrow Connector 80">
             <a:extLst>
               <a:ext uri="{FF2B5EF4-FFF2-40B4-BE49-F238E27FC236}">
                 <a16:creationId xmlns:a16="http://schemas.microsoft.com/office/drawing/2014/main" id="{E3E411FB-33CC-5F34-656E-94560D185092}"/>
@@ -14075,7 +14521,7 @@
       </p:cxnSp>
       <p:sp>
         <p:nvSpPr>
-          <p:cNvPr id="127" name="TextBox 126">
+          <p:cNvPr id="82" name="TextBox 81">
             <a:extLst>
               <a:ext uri="{FF2B5EF4-FFF2-40B4-BE49-F238E27FC236}">
                 <a16:creationId xmlns:a16="http://schemas.microsoft.com/office/drawing/2014/main" id="{871F6875-B35B-38C5-3426-33D516CADAB5}"/>
@@ -14124,7 +14570,7 @@
       </p:sp>
       <p:sp>
         <p:nvSpPr>
-          <p:cNvPr id="128" name="TextBox 127">
+          <p:cNvPr id="83" name="TextBox 82">
             <a:extLst>
               <a:ext uri="{FF2B5EF4-FFF2-40B4-BE49-F238E27FC236}">
                 <a16:creationId xmlns:a16="http://schemas.microsoft.com/office/drawing/2014/main" id="{843DCFB4-D832-CE14-33FD-22FE10682A05}"/>
@@ -14173,7 +14619,7 @@
       </p:sp>
       <p:sp>
         <p:nvSpPr>
-          <p:cNvPr id="129" name="TextBox 128">
+          <p:cNvPr id="84" name="TextBox 83">
             <a:extLst>
               <a:ext uri="{FF2B5EF4-FFF2-40B4-BE49-F238E27FC236}">
                 <a16:creationId xmlns:a16="http://schemas.microsoft.com/office/drawing/2014/main" id="{1ACBC9A4-96CE-2145-4C13-43843EED1EEE}"/>
@@ -14222,7 +14668,7 @@
       </p:sp>
       <p:sp>
         <p:nvSpPr>
-          <p:cNvPr id="130" name="TextBox 129">
+          <p:cNvPr id="85" name="TextBox 84">
             <a:extLst>
               <a:ext uri="{FF2B5EF4-FFF2-40B4-BE49-F238E27FC236}">
                 <a16:creationId xmlns:a16="http://schemas.microsoft.com/office/drawing/2014/main" id="{5CCEEB50-0EB3-291D-2911-B86403C69D4E}"/>
@@ -14271,7 +14717,7 @@
       </p:sp>
       <p:cxnSp>
         <p:nvCxnSpPr>
-          <p:cNvPr id="131" name="Straight Connector 130">
+          <p:cNvPr id="86" name="Straight Connector 85">
             <a:extLst>
               <a:ext uri="{FF2B5EF4-FFF2-40B4-BE49-F238E27FC236}">
                 <a16:creationId xmlns:a16="http://schemas.microsoft.com/office/drawing/2014/main" id="{A0143ED4-4C89-1348-C278-56520894994E}"/>
@@ -14317,7 +14763,7 @@
       </p:cxnSp>
       <p:cxnSp>
         <p:nvCxnSpPr>
-          <p:cNvPr id="132" name="Straight Connector 131">
+          <p:cNvPr id="87" name="Straight Connector 86">
             <a:extLst>
               <a:ext uri="{FF2B5EF4-FFF2-40B4-BE49-F238E27FC236}">
                 <a16:creationId xmlns:a16="http://schemas.microsoft.com/office/drawing/2014/main" id="{F722787C-8461-E4FE-8414-D479477597C4}"/>
@@ -14363,7 +14809,7 @@
       </p:cxnSp>
       <p:sp>
         <p:nvSpPr>
-          <p:cNvPr id="133" name="TextBox 132">
+          <p:cNvPr id="88" name="TextBox 87">
             <a:extLst>
               <a:ext uri="{FF2B5EF4-FFF2-40B4-BE49-F238E27FC236}">
                 <a16:creationId xmlns:a16="http://schemas.microsoft.com/office/drawing/2014/main" id="{DD906E7D-FF64-09FE-65EF-837BDD47046A}"/>
@@ -14415,7 +14861,7 @@
       </p:sp>
       <p:sp>
         <p:nvSpPr>
-          <p:cNvPr id="134" name="TextBox 133">
+          <p:cNvPr id="89" name="TextBox 88">
             <a:extLst>
               <a:ext uri="{FF2B5EF4-FFF2-40B4-BE49-F238E27FC236}">
                 <a16:creationId xmlns:a16="http://schemas.microsoft.com/office/drawing/2014/main" id="{CDF5D99F-239B-7286-E705-43476984C1FD}"/>
@@ -14457,7 +14903,7 @@
       </p:sp>
       <p:sp>
         <p:nvSpPr>
-          <p:cNvPr id="135" name="TextBox 134">
+          <p:cNvPr id="90" name="TextBox 89">
             <a:extLst>
               <a:ext uri="{FF2B5EF4-FFF2-40B4-BE49-F238E27FC236}">
                 <a16:creationId xmlns:a16="http://schemas.microsoft.com/office/drawing/2014/main" id="{A09387BF-360E-1373-B4E2-484CDF5B6943}"/>
@@ -14509,7 +14955,7 @@
       </p:sp>
       <p:sp>
         <p:nvSpPr>
-          <p:cNvPr id="136" name="TextBox 135">
+          <p:cNvPr id="91" name="TextBox 90">
             <a:extLst>
               <a:ext uri="{FF2B5EF4-FFF2-40B4-BE49-F238E27FC236}">
                 <a16:creationId xmlns:a16="http://schemas.microsoft.com/office/drawing/2014/main" id="{FEE84F7D-562E-3E17-3F19-517232627412}"/>
@@ -14551,7 +14997,7 @@
       </p:sp>
       <p:sp>
         <p:nvSpPr>
-          <p:cNvPr id="137" name="TextBox 136">
+          <p:cNvPr id="92" name="TextBox 91">
             <a:extLst>
               <a:ext uri="{FF2B5EF4-FFF2-40B4-BE49-F238E27FC236}">
                 <a16:creationId xmlns:a16="http://schemas.microsoft.com/office/drawing/2014/main" id="{F3106249-1C45-1C12-2453-07133FF1CD86}"/>
@@ -14593,7 +15039,7 @@
       </p:sp>
       <p:sp>
         <p:nvSpPr>
-          <p:cNvPr id="138" name="TextBox 137">
+          <p:cNvPr id="93" name="TextBox 92">
             <a:extLst>
               <a:ext uri="{FF2B5EF4-FFF2-40B4-BE49-F238E27FC236}">
                 <a16:creationId xmlns:a16="http://schemas.microsoft.com/office/drawing/2014/main" id="{E3F5F678-30B9-E5A6-EDA8-349820A25D9E}"/>
@@ -14635,7 +15081,7 @@
       </p:sp>
       <p:sp>
         <p:nvSpPr>
-          <p:cNvPr id="139" name="Rectangle 138">
+          <p:cNvPr id="94" name="Rectangle 93">
             <a:extLst>
               <a:ext uri="{FF2B5EF4-FFF2-40B4-BE49-F238E27FC236}">
                 <a16:creationId xmlns:a16="http://schemas.microsoft.com/office/drawing/2014/main" id="{2D87FE8A-4BD4-D2C0-4981-4C00E52C4C21}"/>
@@ -14699,7 +15145,7 @@
       </p:sp>
       <p:sp>
         <p:nvSpPr>
-          <p:cNvPr id="140" name="Rectangle 139">
+          <p:cNvPr id="95" name="Rectangle 94">
             <a:extLst>
               <a:ext uri="{FF2B5EF4-FFF2-40B4-BE49-F238E27FC236}">
                 <a16:creationId xmlns:a16="http://schemas.microsoft.com/office/drawing/2014/main" id="{65533EAA-5F83-EA70-6747-5F625123CB00}"/>
@@ -14760,7 +15206,7 @@
       </p:sp>
       <p:sp>
         <p:nvSpPr>
-          <p:cNvPr id="141" name="Rectangle 140">
+          <p:cNvPr id="96" name="Rectangle 95">
             <a:extLst>
               <a:ext uri="{FF2B5EF4-FFF2-40B4-BE49-F238E27FC236}">
                 <a16:creationId xmlns:a16="http://schemas.microsoft.com/office/drawing/2014/main" id="{545E5C43-F926-13EA-70BE-CA710E33D019}"/>
@@ -14821,7 +15267,7 @@
       </p:sp>
       <p:sp>
         <p:nvSpPr>
-          <p:cNvPr id="142" name="Rectangle 141">
+          <p:cNvPr id="97" name="Rectangle 96">
             <a:extLst>
               <a:ext uri="{FF2B5EF4-FFF2-40B4-BE49-F238E27FC236}">
                 <a16:creationId xmlns:a16="http://schemas.microsoft.com/office/drawing/2014/main" id="{4ABA71F5-F7CE-E653-5451-1F27E1EA51A4}"/>
@@ -14839,7 +15285,7 @@
           <a:prstGeom prst="rect">
             <a:avLst/>
           </a:prstGeom>
-          <a:pattFill prst="wdDnDiag">
+          <a:pattFill prst="wdUpDiag">
             <a:fgClr>
               <a:srgbClr val="21857A"/>
             </a:fgClr>
@@ -14883,39 +15329,9 @@
           </a:p>
         </p:txBody>
       </p:sp>
-      <p:pic>
-        <p:nvPicPr>
-          <p:cNvPr id="143" name="Picture 142">
-            <a:extLst>
-              <a:ext uri="{FF2B5EF4-FFF2-40B4-BE49-F238E27FC236}">
-                <a16:creationId xmlns:a16="http://schemas.microsoft.com/office/drawing/2014/main" id="{B4B20B6B-3DAA-796C-8EA6-D7D94A189AD2}"/>
-              </a:ext>
-            </a:extLst>
-          </p:cNvPr>
-          <p:cNvPicPr>
-            <a:picLocks noChangeAspect="1"/>
-          </p:cNvPicPr>
-          <p:nvPr/>
-        </p:nvPicPr>
-        <p:blipFill>
-          <a:blip r:embed="rId2"/>
-          <a:stretch>
-            <a:fillRect/>
-          </a:stretch>
-        </p:blipFill>
-        <p:spPr>
-          <a:xfrm>
-            <a:off x="516369" y="980065"/>
-            <a:ext cx="1987063" cy="1079696"/>
-          </a:xfrm>
-          <a:prstGeom prst="rect">
-            <a:avLst/>
-          </a:prstGeom>
-        </p:spPr>
-      </p:pic>
       <p:sp>
         <p:nvSpPr>
-          <p:cNvPr id="144" name="TextBox 143">
+          <p:cNvPr id="98" name="TextBox 97">
             <a:extLst>
               <a:ext uri="{FF2B5EF4-FFF2-40B4-BE49-F238E27FC236}">
                 <a16:creationId xmlns:a16="http://schemas.microsoft.com/office/drawing/2014/main" id="{D0B60395-29A9-5583-BABB-33B236329A61}"/>
@@ -14960,7 +15376,7 @@
       </p:sp>
       <p:sp>
         <p:nvSpPr>
-          <p:cNvPr id="145" name="TextBox 144">
+          <p:cNvPr id="99" name="TextBox 98">
             <a:extLst>
               <a:ext uri="{FF2B5EF4-FFF2-40B4-BE49-F238E27FC236}">
                 <a16:creationId xmlns:a16="http://schemas.microsoft.com/office/drawing/2014/main" id="{88FD4609-03C7-48B1-EA84-375FFFEDBE06}"/>
@@ -15019,7 +15435,7 @@
       </p:sp>
       <p:sp>
         <p:nvSpPr>
-          <p:cNvPr id="146" name="TextBox 145">
+          <p:cNvPr id="100" name="TextBox 99">
             <a:extLst>
               <a:ext uri="{FF2B5EF4-FFF2-40B4-BE49-F238E27FC236}">
                 <a16:creationId xmlns:a16="http://schemas.microsoft.com/office/drawing/2014/main" id="{4C39D33D-2B26-F2D6-F8F4-09E6518093E9}"/>
@@ -15099,7 +15515,7 @@
       </p:sp>
       <p:sp>
         <p:nvSpPr>
-          <p:cNvPr id="147" name="TextBox 146">
+          <p:cNvPr id="101" name="TextBox 100">
             <a:extLst>
               <a:ext uri="{FF2B5EF4-FFF2-40B4-BE49-F238E27FC236}">
                 <a16:creationId xmlns:a16="http://schemas.microsoft.com/office/drawing/2014/main" id="{D4A499F2-3420-098E-60B9-2B0BAC6336D7}"/>
@@ -15144,7 +15560,7 @@
       </p:sp>
       <p:sp>
         <p:nvSpPr>
-          <p:cNvPr id="148" name="TextBox 147">
+          <p:cNvPr id="102" name="TextBox 101">
             <a:extLst>
               <a:ext uri="{FF2B5EF4-FFF2-40B4-BE49-F238E27FC236}">
                 <a16:creationId xmlns:a16="http://schemas.microsoft.com/office/drawing/2014/main" id="{886A253C-800A-4473-19A4-5EC96B3D6DA8}"/>
@@ -15189,7 +15605,7 @@
       </p:sp>
       <p:sp>
         <p:nvSpPr>
-          <p:cNvPr id="149" name="TextBox 148">
+          <p:cNvPr id="103" name="TextBox 102">
             <a:extLst>
               <a:ext uri="{FF2B5EF4-FFF2-40B4-BE49-F238E27FC236}">
                 <a16:creationId xmlns:a16="http://schemas.microsoft.com/office/drawing/2014/main" id="{31526C8F-65EA-4AE2-A6F7-E27D64A802EA}"/>
@@ -15234,7 +15650,7 @@
       </p:sp>
       <p:sp>
         <p:nvSpPr>
-          <p:cNvPr id="150" name="TextBox 149">
+          <p:cNvPr id="104" name="TextBox 103">
             <a:extLst>
               <a:ext uri="{FF2B5EF4-FFF2-40B4-BE49-F238E27FC236}">
                 <a16:creationId xmlns:a16="http://schemas.microsoft.com/office/drawing/2014/main" id="{2806A400-C100-A7CD-C682-9F752EF41C58}"/>
@@ -15279,7 +15695,7 @@
       </p:sp>
       <p:cxnSp>
         <p:nvCxnSpPr>
-          <p:cNvPr id="151" name="Straight Connector 150">
+          <p:cNvPr id="105" name="Straight Connector 104">
             <a:extLst>
               <a:ext uri="{FF2B5EF4-FFF2-40B4-BE49-F238E27FC236}">
                 <a16:creationId xmlns:a16="http://schemas.microsoft.com/office/drawing/2014/main" id="{3E482B56-9FB4-F1B3-4505-6BC8857291E6}"/>
@@ -15323,7 +15739,7 @@
       </p:cxnSp>
       <p:sp>
         <p:nvSpPr>
-          <p:cNvPr id="152" name="TextBox 151">
+          <p:cNvPr id="106" name="TextBox 105">
             <a:extLst>
               <a:ext uri="{FF2B5EF4-FFF2-40B4-BE49-F238E27FC236}">
                 <a16:creationId xmlns:a16="http://schemas.microsoft.com/office/drawing/2014/main" id="{1B78CC36-883D-5957-AD5C-423198EA1845}"/>
@@ -15392,7 +15808,7 @@
       </p:sp>
       <p:sp>
         <p:nvSpPr>
-          <p:cNvPr id="153" name="TextBox 152">
+          <p:cNvPr id="107" name="TextBox 106">
             <a:extLst>
               <a:ext uri="{FF2B5EF4-FFF2-40B4-BE49-F238E27FC236}">
                 <a16:creationId xmlns:a16="http://schemas.microsoft.com/office/drawing/2014/main" id="{E1F6673A-1B0C-E424-8F99-86B139BD4918}"/>
@@ -15463,7 +15879,7 @@
       </p:sp>
       <p:sp>
         <p:nvSpPr>
-          <p:cNvPr id="154" name="TextBox 153">
+          <p:cNvPr id="108" name="TextBox 107">
             <a:extLst>
               <a:ext uri="{FF2B5EF4-FFF2-40B4-BE49-F238E27FC236}">
                 <a16:creationId xmlns:a16="http://schemas.microsoft.com/office/drawing/2014/main" id="{7160EB10-8701-2F92-B2E3-BD9975B33EAB}"/>
@@ -15543,7 +15959,7 @@
       </p:sp>
       <p:sp>
         <p:nvSpPr>
-          <p:cNvPr id="155" name="TextBox 154">
+          <p:cNvPr id="109" name="TextBox 108">
             <a:extLst>
               <a:ext uri="{FF2B5EF4-FFF2-40B4-BE49-F238E27FC236}">
                 <a16:creationId xmlns:a16="http://schemas.microsoft.com/office/drawing/2014/main" id="{C700B7F9-A72E-559F-D17A-BFCCF191350D}"/>
@@ -15588,7 +16004,7 @@
       </p:sp>
       <p:sp>
         <p:nvSpPr>
-          <p:cNvPr id="156" name="Rectangle 155">
+          <p:cNvPr id="110" name="Rectangle 109">
             <a:extLst>
               <a:ext uri="{FF2B5EF4-FFF2-40B4-BE49-F238E27FC236}">
                 <a16:creationId xmlns:a16="http://schemas.microsoft.com/office/drawing/2014/main" id="{BA6B5728-94FF-1C7C-CD97-4D776F6436FF}"/>
@@ -15641,7 +16057,7 @@
       </p:sp>
       <p:sp>
         <p:nvSpPr>
-          <p:cNvPr id="157" name="TextBox 156">
+          <p:cNvPr id="111" name="TextBox 110">
             <a:extLst>
               <a:ext uri="{FF2B5EF4-FFF2-40B4-BE49-F238E27FC236}">
                 <a16:creationId xmlns:a16="http://schemas.microsoft.com/office/drawing/2014/main" id="{BE8CA2C2-9A67-A315-55CF-D3B76C5B4ABF}"/>
@@ -15686,7 +16102,7 @@
       </p:sp>
       <p:sp>
         <p:nvSpPr>
-          <p:cNvPr id="158" name="TextBox 157">
+          <p:cNvPr id="112" name="TextBox 111">
             <a:extLst>
               <a:ext uri="{FF2B5EF4-FFF2-40B4-BE49-F238E27FC236}">
                 <a16:creationId xmlns:a16="http://schemas.microsoft.com/office/drawing/2014/main" id="{16D7E8D5-094D-0801-2477-66BD27467E33}"/>
@@ -15731,7 +16147,7 @@
       </p:sp>
       <p:sp>
         <p:nvSpPr>
-          <p:cNvPr id="159" name="TextBox 158">
+          <p:cNvPr id="113" name="TextBox 112">
             <a:extLst>
               <a:ext uri="{FF2B5EF4-FFF2-40B4-BE49-F238E27FC236}">
                 <a16:creationId xmlns:a16="http://schemas.microsoft.com/office/drawing/2014/main" id="{5E7D516C-6098-CA78-A68A-A60E91A03B8B}"/>
@@ -15776,7 +16192,7 @@
       </p:sp>
       <p:cxnSp>
         <p:nvCxnSpPr>
-          <p:cNvPr id="160" name="Straight Arrow Connector 159">
+          <p:cNvPr id="165" name="Straight Arrow Connector 164">
             <a:extLst>
               <a:ext uri="{FF2B5EF4-FFF2-40B4-BE49-F238E27FC236}">
                 <a16:creationId xmlns:a16="http://schemas.microsoft.com/office/drawing/2014/main" id="{9F83BDF9-60EC-1D45-016B-A09DF554F68E}"/>
@@ -15823,7 +16239,7 @@
       </p:cxnSp>
       <p:sp>
         <p:nvSpPr>
-          <p:cNvPr id="161" name="Oval 160">
+          <p:cNvPr id="166" name="Oval 165">
             <a:extLst>
               <a:ext uri="{FF2B5EF4-FFF2-40B4-BE49-F238E27FC236}">
                 <a16:creationId xmlns:a16="http://schemas.microsoft.com/office/drawing/2014/main" id="{19C06D92-10F2-6629-738B-329DDCC22607}"/>
@@ -15878,7 +16294,7 @@
       </p:sp>
       <p:sp>
         <p:nvSpPr>
-          <p:cNvPr id="162" name="TextBox 161">
+          <p:cNvPr id="167" name="TextBox 166">
             <a:extLst>
               <a:ext uri="{FF2B5EF4-FFF2-40B4-BE49-F238E27FC236}">
                 <a16:creationId xmlns:a16="http://schemas.microsoft.com/office/drawing/2014/main" id="{8C2CF4A1-967C-6891-8D3E-E404ED5D4E82}"/>
@@ -15922,7 +16338,7 @@
       </p:sp>
       <p:sp>
         <p:nvSpPr>
-          <p:cNvPr id="163" name="TextBox 162">
+          <p:cNvPr id="168" name="TextBox 167">
             <a:extLst>
               <a:ext uri="{FF2B5EF4-FFF2-40B4-BE49-F238E27FC236}">
                 <a16:creationId xmlns:a16="http://schemas.microsoft.com/office/drawing/2014/main" id="{748BB081-753E-2804-7F05-2F111730D61F}"/>
@@ -15966,7 +16382,7 @@
       </p:sp>
       <p:cxnSp>
         <p:nvCxnSpPr>
-          <p:cNvPr id="164" name="Straight Connector 163">
+          <p:cNvPr id="169" name="Straight Connector 168">
             <a:extLst>
               <a:ext uri="{FF2B5EF4-FFF2-40B4-BE49-F238E27FC236}">
                 <a16:creationId xmlns:a16="http://schemas.microsoft.com/office/drawing/2014/main" id="{4EE81F27-A2FC-54A4-9BD3-2E705EEA2164}"/>
@@ -16010,6 +16426,386 @@
           </a:fontRef>
         </p:style>
       </p:cxnSp>
+      <p:sp>
+        <p:nvSpPr>
+          <p:cNvPr id="170" name="TextBox 169">
+            <a:extLst>
+              <a:ext uri="{FF2B5EF4-FFF2-40B4-BE49-F238E27FC236}">
+                <a16:creationId xmlns:a16="http://schemas.microsoft.com/office/drawing/2014/main" id="{B9DACAD8-B9E0-E96C-4ACB-CB40C5842B50}"/>
+              </a:ext>
+            </a:extLst>
+          </p:cNvPr>
+          <p:cNvSpPr txBox="1"/>
+          <p:nvPr/>
+        </p:nvSpPr>
+        <p:spPr>
+          <a:xfrm>
+            <a:off x="-74558" y="2635833"/>
+            <a:ext cx="4827531" cy="215444"/>
+          </a:xfrm>
+          <a:prstGeom prst="rect">
+            <a:avLst/>
+          </a:prstGeom>
+          <a:noFill/>
+        </p:spPr>
+        <p:txBody>
+          <a:bodyPr wrap="square" rtlCol="0">
+            <a:spAutoFit/>
+          </a:bodyPr>
+          <a:lstStyle/>
+          <a:p>
+            <a:r>
+              <a:rPr lang="en-US" sz="800" dirty="0">
+                <a:solidFill>
+                  <a:schemeClr val="tx1">
+                    <a:lumMod val="95000"/>
+                    <a:lumOff val="5000"/>
+                  </a:schemeClr>
+                </a:solidFill>
+                <a:latin typeface="Calibri Light" panose="020F0302020204030204" pitchFamily="34" charset="0"/>
+                <a:cs typeface="Calibri Light" panose="020F0302020204030204" pitchFamily="34" charset="0"/>
+              </a:rPr>
+              <a:t>(c) Practical construction of the 2x2 contingency table for each grid-box in the  considered geographical domain</a:t>
+            </a:r>
+          </a:p>
+        </p:txBody>
+      </p:sp>
+      <p:pic>
+        <p:nvPicPr>
+          <p:cNvPr id="171" name="Graphic 170">
+            <a:extLst>
+              <a:ext uri="{FF2B5EF4-FFF2-40B4-BE49-F238E27FC236}">
+                <a16:creationId xmlns:a16="http://schemas.microsoft.com/office/drawing/2014/main" id="{499574A5-DBB1-A835-3099-B6F210FD833C}"/>
+              </a:ext>
+            </a:extLst>
+          </p:cNvPr>
+          <p:cNvPicPr>
+            <a:picLocks noChangeAspect="1"/>
+          </p:cNvPicPr>
+          <p:nvPr/>
+        </p:nvPicPr>
+        <p:blipFill>
+          <a:blip r:embed="rId3">
+            <a:extLst>
+              <a:ext uri="{96DAC541-7B7A-43D3-8B79-37D633B846F1}">
+                <asvg:svgBlip xmlns:asvg="http://schemas.microsoft.com/office/drawing/2016/SVG/main" r:embed="rId4"/>
+              </a:ext>
+            </a:extLst>
+          </a:blip>
+          <a:srcRect t="22441" r="77804" b="18546"/>
+          <a:stretch>
+            <a:fillRect/>
+          </a:stretch>
+        </p:blipFill>
+        <p:spPr>
+          <a:xfrm>
+            <a:off x="143169" y="3183919"/>
+            <a:ext cx="1278402" cy="1208481"/>
+          </a:xfrm>
+          <a:prstGeom prst="rect">
+            <a:avLst/>
+          </a:prstGeom>
+        </p:spPr>
+      </p:pic>
+      <p:sp>
+        <p:nvSpPr>
+          <p:cNvPr id="172" name="TextBox 171">
+            <a:extLst>
+              <a:ext uri="{FF2B5EF4-FFF2-40B4-BE49-F238E27FC236}">
+                <a16:creationId xmlns:a16="http://schemas.microsoft.com/office/drawing/2014/main" id="{7F9A54EC-7677-98F3-A2A9-8D12ECCFFC18}"/>
+              </a:ext>
+            </a:extLst>
+          </p:cNvPr>
+          <p:cNvSpPr txBox="1"/>
+          <p:nvPr/>
+        </p:nvSpPr>
+        <p:spPr>
+          <a:xfrm>
+            <a:off x="197684" y="2897435"/>
+            <a:ext cx="1163512" cy="215444"/>
+          </a:xfrm>
+          <a:prstGeom prst="rect">
+            <a:avLst/>
+          </a:prstGeom>
+          <a:noFill/>
+        </p:spPr>
+        <p:txBody>
+          <a:bodyPr wrap="square" rtlCol="0">
+            <a:spAutoFit/>
+          </a:bodyPr>
+          <a:lstStyle/>
+          <a:p>
+            <a:pPr algn="ctr"/>
+            <a:r>
+              <a:rPr lang="en-US" sz="800" dirty="0">
+                <a:solidFill>
+                  <a:schemeClr val="tx1">
+                    <a:lumMod val="95000"/>
+                    <a:lumOff val="5000"/>
+                  </a:schemeClr>
+                </a:solidFill>
+                <a:latin typeface="Calibri Light" panose="020F0302020204030204" pitchFamily="34" charset="0"/>
+                <a:cs typeface="Calibri Light" panose="020F0302020204030204" pitchFamily="34" charset="0"/>
+              </a:rPr>
+              <a:t>Observed binary field</a:t>
+            </a:r>
+          </a:p>
+        </p:txBody>
+      </p:sp>
+      <p:sp>
+        <p:nvSpPr>
+          <p:cNvPr id="173" name="TextBox 172">
+            <a:extLst>
+              <a:ext uri="{FF2B5EF4-FFF2-40B4-BE49-F238E27FC236}">
+                <a16:creationId xmlns:a16="http://schemas.microsoft.com/office/drawing/2014/main" id="{69264F16-B69D-6B4B-97B4-69D4F6D781F7}"/>
+              </a:ext>
+            </a:extLst>
+          </p:cNvPr>
+          <p:cNvSpPr txBox="1"/>
+          <p:nvPr/>
+        </p:nvSpPr>
+        <p:spPr>
+          <a:xfrm>
+            <a:off x="1920137" y="2835880"/>
+            <a:ext cx="1897547" cy="338554"/>
+          </a:xfrm>
+          <a:prstGeom prst="rect">
+            <a:avLst/>
+          </a:prstGeom>
+          <a:noFill/>
+        </p:spPr>
+        <p:txBody>
+          <a:bodyPr wrap="square" rtlCol="0">
+            <a:spAutoFit/>
+          </a:bodyPr>
+          <a:lstStyle/>
+          <a:p>
+            <a:pPr algn="ctr"/>
+            <a:r>
+              <a:rPr lang="en-US" sz="800" dirty="0">
+                <a:solidFill>
+                  <a:schemeClr val="tx1">
+                    <a:lumMod val="95000"/>
+                    <a:lumOff val="5000"/>
+                  </a:schemeClr>
+                </a:solidFill>
+                <a:latin typeface="Calibri Light" panose="020F0302020204030204" pitchFamily="34" charset="0"/>
+                <a:cs typeface="Calibri Light" panose="020F0302020204030204" pitchFamily="34" charset="0"/>
+              </a:rPr>
+              <a:t>Predicted binary field (for a probability of exceeding the verifying rainfall threshold)</a:t>
+            </a:r>
+          </a:p>
+        </p:txBody>
+      </p:sp>
+      <p:sp>
+        <p:nvSpPr>
+          <p:cNvPr id="174" name="TextBox 173">
+            <a:extLst>
+              <a:ext uri="{FF2B5EF4-FFF2-40B4-BE49-F238E27FC236}">
+                <a16:creationId xmlns:a16="http://schemas.microsoft.com/office/drawing/2014/main" id="{7B459E9B-BC54-D128-00BB-242594E7828F}"/>
+              </a:ext>
+            </a:extLst>
+          </p:cNvPr>
+          <p:cNvSpPr txBox="1"/>
+          <p:nvPr/>
+        </p:nvSpPr>
+        <p:spPr>
+          <a:xfrm>
+            <a:off x="4280793" y="2846673"/>
+            <a:ext cx="1412962" cy="338554"/>
+          </a:xfrm>
+          <a:prstGeom prst="rect">
+            <a:avLst/>
+          </a:prstGeom>
+          <a:noFill/>
+        </p:spPr>
+        <p:txBody>
+          <a:bodyPr wrap="square" rtlCol="0">
+            <a:spAutoFit/>
+          </a:bodyPr>
+          <a:lstStyle/>
+          <a:p>
+            <a:pPr algn="ctr"/>
+            <a:r>
+              <a:rPr lang="en-US" sz="800" dirty="0">
+                <a:solidFill>
+                  <a:schemeClr val="tx1">
+                    <a:lumMod val="95000"/>
+                    <a:lumOff val="5000"/>
+                  </a:schemeClr>
+                </a:solidFill>
+                <a:latin typeface="Calibri Light" panose="020F0302020204030204" pitchFamily="34" charset="0"/>
+                <a:cs typeface="Calibri Light" panose="020F0302020204030204" pitchFamily="34" charset="0"/>
+              </a:rPr>
+              <a:t>Values of the 2x2 contingency table in each grid-box</a:t>
+            </a:r>
+          </a:p>
+        </p:txBody>
+      </p:sp>
+      <p:pic>
+        <p:nvPicPr>
+          <p:cNvPr id="175" name="Graphic 174">
+            <a:extLst>
+              <a:ext uri="{FF2B5EF4-FFF2-40B4-BE49-F238E27FC236}">
+                <a16:creationId xmlns:a16="http://schemas.microsoft.com/office/drawing/2014/main" id="{33171DA4-F999-1BCA-6CDC-E62EB7A0D3A4}"/>
+              </a:ext>
+            </a:extLst>
+          </p:cNvPr>
+          <p:cNvPicPr>
+            <a:picLocks noChangeAspect="1"/>
+          </p:cNvPicPr>
+          <p:nvPr/>
+        </p:nvPicPr>
+        <p:blipFill>
+          <a:blip r:embed="rId3">
+            <a:extLst>
+              <a:ext uri="{96DAC541-7B7A-43D3-8B79-37D633B846F1}">
+                <asvg:svgBlip xmlns:asvg="http://schemas.microsoft.com/office/drawing/2016/SVG/main" r:embed="rId4"/>
+              </a:ext>
+            </a:extLst>
+          </a:blip>
+          <a:srcRect l="60328" t="22441" r="17475" b="18546"/>
+          <a:stretch>
+            <a:fillRect/>
+          </a:stretch>
+        </p:blipFill>
+        <p:spPr>
+          <a:xfrm>
+            <a:off x="4357838" y="3183919"/>
+            <a:ext cx="1278402" cy="1208481"/>
+          </a:xfrm>
+          <a:prstGeom prst="rect">
+            <a:avLst/>
+          </a:prstGeom>
+        </p:spPr>
+      </p:pic>
+      <p:pic>
+        <p:nvPicPr>
+          <p:cNvPr id="176" name="Graphic 175">
+            <a:extLst>
+              <a:ext uri="{FF2B5EF4-FFF2-40B4-BE49-F238E27FC236}">
+                <a16:creationId xmlns:a16="http://schemas.microsoft.com/office/drawing/2014/main" id="{631A71EA-6234-2CC1-4520-6B28E47168AD}"/>
+              </a:ext>
+            </a:extLst>
+          </p:cNvPr>
+          <p:cNvPicPr>
+            <a:picLocks noChangeAspect="1"/>
+          </p:cNvPicPr>
+          <p:nvPr/>
+        </p:nvPicPr>
+        <p:blipFill>
+          <a:blip r:embed="rId3">
+            <a:extLst>
+              <a:ext uri="{96DAC541-7B7A-43D3-8B79-37D633B846F1}">
+                <asvg:svgBlip xmlns:asvg="http://schemas.microsoft.com/office/drawing/2016/SVG/main" r:embed="rId4"/>
+              </a:ext>
+            </a:extLst>
+          </a:blip>
+          <a:srcRect l="28404" t="22441" r="49814" b="18546"/>
+          <a:stretch>
+            <a:fillRect/>
+          </a:stretch>
+        </p:blipFill>
+        <p:spPr>
+          <a:xfrm>
+            <a:off x="2262447" y="3183919"/>
+            <a:ext cx="1254515" cy="1208481"/>
+          </a:xfrm>
+          <a:prstGeom prst="rect">
+            <a:avLst/>
+          </a:prstGeom>
+        </p:spPr>
+      </p:pic>
+      <p:sp>
+        <p:nvSpPr>
+          <p:cNvPr id="177" name="TextBox 176">
+            <a:extLst>
+              <a:ext uri="{FF2B5EF4-FFF2-40B4-BE49-F238E27FC236}">
+                <a16:creationId xmlns:a16="http://schemas.microsoft.com/office/drawing/2014/main" id="{1398DA6C-3D5E-DD45-9EEB-E8E386580228}"/>
+              </a:ext>
+            </a:extLst>
+          </p:cNvPr>
+          <p:cNvSpPr txBox="1"/>
+          <p:nvPr/>
+        </p:nvSpPr>
+        <p:spPr>
+          <a:xfrm>
+            <a:off x="1245892" y="3680437"/>
+            <a:ext cx="1163512" cy="215444"/>
+          </a:xfrm>
+          <a:prstGeom prst="rect">
+            <a:avLst/>
+          </a:prstGeom>
+          <a:noFill/>
+        </p:spPr>
+        <p:txBody>
+          <a:bodyPr wrap="square" rtlCol="0">
+            <a:spAutoFit/>
+          </a:bodyPr>
+          <a:lstStyle/>
+          <a:p>
+            <a:pPr algn="ctr"/>
+            <a:r>
+              <a:rPr lang="en-US" sz="800" dirty="0">
+                <a:solidFill>
+                  <a:schemeClr val="tx1">
+                    <a:lumMod val="95000"/>
+                    <a:lumOff val="5000"/>
+                  </a:schemeClr>
+                </a:solidFill>
+                <a:latin typeface="Calibri Light" panose="020F0302020204030204" pitchFamily="34" charset="0"/>
+                <a:cs typeface="Calibri Light" panose="020F0302020204030204" pitchFamily="34" charset="0"/>
+              </a:rPr>
+              <a:t>overlapped with</a:t>
+            </a:r>
+          </a:p>
+        </p:txBody>
+      </p:sp>
+      <p:sp>
+        <p:nvSpPr>
+          <p:cNvPr id="178" name="TextBox 177">
+            <a:extLst>
+              <a:ext uri="{FF2B5EF4-FFF2-40B4-BE49-F238E27FC236}">
+                <a16:creationId xmlns:a16="http://schemas.microsoft.com/office/drawing/2014/main" id="{8E734807-A9EC-31E5-F187-A3C719CDF111}"/>
+              </a:ext>
+            </a:extLst>
+          </p:cNvPr>
+          <p:cNvSpPr txBox="1"/>
+          <p:nvPr/>
+        </p:nvSpPr>
+        <p:spPr>
+          <a:xfrm>
+            <a:off x="3320846" y="3680437"/>
+            <a:ext cx="1163512" cy="215444"/>
+          </a:xfrm>
+          <a:prstGeom prst="rect">
+            <a:avLst/>
+          </a:prstGeom>
+          <a:noFill/>
+        </p:spPr>
+        <p:txBody>
+          <a:bodyPr wrap="square" rtlCol="0">
+            <a:spAutoFit/>
+          </a:bodyPr>
+          <a:lstStyle/>
+          <a:p>
+            <a:pPr algn="ctr"/>
+            <a:r>
+              <a:rPr lang="en-US" sz="800" dirty="0">
+                <a:solidFill>
+                  <a:schemeClr val="tx1">
+                    <a:lumMod val="95000"/>
+                    <a:lumOff val="5000"/>
+                  </a:schemeClr>
+                </a:solidFill>
+                <a:latin typeface="Calibri Light" panose="020F0302020204030204" pitchFamily="34" charset="0"/>
+                <a:cs typeface="Calibri Light" panose="020F0302020204030204" pitchFamily="34" charset="0"/>
+              </a:rPr>
+              <a:t>=</a:t>
+            </a:r>
+          </a:p>
+        </p:txBody>
+      </p:sp>
     </p:spTree>
     <p:extLst>
       <p:ext uri="{BB962C8B-B14F-4D97-AF65-F5344CB8AC3E}">
